--- a/decks/lesson-02-harness-engineering.pptx
+++ b/decks/lesson-02-harness-engineering.pptx
@@ -2,22 +2,22 @@
 <file path=ppt/presentation.xml><?xml version="1.0" encoding="utf-8"?>
 <p:presentation xmlns:p="http://schemas.openxmlformats.org/presentationml/2006/main">
   <p:sldMasterIdLst>
-    <p:sldMasterId xmlns:r="http://schemas.openxmlformats.org/officeDocument/2006/relationships" id="2147483648" r:id="R3d8d548022b04a0a"/>
+    <p:sldMasterId xmlns:r="http://schemas.openxmlformats.org/officeDocument/2006/relationships" id="2147483648" r:id="R8f2462e6e0f04319"/>
   </p:sldMasterIdLst>
   <p:notesMasterIdLst>
-    <p:notesMasterId xmlns:r="http://schemas.openxmlformats.org/officeDocument/2006/relationships" r:id="R5e2991cf63594b34"/>
+    <p:notesMasterId xmlns:r="http://schemas.openxmlformats.org/officeDocument/2006/relationships" r:id="R65c7f2c9861046c5"/>
   </p:notesMasterIdLst>
   <p:sldIdLst>
-    <p:sldId xmlns:r="http://schemas.openxmlformats.org/officeDocument/2006/relationships" id="256" r:id="Rde1ddefb52784eac"/>
-    <p:sldId xmlns:r="http://schemas.openxmlformats.org/officeDocument/2006/relationships" id="257" r:id="R6691469b7df246f0"/>
-    <p:sldId xmlns:r="http://schemas.openxmlformats.org/officeDocument/2006/relationships" id="258" r:id="R76596ff6edfa4ea2"/>
-    <p:sldId xmlns:r="http://schemas.openxmlformats.org/officeDocument/2006/relationships" id="259" r:id="Ra566f1b05b6e491f"/>
-    <p:sldId xmlns:r="http://schemas.openxmlformats.org/officeDocument/2006/relationships" id="260" r:id="R614b38e9970f47f2"/>
-    <p:sldId xmlns:r="http://schemas.openxmlformats.org/officeDocument/2006/relationships" id="261" r:id="R8c42d057090b4b78"/>
-    <p:sldId xmlns:r="http://schemas.openxmlformats.org/officeDocument/2006/relationships" id="262" r:id="Rb0b7d03d2459414d"/>
-    <p:sldId xmlns:r="http://schemas.openxmlformats.org/officeDocument/2006/relationships" id="263" r:id="R60cc7bede9f34656"/>
-    <p:sldId xmlns:r="http://schemas.openxmlformats.org/officeDocument/2006/relationships" id="264" r:id="Rebc5807b6dbd4962"/>
-    <p:sldId xmlns:r="http://schemas.openxmlformats.org/officeDocument/2006/relationships" id="265" r:id="R078b628f4a584109"/>
+    <p:sldId xmlns:r="http://schemas.openxmlformats.org/officeDocument/2006/relationships" id="256" r:id="R23ab7838b43140b8"/>
+    <p:sldId xmlns:r="http://schemas.openxmlformats.org/officeDocument/2006/relationships" id="257" r:id="Rce2e65717dea4eaa"/>
+    <p:sldId xmlns:r="http://schemas.openxmlformats.org/officeDocument/2006/relationships" id="258" r:id="Ra340d79385384162"/>
+    <p:sldId xmlns:r="http://schemas.openxmlformats.org/officeDocument/2006/relationships" id="259" r:id="R8bb24945650c4463"/>
+    <p:sldId xmlns:r="http://schemas.openxmlformats.org/officeDocument/2006/relationships" id="260" r:id="R8ffa9638792048bd"/>
+    <p:sldId xmlns:r="http://schemas.openxmlformats.org/officeDocument/2006/relationships" id="261" r:id="R45f4e5d6e1b8454d"/>
+    <p:sldId xmlns:r="http://schemas.openxmlformats.org/officeDocument/2006/relationships" id="262" r:id="R63b22a716c524e31"/>
+    <p:sldId xmlns:r="http://schemas.openxmlformats.org/officeDocument/2006/relationships" id="263" r:id="R74ddb14e59c74e7e"/>
+    <p:sldId xmlns:r="http://schemas.openxmlformats.org/officeDocument/2006/relationships" id="264" r:id="R8f05e76709a24824"/>
+    <p:sldId xmlns:r="http://schemas.openxmlformats.org/officeDocument/2006/relationships" id="265" r:id="Rd9648dc9864a4571"/>
   </p:sldIdLst>
   <p:sldSz cx="12192000" cy="6858000"/>
   <p:notesSz cx="6858000" cy="9144000"/>
@@ -546,7 +546,7 @@
           <a:lstStyle xmlns:a="http://schemas.openxmlformats.org/drawingml/2006/main"/>
           <a:p xmlns:a="http://schemas.openxmlformats.org/drawingml/2006/main">
             <a:r>
-              <a:t>Open Lesson 2 by connecting back to Lesson 1. A model reads and writes tokens, but a real product needs an operating environment around it. That operating environment is the harness.</a:t>
+              <a:t>Open Lesson 2 by connecting back to Lesson 1. A model reads and writes tokens, but a real product needs a harness to decide which instructions, tools, skills, and agent profiles enter the current paper.</a:t>
             </a:r>
           </a:p>
         </p:txBody>
@@ -616,7 +616,7 @@
           <a:lstStyle xmlns:a="http://schemas.openxmlformats.org/drawingml/2006/main"/>
           <a:p xmlns:a="http://schemas.openxmlformats.org/drawingml/2006/main">
             <a:r>
-              <a:t>Close with the shift from prompt engineering to harness engineering. A prompt controls a message. A harness controls the interaction system. This prepares the audience for the advanced 2.1 add-on and Lesson 3 workflows.</a:t>
+              <a:t>Close with the shift from writing longer prompts to designing how prompts and prompt-like objects are loaded. Skills protect the current context by loading only when relevant; subagents protect the main context by using a separate paper and returning a summary.</a:t>
             </a:r>
           </a:p>
         </p:txBody>
@@ -966,7 +966,7 @@
           <a:lstStyle xmlns:a="http://schemas.openxmlformats.org/drawingml/2006/main"/>
           <a:p xmlns:a="http://schemas.openxmlformats.org/drawingml/2006/main">
             <a:r>
-              <a:t>Define custom agent narrowly. In this lesson, an agent means a reusable work environment in one runtime: role, rules, tools, permissions, task boundary, quality standard, and stop condition. Do not expand into subagents yet.</a:t>
+              <a:t>Frame a custom agent as a packaged custom prompt plus runtime profile. It is still one work environment unless the runtime starts it as a separate subagent run.</a:t>
             </a:r>
           </a:p>
         </p:txBody>
@@ -1036,7 +1036,7 @@
           <a:lstStyle xmlns:a="http://schemas.openxmlformats.org/drawingml/2006/main"/>
           <a:p xmlns:a="http://schemas.openxmlformats.org/drawingml/2006/main">
             <a:r>
-              <a:t>Define skills as reusable manuals. A skill guides how work should be done. It is not itself an executable tool. It should be loaded when relevant, not pasted into every interaction by default.</a:t>
+              <a:t>Define skills as dynamically loaded custom prompt packs. They are useful because not every possible checklist, example, and convention should be loaded into every context window.</a:t>
             </a:r>
           </a:p>
         </p:txBody>
@@ -1106,7 +1106,7 @@
           <a:lstStyle xmlns:a="http://schemas.openxmlformats.org/drawingml/2006/main"/>
           <a:p xmlns:a="http://schemas.openxmlformats.org/drawingml/2006/main">
             <a:r>
-              <a:t>Resolve vocabulary. Tool, skill, agent, and harness solve different problems. This slide prevents learners from using one word for all AI product behavior.</a:t>
+              <a:t>Resolve prompt-loading strategies. One-off prompts, user instructions, skills, custom agent profiles, and subagents all extend the paper in different ways and with different context costs. A forked subagent may inherit the shared starting paper, but its paper evolves independently after the fork.</a:t>
             </a:r>
           </a:p>
         </p:txBody>
@@ -1244,7 +1244,7 @@
   </p:cSld>
   <p:clrMap bg1="lt1" tx1="dk1" bg2="lt2" tx2="dk2" accent1="accent1" accent2="accent2" accent3="accent3" accent4="accent4" accent5="accent5" accent6="accent6" hlink="hlink" folHlink="folHlink"/>
   <p:sldLayoutIdLst>
-    <p:sldLayoutId xmlns:r="http://schemas.openxmlformats.org/officeDocument/2006/relationships" id="2147483649" r:id="R0a364e529126452e"/>
+    <p:sldLayoutId xmlns:r="http://schemas.openxmlformats.org/officeDocument/2006/relationships" id="2147483649" r:id="Ra757935eb2ff4bb7"/>
   </p:sldLayoutIdLst>
   <p:txStyles>
     <p:titleStyle>
@@ -1795,7 +1795,7 @@
           <p:cNvPr id="1" name="">
             <a:extLst xmlns:a="http://schemas.openxmlformats.org/drawingml/2006/main">
               <a:ext uri="{FF2B5EF4-FFF2-40B4-BE49-F238E27FC236}">
-                <a16:creationId xmlns:a16="http://schemas.microsoft.com/office/drawing/2014/main" id="{1085B2EA-F858-4E04-8F39-814BA524D162}"/>
+                <a16:creationId xmlns:a16="http://schemas.microsoft.com/office/drawing/2014/main" id="{ACA5B7B6-0504-47E5-A064-E21ABBC20CA5}"/>
               </a:ext>
             </a:extLst>
           </p:cNvPr>
@@ -1845,7 +1845,7 @@
           <p:cNvPr id="2" name="">
             <a:extLst xmlns:a="http://schemas.openxmlformats.org/drawingml/2006/main">
               <a:ext uri="{FF2B5EF4-FFF2-40B4-BE49-F238E27FC236}">
-                <a16:creationId xmlns:a16="http://schemas.microsoft.com/office/drawing/2014/main" id="{0F288608-0AFB-4721-84BB-17D0DAEED353}"/>
+                <a16:creationId xmlns:a16="http://schemas.microsoft.com/office/drawing/2014/main" id="{6BB6BE8F-FEAF-4804-8BBB-95EA2064F1D9}"/>
               </a:ext>
             </a:extLst>
           </p:cNvPr>
@@ -1895,7 +1895,7 @@
           <p:cNvPr id="3" name="">
             <a:extLst xmlns:a="http://schemas.openxmlformats.org/drawingml/2006/main">
               <a:ext uri="{FF2B5EF4-FFF2-40B4-BE49-F238E27FC236}">
-                <a16:creationId xmlns:a16="http://schemas.microsoft.com/office/drawing/2014/main" id="{A4BEBA6B-0D28-4C9D-A695-7CE4E04DFC20}"/>
+                <a16:creationId xmlns:a16="http://schemas.microsoft.com/office/drawing/2014/main" id="{DE0CA43A-3F8B-40B1-8EBC-FCAB14EBEAEB}"/>
               </a:ext>
             </a:extLst>
           </p:cNvPr>
@@ -1935,7 +1935,7 @@
                   <a:srgbClr val="004AAD"/>
                 </a:solidFill>
               </a:rPr>
-              <a:t>Instructions, Agents, Skills, and Tool Runtime</a:t>
+              <a:t>Custom prompts, skills, subagent bridge, and tool runtime</a:t>
             </a:r>
           </a:p>
         </p:txBody>
@@ -1945,7 +1945,7 @@
           <p:cNvPr id="4" name="">
             <a:extLst xmlns:a="http://schemas.openxmlformats.org/drawingml/2006/main">
               <a:ext uri="{FF2B5EF4-FFF2-40B4-BE49-F238E27FC236}">
-                <a16:creationId xmlns:a16="http://schemas.microsoft.com/office/drawing/2014/main" id="{1782A04D-C57C-4222-BE65-85A3A5ABFB01}"/>
+                <a16:creationId xmlns:a16="http://schemas.microsoft.com/office/drawing/2014/main" id="{A4E6E5DF-BB51-44C0-85C7-CA18BF99AB43}"/>
               </a:ext>
             </a:extLst>
           </p:cNvPr>
@@ -1975,7 +1975,7 @@
           <p:cNvPr id="5" name="">
             <a:extLst xmlns:a="http://schemas.openxmlformats.org/drawingml/2006/main">
               <a:ext uri="{FF2B5EF4-FFF2-40B4-BE49-F238E27FC236}">
-                <a16:creationId xmlns:a16="http://schemas.microsoft.com/office/drawing/2014/main" id="{34FE844A-B7B4-4652-A078-4E208E4EB508}"/>
+                <a16:creationId xmlns:a16="http://schemas.microsoft.com/office/drawing/2014/main" id="{31DA78E8-4F80-461B-9A6D-C0676E83C032}"/>
               </a:ext>
             </a:extLst>
           </p:cNvPr>
@@ -2016,7 +2016,7 @@
           <p:cNvPr id="6" name="">
             <a:extLst xmlns:a="http://schemas.openxmlformats.org/drawingml/2006/main">
               <a:ext uri="{FF2B5EF4-FFF2-40B4-BE49-F238E27FC236}">
-                <a16:creationId xmlns:a16="http://schemas.microsoft.com/office/drawing/2014/main" id="{F019FAEB-4DD0-4A81-B7D6-3F57EB8E1218}"/>
+                <a16:creationId xmlns:a16="http://schemas.microsoft.com/office/drawing/2014/main" id="{93CA7FF9-F7F3-4548-BEBF-B72AC977AB94}"/>
               </a:ext>
             </a:extLst>
           </p:cNvPr>
@@ -2066,7 +2066,7 @@
           <p:cNvPr id="7" name="">
             <a:extLst xmlns:a="http://schemas.openxmlformats.org/drawingml/2006/main">
               <a:ext uri="{FF2B5EF4-FFF2-40B4-BE49-F238E27FC236}">
-                <a16:creationId xmlns:a16="http://schemas.microsoft.com/office/drawing/2014/main" id="{234D0743-6C6C-44C6-9950-B0173EEAE6E5}"/>
+                <a16:creationId xmlns:a16="http://schemas.microsoft.com/office/drawing/2014/main" id="{55645513-24FF-46EA-8C28-A78AED3748F0}"/>
               </a:ext>
             </a:extLst>
           </p:cNvPr>
@@ -2094,14 +2094,14 @@
           <a:lstStyle xmlns:a="http://schemas.openxmlformats.org/drawingml/2006/main"/>
           <a:p xmlns:a="http://schemas.openxmlformats.org/drawingml/2006/main">
             <a:pPr algn="ctr">
-              <a:defRPr sz="1125" b="0" i="0">
-                <a:solidFill>
-                  <a:srgbClr val="061A45"/>
-                </a:solidFill>
-              </a:defRPr>
-            </a:pPr>
-            <a:r>
-              <a:rPr sz="1125" b="0" i="0">
+              <a:defRPr sz="1200" b="0" i="0">
+                <a:solidFill>
+                  <a:srgbClr val="061A45"/>
+                </a:solidFill>
+              </a:defRPr>
+            </a:pPr>
+            <a:r>
+              <a:rPr sz="1200" b="0" i="0">
                 <a:solidFill>
                   <a:srgbClr val="061A45"/>
                 </a:solidFill>
@@ -2116,7 +2116,7 @@
           <p:cNvPr id="8" name="">
             <a:extLst xmlns:a="http://schemas.openxmlformats.org/drawingml/2006/main">
               <a:ext uri="{FF2B5EF4-FFF2-40B4-BE49-F238E27FC236}">
-                <a16:creationId xmlns:a16="http://schemas.microsoft.com/office/drawing/2014/main" id="{C1DBF799-2702-4BAD-8DB1-51ABFCB067F3}"/>
+                <a16:creationId xmlns:a16="http://schemas.microsoft.com/office/drawing/2014/main" id="{16B4B5F9-348A-437D-A20C-7A8DE2C9AA4E}"/>
               </a:ext>
             </a:extLst>
           </p:cNvPr>
@@ -2146,7 +2146,7 @@
           <p:cNvPr id="9" name="">
             <a:extLst xmlns:a="http://schemas.openxmlformats.org/drawingml/2006/main">
               <a:ext uri="{FF2B5EF4-FFF2-40B4-BE49-F238E27FC236}">
-                <a16:creationId xmlns:a16="http://schemas.microsoft.com/office/drawing/2014/main" id="{1E12DF80-4A83-4EAD-847D-23DD40BEB4F1}"/>
+                <a16:creationId xmlns:a16="http://schemas.microsoft.com/office/drawing/2014/main" id="{52F5C8EC-5605-4989-904D-E24385B943E2}"/>
               </a:ext>
             </a:extLst>
           </p:cNvPr>
@@ -2187,7 +2187,7 @@
           <p:cNvPr id="10" name="">
             <a:extLst xmlns:a="http://schemas.openxmlformats.org/drawingml/2006/main">
               <a:ext uri="{FF2B5EF4-FFF2-40B4-BE49-F238E27FC236}">
-                <a16:creationId xmlns:a16="http://schemas.microsoft.com/office/drawing/2014/main" id="{42E2679E-B59F-4028-BC7E-02A5EBA65D73}"/>
+                <a16:creationId xmlns:a16="http://schemas.microsoft.com/office/drawing/2014/main" id="{C8D39233-2568-499B-B815-1CFF7B96840A}"/>
               </a:ext>
             </a:extLst>
           </p:cNvPr>
@@ -2237,7 +2237,7 @@
           <p:cNvPr id="11" name="">
             <a:extLst xmlns:a="http://schemas.openxmlformats.org/drawingml/2006/main">
               <a:ext uri="{FF2B5EF4-FFF2-40B4-BE49-F238E27FC236}">
-                <a16:creationId xmlns:a16="http://schemas.microsoft.com/office/drawing/2014/main" id="{1722AFA7-34E9-4982-9D36-75101F27C58A}"/>
+                <a16:creationId xmlns:a16="http://schemas.microsoft.com/office/drawing/2014/main" id="{7709CD80-23B7-4902-B845-793F3E8D5CEF}"/>
               </a:ext>
             </a:extLst>
           </p:cNvPr>
@@ -2265,19 +2265,19 @@
           <a:lstStyle xmlns:a="http://schemas.openxmlformats.org/drawingml/2006/main"/>
           <a:p xmlns:a="http://schemas.openxmlformats.org/drawingml/2006/main">
             <a:pPr algn="ctr">
-              <a:defRPr sz="1125" b="0" i="0">
-                <a:solidFill>
-                  <a:srgbClr val="061A45"/>
-                </a:solidFill>
-              </a:defRPr>
-            </a:pPr>
-            <a:r>
-              <a:rPr sz="1125" b="0" i="0">
-                <a:solidFill>
-                  <a:srgbClr val="061A45"/>
-                </a:solidFill>
-              </a:rPr>
-              <a:t>The harness prepares the paper, exposes tools, checks permission, runs actions, and writes results back.</a:t>
+              <a:defRPr sz="1200" b="0" i="0">
+                <a:solidFill>
+                  <a:srgbClr val="061A45"/>
+                </a:solidFill>
+              </a:defRPr>
+            </a:pPr>
+            <a:r>
+              <a:rPr sz="1200" b="0" i="0">
+                <a:solidFill>
+                  <a:srgbClr val="061A45"/>
+                </a:solidFill>
+              </a:rPr>
+              <a:t>The harness decides which prompts, skills, tools, and runtime profiles enter the current paper.</a:t>
             </a:r>
           </a:p>
         </p:txBody>
@@ -2287,7 +2287,7 @@
           <p:cNvPr id="12" name="">
             <a:extLst xmlns:a="http://schemas.openxmlformats.org/drawingml/2006/main">
               <a:ext uri="{FF2B5EF4-FFF2-40B4-BE49-F238E27FC236}">
-                <a16:creationId xmlns:a16="http://schemas.microsoft.com/office/drawing/2014/main" id="{F6DB6138-DF7E-468E-B1DD-83C3734FA7B6}"/>
+                <a16:creationId xmlns:a16="http://schemas.microsoft.com/office/drawing/2014/main" id="{9E2818FD-E40F-473F-B94B-157CE4D92354}"/>
               </a:ext>
             </a:extLst>
           </p:cNvPr>
@@ -2317,7 +2317,7 @@
           <p:cNvPr id="13" name="">
             <a:extLst xmlns:a="http://schemas.openxmlformats.org/drawingml/2006/main">
               <a:ext uri="{FF2B5EF4-FFF2-40B4-BE49-F238E27FC236}">
-                <a16:creationId xmlns:a16="http://schemas.microsoft.com/office/drawing/2014/main" id="{C9C84729-C08C-4AB0-AACE-B07D7FE1F067}"/>
+                <a16:creationId xmlns:a16="http://schemas.microsoft.com/office/drawing/2014/main" id="{7F819423-0D47-4D3C-B45A-6A9F9E2643A0}"/>
               </a:ext>
             </a:extLst>
           </p:cNvPr>
@@ -2358,7 +2358,7 @@
           <p:cNvPr id="14" name="">
             <a:extLst xmlns:a="http://schemas.openxmlformats.org/drawingml/2006/main">
               <a:ext uri="{FF2B5EF4-FFF2-40B4-BE49-F238E27FC236}">
-                <a16:creationId xmlns:a16="http://schemas.microsoft.com/office/drawing/2014/main" id="{68833B0B-01D8-4C98-9A60-D1A2885D8537}"/>
+                <a16:creationId xmlns:a16="http://schemas.microsoft.com/office/drawing/2014/main" id="{E6928B5D-BC30-444C-A6C1-05C9BE818493}"/>
               </a:ext>
             </a:extLst>
           </p:cNvPr>
@@ -2408,7 +2408,7 @@
           <p:cNvPr id="15" name="">
             <a:extLst xmlns:a="http://schemas.openxmlformats.org/drawingml/2006/main">
               <a:ext uri="{FF2B5EF4-FFF2-40B4-BE49-F238E27FC236}">
-                <a16:creationId xmlns:a16="http://schemas.microsoft.com/office/drawing/2014/main" id="{56F21BF3-4091-4CEF-AAE5-427FDDEE31C0}"/>
+                <a16:creationId xmlns:a16="http://schemas.microsoft.com/office/drawing/2014/main" id="{EB2E2C53-C242-40F0-B114-DE22A15DFC5E}"/>
               </a:ext>
             </a:extLst>
           </p:cNvPr>
@@ -2436,19 +2436,19 @@
           <a:lstStyle xmlns:a="http://schemas.openxmlformats.org/drawingml/2006/main"/>
           <a:p xmlns:a="http://schemas.openxmlformats.org/drawingml/2006/main">
             <a:pPr algn="ctr">
-              <a:defRPr sz="1125" b="0" i="0">
-                <a:solidFill>
-                  <a:srgbClr val="061A45"/>
-                </a:solidFill>
-              </a:defRPr>
-            </a:pPr>
-            <a:r>
-              <a:rPr sz="1125" b="0" i="0">
-                <a:solidFill>
-                  <a:srgbClr val="061A45"/>
-                </a:solidFill>
-              </a:rPr>
-              <a:t>Advanced objects and multi-step workflows.</a:t>
+              <a:defRPr sz="1200" b="0" i="0">
+                <a:solidFill>
+                  <a:srgbClr val="061A45"/>
+                </a:solidFill>
+              </a:defRPr>
+            </a:pPr>
+            <a:r>
+              <a:rPr sz="1200" b="0" i="0">
+                <a:solidFill>
+                  <a:srgbClr val="061A45"/>
+                </a:solidFill>
+              </a:rPr>
+              <a:t>Subagents, workflows, and loop coding.</a:t>
             </a:r>
           </a:p>
         </p:txBody>
@@ -2458,7 +2458,7 @@
           <p:cNvPr id="16" name="">
             <a:extLst xmlns:a="http://schemas.openxmlformats.org/drawingml/2006/main">
               <a:ext uri="{FF2B5EF4-FFF2-40B4-BE49-F238E27FC236}">
-                <a16:creationId xmlns:a16="http://schemas.microsoft.com/office/drawing/2014/main" id="{FDB6C7D8-DE87-4498-9A22-DC0009F4AFDD}"/>
+                <a16:creationId xmlns:a16="http://schemas.microsoft.com/office/drawing/2014/main" id="{5E3F4848-B36F-4176-B763-46E36FEB5986}"/>
               </a:ext>
             </a:extLst>
           </p:cNvPr>
@@ -2493,7 +2493,7 @@
           <p:cNvPr id="17" name="">
             <a:extLst xmlns:a="http://schemas.openxmlformats.org/drawingml/2006/main">
               <a:ext uri="{FF2B5EF4-FFF2-40B4-BE49-F238E27FC236}">
-                <a16:creationId xmlns:a16="http://schemas.microsoft.com/office/drawing/2014/main" id="{659E710C-45EE-46E8-8313-9A4188D3DB06}"/>
+                <a16:creationId xmlns:a16="http://schemas.microsoft.com/office/drawing/2014/main" id="{8DAD1A10-5A84-49D0-AECD-642F49DB73B9}"/>
               </a:ext>
             </a:extLst>
           </p:cNvPr>
@@ -2543,7 +2543,7 @@
           <p:cNvPr id="18" name="">
             <a:extLst xmlns:a="http://schemas.openxmlformats.org/drawingml/2006/main">
               <a:ext uri="{FF2B5EF4-FFF2-40B4-BE49-F238E27FC236}">
-                <a16:creationId xmlns:a16="http://schemas.microsoft.com/office/drawing/2014/main" id="{49C7248B-2F28-4321-A5F8-11301949B8BE}"/>
+                <a16:creationId xmlns:a16="http://schemas.microsoft.com/office/drawing/2014/main" id="{7CA41E2E-EE31-4DA2-81E2-C7DB917467B4}"/>
               </a:ext>
             </a:extLst>
           </p:cNvPr>
@@ -2583,7 +2583,7 @@
                   <a:srgbClr val="061A45"/>
                 </a:solidFill>
               </a:rPr>
-              <a:t>A model is the token generator. The harness is the operating environment around it.</a:t>
+              <a:t>Lesson 2 loads the right instruction objects instead of one giant prompt.</a:t>
             </a:r>
           </a:p>
         </p:txBody>
@@ -2591,7 +2591,7 @@
     </p:spTree>
     <p:extLst>
       <p:ext uri="{BB962C8B-B14F-4D97-AF65-F5344CB8AC3E}">
-        <p14:creationId xmlns:p14="http://schemas.microsoft.com/office/powerpoint/2010/main" val="642428497"/>
+        <p14:creationId xmlns:p14="http://schemas.microsoft.com/office/powerpoint/2010/main" val="1585078543"/>
       </p:ext>
     </p:extLst>
   </p:cSld>
@@ -2622,7 +2622,7 @@
           <p:cNvPr id="1" name="">
             <a:extLst xmlns:a="http://schemas.openxmlformats.org/drawingml/2006/main">
               <a:ext uri="{FF2B5EF4-FFF2-40B4-BE49-F238E27FC236}">
-                <a16:creationId xmlns:a16="http://schemas.microsoft.com/office/drawing/2014/main" id="{2847A875-D63E-4E8A-AB1C-76D97A3703CD}"/>
+                <a16:creationId xmlns:a16="http://schemas.microsoft.com/office/drawing/2014/main" id="{69E5DB69-44DE-4D2A-ADEB-388C9F8E26B9}"/>
               </a:ext>
             </a:extLst>
           </p:cNvPr>
@@ -2662,7 +2662,7 @@
                   <a:srgbClr val="061A45"/>
                 </a:solidFill>
               </a:rPr>
-              <a:t>Harness Engineering Turns Prompts Into Systems</a:t>
+              <a:t>Harness Engineering Turns Prompts Into Loading Strategy</a:t>
             </a:r>
           </a:p>
         </p:txBody>
@@ -2672,7 +2672,7 @@
           <p:cNvPr id="2" name="">
             <a:extLst xmlns:a="http://schemas.openxmlformats.org/drawingml/2006/main">
               <a:ext uri="{FF2B5EF4-FFF2-40B4-BE49-F238E27FC236}">
-                <a16:creationId xmlns:a16="http://schemas.microsoft.com/office/drawing/2014/main" id="{3B01287C-276A-4720-B4C8-95D73A64A949}"/>
+                <a16:creationId xmlns:a16="http://schemas.microsoft.com/office/drawing/2014/main" id="{86C9CBEE-8662-40ED-9814-DB6A81A0654A}"/>
               </a:ext>
             </a:extLst>
           </p:cNvPr>
@@ -2712,7 +2712,7 @@
                   <a:srgbClr val="004AAD"/>
                 </a:solidFill>
               </a:rPr>
-              <a:t>A prompt controls one message. A harness controls the interaction system.</a:t>
+              <a:t>A prompt controls one message. The harness controls which prompts enter which paper.</a:t>
             </a:r>
           </a:p>
         </p:txBody>
@@ -2722,7 +2722,7 @@
           <p:cNvPr id="3" name="">
             <a:extLst xmlns:a="http://schemas.openxmlformats.org/drawingml/2006/main">
               <a:ext uri="{FF2B5EF4-FFF2-40B4-BE49-F238E27FC236}">
-                <a16:creationId xmlns:a16="http://schemas.microsoft.com/office/drawing/2014/main" id="{F7D066E9-CB90-4698-9F6C-66D8B6A643D6}"/>
+                <a16:creationId xmlns:a16="http://schemas.microsoft.com/office/drawing/2014/main" id="{1C44AEBB-95EE-44D8-812C-5DAF48E792DD}"/>
               </a:ext>
             </a:extLst>
           </p:cNvPr>
@@ -2752,23 +2752,23 @@
           <p:cNvPr id="4" name="">
             <a:extLst xmlns:a="http://schemas.openxmlformats.org/drawingml/2006/main">
               <a:ext uri="{FF2B5EF4-FFF2-40B4-BE49-F238E27FC236}">
-                <a16:creationId xmlns:a16="http://schemas.microsoft.com/office/drawing/2014/main" id="{32C1CE82-8E48-4D85-8F7D-6CC78965FA55}"/>
-              </a:ext>
-            </a:extLst>
-          </p:cNvPr>
-          <p:cNvSpPr>
-            <a:spLocks xmlns:a="http://schemas.openxmlformats.org/drawingml/2006/main" noGrp="1"/>
-          </p:cNvSpPr>
-          <p:nvPr/>
-        </p:nvSpPr>
-        <p:spPr>
-          <a:xfrm xmlns:a="http://schemas.openxmlformats.org/drawingml/2006/main">
-            <a:off x="4857750" y="1581150"/>
-            <a:ext cx="2476500" cy="495300"/>
+                <a16:creationId xmlns:a16="http://schemas.microsoft.com/office/drawing/2014/main" id="{78005D9F-C142-4ED2-84C6-D670F98732DE}"/>
+              </a:ext>
+            </a:extLst>
+          </p:cNvPr>
+          <p:cNvSpPr>
+            <a:spLocks xmlns:a="http://schemas.openxmlformats.org/drawingml/2006/main" noGrp="1"/>
+          </p:cNvSpPr>
+          <p:nvPr/>
+        </p:nvSpPr>
+        <p:spPr>
+          <a:xfrm xmlns:a="http://schemas.openxmlformats.org/drawingml/2006/main">
+            <a:off x="4838700" y="1371600"/>
+            <a:ext cx="2628900" cy="457200"/>
           </a:xfrm>
           <a:prstGeom xmlns:a="http://schemas.openxmlformats.org/drawingml/2006/main" prst="roundRect">
             <a:avLst>
-              <a:gd name="adj" fmla="val 11538"/>
+              <a:gd name="adj" fmla="val 12500"/>
             </a:avLst>
           </a:prstGeom>
           <a:solidFill xmlns:a="http://schemas.openxmlformats.org/drawingml/2006/main">
@@ -2787,19 +2787,19 @@
           <p:cNvPr id="5" name="">
             <a:extLst xmlns:a="http://schemas.openxmlformats.org/drawingml/2006/main">
               <a:ext uri="{FF2B5EF4-FFF2-40B4-BE49-F238E27FC236}">
-                <a16:creationId xmlns:a16="http://schemas.microsoft.com/office/drawing/2014/main" id="{A768FCBD-163E-411C-8484-668016306A6A}"/>
-              </a:ext>
-            </a:extLst>
-          </p:cNvPr>
-          <p:cNvSpPr>
-            <a:spLocks xmlns:a="http://schemas.openxmlformats.org/drawingml/2006/main" noGrp="1"/>
-          </p:cNvSpPr>
-          <p:nvPr/>
-        </p:nvSpPr>
-        <p:spPr>
-          <a:xfrm xmlns:a="http://schemas.openxmlformats.org/drawingml/2006/main">
-            <a:off x="5086350" y="1657350"/>
-            <a:ext cx="2190750" cy="171450"/>
+                <a16:creationId xmlns:a16="http://schemas.microsoft.com/office/drawing/2014/main" id="{E346950E-EC1E-477F-A2CF-1C3432B88BFB}"/>
+              </a:ext>
+            </a:extLst>
+          </p:cNvPr>
+          <p:cNvSpPr>
+            <a:spLocks xmlns:a="http://schemas.openxmlformats.org/drawingml/2006/main" noGrp="1"/>
+          </p:cNvSpPr>
+          <p:nvPr/>
+        </p:nvSpPr>
+        <p:spPr>
+          <a:xfrm xmlns:a="http://schemas.openxmlformats.org/drawingml/2006/main">
+            <a:off x="5048250" y="1438275"/>
+            <a:ext cx="1104900" cy="171450"/>
           </a:xfrm>
           <a:prstGeom xmlns:a="http://schemas.openxmlformats.org/drawingml/2006/main" prst="rect">
             <a:avLst/>
@@ -2815,14 +2815,14 @@
           <a:lstStyle xmlns:a="http://schemas.openxmlformats.org/drawingml/2006/main"/>
           <a:p xmlns:a="http://schemas.openxmlformats.org/drawingml/2006/main">
             <a:pPr algn="l">
-              <a:defRPr sz="1275" b="1" i="0">
-                <a:solidFill>
-                  <a:srgbClr val="061A45"/>
-                </a:solidFill>
-              </a:defRPr>
-            </a:pPr>
-            <a:r>
-              <a:rPr sz="1275" b="1" i="0">
+              <a:defRPr sz="1200" b="1" i="0">
+                <a:solidFill>
+                  <a:srgbClr val="061A45"/>
+                </a:solidFill>
+              </a:defRPr>
+            </a:pPr>
+            <a:r>
+              <a:rPr sz="1200" b="1" i="0">
                 <a:solidFill>
                   <a:srgbClr val="061A45"/>
                 </a:solidFill>
@@ -2837,19 +2837,19 @@
           <p:cNvPr id="6" name="">
             <a:extLst xmlns:a="http://schemas.openxmlformats.org/drawingml/2006/main">
               <a:ext uri="{FF2B5EF4-FFF2-40B4-BE49-F238E27FC236}">
-                <a16:creationId xmlns:a16="http://schemas.microsoft.com/office/drawing/2014/main" id="{509F00C0-70E2-4473-9709-E8AC75607965}"/>
-              </a:ext>
-            </a:extLst>
-          </p:cNvPr>
-          <p:cNvSpPr>
-            <a:spLocks xmlns:a="http://schemas.openxmlformats.org/drawingml/2006/main" noGrp="1"/>
-          </p:cNvSpPr>
-          <p:nvPr/>
-        </p:nvSpPr>
-        <p:spPr>
-          <a:xfrm xmlns:a="http://schemas.openxmlformats.org/drawingml/2006/main">
-            <a:off x="7524750" y="1676400"/>
-            <a:ext cx="1714500" cy="171450"/>
+                <a16:creationId xmlns:a16="http://schemas.microsoft.com/office/drawing/2014/main" id="{99CC8F9F-653D-4411-9C59-A0D32766E2B9}"/>
+              </a:ext>
+            </a:extLst>
+          </p:cNvPr>
+          <p:cNvSpPr>
+            <a:spLocks xmlns:a="http://schemas.openxmlformats.org/drawingml/2006/main" noGrp="1"/>
+          </p:cNvSpPr>
+          <p:nvPr/>
+        </p:nvSpPr>
+        <p:spPr>
+          <a:xfrm xmlns:a="http://schemas.openxmlformats.org/drawingml/2006/main">
+            <a:off x="6267450" y="1447800"/>
+            <a:ext cx="1009650" cy="171450"/>
           </a:xfrm>
           <a:prstGeom xmlns:a="http://schemas.openxmlformats.org/drawingml/2006/main" prst="rect">
             <a:avLst/>
@@ -2865,19 +2865,19 @@
           <a:lstStyle xmlns:a="http://schemas.openxmlformats.org/drawingml/2006/main"/>
           <a:p xmlns:a="http://schemas.openxmlformats.org/drawingml/2006/main">
             <a:pPr algn="l">
-              <a:defRPr sz="1125" b="0" i="0">
-                <a:solidFill>
-                  <a:srgbClr val="061A45"/>
-                </a:solidFill>
-              </a:defRPr>
-            </a:pPr>
-            <a:r>
-              <a:rPr sz="1125" b="0" i="0">
-                <a:solidFill>
-                  <a:srgbClr val="061A45"/>
-                </a:solidFill>
-              </a:rPr>
-              <a:t>single request</a:t>
+              <a:defRPr sz="1200" b="0" i="0">
+                <a:solidFill>
+                  <a:srgbClr val="061A45"/>
+                </a:solidFill>
+              </a:defRPr>
+            </a:pPr>
+            <a:r>
+              <a:rPr sz="1200" b="0" i="0">
+                <a:solidFill>
+                  <a:srgbClr val="061A45"/>
+                </a:solidFill>
+              </a:rPr>
+              <a:t>one request</a:t>
             </a:r>
           </a:p>
         </p:txBody>
@@ -2887,23 +2887,23 @@
           <p:cNvPr id="7" name="">
             <a:extLst xmlns:a="http://schemas.openxmlformats.org/drawingml/2006/main">
               <a:ext uri="{FF2B5EF4-FFF2-40B4-BE49-F238E27FC236}">
-                <a16:creationId xmlns:a16="http://schemas.microsoft.com/office/drawing/2014/main" id="{0D149A94-B008-426C-800C-C84EA6A4D3E3}"/>
-              </a:ext>
-            </a:extLst>
-          </p:cNvPr>
-          <p:cNvSpPr>
-            <a:spLocks xmlns:a="http://schemas.openxmlformats.org/drawingml/2006/main" noGrp="1"/>
-          </p:cNvSpPr>
-          <p:nvPr/>
-        </p:nvSpPr>
-        <p:spPr>
-          <a:xfrm xmlns:a="http://schemas.openxmlformats.org/drawingml/2006/main">
-            <a:off x="4324350" y="2247900"/>
-            <a:ext cx="3571875" cy="495300"/>
+                <a16:creationId xmlns:a16="http://schemas.microsoft.com/office/drawing/2014/main" id="{5E2DA907-8CBC-4837-A167-C954983ECC1B}"/>
+              </a:ext>
+            </a:extLst>
+          </p:cNvPr>
+          <p:cNvSpPr>
+            <a:spLocks xmlns:a="http://schemas.openxmlformats.org/drawingml/2006/main" noGrp="1"/>
+          </p:cNvSpPr>
+          <p:nvPr/>
+        </p:nvSpPr>
+        <p:spPr>
+          <a:xfrm xmlns:a="http://schemas.openxmlformats.org/drawingml/2006/main">
+            <a:off x="4438650" y="1943100"/>
+            <a:ext cx="3429000" cy="457200"/>
           </a:xfrm>
           <a:prstGeom xmlns:a="http://schemas.openxmlformats.org/drawingml/2006/main" prst="roundRect">
             <a:avLst>
-              <a:gd name="adj" fmla="val 11538"/>
+              <a:gd name="adj" fmla="val 12500"/>
             </a:avLst>
           </a:prstGeom>
           <a:solidFill xmlns:a="http://schemas.openxmlformats.org/drawingml/2006/main">
@@ -2922,19 +2922,19 @@
           <p:cNvPr id="8" name="">
             <a:extLst xmlns:a="http://schemas.openxmlformats.org/drawingml/2006/main">
               <a:ext uri="{FF2B5EF4-FFF2-40B4-BE49-F238E27FC236}">
-                <a16:creationId xmlns:a16="http://schemas.microsoft.com/office/drawing/2014/main" id="{738261E2-D82B-452A-99BA-A3D0F84AC36E}"/>
-              </a:ext>
-            </a:extLst>
-          </p:cNvPr>
-          <p:cNvSpPr>
-            <a:spLocks xmlns:a="http://schemas.openxmlformats.org/drawingml/2006/main" noGrp="1"/>
-          </p:cNvSpPr>
-          <p:nvPr/>
-        </p:nvSpPr>
-        <p:spPr>
-          <a:xfrm xmlns:a="http://schemas.openxmlformats.org/drawingml/2006/main">
-            <a:off x="4552950" y="2324100"/>
-            <a:ext cx="2190750" cy="171450"/>
+                <a16:creationId xmlns:a16="http://schemas.microsoft.com/office/drawing/2014/main" id="{292ECF71-00CD-4098-A237-7228ED8C9697}"/>
+              </a:ext>
+            </a:extLst>
+          </p:cNvPr>
+          <p:cNvSpPr>
+            <a:spLocks xmlns:a="http://schemas.openxmlformats.org/drawingml/2006/main" noGrp="1"/>
+          </p:cNvSpPr>
+          <p:nvPr/>
+        </p:nvSpPr>
+        <p:spPr>
+          <a:xfrm xmlns:a="http://schemas.openxmlformats.org/drawingml/2006/main">
+            <a:off x="4648200" y="2009775"/>
+            <a:ext cx="1485900" cy="171450"/>
           </a:xfrm>
           <a:prstGeom xmlns:a="http://schemas.openxmlformats.org/drawingml/2006/main" prst="rect">
             <a:avLst/>
@@ -2950,19 +2950,19 @@
           <a:lstStyle xmlns:a="http://schemas.openxmlformats.org/drawingml/2006/main"/>
           <a:p xmlns:a="http://schemas.openxmlformats.org/drawingml/2006/main">
             <a:pPr algn="l">
-              <a:defRPr sz="1275" b="1" i="0">
-                <a:solidFill>
-                  <a:srgbClr val="061A45"/>
-                </a:solidFill>
-              </a:defRPr>
-            </a:pPr>
-            <a:r>
-              <a:rPr sz="1275" b="1" i="0">
-                <a:solidFill>
-                  <a:srgbClr val="061A45"/>
-                </a:solidFill>
-              </a:rPr>
-              <a:t>Prompt template</a:t>
+              <a:defRPr sz="1200" b="1" i="0">
+                <a:solidFill>
+                  <a:srgbClr val="061A45"/>
+                </a:solidFill>
+              </a:defRPr>
+            </a:pPr>
+            <a:r>
+              <a:rPr sz="1200" b="1" i="0">
+                <a:solidFill>
+                  <a:srgbClr val="061A45"/>
+                </a:solidFill>
+              </a:rPr>
+              <a:t>User instructions</a:t>
             </a:r>
           </a:p>
         </p:txBody>
@@ -2972,19 +2972,19 @@
           <p:cNvPr id="9" name="">
             <a:extLst xmlns:a="http://schemas.openxmlformats.org/drawingml/2006/main">
               <a:ext uri="{FF2B5EF4-FFF2-40B4-BE49-F238E27FC236}">
-                <a16:creationId xmlns:a16="http://schemas.microsoft.com/office/drawing/2014/main" id="{0FAFE87D-2F12-45C5-929C-FEB0DD9BA7AC}"/>
-              </a:ext>
-            </a:extLst>
-          </p:cNvPr>
-          <p:cNvSpPr>
-            <a:spLocks xmlns:a="http://schemas.openxmlformats.org/drawingml/2006/main" noGrp="1"/>
-          </p:cNvSpPr>
-          <p:nvPr/>
-        </p:nvSpPr>
-        <p:spPr>
-          <a:xfrm xmlns:a="http://schemas.openxmlformats.org/drawingml/2006/main">
-            <a:off x="6991350" y="2343150"/>
-            <a:ext cx="1714500" cy="171450"/>
+                <a16:creationId xmlns:a16="http://schemas.microsoft.com/office/drawing/2014/main" id="{42C443B5-86BC-47E6-BEBD-0504683D061D}"/>
+              </a:ext>
+            </a:extLst>
+          </p:cNvPr>
+          <p:cNvSpPr>
+            <a:spLocks xmlns:a="http://schemas.openxmlformats.org/drawingml/2006/main" noGrp="1"/>
+          </p:cNvSpPr>
+          <p:nvPr/>
+        </p:nvSpPr>
+        <p:spPr>
+          <a:xfrm xmlns:a="http://schemas.openxmlformats.org/drawingml/2006/main">
+            <a:off x="6248400" y="2019300"/>
+            <a:ext cx="1428750" cy="171450"/>
           </a:xfrm>
           <a:prstGeom xmlns:a="http://schemas.openxmlformats.org/drawingml/2006/main" prst="rect">
             <a:avLst/>
@@ -3000,19 +3000,19 @@
           <a:lstStyle xmlns:a="http://schemas.openxmlformats.org/drawingml/2006/main"/>
           <a:p xmlns:a="http://schemas.openxmlformats.org/drawingml/2006/main">
             <a:pPr algn="l">
-              <a:defRPr sz="1125" b="0" i="0">
-                <a:solidFill>
-                  <a:srgbClr val="061A45"/>
-                </a:solidFill>
-              </a:defRPr>
-            </a:pPr>
-            <a:r>
-              <a:rPr sz="1125" b="0" i="0">
-                <a:solidFill>
-                  <a:srgbClr val="061A45"/>
-                </a:solidFill>
-              </a:rPr>
-              <a:t>repeatable wording</a:t>
+              <a:defRPr sz="1200" b="0" i="0">
+                <a:solidFill>
+                  <a:srgbClr val="061A45"/>
+                </a:solidFill>
+              </a:defRPr>
+            </a:pPr>
+            <a:r>
+              <a:rPr sz="1200" b="0" i="0">
+                <a:solidFill>
+                  <a:srgbClr val="061A45"/>
+                </a:solidFill>
+              </a:rPr>
+              <a:t>stable prefs</a:t>
             </a:r>
           </a:p>
         </p:txBody>
@@ -3022,23 +3022,158 @@
           <p:cNvPr id="10" name="">
             <a:extLst xmlns:a="http://schemas.openxmlformats.org/drawingml/2006/main">
               <a:ext uri="{FF2B5EF4-FFF2-40B4-BE49-F238E27FC236}">
-                <a16:creationId xmlns:a16="http://schemas.microsoft.com/office/drawing/2014/main" id="{EDF21704-3BAD-4DA6-910D-25FED806DB61}"/>
-              </a:ext>
-            </a:extLst>
-          </p:cNvPr>
-          <p:cNvSpPr>
-            <a:spLocks xmlns:a="http://schemas.openxmlformats.org/drawingml/2006/main" noGrp="1"/>
-          </p:cNvSpPr>
-          <p:nvPr/>
-        </p:nvSpPr>
-        <p:spPr>
-          <a:xfrm xmlns:a="http://schemas.openxmlformats.org/drawingml/2006/main">
-            <a:off x="3790950" y="2914650"/>
-            <a:ext cx="4667250" cy="495300"/>
+                <a16:creationId xmlns:a16="http://schemas.microsoft.com/office/drawing/2014/main" id="{DA895152-C7FA-41AC-902F-E8F8FD0E94A9}"/>
+              </a:ext>
+            </a:extLst>
+          </p:cNvPr>
+          <p:cNvSpPr>
+            <a:spLocks xmlns:a="http://schemas.openxmlformats.org/drawingml/2006/main" noGrp="1"/>
+          </p:cNvSpPr>
+          <p:nvPr/>
+        </p:nvSpPr>
+        <p:spPr>
+          <a:xfrm xmlns:a="http://schemas.openxmlformats.org/drawingml/2006/main">
+            <a:off x="4038600" y="2514600"/>
+            <a:ext cx="4229100" cy="457200"/>
           </a:xfrm>
           <a:prstGeom xmlns:a="http://schemas.openxmlformats.org/drawingml/2006/main" prst="roundRect">
             <a:avLst>
-              <a:gd name="adj" fmla="val 11538"/>
+              <a:gd name="adj" fmla="val 12500"/>
+            </a:avLst>
+          </a:prstGeom>
+          <a:solidFill xmlns:a="http://schemas.openxmlformats.org/drawingml/2006/main">
+            <a:srgbClr val="EEF6FF"/>
+          </a:solidFill>
+          <a:ln xmlns:a="http://schemas.openxmlformats.org/drawingml/2006/main" w="10478">
+            <a:solidFill>
+              <a:srgbClr val="004AAD"/>
+            </a:solidFill>
+            <a:prstDash val="solid"/>
+          </a:ln>
+        </p:spPr>
+      </p:sp>
+      <p:sp>
+        <p:nvSpPr>
+          <p:cNvPr id="11" name="">
+            <a:extLst xmlns:a="http://schemas.openxmlformats.org/drawingml/2006/main">
+              <a:ext uri="{FF2B5EF4-FFF2-40B4-BE49-F238E27FC236}">
+                <a16:creationId xmlns:a16="http://schemas.microsoft.com/office/drawing/2014/main" id="{1A608B38-E61D-41D9-890E-E6BFA781F549}"/>
+              </a:ext>
+            </a:extLst>
+          </p:cNvPr>
+          <p:cNvSpPr>
+            <a:spLocks xmlns:a="http://schemas.openxmlformats.org/drawingml/2006/main" noGrp="1"/>
+          </p:cNvSpPr>
+          <p:nvPr/>
+        </p:nvSpPr>
+        <p:spPr>
+          <a:xfrm xmlns:a="http://schemas.openxmlformats.org/drawingml/2006/main">
+            <a:off x="4248150" y="2581275"/>
+            <a:ext cx="1485900" cy="171450"/>
+          </a:xfrm>
+          <a:prstGeom xmlns:a="http://schemas.openxmlformats.org/drawingml/2006/main" prst="rect">
+            <a:avLst/>
+          </a:prstGeom>
+          <a:noFill xmlns:a="http://schemas.openxmlformats.org/drawingml/2006/main"/>
+          <a:ln xmlns:a="http://schemas.openxmlformats.org/drawingml/2006/main" w="0">
+            <a:noFill/>
+            <a:prstDash val="solid"/>
+          </a:ln>
+        </p:spPr>
+        <p:txBody>
+          <a:bodyPr xmlns:a="http://schemas.openxmlformats.org/drawingml/2006/main"/>
+          <a:lstStyle xmlns:a="http://schemas.openxmlformats.org/drawingml/2006/main"/>
+          <a:p xmlns:a="http://schemas.openxmlformats.org/drawingml/2006/main">
+            <a:pPr algn="l">
+              <a:defRPr sz="1200" b="1" i="0">
+                <a:solidFill>
+                  <a:srgbClr val="004AAD"/>
+                </a:solidFill>
+              </a:defRPr>
+            </a:pPr>
+            <a:r>
+              <a:rPr sz="1200" b="1" i="0">
+                <a:solidFill>
+                  <a:srgbClr val="004AAD"/>
+                </a:solidFill>
+              </a:rPr>
+              <a:t>Skill</a:t>
+            </a:r>
+          </a:p>
+        </p:txBody>
+      </p:sp>
+      <p:sp>
+        <p:nvSpPr>
+          <p:cNvPr id="12" name="">
+            <a:extLst xmlns:a="http://schemas.openxmlformats.org/drawingml/2006/main">
+              <a:ext uri="{FF2B5EF4-FFF2-40B4-BE49-F238E27FC236}">
+                <a16:creationId xmlns:a16="http://schemas.microsoft.com/office/drawing/2014/main" id="{0E5A0E69-09B5-4A32-8AD7-5CF5A5617286}"/>
+              </a:ext>
+            </a:extLst>
+          </p:cNvPr>
+          <p:cNvSpPr>
+            <a:spLocks xmlns:a="http://schemas.openxmlformats.org/drawingml/2006/main" noGrp="1"/>
+          </p:cNvSpPr>
+          <p:nvPr/>
+        </p:nvSpPr>
+        <p:spPr>
+          <a:xfrm xmlns:a="http://schemas.openxmlformats.org/drawingml/2006/main">
+            <a:off x="5848350" y="2590800"/>
+            <a:ext cx="2228850" cy="171450"/>
+          </a:xfrm>
+          <a:prstGeom xmlns:a="http://schemas.openxmlformats.org/drawingml/2006/main" prst="rect">
+            <a:avLst/>
+          </a:prstGeom>
+          <a:noFill xmlns:a="http://schemas.openxmlformats.org/drawingml/2006/main"/>
+          <a:ln xmlns:a="http://schemas.openxmlformats.org/drawingml/2006/main" w="0">
+            <a:noFill/>
+            <a:prstDash val="solid"/>
+          </a:ln>
+        </p:spPr>
+        <p:txBody>
+          <a:bodyPr xmlns:a="http://schemas.openxmlformats.org/drawingml/2006/main"/>
+          <a:lstStyle xmlns:a="http://schemas.openxmlformats.org/drawingml/2006/main"/>
+          <a:p xmlns:a="http://schemas.openxmlformats.org/drawingml/2006/main">
+            <a:pPr algn="l">
+              <a:defRPr sz="1200" b="0" i="0">
+                <a:solidFill>
+                  <a:srgbClr val="061A45"/>
+                </a:solidFill>
+              </a:defRPr>
+            </a:pPr>
+            <a:r>
+              <a:rPr sz="1200" b="0" i="0">
+                <a:solidFill>
+                  <a:srgbClr val="061A45"/>
+                </a:solidFill>
+              </a:rPr>
+              <a:t>dynamic prompt pack</a:t>
+            </a:r>
+          </a:p>
+        </p:txBody>
+      </p:sp>
+      <p:sp>
+        <p:nvSpPr>
+          <p:cNvPr id="13" name="">
+            <a:extLst xmlns:a="http://schemas.openxmlformats.org/drawingml/2006/main">
+              <a:ext uri="{FF2B5EF4-FFF2-40B4-BE49-F238E27FC236}">
+                <a16:creationId xmlns:a16="http://schemas.microsoft.com/office/drawing/2014/main" id="{40E99ADD-A9F1-4242-8D97-9A8CC55DE3CD}"/>
+              </a:ext>
+            </a:extLst>
+          </p:cNvPr>
+          <p:cNvSpPr>
+            <a:spLocks xmlns:a="http://schemas.openxmlformats.org/drawingml/2006/main" noGrp="1"/>
+          </p:cNvSpPr>
+          <p:nvPr/>
+        </p:nvSpPr>
+        <p:spPr>
+          <a:xfrm xmlns:a="http://schemas.openxmlformats.org/drawingml/2006/main">
+            <a:off x="3638550" y="3086100"/>
+            <a:ext cx="5029200" cy="457200"/>
+          </a:xfrm>
+          <a:prstGeom xmlns:a="http://schemas.openxmlformats.org/drawingml/2006/main" prst="roundRect">
+            <a:avLst>
+              <a:gd name="adj" fmla="val 12500"/>
             </a:avLst>
           </a:prstGeom>
           <a:solidFill xmlns:a="http://schemas.openxmlformats.org/drawingml/2006/main">
@@ -3054,22 +3189,22 @@
       </p:sp>
       <p:sp>
         <p:nvSpPr>
-          <p:cNvPr id="11" name="">
-            <a:extLst xmlns:a="http://schemas.openxmlformats.org/drawingml/2006/main">
-              <a:ext uri="{FF2B5EF4-FFF2-40B4-BE49-F238E27FC236}">
-                <a16:creationId xmlns:a16="http://schemas.microsoft.com/office/drawing/2014/main" id="{6F743DD3-D4C7-41FD-831F-E4B36A50CD66}"/>
-              </a:ext>
-            </a:extLst>
-          </p:cNvPr>
-          <p:cNvSpPr>
-            <a:spLocks xmlns:a="http://schemas.openxmlformats.org/drawingml/2006/main" noGrp="1"/>
-          </p:cNvSpPr>
-          <p:nvPr/>
-        </p:nvSpPr>
-        <p:spPr>
-          <a:xfrm xmlns:a="http://schemas.openxmlformats.org/drawingml/2006/main">
-            <a:off x="4019550" y="2990850"/>
-            <a:ext cx="2190750" cy="171450"/>
+          <p:cNvPr id="14" name="">
+            <a:extLst xmlns:a="http://schemas.openxmlformats.org/drawingml/2006/main">
+              <a:ext uri="{FF2B5EF4-FFF2-40B4-BE49-F238E27FC236}">
+                <a16:creationId xmlns:a16="http://schemas.microsoft.com/office/drawing/2014/main" id="{9A6CE71F-7F86-43B1-A9F8-70496CCE7A49}"/>
+              </a:ext>
+            </a:extLst>
+          </p:cNvPr>
+          <p:cNvSpPr>
+            <a:spLocks xmlns:a="http://schemas.openxmlformats.org/drawingml/2006/main" noGrp="1"/>
+          </p:cNvSpPr>
+          <p:nvPr/>
+        </p:nvSpPr>
+        <p:spPr>
+          <a:xfrm xmlns:a="http://schemas.openxmlformats.org/drawingml/2006/main">
+            <a:off x="3848100" y="3152775"/>
+            <a:ext cx="1485900" cy="171450"/>
           </a:xfrm>
           <a:prstGeom xmlns:a="http://schemas.openxmlformats.org/drawingml/2006/main" prst="rect">
             <a:avLst/>
@@ -3085,14 +3220,14 @@
           <a:lstStyle xmlns:a="http://schemas.openxmlformats.org/drawingml/2006/main"/>
           <a:p xmlns:a="http://schemas.openxmlformats.org/drawingml/2006/main">
             <a:pPr algn="l">
-              <a:defRPr sz="1275" b="1" i="0">
-                <a:solidFill>
-                  <a:srgbClr val="061A45"/>
-                </a:solidFill>
-              </a:defRPr>
-            </a:pPr>
-            <a:r>
-              <a:rPr sz="1275" b="1" i="0">
+              <a:defRPr sz="1200" b="1" i="0">
+                <a:solidFill>
+                  <a:srgbClr val="061A45"/>
+                </a:solidFill>
+              </a:defRPr>
+            </a:pPr>
+            <a:r>
+              <a:rPr sz="1200" b="1" i="0">
                 <a:solidFill>
                   <a:srgbClr val="061A45"/>
                 </a:solidFill>
@@ -3104,22 +3239,22 @@
       </p:sp>
       <p:sp>
         <p:nvSpPr>
-          <p:cNvPr id="12" name="">
-            <a:extLst xmlns:a="http://schemas.openxmlformats.org/drawingml/2006/main">
-              <a:ext uri="{FF2B5EF4-FFF2-40B4-BE49-F238E27FC236}">
-                <a16:creationId xmlns:a16="http://schemas.microsoft.com/office/drawing/2014/main" id="{E97CC435-E9DA-4DDF-AC23-FCC3C16A0CDB}"/>
-              </a:ext>
-            </a:extLst>
-          </p:cNvPr>
-          <p:cNvSpPr>
-            <a:spLocks xmlns:a="http://schemas.openxmlformats.org/drawingml/2006/main" noGrp="1"/>
-          </p:cNvSpPr>
-          <p:nvPr/>
-        </p:nvSpPr>
-        <p:spPr>
-          <a:xfrm xmlns:a="http://schemas.openxmlformats.org/drawingml/2006/main">
-            <a:off x="6457950" y="3009900"/>
-            <a:ext cx="1714500" cy="171450"/>
+          <p:cNvPr id="15" name="">
+            <a:extLst xmlns:a="http://schemas.openxmlformats.org/drawingml/2006/main">
+              <a:ext uri="{FF2B5EF4-FFF2-40B4-BE49-F238E27FC236}">
+                <a16:creationId xmlns:a16="http://schemas.microsoft.com/office/drawing/2014/main" id="{D90967C1-1895-4512-982C-532F4C14426B}"/>
+              </a:ext>
+            </a:extLst>
+          </p:cNvPr>
+          <p:cNvSpPr>
+            <a:spLocks xmlns:a="http://schemas.openxmlformats.org/drawingml/2006/main" noGrp="1"/>
+          </p:cNvSpPr>
+          <p:nvPr/>
+        </p:nvSpPr>
+        <p:spPr>
+          <a:xfrm xmlns:a="http://schemas.openxmlformats.org/drawingml/2006/main">
+            <a:off x="5448300" y="3162300"/>
+            <a:ext cx="3028950" cy="171450"/>
           </a:xfrm>
           <a:prstGeom xmlns:a="http://schemas.openxmlformats.org/drawingml/2006/main" prst="rect">
             <a:avLst/>
@@ -3135,45 +3270,45 @@
           <a:lstStyle xmlns:a="http://schemas.openxmlformats.org/drawingml/2006/main"/>
           <a:p xmlns:a="http://schemas.openxmlformats.org/drawingml/2006/main">
             <a:pPr algn="l">
-              <a:defRPr sz="1125" b="0" i="0">
-                <a:solidFill>
-                  <a:srgbClr val="061A45"/>
-                </a:solidFill>
-              </a:defRPr>
-            </a:pPr>
-            <a:r>
-              <a:rPr sz="1125" b="0" i="0">
-                <a:solidFill>
-                  <a:srgbClr val="061A45"/>
-                </a:solidFill>
-              </a:rPr>
-              <a:t>fixed role and tool environment</a:t>
-            </a:r>
-          </a:p>
-        </p:txBody>
-      </p:sp>
-      <p:sp>
-        <p:nvSpPr>
-          <p:cNvPr id="13" name="">
-            <a:extLst xmlns:a="http://schemas.openxmlformats.org/drawingml/2006/main">
-              <a:ext uri="{FF2B5EF4-FFF2-40B4-BE49-F238E27FC236}">
-                <a16:creationId xmlns:a16="http://schemas.microsoft.com/office/drawing/2014/main" id="{5A58DDB5-FAD5-47B9-985E-4D81912232DD}"/>
-              </a:ext>
-            </a:extLst>
-          </p:cNvPr>
-          <p:cNvSpPr>
-            <a:spLocks xmlns:a="http://schemas.openxmlformats.org/drawingml/2006/main" noGrp="1"/>
-          </p:cNvSpPr>
-          <p:nvPr/>
-        </p:nvSpPr>
-        <p:spPr>
-          <a:xfrm xmlns:a="http://schemas.openxmlformats.org/drawingml/2006/main">
-            <a:off x="3257550" y="3581400"/>
-            <a:ext cx="5762625" cy="495300"/>
+              <a:defRPr sz="1200" b="0" i="0">
+                <a:solidFill>
+                  <a:srgbClr val="061A45"/>
+                </a:solidFill>
+              </a:defRPr>
+            </a:pPr>
+            <a:r>
+              <a:rPr sz="1200" b="0" i="0">
+                <a:solidFill>
+                  <a:srgbClr val="061A45"/>
+                </a:solidFill>
+              </a:rPr>
+              <a:t>profile with role, tools, limits</a:t>
+            </a:r>
+          </a:p>
+        </p:txBody>
+      </p:sp>
+      <p:sp>
+        <p:nvSpPr>
+          <p:cNvPr id="16" name="">
+            <a:extLst xmlns:a="http://schemas.openxmlformats.org/drawingml/2006/main">
+              <a:ext uri="{FF2B5EF4-FFF2-40B4-BE49-F238E27FC236}">
+                <a16:creationId xmlns:a16="http://schemas.microsoft.com/office/drawing/2014/main" id="{3227F213-16B7-4060-93B9-2630AAA45D70}"/>
+              </a:ext>
+            </a:extLst>
+          </p:cNvPr>
+          <p:cNvSpPr>
+            <a:spLocks xmlns:a="http://schemas.openxmlformats.org/drawingml/2006/main" noGrp="1"/>
+          </p:cNvSpPr>
+          <p:nvPr/>
+        </p:nvSpPr>
+        <p:spPr>
+          <a:xfrm xmlns:a="http://schemas.openxmlformats.org/drawingml/2006/main">
+            <a:off x="3238500" y="3657600"/>
+            <a:ext cx="5829300" cy="457200"/>
           </a:xfrm>
           <a:prstGeom xmlns:a="http://schemas.openxmlformats.org/drawingml/2006/main" prst="roundRect">
             <a:avLst>
-              <a:gd name="adj" fmla="val 11538"/>
+              <a:gd name="adj" fmla="val 12500"/>
             </a:avLst>
           </a:prstGeom>
           <a:solidFill xmlns:a="http://schemas.openxmlformats.org/drawingml/2006/main">
@@ -3189,22 +3324,22 @@
       </p:sp>
       <p:sp>
         <p:nvSpPr>
-          <p:cNvPr id="14" name="">
-            <a:extLst xmlns:a="http://schemas.openxmlformats.org/drawingml/2006/main">
-              <a:ext uri="{FF2B5EF4-FFF2-40B4-BE49-F238E27FC236}">
-                <a16:creationId xmlns:a16="http://schemas.microsoft.com/office/drawing/2014/main" id="{1E7D5F8C-2658-41FC-9B22-6F0FEF548BB3}"/>
-              </a:ext>
-            </a:extLst>
-          </p:cNvPr>
-          <p:cNvSpPr>
-            <a:spLocks xmlns:a="http://schemas.openxmlformats.org/drawingml/2006/main" noGrp="1"/>
-          </p:cNvSpPr>
-          <p:nvPr/>
-        </p:nvSpPr>
-        <p:spPr>
-          <a:xfrm xmlns:a="http://schemas.openxmlformats.org/drawingml/2006/main">
-            <a:off x="3486150" y="3657600"/>
-            <a:ext cx="2190750" cy="171450"/>
+          <p:cNvPr id="17" name="">
+            <a:extLst xmlns:a="http://schemas.openxmlformats.org/drawingml/2006/main">
+              <a:ext uri="{FF2B5EF4-FFF2-40B4-BE49-F238E27FC236}">
+                <a16:creationId xmlns:a16="http://schemas.microsoft.com/office/drawing/2014/main" id="{894523DA-0A45-4917-8C90-CCDE8FFCA4D7}"/>
+              </a:ext>
+            </a:extLst>
+          </p:cNvPr>
+          <p:cNvSpPr>
+            <a:spLocks xmlns:a="http://schemas.openxmlformats.org/drawingml/2006/main" noGrp="1"/>
+          </p:cNvSpPr>
+          <p:nvPr/>
+        </p:nvSpPr>
+        <p:spPr>
+          <a:xfrm xmlns:a="http://schemas.openxmlformats.org/drawingml/2006/main">
+            <a:off x="3448050" y="3724275"/>
+            <a:ext cx="1485900" cy="171450"/>
           </a:xfrm>
           <a:prstGeom xmlns:a="http://schemas.openxmlformats.org/drawingml/2006/main" prst="rect">
             <a:avLst/>
@@ -3220,41 +3355,41 @@
           <a:lstStyle xmlns:a="http://schemas.openxmlformats.org/drawingml/2006/main"/>
           <a:p xmlns:a="http://schemas.openxmlformats.org/drawingml/2006/main">
             <a:pPr algn="l">
-              <a:defRPr sz="1275" b="1" i="0">
+              <a:defRPr sz="1200" b="1" i="0">
                 <a:solidFill>
                   <a:srgbClr val="004AAD"/>
                 </a:solidFill>
               </a:defRPr>
             </a:pPr>
             <a:r>
-              <a:rPr sz="1275" b="1" i="0">
+              <a:rPr sz="1200" b="1" i="0">
                 <a:solidFill>
                   <a:srgbClr val="004AAD"/>
                 </a:solidFill>
               </a:rPr>
-              <a:t>Harness</a:t>
-            </a:r>
-          </a:p>
-        </p:txBody>
-      </p:sp>
-      <p:sp>
-        <p:nvSpPr>
-          <p:cNvPr id="15" name="">
-            <a:extLst xmlns:a="http://schemas.openxmlformats.org/drawingml/2006/main">
-              <a:ext uri="{FF2B5EF4-FFF2-40B4-BE49-F238E27FC236}">
-                <a16:creationId xmlns:a16="http://schemas.microsoft.com/office/drawing/2014/main" id="{39F7E81D-ED65-4AC0-8239-45291BE5C569}"/>
-              </a:ext>
-            </a:extLst>
-          </p:cNvPr>
-          <p:cNvSpPr>
-            <a:spLocks xmlns:a="http://schemas.openxmlformats.org/drawingml/2006/main" noGrp="1"/>
-          </p:cNvSpPr>
-          <p:nvPr/>
-        </p:nvSpPr>
-        <p:spPr>
-          <a:xfrm xmlns:a="http://schemas.openxmlformats.org/drawingml/2006/main">
-            <a:off x="5924550" y="3676650"/>
-            <a:ext cx="2809875" cy="171450"/>
+              <a:t>Subagent</a:t>
+            </a:r>
+          </a:p>
+        </p:txBody>
+      </p:sp>
+      <p:sp>
+        <p:nvSpPr>
+          <p:cNvPr id="18" name="">
+            <a:extLst xmlns:a="http://schemas.openxmlformats.org/drawingml/2006/main">
+              <a:ext uri="{FF2B5EF4-FFF2-40B4-BE49-F238E27FC236}">
+                <a16:creationId xmlns:a16="http://schemas.microsoft.com/office/drawing/2014/main" id="{86EDA2A1-19AC-4EA0-AA54-AFA5858475C0}"/>
+              </a:ext>
+            </a:extLst>
+          </p:cNvPr>
+          <p:cNvSpPr>
+            <a:spLocks xmlns:a="http://schemas.openxmlformats.org/drawingml/2006/main" noGrp="1"/>
+          </p:cNvSpPr>
+          <p:nvPr/>
+        </p:nvSpPr>
+        <p:spPr>
+          <a:xfrm xmlns:a="http://schemas.openxmlformats.org/drawingml/2006/main">
+            <a:off x="5048250" y="3733800"/>
+            <a:ext cx="3829050" cy="171450"/>
           </a:xfrm>
           <a:prstGeom xmlns:a="http://schemas.openxmlformats.org/drawingml/2006/main" prst="rect">
             <a:avLst/>
@@ -3270,45 +3405,45 @@
           <a:lstStyle xmlns:a="http://schemas.openxmlformats.org/drawingml/2006/main"/>
           <a:p xmlns:a="http://schemas.openxmlformats.org/drawingml/2006/main">
             <a:pPr algn="l">
-              <a:defRPr sz="1125" b="0" i="0">
-                <a:solidFill>
-                  <a:srgbClr val="061A45"/>
-                </a:solidFill>
-              </a:defRPr>
-            </a:pPr>
-            <a:r>
-              <a:rPr sz="1125" b="0" i="0">
-                <a:solidFill>
-                  <a:srgbClr val="061A45"/>
-                </a:solidFill>
-              </a:rPr>
-              <a:t>context, tools, permission, loop</a:t>
-            </a:r>
-          </a:p>
-        </p:txBody>
-      </p:sp>
-      <p:sp>
-        <p:nvSpPr>
-          <p:cNvPr id="16" name="">
-            <a:extLst xmlns:a="http://schemas.openxmlformats.org/drawingml/2006/main">
-              <a:ext uri="{FF2B5EF4-FFF2-40B4-BE49-F238E27FC236}">
-                <a16:creationId xmlns:a16="http://schemas.microsoft.com/office/drawing/2014/main" id="{0964F577-F2DC-4FC7-8611-9FA96701513E}"/>
-              </a:ext>
-            </a:extLst>
-          </p:cNvPr>
-          <p:cNvSpPr>
-            <a:spLocks xmlns:a="http://schemas.openxmlformats.org/drawingml/2006/main" noGrp="1"/>
-          </p:cNvSpPr>
-          <p:nvPr/>
-        </p:nvSpPr>
-        <p:spPr>
-          <a:xfrm xmlns:a="http://schemas.openxmlformats.org/drawingml/2006/main">
-            <a:off x="2724150" y="4248150"/>
-            <a:ext cx="6858000" cy="495300"/>
+              <a:defRPr sz="1200" b="0" i="0">
+                <a:solidFill>
+                  <a:srgbClr val="061A45"/>
+                </a:solidFill>
+              </a:defRPr>
+            </a:pPr>
+            <a:r>
+              <a:rPr sz="1200" b="0" i="0">
+                <a:solidFill>
+                  <a:srgbClr val="061A45"/>
+                </a:solidFill>
+              </a:rPr>
+              <a:t>local task on separate paper</a:t>
+            </a:r>
+          </a:p>
+        </p:txBody>
+      </p:sp>
+      <p:sp>
+        <p:nvSpPr>
+          <p:cNvPr id="19" name="">
+            <a:extLst xmlns:a="http://schemas.openxmlformats.org/drawingml/2006/main">
+              <a:ext uri="{FF2B5EF4-FFF2-40B4-BE49-F238E27FC236}">
+                <a16:creationId xmlns:a16="http://schemas.microsoft.com/office/drawing/2014/main" id="{A09629FA-B25C-422D-85F0-83C222A017D7}"/>
+              </a:ext>
+            </a:extLst>
+          </p:cNvPr>
+          <p:cNvSpPr>
+            <a:spLocks xmlns:a="http://schemas.openxmlformats.org/drawingml/2006/main" noGrp="1"/>
+          </p:cNvSpPr>
+          <p:nvPr/>
+        </p:nvSpPr>
+        <p:spPr>
+          <a:xfrm xmlns:a="http://schemas.openxmlformats.org/drawingml/2006/main">
+            <a:off x="2838450" y="4229100"/>
+            <a:ext cx="6629400" cy="457200"/>
           </a:xfrm>
           <a:prstGeom xmlns:a="http://schemas.openxmlformats.org/drawingml/2006/main" prst="roundRect">
             <a:avLst>
-              <a:gd name="adj" fmla="val 11538"/>
+              <a:gd name="adj" fmla="val 12500"/>
             </a:avLst>
           </a:prstGeom>
           <a:solidFill xmlns:a="http://schemas.openxmlformats.org/drawingml/2006/main">
@@ -3324,22 +3459,22 @@
       </p:sp>
       <p:sp>
         <p:nvSpPr>
-          <p:cNvPr id="17" name="">
-            <a:extLst xmlns:a="http://schemas.openxmlformats.org/drawingml/2006/main">
-              <a:ext uri="{FF2B5EF4-FFF2-40B4-BE49-F238E27FC236}">
-                <a16:creationId xmlns:a16="http://schemas.microsoft.com/office/drawing/2014/main" id="{73CB29BB-A86A-4718-934C-01E810CAC374}"/>
-              </a:ext>
-            </a:extLst>
-          </p:cNvPr>
-          <p:cNvSpPr>
-            <a:spLocks xmlns:a="http://schemas.openxmlformats.org/drawingml/2006/main" noGrp="1"/>
-          </p:cNvSpPr>
-          <p:nvPr/>
-        </p:nvSpPr>
-        <p:spPr>
-          <a:xfrm xmlns:a="http://schemas.openxmlformats.org/drawingml/2006/main">
-            <a:off x="2952750" y="4324350"/>
-            <a:ext cx="2190750" cy="171450"/>
+          <p:cNvPr id="20" name="">
+            <a:extLst xmlns:a="http://schemas.openxmlformats.org/drawingml/2006/main">
+              <a:ext uri="{FF2B5EF4-FFF2-40B4-BE49-F238E27FC236}">
+                <a16:creationId xmlns:a16="http://schemas.microsoft.com/office/drawing/2014/main" id="{13F5294D-83EA-446F-BEB0-BEB67D86E812}"/>
+              </a:ext>
+            </a:extLst>
+          </p:cNvPr>
+          <p:cNvSpPr>
+            <a:spLocks xmlns:a="http://schemas.openxmlformats.org/drawingml/2006/main" noGrp="1"/>
+          </p:cNvSpPr>
+          <p:nvPr/>
+        </p:nvSpPr>
+        <p:spPr>
+          <a:xfrm xmlns:a="http://schemas.openxmlformats.org/drawingml/2006/main">
+            <a:off x="3048000" y="4295775"/>
+            <a:ext cx="1485900" cy="171450"/>
           </a:xfrm>
           <a:prstGeom xmlns:a="http://schemas.openxmlformats.org/drawingml/2006/main" prst="rect">
             <a:avLst/>
@@ -3355,41 +3490,41 @@
           <a:lstStyle xmlns:a="http://schemas.openxmlformats.org/drawingml/2006/main"/>
           <a:p xmlns:a="http://schemas.openxmlformats.org/drawingml/2006/main">
             <a:pPr algn="l">
-              <a:defRPr sz="1275" b="1" i="0">
-                <a:solidFill>
-                  <a:srgbClr val="061A45"/>
-                </a:solidFill>
-              </a:defRPr>
-            </a:pPr>
-            <a:r>
-              <a:rPr sz="1275" b="1" i="0">
-                <a:solidFill>
-                  <a:srgbClr val="061A45"/>
-                </a:solidFill>
-              </a:rPr>
-              <a:t>Workflow system</a:t>
-            </a:r>
-          </a:p>
-        </p:txBody>
-      </p:sp>
-      <p:sp>
-        <p:nvSpPr>
-          <p:cNvPr id="18" name="">
-            <a:extLst xmlns:a="http://schemas.openxmlformats.org/drawingml/2006/main">
-              <a:ext uri="{FF2B5EF4-FFF2-40B4-BE49-F238E27FC236}">
-                <a16:creationId xmlns:a16="http://schemas.microsoft.com/office/drawing/2014/main" id="{2194EDF7-03CF-40E2-AA60-721EB6F30501}"/>
-              </a:ext>
-            </a:extLst>
-          </p:cNvPr>
-          <p:cNvSpPr>
-            <a:spLocks xmlns:a="http://schemas.openxmlformats.org/drawingml/2006/main" noGrp="1"/>
-          </p:cNvSpPr>
-          <p:nvPr/>
-        </p:nvSpPr>
-        <p:spPr>
-          <a:xfrm xmlns:a="http://schemas.openxmlformats.org/drawingml/2006/main">
-            <a:off x="5391150" y="4343400"/>
-            <a:ext cx="3905250" cy="171450"/>
+              <a:defRPr sz="1200" b="1" i="0">
+                <a:solidFill>
+                  <a:srgbClr val="061A45"/>
+                </a:solidFill>
+              </a:defRPr>
+            </a:pPr>
+            <a:r>
+              <a:rPr sz="1200" b="1" i="0">
+                <a:solidFill>
+                  <a:srgbClr val="061A45"/>
+                </a:solidFill>
+              </a:rPr>
+              <a:t>Workflow</a:t>
+            </a:r>
+          </a:p>
+        </p:txBody>
+      </p:sp>
+      <p:sp>
+        <p:nvSpPr>
+          <p:cNvPr id="21" name="">
+            <a:extLst xmlns:a="http://schemas.openxmlformats.org/drawingml/2006/main">
+              <a:ext uri="{FF2B5EF4-FFF2-40B4-BE49-F238E27FC236}">
+                <a16:creationId xmlns:a16="http://schemas.microsoft.com/office/drawing/2014/main" id="{34088C37-0789-4B83-81B6-BC491F2B8BF7}"/>
+              </a:ext>
+            </a:extLst>
+          </p:cNvPr>
+          <p:cNvSpPr>
+            <a:spLocks xmlns:a="http://schemas.openxmlformats.org/drawingml/2006/main" noGrp="1"/>
+          </p:cNvSpPr>
+          <p:nvPr/>
+        </p:nvSpPr>
+        <p:spPr>
+          <a:xfrm xmlns:a="http://schemas.openxmlformats.org/drawingml/2006/main">
+            <a:off x="4648200" y="4305300"/>
+            <a:ext cx="4629150" cy="171450"/>
           </a:xfrm>
           <a:prstGeom xmlns:a="http://schemas.openxmlformats.org/drawingml/2006/main" prst="rect">
             <a:avLst/>
@@ -3405,40 +3540,40 @@
           <a:lstStyle xmlns:a="http://schemas.openxmlformats.org/drawingml/2006/main"/>
           <a:p xmlns:a="http://schemas.openxmlformats.org/drawingml/2006/main">
             <a:pPr algn="l">
-              <a:defRPr sz="1125" b="0" i="0">
-                <a:solidFill>
-                  <a:srgbClr val="061A45"/>
-                </a:solidFill>
-              </a:defRPr>
-            </a:pPr>
-            <a:r>
-              <a:rPr sz="1125" b="0" i="0">
-                <a:solidFill>
-                  <a:srgbClr val="061A45"/>
-                </a:solidFill>
-              </a:rPr>
-              <a:t>multi-step and multi-agent orchestration</a:t>
-            </a:r>
-          </a:p>
-        </p:txBody>
-      </p:sp>
-      <p:sp>
-        <p:nvSpPr>
-          <p:cNvPr id="19" name="">
-            <a:extLst xmlns:a="http://schemas.openxmlformats.org/drawingml/2006/main">
-              <a:ext uri="{FF2B5EF4-FFF2-40B4-BE49-F238E27FC236}">
-                <a16:creationId xmlns:a16="http://schemas.microsoft.com/office/drawing/2014/main" id="{D1D9BAA4-0E0C-4A0B-8885-8ED573F4658E}"/>
-              </a:ext>
-            </a:extLst>
-          </p:cNvPr>
-          <p:cNvSpPr>
-            <a:spLocks xmlns:a="http://schemas.openxmlformats.org/drawingml/2006/main" noGrp="1"/>
-          </p:cNvSpPr>
-          <p:nvPr/>
-        </p:nvSpPr>
-        <p:spPr>
-          <a:xfrm xmlns:a="http://schemas.openxmlformats.org/drawingml/2006/main">
-            <a:off x="781050" y="5048250"/>
+              <a:defRPr sz="1200" b="0" i="0">
+                <a:solidFill>
+                  <a:srgbClr val="061A45"/>
+                </a:solidFill>
+              </a:defRPr>
+            </a:pPr>
+            <a:r>
+              <a:rPr sz="1200" b="0" i="0">
+                <a:solidFill>
+                  <a:srgbClr val="061A45"/>
+                </a:solidFill>
+              </a:rPr>
+              <a:t>orchestrated multi-step system</a:t>
+            </a:r>
+          </a:p>
+        </p:txBody>
+      </p:sp>
+      <p:sp>
+        <p:nvSpPr>
+          <p:cNvPr id="22" name="">
+            <a:extLst xmlns:a="http://schemas.openxmlformats.org/drawingml/2006/main">
+              <a:ext uri="{FF2B5EF4-FFF2-40B4-BE49-F238E27FC236}">
+                <a16:creationId xmlns:a16="http://schemas.microsoft.com/office/drawing/2014/main" id="{61C0E3E6-2A0D-43CA-9212-CFFDFDFFA542}"/>
+              </a:ext>
+            </a:extLst>
+          </p:cNvPr>
+          <p:cNvSpPr>
+            <a:spLocks xmlns:a="http://schemas.openxmlformats.org/drawingml/2006/main" noGrp="1"/>
+          </p:cNvSpPr>
+          <p:nvPr/>
+        </p:nvSpPr>
+        <p:spPr>
+          <a:xfrm xmlns:a="http://schemas.openxmlformats.org/drawingml/2006/main">
+            <a:off x="781050" y="5143500"/>
             <a:ext cx="4800600" cy="876300"/>
           </a:xfrm>
           <a:prstGeom xmlns:a="http://schemas.openxmlformats.org/drawingml/2006/main" prst="roundRect">
@@ -3459,10 +3594,10 @@
       </p:sp>
       <p:sp>
         <p:nvSpPr>
-          <p:cNvPr id="20" name="">
-            <a:extLst xmlns:a="http://schemas.openxmlformats.org/drawingml/2006/main">
-              <a:ext uri="{FF2B5EF4-FFF2-40B4-BE49-F238E27FC236}">
-                <a16:creationId xmlns:a16="http://schemas.microsoft.com/office/drawing/2014/main" id="{EF871AF0-A63C-48A7-9A68-59694A74703C}"/>
+          <p:cNvPr id="23" name="">
+            <a:extLst xmlns:a="http://schemas.openxmlformats.org/drawingml/2006/main">
+              <a:ext uri="{FF2B5EF4-FFF2-40B4-BE49-F238E27FC236}">
+                <a16:creationId xmlns:a16="http://schemas.microsoft.com/office/drawing/2014/main" id="{C995287C-A120-4515-8FFB-719575178C47}"/>
               </a:ext>
             </a:extLst>
           </p:cNvPr>
@@ -3509,10 +3644,10 @@
       </p:sp>
       <p:sp>
         <p:nvSpPr>
-          <p:cNvPr id="21" name="">
-            <a:extLst xmlns:a="http://schemas.openxmlformats.org/drawingml/2006/main">
-              <a:ext uri="{FF2B5EF4-FFF2-40B4-BE49-F238E27FC236}">
-                <a16:creationId xmlns:a16="http://schemas.microsoft.com/office/drawing/2014/main" id="{A12CCF8B-52C4-41FF-9B18-6B7ADDC03D60}"/>
+          <p:cNvPr id="24" name="">
+            <a:extLst xmlns:a="http://schemas.openxmlformats.org/drawingml/2006/main">
+              <a:ext uri="{FF2B5EF4-FFF2-40B4-BE49-F238E27FC236}">
+                <a16:creationId xmlns:a16="http://schemas.microsoft.com/office/drawing/2014/main" id="{5AB9737A-B125-478C-93AE-C7C962F09D50}"/>
               </a:ext>
             </a:extLst>
           </p:cNvPr>
@@ -3559,21 +3694,21 @@
       </p:sp>
       <p:sp>
         <p:nvSpPr>
-          <p:cNvPr id="22" name="">
-            <a:extLst xmlns:a="http://schemas.openxmlformats.org/drawingml/2006/main">
-              <a:ext uri="{FF2B5EF4-FFF2-40B4-BE49-F238E27FC236}">
-                <a16:creationId xmlns:a16="http://schemas.microsoft.com/office/drawing/2014/main" id="{E7617E3C-757E-4BC8-B653-75D640AFAC64}"/>
-              </a:ext>
-            </a:extLst>
-          </p:cNvPr>
-          <p:cNvSpPr>
-            <a:spLocks xmlns:a="http://schemas.openxmlformats.org/drawingml/2006/main" noGrp="1"/>
-          </p:cNvSpPr>
-          <p:nvPr/>
-        </p:nvSpPr>
-        <p:spPr>
-          <a:xfrm xmlns:a="http://schemas.openxmlformats.org/drawingml/2006/main">
-            <a:off x="6610350" y="5048250"/>
+          <p:cNvPr id="25" name="">
+            <a:extLst xmlns:a="http://schemas.openxmlformats.org/drawingml/2006/main">
+              <a:ext uri="{FF2B5EF4-FFF2-40B4-BE49-F238E27FC236}">
+                <a16:creationId xmlns:a16="http://schemas.microsoft.com/office/drawing/2014/main" id="{24FB40FA-AC82-4028-AC76-77FEFE14224D}"/>
+              </a:ext>
+            </a:extLst>
+          </p:cNvPr>
+          <p:cNvSpPr>
+            <a:spLocks xmlns:a="http://schemas.openxmlformats.org/drawingml/2006/main" noGrp="1"/>
+          </p:cNvSpPr>
+          <p:nvPr/>
+        </p:nvSpPr>
+        <p:spPr>
+          <a:xfrm xmlns:a="http://schemas.openxmlformats.org/drawingml/2006/main">
+            <a:off x="6610350" y="5143500"/>
             <a:ext cx="4800600" cy="876300"/>
           </a:xfrm>
           <a:prstGeom xmlns:a="http://schemas.openxmlformats.org/drawingml/2006/main" prst="roundRect">
@@ -3594,10 +3729,10 @@
       </p:sp>
       <p:sp>
         <p:nvSpPr>
-          <p:cNvPr id="23" name="">
-            <a:extLst xmlns:a="http://schemas.openxmlformats.org/drawingml/2006/main">
-              <a:ext uri="{FF2B5EF4-FFF2-40B4-BE49-F238E27FC236}">
-                <a16:creationId xmlns:a16="http://schemas.microsoft.com/office/drawing/2014/main" id="{F7D49BB7-25EA-4264-8B28-0DE080091BC1}"/>
+          <p:cNvPr id="26" name="">
+            <a:extLst xmlns:a="http://schemas.openxmlformats.org/drawingml/2006/main">
+              <a:ext uri="{FF2B5EF4-FFF2-40B4-BE49-F238E27FC236}">
+                <a16:creationId xmlns:a16="http://schemas.microsoft.com/office/drawing/2014/main" id="{79BE536E-6FD4-4597-A689-DC0DC228C06A}"/>
               </a:ext>
             </a:extLst>
           </p:cNvPr>
@@ -3644,10 +3779,10 @@
       </p:sp>
       <p:sp>
         <p:nvSpPr>
-          <p:cNvPr id="24" name="">
-            <a:extLst xmlns:a="http://schemas.openxmlformats.org/drawingml/2006/main">
-              <a:ext uri="{FF2B5EF4-FFF2-40B4-BE49-F238E27FC236}">
-                <a16:creationId xmlns:a16="http://schemas.microsoft.com/office/drawing/2014/main" id="{2D7450CA-5BE3-4165-B88C-60E0E0BBCC0F}"/>
+          <p:cNvPr id="27" name="">
+            <a:extLst xmlns:a="http://schemas.openxmlformats.org/drawingml/2006/main">
+              <a:ext uri="{FF2B5EF4-FFF2-40B4-BE49-F238E27FC236}">
+                <a16:creationId xmlns:a16="http://schemas.microsoft.com/office/drawing/2014/main" id="{D72AFDE8-3A49-4F54-AE51-BD70CA6B0037}"/>
               </a:ext>
             </a:extLst>
           </p:cNvPr>
@@ -3687,7 +3822,7 @@
                   <a:srgbClr val="061A45"/>
                 </a:solidFill>
               </a:rPr>
-              <a:t>Next step: subagents, workflows, teammates, and loop coding.</a:t>
+              <a:t>Next step: subagent workflows, teammates, and loop coding.</a:t>
             </a:r>
           </a:p>
         </p:txBody>
@@ -3695,7 +3830,7 @@
     </p:spTree>
     <p:extLst>
       <p:ext uri="{BB962C8B-B14F-4D97-AF65-F5344CB8AC3E}">
-        <p14:creationId xmlns:p14="http://schemas.microsoft.com/office/powerpoint/2010/main" val="1879164768"/>
+        <p14:creationId xmlns:p14="http://schemas.microsoft.com/office/powerpoint/2010/main" val="844728176"/>
       </p:ext>
     </p:extLst>
   </p:cSld>
@@ -3726,7 +3861,7 @@
           <p:cNvPr id="1" name="">
             <a:extLst xmlns:a="http://schemas.openxmlformats.org/drawingml/2006/main">
               <a:ext uri="{FF2B5EF4-FFF2-40B4-BE49-F238E27FC236}">
-                <a16:creationId xmlns:a16="http://schemas.microsoft.com/office/drawing/2014/main" id="{53BB859E-7A39-4828-BBB2-5D0AFFB93C95}"/>
+                <a16:creationId xmlns:a16="http://schemas.microsoft.com/office/drawing/2014/main" id="{B90EA412-B93F-43D0-AD08-DBBB42E0A012}"/>
               </a:ext>
             </a:extLst>
           </p:cNvPr>
@@ -3776,7 +3911,7 @@
           <p:cNvPr id="2" name="">
             <a:extLst xmlns:a="http://schemas.openxmlformats.org/drawingml/2006/main">
               <a:ext uri="{FF2B5EF4-FFF2-40B4-BE49-F238E27FC236}">
-                <a16:creationId xmlns:a16="http://schemas.microsoft.com/office/drawing/2014/main" id="{20F3723E-AEE2-4986-9144-B37F85285259}"/>
+                <a16:creationId xmlns:a16="http://schemas.microsoft.com/office/drawing/2014/main" id="{B1382F51-122F-42E5-82D7-9A1253F27091}"/>
               </a:ext>
             </a:extLst>
           </p:cNvPr>
@@ -3826,7 +3961,7 @@
           <p:cNvPr id="3" name="">
             <a:extLst xmlns:a="http://schemas.openxmlformats.org/drawingml/2006/main">
               <a:ext uri="{FF2B5EF4-FFF2-40B4-BE49-F238E27FC236}">
-                <a16:creationId xmlns:a16="http://schemas.microsoft.com/office/drawing/2014/main" id="{2D49602E-BA87-4A7C-BAC1-C69F508F3499}"/>
+                <a16:creationId xmlns:a16="http://schemas.microsoft.com/office/drawing/2014/main" id="{67FFA646-2C41-4F63-B0D0-4FF29964593A}"/>
               </a:ext>
             </a:extLst>
           </p:cNvPr>
@@ -3856,7 +3991,7 @@
           <p:cNvPr id="4" name="">
             <a:extLst xmlns:a="http://schemas.openxmlformats.org/drawingml/2006/main">
               <a:ext uri="{FF2B5EF4-FFF2-40B4-BE49-F238E27FC236}">
-                <a16:creationId xmlns:a16="http://schemas.microsoft.com/office/drawing/2014/main" id="{56C65410-7ADF-4A59-B15E-4692C28D9FA8}"/>
+                <a16:creationId xmlns:a16="http://schemas.microsoft.com/office/drawing/2014/main" id="{8F31DC84-05D6-401A-AD6C-1544D162125F}"/>
               </a:ext>
             </a:extLst>
           </p:cNvPr>
@@ -3891,7 +4026,7 @@
           <p:cNvPr id="5" name="">
             <a:extLst xmlns:a="http://schemas.openxmlformats.org/drawingml/2006/main">
               <a:ext uri="{FF2B5EF4-FFF2-40B4-BE49-F238E27FC236}">
-                <a16:creationId xmlns:a16="http://schemas.microsoft.com/office/drawing/2014/main" id="{4B500770-AF69-43BB-AFE1-F1AD1B585C66}"/>
+                <a16:creationId xmlns:a16="http://schemas.microsoft.com/office/drawing/2014/main" id="{3DAE7D7D-6CB9-47A2-BA2C-FB310B3BF2E1}"/>
               </a:ext>
             </a:extLst>
           </p:cNvPr>
@@ -3941,7 +4076,7 @@
           <p:cNvPr id="6" name="">
             <a:extLst xmlns:a="http://schemas.openxmlformats.org/drawingml/2006/main">
               <a:ext uri="{FF2B5EF4-FFF2-40B4-BE49-F238E27FC236}">
-                <a16:creationId xmlns:a16="http://schemas.microsoft.com/office/drawing/2014/main" id="{5C274179-9651-4633-9513-D4AA95953BEA}"/>
+                <a16:creationId xmlns:a16="http://schemas.microsoft.com/office/drawing/2014/main" id="{661879FD-A1BD-4F6E-AE2C-47E29F033044}"/>
               </a:ext>
             </a:extLst>
           </p:cNvPr>
@@ -3976,7 +4111,7 @@
           <p:cNvPr id="7" name="">
             <a:extLst xmlns:a="http://schemas.openxmlformats.org/drawingml/2006/main">
               <a:ext uri="{FF2B5EF4-FFF2-40B4-BE49-F238E27FC236}">
-                <a16:creationId xmlns:a16="http://schemas.microsoft.com/office/drawing/2014/main" id="{98251C36-8298-4A49-B608-B10E4903E3C2}"/>
+                <a16:creationId xmlns:a16="http://schemas.microsoft.com/office/drawing/2014/main" id="{96C8E4A1-93A8-41D1-A51E-B7ACEC04F384}"/>
               </a:ext>
             </a:extLst>
           </p:cNvPr>
@@ -4026,7 +4161,7 @@
           <p:cNvPr id="8" name="">
             <a:extLst xmlns:a="http://schemas.openxmlformats.org/drawingml/2006/main">
               <a:ext uri="{FF2B5EF4-FFF2-40B4-BE49-F238E27FC236}">
-                <a16:creationId xmlns:a16="http://schemas.microsoft.com/office/drawing/2014/main" id="{3B3BD88F-BA50-4A17-9D02-ACB88C2055CE}"/>
+                <a16:creationId xmlns:a16="http://schemas.microsoft.com/office/drawing/2014/main" id="{10B66D5E-8C56-4B66-B304-048C3A587D81}"/>
               </a:ext>
             </a:extLst>
           </p:cNvPr>
@@ -4076,7 +4211,7 @@
           <p:cNvPr id="9" name="">
             <a:extLst xmlns:a="http://schemas.openxmlformats.org/drawingml/2006/main">
               <a:ext uri="{FF2B5EF4-FFF2-40B4-BE49-F238E27FC236}">
-                <a16:creationId xmlns:a16="http://schemas.microsoft.com/office/drawing/2014/main" id="{F1CCB19B-A1A7-4E40-A1EE-4A5CD90CB5C6}"/>
+                <a16:creationId xmlns:a16="http://schemas.microsoft.com/office/drawing/2014/main" id="{E51E2563-B9B7-48BF-A142-62CB7538F75D}"/>
               </a:ext>
             </a:extLst>
           </p:cNvPr>
@@ -4111,7 +4246,7 @@
           <p:cNvPr id="10" name="">
             <a:extLst xmlns:a="http://schemas.openxmlformats.org/drawingml/2006/main">
               <a:ext uri="{FF2B5EF4-FFF2-40B4-BE49-F238E27FC236}">
-                <a16:creationId xmlns:a16="http://schemas.microsoft.com/office/drawing/2014/main" id="{3C44EFEA-9D60-4A77-A76B-473C9DEA07C8}"/>
+                <a16:creationId xmlns:a16="http://schemas.microsoft.com/office/drawing/2014/main" id="{A4C3D2E6-FB6C-4DEE-995A-2E6EBB2B14E4}"/>
               </a:ext>
             </a:extLst>
           </p:cNvPr>
@@ -4161,7 +4296,7 @@
           <p:cNvPr id="11" name="">
             <a:extLst xmlns:a="http://schemas.openxmlformats.org/drawingml/2006/main">
               <a:ext uri="{FF2B5EF4-FFF2-40B4-BE49-F238E27FC236}">
-                <a16:creationId xmlns:a16="http://schemas.microsoft.com/office/drawing/2014/main" id="{E3549D23-AD31-4986-B0DA-A8845F371E8F}"/>
+                <a16:creationId xmlns:a16="http://schemas.microsoft.com/office/drawing/2014/main" id="{81071B8C-29A7-4698-A808-049A6AC29DF9}"/>
               </a:ext>
             </a:extLst>
           </p:cNvPr>
@@ -4211,7 +4346,7 @@
           <p:cNvPr id="12" name="">
             <a:extLst xmlns:a="http://schemas.openxmlformats.org/drawingml/2006/main">
               <a:ext uri="{FF2B5EF4-FFF2-40B4-BE49-F238E27FC236}">
-                <a16:creationId xmlns:a16="http://schemas.microsoft.com/office/drawing/2014/main" id="{31956C35-6468-4339-8588-294190979AE0}"/>
+                <a16:creationId xmlns:a16="http://schemas.microsoft.com/office/drawing/2014/main" id="{4CD2B65D-87C3-4A75-98C7-E4292F10BDD6}"/>
               </a:ext>
             </a:extLst>
           </p:cNvPr>
@@ -4246,7 +4381,7 @@
           <p:cNvPr id="13" name="">
             <a:extLst xmlns:a="http://schemas.openxmlformats.org/drawingml/2006/main">
               <a:ext uri="{FF2B5EF4-FFF2-40B4-BE49-F238E27FC236}">
-                <a16:creationId xmlns:a16="http://schemas.microsoft.com/office/drawing/2014/main" id="{39A2D8B9-FBDC-4B7C-961E-4EF8601B5F74}"/>
+                <a16:creationId xmlns:a16="http://schemas.microsoft.com/office/drawing/2014/main" id="{615D38F1-AB04-403F-A114-9968207B50AF}"/>
               </a:ext>
             </a:extLst>
           </p:cNvPr>
@@ -4296,7 +4431,7 @@
           <p:cNvPr id="14" name="">
             <a:extLst xmlns:a="http://schemas.openxmlformats.org/drawingml/2006/main">
               <a:ext uri="{FF2B5EF4-FFF2-40B4-BE49-F238E27FC236}">
-                <a16:creationId xmlns:a16="http://schemas.microsoft.com/office/drawing/2014/main" id="{3858C4EF-D697-4166-A2F0-BD8FBF65C94C}"/>
+                <a16:creationId xmlns:a16="http://schemas.microsoft.com/office/drawing/2014/main" id="{334F7715-C16A-4D75-A7F4-D3FDA011858A}"/>
               </a:ext>
             </a:extLst>
           </p:cNvPr>
@@ -4346,7 +4481,7 @@
           <p:cNvPr id="15" name="">
             <a:extLst xmlns:a="http://schemas.openxmlformats.org/drawingml/2006/main">
               <a:ext uri="{FF2B5EF4-FFF2-40B4-BE49-F238E27FC236}">
-                <a16:creationId xmlns:a16="http://schemas.microsoft.com/office/drawing/2014/main" id="{F5D2F70C-1F63-4213-B716-1E2448962F6F}"/>
+                <a16:creationId xmlns:a16="http://schemas.microsoft.com/office/drawing/2014/main" id="{03366282-D7A6-4670-939F-EC969FAD6A3D}"/>
               </a:ext>
             </a:extLst>
           </p:cNvPr>
@@ -4381,7 +4516,7 @@
           <p:cNvPr id="16" name="">
             <a:extLst xmlns:a="http://schemas.openxmlformats.org/drawingml/2006/main">
               <a:ext uri="{FF2B5EF4-FFF2-40B4-BE49-F238E27FC236}">
-                <a16:creationId xmlns:a16="http://schemas.microsoft.com/office/drawing/2014/main" id="{687C408E-3AC7-43B8-9481-AB184B71F604}"/>
+                <a16:creationId xmlns:a16="http://schemas.microsoft.com/office/drawing/2014/main" id="{69ADB8F4-231F-4CDC-8AC2-74EC995B14AB}"/>
               </a:ext>
             </a:extLst>
           </p:cNvPr>
@@ -4431,7 +4566,7 @@
           <p:cNvPr id="17" name="">
             <a:extLst xmlns:a="http://schemas.openxmlformats.org/drawingml/2006/main">
               <a:ext uri="{FF2B5EF4-FFF2-40B4-BE49-F238E27FC236}">
-                <a16:creationId xmlns:a16="http://schemas.microsoft.com/office/drawing/2014/main" id="{EBF0AB12-F1FF-40BA-8374-C9F1CDCEAC47}"/>
+                <a16:creationId xmlns:a16="http://schemas.microsoft.com/office/drawing/2014/main" id="{E3AB7A32-CD2D-4492-AA74-ECC714A93EBA}"/>
               </a:ext>
             </a:extLst>
           </p:cNvPr>
@@ -4481,7 +4616,7 @@
           <p:cNvPr id="18" name="">
             <a:extLst xmlns:a="http://schemas.openxmlformats.org/drawingml/2006/main">
               <a:ext uri="{FF2B5EF4-FFF2-40B4-BE49-F238E27FC236}">
-                <a16:creationId xmlns:a16="http://schemas.microsoft.com/office/drawing/2014/main" id="{0CFB194D-1351-4F4E-A280-97F9D265A77E}"/>
+                <a16:creationId xmlns:a16="http://schemas.microsoft.com/office/drawing/2014/main" id="{8FC8F6AD-89FC-4A0E-8E12-6D7E92465245}"/>
               </a:ext>
             </a:extLst>
           </p:cNvPr>
@@ -4516,7 +4651,7 @@
           <p:cNvPr id="19" name="">
             <a:extLst xmlns:a="http://schemas.openxmlformats.org/drawingml/2006/main">
               <a:ext uri="{FF2B5EF4-FFF2-40B4-BE49-F238E27FC236}">
-                <a16:creationId xmlns:a16="http://schemas.microsoft.com/office/drawing/2014/main" id="{7B25EC30-68FB-4DDA-8BE4-A0E9CC70A0D2}"/>
+                <a16:creationId xmlns:a16="http://schemas.microsoft.com/office/drawing/2014/main" id="{4518EEBA-1768-48C5-9F0D-382A6756A152}"/>
               </a:ext>
             </a:extLst>
           </p:cNvPr>
@@ -4566,7 +4701,7 @@
           <p:cNvPr id="20" name="">
             <a:extLst xmlns:a="http://schemas.openxmlformats.org/drawingml/2006/main">
               <a:ext uri="{FF2B5EF4-FFF2-40B4-BE49-F238E27FC236}">
-                <a16:creationId xmlns:a16="http://schemas.microsoft.com/office/drawing/2014/main" id="{1B9E3E5A-4F7D-47FF-BBA8-47779CA791C2}"/>
+                <a16:creationId xmlns:a16="http://schemas.microsoft.com/office/drawing/2014/main" id="{B33721B3-E1F4-4EB9-94AE-50A4B0504B80}"/>
               </a:ext>
             </a:extLst>
           </p:cNvPr>
@@ -4601,7 +4736,7 @@
           <p:cNvPr id="21" name="">
             <a:extLst xmlns:a="http://schemas.openxmlformats.org/drawingml/2006/main">
               <a:ext uri="{FF2B5EF4-FFF2-40B4-BE49-F238E27FC236}">
-                <a16:creationId xmlns:a16="http://schemas.microsoft.com/office/drawing/2014/main" id="{69D05D1D-CDE3-4284-8337-13A6B5EEDE45}"/>
+                <a16:creationId xmlns:a16="http://schemas.microsoft.com/office/drawing/2014/main" id="{909A2247-E0B6-42F1-B3E2-4293EA96F398}"/>
               </a:ext>
             </a:extLst>
           </p:cNvPr>
@@ -4651,7 +4786,7 @@
           <p:cNvPr id="22" name="">
             <a:extLst xmlns:a="http://schemas.openxmlformats.org/drawingml/2006/main">
               <a:ext uri="{FF2B5EF4-FFF2-40B4-BE49-F238E27FC236}">
-                <a16:creationId xmlns:a16="http://schemas.microsoft.com/office/drawing/2014/main" id="{B18C8B2A-EB2F-4C05-BE2F-E57E869F6017}"/>
+                <a16:creationId xmlns:a16="http://schemas.microsoft.com/office/drawing/2014/main" id="{5C40A699-AF0E-451D-81F1-B050F5827985}"/>
               </a:ext>
             </a:extLst>
           </p:cNvPr>
@@ -4701,7 +4836,7 @@
           <p:cNvPr id="23" name="">
             <a:extLst xmlns:a="http://schemas.openxmlformats.org/drawingml/2006/main">
               <a:ext uri="{FF2B5EF4-FFF2-40B4-BE49-F238E27FC236}">
-                <a16:creationId xmlns:a16="http://schemas.microsoft.com/office/drawing/2014/main" id="{67821213-F1B4-4053-B1BA-E5F27F7A2514}"/>
+                <a16:creationId xmlns:a16="http://schemas.microsoft.com/office/drawing/2014/main" id="{25F477C4-1330-4907-9995-4D5EC118E7E5}"/>
               </a:ext>
             </a:extLst>
           </p:cNvPr>
@@ -4736,7 +4871,7 @@
           <p:cNvPr id="24" name="">
             <a:extLst xmlns:a="http://schemas.openxmlformats.org/drawingml/2006/main">
               <a:ext uri="{FF2B5EF4-FFF2-40B4-BE49-F238E27FC236}">
-                <a16:creationId xmlns:a16="http://schemas.microsoft.com/office/drawing/2014/main" id="{D846CD51-3CF5-42DD-AF05-487D86542B09}"/>
+                <a16:creationId xmlns:a16="http://schemas.microsoft.com/office/drawing/2014/main" id="{F8CC99E8-CD3B-480D-8A74-6F895D9852DE}"/>
               </a:ext>
             </a:extLst>
           </p:cNvPr>
@@ -4786,7 +4921,7 @@
           <p:cNvPr id="25" name="">
             <a:extLst xmlns:a="http://schemas.openxmlformats.org/drawingml/2006/main">
               <a:ext uri="{FF2B5EF4-FFF2-40B4-BE49-F238E27FC236}">
-                <a16:creationId xmlns:a16="http://schemas.microsoft.com/office/drawing/2014/main" id="{F59D2AC0-3945-4356-B51E-3CA1E8D6186D}"/>
+                <a16:creationId xmlns:a16="http://schemas.microsoft.com/office/drawing/2014/main" id="{DA347EBF-D0FC-4443-9370-60391D575148}"/>
               </a:ext>
             </a:extLst>
           </p:cNvPr>
@@ -4836,7 +4971,7 @@
           <p:cNvPr id="26" name="">
             <a:extLst xmlns:a="http://schemas.openxmlformats.org/drawingml/2006/main">
               <a:ext uri="{FF2B5EF4-FFF2-40B4-BE49-F238E27FC236}">
-                <a16:creationId xmlns:a16="http://schemas.microsoft.com/office/drawing/2014/main" id="{FCB10BFB-625B-4D57-9DB6-5079971A43E9}"/>
+                <a16:creationId xmlns:a16="http://schemas.microsoft.com/office/drawing/2014/main" id="{2A8918D4-71C8-4B49-956A-DD689D885DEA}"/>
               </a:ext>
             </a:extLst>
           </p:cNvPr>
@@ -4871,7 +5006,7 @@
           <p:cNvPr id="27" name="">
             <a:extLst xmlns:a="http://schemas.openxmlformats.org/drawingml/2006/main">
               <a:ext uri="{FF2B5EF4-FFF2-40B4-BE49-F238E27FC236}">
-                <a16:creationId xmlns:a16="http://schemas.microsoft.com/office/drawing/2014/main" id="{81CA16A5-5612-4E8D-AB02-0F9C0357BEAB}"/>
+                <a16:creationId xmlns:a16="http://schemas.microsoft.com/office/drawing/2014/main" id="{A17A2D33-4455-4B5B-BD50-2ABE559E8CBE}"/>
               </a:ext>
             </a:extLst>
           </p:cNvPr>
@@ -4921,7 +5056,7 @@
           <p:cNvPr id="28" name="">
             <a:extLst xmlns:a="http://schemas.openxmlformats.org/drawingml/2006/main">
               <a:ext uri="{FF2B5EF4-FFF2-40B4-BE49-F238E27FC236}">
-                <a16:creationId xmlns:a16="http://schemas.microsoft.com/office/drawing/2014/main" id="{A9210116-95EF-4E16-8282-D7EA4169B0C0}"/>
+                <a16:creationId xmlns:a16="http://schemas.microsoft.com/office/drawing/2014/main" id="{BC2980AC-B263-4B3C-9EAE-86B1A511997F}"/>
               </a:ext>
             </a:extLst>
           </p:cNvPr>
@@ -4971,7 +5106,7 @@
           <p:cNvPr id="29" name="">
             <a:extLst xmlns:a="http://schemas.openxmlformats.org/drawingml/2006/main">
               <a:ext uri="{FF2B5EF4-FFF2-40B4-BE49-F238E27FC236}">
-                <a16:creationId xmlns:a16="http://schemas.microsoft.com/office/drawing/2014/main" id="{A81B820A-1F3A-4AF1-A0EF-2FB311CD0B2D}"/>
+                <a16:creationId xmlns:a16="http://schemas.microsoft.com/office/drawing/2014/main" id="{6A39EBD0-A816-41A0-9EB0-A00A90AC42D7}"/>
               </a:ext>
             </a:extLst>
           </p:cNvPr>
@@ -5006,7 +5141,7 @@
           <p:cNvPr id="30" name="">
             <a:extLst xmlns:a="http://schemas.openxmlformats.org/drawingml/2006/main">
               <a:ext uri="{FF2B5EF4-FFF2-40B4-BE49-F238E27FC236}">
-                <a16:creationId xmlns:a16="http://schemas.microsoft.com/office/drawing/2014/main" id="{4D859F4F-8E03-4654-B1CE-7D7F58640FB6}"/>
+                <a16:creationId xmlns:a16="http://schemas.microsoft.com/office/drawing/2014/main" id="{2A792B6D-BCB5-4E15-A528-32723430986C}"/>
               </a:ext>
             </a:extLst>
           </p:cNvPr>
@@ -5056,7 +5191,7 @@
           <p:cNvPr id="31" name="">
             <a:extLst xmlns:a="http://schemas.openxmlformats.org/drawingml/2006/main">
               <a:ext uri="{FF2B5EF4-FFF2-40B4-BE49-F238E27FC236}">
-                <a16:creationId xmlns:a16="http://schemas.microsoft.com/office/drawing/2014/main" id="{BC8B1344-E0A6-44BF-AEA9-6DE35CBC76B0}"/>
+                <a16:creationId xmlns:a16="http://schemas.microsoft.com/office/drawing/2014/main" id="{D88B063B-5960-426E-85BE-3847A6A7EEA3}"/>
               </a:ext>
             </a:extLst>
           </p:cNvPr>
@@ -5106,7 +5241,7 @@
           <p:cNvPr id="32" name="">
             <a:extLst xmlns:a="http://schemas.openxmlformats.org/drawingml/2006/main">
               <a:ext uri="{FF2B5EF4-FFF2-40B4-BE49-F238E27FC236}">
-                <a16:creationId xmlns:a16="http://schemas.microsoft.com/office/drawing/2014/main" id="{2B30D2EA-493D-466C-8FD9-4C8ADE186C4E}"/>
+                <a16:creationId xmlns:a16="http://schemas.microsoft.com/office/drawing/2014/main" id="{3C63A8A5-CBE8-449B-BD94-45112C591C1F}"/>
               </a:ext>
             </a:extLst>
           </p:cNvPr>
@@ -5136,7 +5271,7 @@
           <p:cNvPr id="33" name="">
             <a:extLst xmlns:a="http://schemas.openxmlformats.org/drawingml/2006/main">
               <a:ext uri="{FF2B5EF4-FFF2-40B4-BE49-F238E27FC236}">
-                <a16:creationId xmlns:a16="http://schemas.microsoft.com/office/drawing/2014/main" id="{8BC0CB49-ACEE-463A-B8AF-D8D401EA6F19}"/>
+                <a16:creationId xmlns:a16="http://schemas.microsoft.com/office/drawing/2014/main" id="{318DECBE-AEA0-4341-9158-0D957436FBB5}"/>
               </a:ext>
             </a:extLst>
           </p:cNvPr>
@@ -5203,7 +5338,7 @@
           <p:cNvPr id="34" name="">
             <a:extLst xmlns:a="http://schemas.openxmlformats.org/drawingml/2006/main">
               <a:ext uri="{FF2B5EF4-FFF2-40B4-BE49-F238E27FC236}">
-                <a16:creationId xmlns:a16="http://schemas.microsoft.com/office/drawing/2014/main" id="{B8BB8B45-7680-4B16-9B9E-3CEF0D153516}"/>
+                <a16:creationId xmlns:a16="http://schemas.microsoft.com/office/drawing/2014/main" id="{2418A3D7-4E26-41BC-93B1-E200288EFEED}"/>
               </a:ext>
             </a:extLst>
           </p:cNvPr>
@@ -5270,7 +5405,7 @@
           <p:cNvPr id="35" name="">
             <a:extLst xmlns:a="http://schemas.openxmlformats.org/drawingml/2006/main">
               <a:ext uri="{FF2B5EF4-FFF2-40B4-BE49-F238E27FC236}">
-                <a16:creationId xmlns:a16="http://schemas.microsoft.com/office/drawing/2014/main" id="{01388F65-E857-4F19-A111-0C33B2923451}"/>
+                <a16:creationId xmlns:a16="http://schemas.microsoft.com/office/drawing/2014/main" id="{9EB6B2FC-B4ED-4088-8932-2F410BF07882}"/>
               </a:ext>
             </a:extLst>
           </p:cNvPr>
@@ -5305,7 +5440,7 @@
           <p:cNvPr id="36" name="">
             <a:extLst xmlns:a="http://schemas.openxmlformats.org/drawingml/2006/main">
               <a:ext uri="{FF2B5EF4-FFF2-40B4-BE49-F238E27FC236}">
-                <a16:creationId xmlns:a16="http://schemas.microsoft.com/office/drawing/2014/main" id="{AB4DFD33-9DBF-4D72-8B56-930A2F98EF99}"/>
+                <a16:creationId xmlns:a16="http://schemas.microsoft.com/office/drawing/2014/main" id="{5E18022C-CBAE-4D4F-8414-624D1079FECD}"/>
               </a:ext>
             </a:extLst>
           </p:cNvPr>
@@ -5355,7 +5490,7 @@
           <p:cNvPr id="37" name="">
             <a:extLst xmlns:a="http://schemas.openxmlformats.org/drawingml/2006/main">
               <a:ext uri="{FF2B5EF4-FFF2-40B4-BE49-F238E27FC236}">
-                <a16:creationId xmlns:a16="http://schemas.microsoft.com/office/drawing/2014/main" id="{54D21EB5-1F2D-4F84-8E81-2A287E343B19}"/>
+                <a16:creationId xmlns:a16="http://schemas.microsoft.com/office/drawing/2014/main" id="{6951EBB4-57A2-41D0-A3ED-CD44F549CCBE}"/>
               </a:ext>
             </a:extLst>
           </p:cNvPr>
@@ -5403,7 +5538,7 @@
     </p:spTree>
     <p:extLst>
       <p:ext uri="{BB962C8B-B14F-4D97-AF65-F5344CB8AC3E}">
-        <p14:creationId xmlns:p14="http://schemas.microsoft.com/office/powerpoint/2010/main" val="1437912120"/>
+        <p14:creationId xmlns:p14="http://schemas.microsoft.com/office/powerpoint/2010/main" val="1115862656"/>
       </p:ext>
     </p:extLst>
   </p:cSld>
@@ -5434,7 +5569,7 @@
           <p:cNvPr id="1" name="">
             <a:extLst xmlns:a="http://schemas.openxmlformats.org/drawingml/2006/main">
               <a:ext uri="{FF2B5EF4-FFF2-40B4-BE49-F238E27FC236}">
-                <a16:creationId xmlns:a16="http://schemas.microsoft.com/office/drawing/2014/main" id="{E85276B7-927E-4921-8100-943BBA394075}"/>
+                <a16:creationId xmlns:a16="http://schemas.microsoft.com/office/drawing/2014/main" id="{6F2F3983-6807-4929-93C6-563BF9EDB66B}"/>
               </a:ext>
             </a:extLst>
           </p:cNvPr>
@@ -5484,7 +5619,7 @@
           <p:cNvPr id="2" name="">
             <a:extLst xmlns:a="http://schemas.openxmlformats.org/drawingml/2006/main">
               <a:ext uri="{FF2B5EF4-FFF2-40B4-BE49-F238E27FC236}">
-                <a16:creationId xmlns:a16="http://schemas.microsoft.com/office/drawing/2014/main" id="{33840456-EDF1-4D32-AA2F-08B04361F53B}"/>
+                <a16:creationId xmlns:a16="http://schemas.microsoft.com/office/drawing/2014/main" id="{2979951C-4249-4FB9-9933-AE5668329A05}"/>
               </a:ext>
             </a:extLst>
           </p:cNvPr>
@@ -5534,7 +5669,7 @@
           <p:cNvPr id="3" name="">
             <a:extLst xmlns:a="http://schemas.openxmlformats.org/drawingml/2006/main">
               <a:ext uri="{FF2B5EF4-FFF2-40B4-BE49-F238E27FC236}">
-                <a16:creationId xmlns:a16="http://schemas.microsoft.com/office/drawing/2014/main" id="{A1C983B9-4384-4F22-8731-6A6372051E53}"/>
+                <a16:creationId xmlns:a16="http://schemas.microsoft.com/office/drawing/2014/main" id="{4D098F7E-0A86-4328-9F5B-26A3186453E7}"/>
               </a:ext>
             </a:extLst>
           </p:cNvPr>
@@ -5564,7 +5699,7 @@
           <p:cNvPr id="4" name="">
             <a:extLst xmlns:a="http://schemas.openxmlformats.org/drawingml/2006/main">
               <a:ext uri="{FF2B5EF4-FFF2-40B4-BE49-F238E27FC236}">
-                <a16:creationId xmlns:a16="http://schemas.microsoft.com/office/drawing/2014/main" id="{7A9BDC6D-C0DB-4D94-8982-979D55533159}"/>
+                <a16:creationId xmlns:a16="http://schemas.microsoft.com/office/drawing/2014/main" id="{E09B2050-5F11-41D5-949A-07AADAAB63F1}"/>
               </a:ext>
             </a:extLst>
           </p:cNvPr>
@@ -5605,7 +5740,7 @@
           <p:cNvPr id="5" name="">
             <a:extLst xmlns:a="http://schemas.openxmlformats.org/drawingml/2006/main">
               <a:ext uri="{FF2B5EF4-FFF2-40B4-BE49-F238E27FC236}">
-                <a16:creationId xmlns:a16="http://schemas.microsoft.com/office/drawing/2014/main" id="{8FD6AEA9-7894-418D-9107-90D51BD08413}"/>
+                <a16:creationId xmlns:a16="http://schemas.microsoft.com/office/drawing/2014/main" id="{5BE6AB65-EB15-4D90-A8B2-BFC85048B400}"/>
               </a:ext>
             </a:extLst>
           </p:cNvPr>
@@ -5655,7 +5790,7 @@
           <p:cNvPr id="6" name="">
             <a:extLst xmlns:a="http://schemas.openxmlformats.org/drawingml/2006/main">
               <a:ext uri="{FF2B5EF4-FFF2-40B4-BE49-F238E27FC236}">
-                <a16:creationId xmlns:a16="http://schemas.microsoft.com/office/drawing/2014/main" id="{0071DABD-6766-40DA-AD8D-AE968CC04E4B}"/>
+                <a16:creationId xmlns:a16="http://schemas.microsoft.com/office/drawing/2014/main" id="{A118F27B-6772-48DF-9A11-A356A103EF5F}"/>
               </a:ext>
             </a:extLst>
           </p:cNvPr>
@@ -5690,7 +5825,7 @@
           <p:cNvPr id="7" name="">
             <a:extLst xmlns:a="http://schemas.openxmlformats.org/drawingml/2006/main">
               <a:ext uri="{FF2B5EF4-FFF2-40B4-BE49-F238E27FC236}">
-                <a16:creationId xmlns:a16="http://schemas.microsoft.com/office/drawing/2014/main" id="{74B1C9CB-F189-4D73-9589-3CCDC21EE68D}"/>
+                <a16:creationId xmlns:a16="http://schemas.microsoft.com/office/drawing/2014/main" id="{DE0DBAAF-989F-4A50-BB4E-E8581BC6D0C2}"/>
               </a:ext>
             </a:extLst>
           </p:cNvPr>
@@ -5718,14 +5853,14 @@
           <a:lstStyle xmlns:a="http://schemas.openxmlformats.org/drawingml/2006/main"/>
           <a:p xmlns:a="http://schemas.openxmlformats.org/drawingml/2006/main">
             <a:pPr algn="ctr">
-              <a:defRPr sz="1125" b="1" i="0">
-                <a:solidFill>
-                  <a:srgbClr val="061A45"/>
-                </a:solidFill>
-              </a:defRPr>
-            </a:pPr>
-            <a:r>
-              <a:rPr sz="1125" b="1" i="0">
+              <a:defRPr sz="1200" b="1" i="0">
+                <a:solidFill>
+                  <a:srgbClr val="061A45"/>
+                </a:solidFill>
+              </a:defRPr>
+            </a:pPr>
+            <a:r>
+              <a:rPr sz="1200" b="1" i="0">
                 <a:solidFill>
                   <a:srgbClr val="061A45"/>
                 </a:solidFill>
@@ -5740,7 +5875,7 @@
           <p:cNvPr id="8" name="">
             <a:extLst xmlns:a="http://schemas.openxmlformats.org/drawingml/2006/main">
               <a:ext uri="{FF2B5EF4-FFF2-40B4-BE49-F238E27FC236}">
-                <a16:creationId xmlns:a16="http://schemas.microsoft.com/office/drawing/2014/main" id="{05072A16-1B31-429D-BF64-20C2E9EF2E4B}"/>
+                <a16:creationId xmlns:a16="http://schemas.microsoft.com/office/drawing/2014/main" id="{7998FDB8-D136-4FA2-903B-4CA60EDC6D11}"/>
               </a:ext>
             </a:extLst>
           </p:cNvPr>
@@ -5775,7 +5910,7 @@
           <p:cNvPr id="9" name="">
             <a:extLst xmlns:a="http://schemas.openxmlformats.org/drawingml/2006/main">
               <a:ext uri="{FF2B5EF4-FFF2-40B4-BE49-F238E27FC236}">
-                <a16:creationId xmlns:a16="http://schemas.microsoft.com/office/drawing/2014/main" id="{2C7FADBF-4842-4A81-91B7-5C8739328086}"/>
+                <a16:creationId xmlns:a16="http://schemas.microsoft.com/office/drawing/2014/main" id="{E944B812-2901-405D-914B-895A67FBBA50}"/>
               </a:ext>
             </a:extLst>
           </p:cNvPr>
@@ -5803,14 +5938,14 @@
           <a:lstStyle xmlns:a="http://schemas.openxmlformats.org/drawingml/2006/main"/>
           <a:p xmlns:a="http://schemas.openxmlformats.org/drawingml/2006/main">
             <a:pPr algn="ctr">
-              <a:defRPr sz="1125" b="1" i="0">
-                <a:solidFill>
-                  <a:srgbClr val="061A45"/>
-                </a:solidFill>
-              </a:defRPr>
-            </a:pPr>
-            <a:r>
-              <a:rPr sz="1125" b="1" i="0">
+              <a:defRPr sz="1200" b="1" i="0">
+                <a:solidFill>
+                  <a:srgbClr val="061A45"/>
+                </a:solidFill>
+              </a:defRPr>
+            </a:pPr>
+            <a:r>
+              <a:rPr sz="1200" b="1" i="0">
                 <a:solidFill>
                   <a:srgbClr val="061A45"/>
                 </a:solidFill>
@@ -5825,7 +5960,7 @@
           <p:cNvPr id="10" name="">
             <a:extLst xmlns:a="http://schemas.openxmlformats.org/drawingml/2006/main">
               <a:ext uri="{FF2B5EF4-FFF2-40B4-BE49-F238E27FC236}">
-                <a16:creationId xmlns:a16="http://schemas.microsoft.com/office/drawing/2014/main" id="{6B739D97-6185-4A89-A632-16BCF4266B2A}"/>
+                <a16:creationId xmlns:a16="http://schemas.microsoft.com/office/drawing/2014/main" id="{3271D9FC-7CBD-46DE-BDB9-9842174BBABC}"/>
               </a:ext>
             </a:extLst>
           </p:cNvPr>
@@ -5860,7 +5995,7 @@
           <p:cNvPr id="11" name="">
             <a:extLst xmlns:a="http://schemas.openxmlformats.org/drawingml/2006/main">
               <a:ext uri="{FF2B5EF4-FFF2-40B4-BE49-F238E27FC236}">
-                <a16:creationId xmlns:a16="http://schemas.microsoft.com/office/drawing/2014/main" id="{FA9CBBDC-1CA7-478A-B54E-8714BE9685A1}"/>
+                <a16:creationId xmlns:a16="http://schemas.microsoft.com/office/drawing/2014/main" id="{FBDFBCC5-108A-4C48-94A5-6508F93A2C74}"/>
               </a:ext>
             </a:extLst>
           </p:cNvPr>
@@ -5888,14 +6023,14 @@
           <a:lstStyle xmlns:a="http://schemas.openxmlformats.org/drawingml/2006/main"/>
           <a:p xmlns:a="http://schemas.openxmlformats.org/drawingml/2006/main">
             <a:pPr algn="ctr">
-              <a:defRPr sz="1125" b="1" i="0">
-                <a:solidFill>
-                  <a:srgbClr val="061A45"/>
-                </a:solidFill>
-              </a:defRPr>
-            </a:pPr>
-            <a:r>
-              <a:rPr sz="1125" b="1" i="0">
+              <a:defRPr sz="1200" b="1" i="0">
+                <a:solidFill>
+                  <a:srgbClr val="061A45"/>
+                </a:solidFill>
+              </a:defRPr>
+            </a:pPr>
+            <a:r>
+              <a:rPr sz="1200" b="1" i="0">
                 <a:solidFill>
                   <a:srgbClr val="061A45"/>
                 </a:solidFill>
@@ -5910,7 +6045,7 @@
           <p:cNvPr id="12" name="">
             <a:extLst xmlns:a="http://schemas.openxmlformats.org/drawingml/2006/main">
               <a:ext uri="{FF2B5EF4-FFF2-40B4-BE49-F238E27FC236}">
-                <a16:creationId xmlns:a16="http://schemas.microsoft.com/office/drawing/2014/main" id="{CBD195FF-CCE6-46DA-8D6A-1CF18493B826}"/>
+                <a16:creationId xmlns:a16="http://schemas.microsoft.com/office/drawing/2014/main" id="{F6740F47-7BA5-4647-8029-0D61437EC6AD}"/>
               </a:ext>
             </a:extLst>
           </p:cNvPr>
@@ -5945,7 +6080,7 @@
           <p:cNvPr id="13" name="">
             <a:extLst xmlns:a="http://schemas.openxmlformats.org/drawingml/2006/main">
               <a:ext uri="{FF2B5EF4-FFF2-40B4-BE49-F238E27FC236}">
-                <a16:creationId xmlns:a16="http://schemas.microsoft.com/office/drawing/2014/main" id="{B6CB05B3-BD5A-4D48-B30F-6B3B03C918AE}"/>
+                <a16:creationId xmlns:a16="http://schemas.microsoft.com/office/drawing/2014/main" id="{1D153882-655B-4674-B5E6-26FB19DE1383}"/>
               </a:ext>
             </a:extLst>
           </p:cNvPr>
@@ -5973,14 +6108,14 @@
           <a:lstStyle xmlns:a="http://schemas.openxmlformats.org/drawingml/2006/main"/>
           <a:p xmlns:a="http://schemas.openxmlformats.org/drawingml/2006/main">
             <a:pPr algn="ctr">
-              <a:defRPr sz="1125" b="0" i="0">
-                <a:solidFill>
-                  <a:srgbClr val="061A45"/>
-                </a:solidFill>
-              </a:defRPr>
-            </a:pPr>
-            <a:r>
-              <a:rPr sz="1125" b="0" i="0">
+              <a:defRPr sz="1200" b="0" i="0">
+                <a:solidFill>
+                  <a:srgbClr val="061A45"/>
+                </a:solidFill>
+              </a:defRPr>
+            </a:pPr>
+            <a:r>
+              <a:rPr sz="1200" b="0" i="0">
                 <a:solidFill>
                   <a:srgbClr val="061A45"/>
                 </a:solidFill>
@@ -5995,7 +6130,7 @@
           <p:cNvPr id="14" name="">
             <a:extLst xmlns:a="http://schemas.openxmlformats.org/drawingml/2006/main">
               <a:ext uri="{FF2B5EF4-FFF2-40B4-BE49-F238E27FC236}">
-                <a16:creationId xmlns:a16="http://schemas.microsoft.com/office/drawing/2014/main" id="{BDE37CF0-817C-4E4C-A7F1-91A0B9074481}"/>
+                <a16:creationId xmlns:a16="http://schemas.microsoft.com/office/drawing/2014/main" id="{C92ED8BE-5125-4867-9A86-4EED44BE7E89}"/>
               </a:ext>
             </a:extLst>
           </p:cNvPr>
@@ -6030,7 +6165,7 @@
           <p:cNvPr id="15" name="">
             <a:extLst xmlns:a="http://schemas.openxmlformats.org/drawingml/2006/main">
               <a:ext uri="{FF2B5EF4-FFF2-40B4-BE49-F238E27FC236}">
-                <a16:creationId xmlns:a16="http://schemas.microsoft.com/office/drawing/2014/main" id="{5413D889-F217-4AD3-8916-D5EE1F4E8B74}"/>
+                <a16:creationId xmlns:a16="http://schemas.microsoft.com/office/drawing/2014/main" id="{59058149-07BC-4076-8E54-0CDB92F128B7}"/>
               </a:ext>
             </a:extLst>
           </p:cNvPr>
@@ -6058,14 +6193,14 @@
           <a:lstStyle xmlns:a="http://schemas.openxmlformats.org/drawingml/2006/main"/>
           <a:p xmlns:a="http://schemas.openxmlformats.org/drawingml/2006/main">
             <a:pPr algn="ctr">
-              <a:defRPr sz="1125" b="0" i="0">
-                <a:solidFill>
-                  <a:srgbClr val="061A45"/>
-                </a:solidFill>
-              </a:defRPr>
-            </a:pPr>
-            <a:r>
-              <a:rPr sz="1125" b="0" i="0">
+              <a:defRPr sz="1200" b="0" i="0">
+                <a:solidFill>
+                  <a:srgbClr val="061A45"/>
+                </a:solidFill>
+              </a:defRPr>
+            </a:pPr>
+            <a:r>
+              <a:rPr sz="1200" b="0" i="0">
                 <a:solidFill>
                   <a:srgbClr val="061A45"/>
                 </a:solidFill>
@@ -6080,7 +6215,7 @@
           <p:cNvPr id="16" name="">
             <a:extLst xmlns:a="http://schemas.openxmlformats.org/drawingml/2006/main">
               <a:ext uri="{FF2B5EF4-FFF2-40B4-BE49-F238E27FC236}">
-                <a16:creationId xmlns:a16="http://schemas.microsoft.com/office/drawing/2014/main" id="{D4A52DF1-48BD-4A09-85C7-0B012DB4BD48}"/>
+                <a16:creationId xmlns:a16="http://schemas.microsoft.com/office/drawing/2014/main" id="{241F98E4-1570-4521-91BE-8EB00A630DB3}"/>
               </a:ext>
             </a:extLst>
           </p:cNvPr>
@@ -6115,7 +6250,7 @@
           <p:cNvPr id="17" name="">
             <a:extLst xmlns:a="http://schemas.openxmlformats.org/drawingml/2006/main">
               <a:ext uri="{FF2B5EF4-FFF2-40B4-BE49-F238E27FC236}">
-                <a16:creationId xmlns:a16="http://schemas.microsoft.com/office/drawing/2014/main" id="{317299BC-43E5-443F-8647-FCAF6FBD94E1}"/>
+                <a16:creationId xmlns:a16="http://schemas.microsoft.com/office/drawing/2014/main" id="{AB271EAB-7335-4E40-8CE2-43E76A94EA47}"/>
               </a:ext>
             </a:extLst>
           </p:cNvPr>
@@ -6150,7 +6285,7 @@
           <p:cNvPr id="18" name="">
             <a:extLst xmlns:a="http://schemas.openxmlformats.org/drawingml/2006/main">
               <a:ext uri="{FF2B5EF4-FFF2-40B4-BE49-F238E27FC236}">
-                <a16:creationId xmlns:a16="http://schemas.microsoft.com/office/drawing/2014/main" id="{97D91427-9578-42A2-AAA0-D33BC3FE1498}"/>
+                <a16:creationId xmlns:a16="http://schemas.microsoft.com/office/drawing/2014/main" id="{6BDD2224-835D-44AB-A104-FB15BB26FFC6}"/>
               </a:ext>
             </a:extLst>
           </p:cNvPr>
@@ -6200,7 +6335,7 @@
           <p:cNvPr id="19" name="">
             <a:extLst xmlns:a="http://schemas.openxmlformats.org/drawingml/2006/main">
               <a:ext uri="{FF2B5EF4-FFF2-40B4-BE49-F238E27FC236}">
-                <a16:creationId xmlns:a16="http://schemas.microsoft.com/office/drawing/2014/main" id="{8F0838B9-562A-4735-9658-B28F1E1C0000}"/>
+                <a16:creationId xmlns:a16="http://schemas.microsoft.com/office/drawing/2014/main" id="{93015B4C-BD1C-4E1B-BA5F-5135714B3B03}"/>
               </a:ext>
             </a:extLst>
           </p:cNvPr>
@@ -6250,7 +6385,7 @@
           <p:cNvPr id="20" name="">
             <a:extLst xmlns:a="http://schemas.openxmlformats.org/drawingml/2006/main">
               <a:ext uri="{FF2B5EF4-FFF2-40B4-BE49-F238E27FC236}">
-                <a16:creationId xmlns:a16="http://schemas.microsoft.com/office/drawing/2014/main" id="{A372868C-D187-48AF-9635-D53AB83C8CCF}"/>
+                <a16:creationId xmlns:a16="http://schemas.microsoft.com/office/drawing/2014/main" id="{49FF429C-BFE3-46CA-BF03-DDDEB140DAE2}"/>
               </a:ext>
             </a:extLst>
           </p:cNvPr>
@@ -6278,14 +6413,14 @@
           <a:lstStyle xmlns:a="http://schemas.openxmlformats.org/drawingml/2006/main"/>
           <a:p xmlns:a="http://schemas.openxmlformats.org/drawingml/2006/main">
             <a:pPr algn="l">
-              <a:defRPr sz="1125" b="0" i="0">
-                <a:solidFill>
-                  <a:srgbClr val="061A45"/>
-                </a:solidFill>
-              </a:defRPr>
-            </a:pPr>
-            <a:r>
-              <a:rPr sz="1125" b="0" i="0">
+              <a:defRPr sz="1200" b="0" i="0">
+                <a:solidFill>
+                  <a:srgbClr val="061A45"/>
+                </a:solidFill>
+              </a:defRPr>
+            </a:pPr>
+            <a:r>
+              <a:rPr sz="1200" b="0" i="0">
                 <a:solidFill>
                   <a:srgbClr val="061A45"/>
                 </a:solidFill>
@@ -6300,7 +6435,7 @@
           <p:cNvPr id="21" name="">
             <a:extLst xmlns:a="http://schemas.openxmlformats.org/drawingml/2006/main">
               <a:ext uri="{FF2B5EF4-FFF2-40B4-BE49-F238E27FC236}">
-                <a16:creationId xmlns:a16="http://schemas.microsoft.com/office/drawing/2014/main" id="{31E048AD-4D4A-4DBC-B902-2FC3D6C819A7}"/>
+                <a16:creationId xmlns:a16="http://schemas.microsoft.com/office/drawing/2014/main" id="{D5A0BF5A-89EC-4188-A3BD-57EAF572B425}"/>
               </a:ext>
             </a:extLst>
           </p:cNvPr>
@@ -6335,7 +6470,7 @@
           <p:cNvPr id="22" name="">
             <a:extLst xmlns:a="http://schemas.openxmlformats.org/drawingml/2006/main">
               <a:ext uri="{FF2B5EF4-FFF2-40B4-BE49-F238E27FC236}">
-                <a16:creationId xmlns:a16="http://schemas.microsoft.com/office/drawing/2014/main" id="{509B7DBC-2E70-4431-AB73-E072896963DF}"/>
+                <a16:creationId xmlns:a16="http://schemas.microsoft.com/office/drawing/2014/main" id="{4ADAC1AD-C9AA-4164-9F70-B1FDA589D11A}"/>
               </a:ext>
             </a:extLst>
           </p:cNvPr>
@@ -6370,7 +6505,7 @@
           <p:cNvPr id="23" name="">
             <a:extLst xmlns:a="http://schemas.openxmlformats.org/drawingml/2006/main">
               <a:ext uri="{FF2B5EF4-FFF2-40B4-BE49-F238E27FC236}">
-                <a16:creationId xmlns:a16="http://schemas.microsoft.com/office/drawing/2014/main" id="{331C5C58-34B9-42AF-93B6-48E5D897EEED}"/>
+                <a16:creationId xmlns:a16="http://schemas.microsoft.com/office/drawing/2014/main" id="{59AC2A07-073B-4D3C-A570-31112DA45F46}"/>
               </a:ext>
             </a:extLst>
           </p:cNvPr>
@@ -6420,7 +6555,7 @@
           <p:cNvPr id="24" name="">
             <a:extLst xmlns:a="http://schemas.openxmlformats.org/drawingml/2006/main">
               <a:ext uri="{FF2B5EF4-FFF2-40B4-BE49-F238E27FC236}">
-                <a16:creationId xmlns:a16="http://schemas.microsoft.com/office/drawing/2014/main" id="{4668F146-4051-456E-9515-E7AF80CD55D0}"/>
+                <a16:creationId xmlns:a16="http://schemas.microsoft.com/office/drawing/2014/main" id="{D1EF1697-18CD-49AA-A4D6-B88337341091}"/>
               </a:ext>
             </a:extLst>
           </p:cNvPr>
@@ -6470,7 +6605,7 @@
           <p:cNvPr id="25" name="">
             <a:extLst xmlns:a="http://schemas.openxmlformats.org/drawingml/2006/main">
               <a:ext uri="{FF2B5EF4-FFF2-40B4-BE49-F238E27FC236}">
-                <a16:creationId xmlns:a16="http://schemas.microsoft.com/office/drawing/2014/main" id="{935A08E0-8A2C-4561-913B-59639F317D93}"/>
+                <a16:creationId xmlns:a16="http://schemas.microsoft.com/office/drawing/2014/main" id="{BB3B2E61-AEF0-4A1D-BDD2-5B5C6BA9EE7E}"/>
               </a:ext>
             </a:extLst>
           </p:cNvPr>
@@ -6498,14 +6633,14 @@
           <a:lstStyle xmlns:a="http://schemas.openxmlformats.org/drawingml/2006/main"/>
           <a:p xmlns:a="http://schemas.openxmlformats.org/drawingml/2006/main">
             <a:pPr algn="l">
-              <a:defRPr sz="1125" b="0" i="0">
-                <a:solidFill>
-                  <a:srgbClr val="061A45"/>
-                </a:solidFill>
-              </a:defRPr>
-            </a:pPr>
-            <a:r>
-              <a:rPr sz="1125" b="0" i="0">
+              <a:defRPr sz="1200" b="0" i="0">
+                <a:solidFill>
+                  <a:srgbClr val="061A45"/>
+                </a:solidFill>
+              </a:defRPr>
+            </a:pPr>
+            <a:r>
+              <a:rPr sz="1200" b="0" i="0">
                 <a:solidFill>
                   <a:srgbClr val="061A45"/>
                 </a:solidFill>
@@ -6520,7 +6655,7 @@
           <p:cNvPr id="26" name="">
             <a:extLst xmlns:a="http://schemas.openxmlformats.org/drawingml/2006/main">
               <a:ext uri="{FF2B5EF4-FFF2-40B4-BE49-F238E27FC236}">
-                <a16:creationId xmlns:a16="http://schemas.microsoft.com/office/drawing/2014/main" id="{A3A5065E-96E9-4CD0-ACB6-1BD86A90B950}"/>
+                <a16:creationId xmlns:a16="http://schemas.microsoft.com/office/drawing/2014/main" id="{7E4AC497-7E98-463D-8EB9-B95F4B1365C8}"/>
               </a:ext>
             </a:extLst>
           </p:cNvPr>
@@ -6555,7 +6690,7 @@
           <p:cNvPr id="27" name="">
             <a:extLst xmlns:a="http://schemas.openxmlformats.org/drawingml/2006/main">
               <a:ext uri="{FF2B5EF4-FFF2-40B4-BE49-F238E27FC236}">
-                <a16:creationId xmlns:a16="http://schemas.microsoft.com/office/drawing/2014/main" id="{ACB9A5F2-1FC8-4C8A-9955-D781FD1A5674}"/>
+                <a16:creationId xmlns:a16="http://schemas.microsoft.com/office/drawing/2014/main" id="{51266F7B-02B5-4CB1-88FE-B1276C9E5198}"/>
               </a:ext>
             </a:extLst>
           </p:cNvPr>
@@ -6590,7 +6725,7 @@
           <p:cNvPr id="28" name="">
             <a:extLst xmlns:a="http://schemas.openxmlformats.org/drawingml/2006/main">
               <a:ext uri="{FF2B5EF4-FFF2-40B4-BE49-F238E27FC236}">
-                <a16:creationId xmlns:a16="http://schemas.microsoft.com/office/drawing/2014/main" id="{FD83CD1A-D9FF-471F-9722-32681596E68C}"/>
+                <a16:creationId xmlns:a16="http://schemas.microsoft.com/office/drawing/2014/main" id="{2EE1E844-97AC-4D4D-8D1D-D2DF35CC0C93}"/>
               </a:ext>
             </a:extLst>
           </p:cNvPr>
@@ -6640,7 +6775,7 @@
           <p:cNvPr id="29" name="">
             <a:extLst xmlns:a="http://schemas.openxmlformats.org/drawingml/2006/main">
               <a:ext uri="{FF2B5EF4-FFF2-40B4-BE49-F238E27FC236}">
-                <a16:creationId xmlns:a16="http://schemas.microsoft.com/office/drawing/2014/main" id="{C88F0CE2-6B9D-47C3-B943-0F0D9BB9B4B8}"/>
+                <a16:creationId xmlns:a16="http://schemas.microsoft.com/office/drawing/2014/main" id="{2F4BB1EC-156F-477F-AACA-FB0262C0AC83}"/>
               </a:ext>
             </a:extLst>
           </p:cNvPr>
@@ -6690,7 +6825,7 @@
           <p:cNvPr id="30" name="">
             <a:extLst xmlns:a="http://schemas.openxmlformats.org/drawingml/2006/main">
               <a:ext uri="{FF2B5EF4-FFF2-40B4-BE49-F238E27FC236}">
-                <a16:creationId xmlns:a16="http://schemas.microsoft.com/office/drawing/2014/main" id="{C091CE5A-6F5B-451F-A700-6D02DBFB4884}"/>
+                <a16:creationId xmlns:a16="http://schemas.microsoft.com/office/drawing/2014/main" id="{5CDFAE1E-A3F6-4CA0-9FCE-7E4AE8B47B84}"/>
               </a:ext>
             </a:extLst>
           </p:cNvPr>
@@ -6718,14 +6853,14 @@
           <a:lstStyle xmlns:a="http://schemas.openxmlformats.org/drawingml/2006/main"/>
           <a:p xmlns:a="http://schemas.openxmlformats.org/drawingml/2006/main">
             <a:pPr algn="l">
-              <a:defRPr sz="1125" b="0" i="0">
-                <a:solidFill>
-                  <a:srgbClr val="061A45"/>
-                </a:solidFill>
-              </a:defRPr>
-            </a:pPr>
-            <a:r>
-              <a:rPr sz="1125" b="0" i="0">
+              <a:defRPr sz="1200" b="0" i="0">
+                <a:solidFill>
+                  <a:srgbClr val="061A45"/>
+                </a:solidFill>
+              </a:defRPr>
+            </a:pPr>
+            <a:r>
+              <a:rPr sz="1200" b="0" i="0">
                 <a:solidFill>
                   <a:srgbClr val="061A45"/>
                 </a:solidFill>
@@ -6740,7 +6875,7 @@
           <p:cNvPr id="31" name="">
             <a:extLst xmlns:a="http://schemas.openxmlformats.org/drawingml/2006/main">
               <a:ext uri="{FF2B5EF4-FFF2-40B4-BE49-F238E27FC236}">
-                <a16:creationId xmlns:a16="http://schemas.microsoft.com/office/drawing/2014/main" id="{66908BDC-02F1-4247-B222-A500ACB1CB89}"/>
+                <a16:creationId xmlns:a16="http://schemas.microsoft.com/office/drawing/2014/main" id="{3B1F48E7-A34E-4FC7-AB7D-1B4DFA75D6EB}"/>
               </a:ext>
             </a:extLst>
           </p:cNvPr>
@@ -6775,7 +6910,7 @@
           <p:cNvPr id="32" name="">
             <a:extLst xmlns:a="http://schemas.openxmlformats.org/drawingml/2006/main">
               <a:ext uri="{FF2B5EF4-FFF2-40B4-BE49-F238E27FC236}">
-                <a16:creationId xmlns:a16="http://schemas.microsoft.com/office/drawing/2014/main" id="{D8E217FB-BB87-4ADE-A81A-C2E279F02962}"/>
+                <a16:creationId xmlns:a16="http://schemas.microsoft.com/office/drawing/2014/main" id="{12A6CCC2-F785-476D-8DC1-21370E46EECD}"/>
               </a:ext>
             </a:extLst>
           </p:cNvPr>
@@ -6810,7 +6945,7 @@
           <p:cNvPr id="33" name="">
             <a:extLst xmlns:a="http://schemas.openxmlformats.org/drawingml/2006/main">
               <a:ext uri="{FF2B5EF4-FFF2-40B4-BE49-F238E27FC236}">
-                <a16:creationId xmlns:a16="http://schemas.microsoft.com/office/drawing/2014/main" id="{E5B0CE74-5D3E-4010-B33D-97137B6C5F82}"/>
+                <a16:creationId xmlns:a16="http://schemas.microsoft.com/office/drawing/2014/main" id="{9F61700E-6EFA-4E1A-B555-F32939567308}"/>
               </a:ext>
             </a:extLst>
           </p:cNvPr>
@@ -6860,7 +6995,7 @@
           <p:cNvPr id="34" name="">
             <a:extLst xmlns:a="http://schemas.openxmlformats.org/drawingml/2006/main">
               <a:ext uri="{FF2B5EF4-FFF2-40B4-BE49-F238E27FC236}">
-                <a16:creationId xmlns:a16="http://schemas.microsoft.com/office/drawing/2014/main" id="{9404796F-F200-421B-B509-791AD0D65F2E}"/>
+                <a16:creationId xmlns:a16="http://schemas.microsoft.com/office/drawing/2014/main" id="{D3AB2138-2186-4FFA-BB61-0C501CDD82AD}"/>
               </a:ext>
             </a:extLst>
           </p:cNvPr>
@@ -6910,7 +7045,7 @@
           <p:cNvPr id="35" name="">
             <a:extLst xmlns:a="http://schemas.openxmlformats.org/drawingml/2006/main">
               <a:ext uri="{FF2B5EF4-FFF2-40B4-BE49-F238E27FC236}">
-                <a16:creationId xmlns:a16="http://schemas.microsoft.com/office/drawing/2014/main" id="{CB083D98-E237-46A0-8C4C-D2F984092B20}"/>
+                <a16:creationId xmlns:a16="http://schemas.microsoft.com/office/drawing/2014/main" id="{924F5EF4-7AE5-494C-8C91-1374F08CDE73}"/>
               </a:ext>
             </a:extLst>
           </p:cNvPr>
@@ -6938,14 +7073,14 @@
           <a:lstStyle xmlns:a="http://schemas.openxmlformats.org/drawingml/2006/main"/>
           <a:p xmlns:a="http://schemas.openxmlformats.org/drawingml/2006/main">
             <a:pPr algn="l">
-              <a:defRPr sz="1125" b="0" i="0">
-                <a:solidFill>
-                  <a:srgbClr val="061A45"/>
-                </a:solidFill>
-              </a:defRPr>
-            </a:pPr>
-            <a:r>
-              <a:rPr sz="1125" b="0" i="0">
+              <a:defRPr sz="1200" b="0" i="0">
+                <a:solidFill>
+                  <a:srgbClr val="061A45"/>
+                </a:solidFill>
+              </a:defRPr>
+            </a:pPr>
+            <a:r>
+              <a:rPr sz="1200" b="0" i="0">
                 <a:solidFill>
                   <a:srgbClr val="061A45"/>
                 </a:solidFill>
@@ -6960,7 +7095,7 @@
           <p:cNvPr id="36" name="">
             <a:extLst xmlns:a="http://schemas.openxmlformats.org/drawingml/2006/main">
               <a:ext uri="{FF2B5EF4-FFF2-40B4-BE49-F238E27FC236}">
-                <a16:creationId xmlns:a16="http://schemas.microsoft.com/office/drawing/2014/main" id="{500B4E89-86B1-4506-879E-421299E995AC}"/>
+                <a16:creationId xmlns:a16="http://schemas.microsoft.com/office/drawing/2014/main" id="{593F3840-883F-4D11-9F61-5A73DCC88929}"/>
               </a:ext>
             </a:extLst>
           </p:cNvPr>
@@ -6995,7 +7130,7 @@
           <p:cNvPr id="37" name="">
             <a:extLst xmlns:a="http://schemas.openxmlformats.org/drawingml/2006/main">
               <a:ext uri="{FF2B5EF4-FFF2-40B4-BE49-F238E27FC236}">
-                <a16:creationId xmlns:a16="http://schemas.microsoft.com/office/drawing/2014/main" id="{DE0A54A7-A2C9-4A58-AEB4-7E7F7417C949}"/>
+                <a16:creationId xmlns:a16="http://schemas.microsoft.com/office/drawing/2014/main" id="{4F9BF0D5-107F-49EC-ACA4-67B3FAD33103}"/>
               </a:ext>
             </a:extLst>
           </p:cNvPr>
@@ -7030,7 +7165,7 @@
           <p:cNvPr id="38" name="">
             <a:extLst xmlns:a="http://schemas.openxmlformats.org/drawingml/2006/main">
               <a:ext uri="{FF2B5EF4-FFF2-40B4-BE49-F238E27FC236}">
-                <a16:creationId xmlns:a16="http://schemas.microsoft.com/office/drawing/2014/main" id="{DC0B21DD-06DC-4D7C-AD82-5F22660933C0}"/>
+                <a16:creationId xmlns:a16="http://schemas.microsoft.com/office/drawing/2014/main" id="{4D514CB7-6BB8-4607-ADE1-E244BEE6E9D6}"/>
               </a:ext>
             </a:extLst>
           </p:cNvPr>
@@ -7080,7 +7215,7 @@
           <p:cNvPr id="39" name="">
             <a:extLst xmlns:a="http://schemas.openxmlformats.org/drawingml/2006/main">
               <a:ext uri="{FF2B5EF4-FFF2-40B4-BE49-F238E27FC236}">
-                <a16:creationId xmlns:a16="http://schemas.microsoft.com/office/drawing/2014/main" id="{4DF01327-02C3-4E10-92B6-F9B2A9789F24}"/>
+                <a16:creationId xmlns:a16="http://schemas.microsoft.com/office/drawing/2014/main" id="{82934CE8-B367-4281-8A25-FBB9EF9B4669}"/>
               </a:ext>
             </a:extLst>
           </p:cNvPr>
@@ -7130,7 +7265,7 @@
           <p:cNvPr id="40" name="">
             <a:extLst xmlns:a="http://schemas.openxmlformats.org/drawingml/2006/main">
               <a:ext uri="{FF2B5EF4-FFF2-40B4-BE49-F238E27FC236}">
-                <a16:creationId xmlns:a16="http://schemas.microsoft.com/office/drawing/2014/main" id="{08C44F7C-FC47-48E3-897F-2C8FAC677F02}"/>
+                <a16:creationId xmlns:a16="http://schemas.microsoft.com/office/drawing/2014/main" id="{1D42162D-180F-46BE-AFF6-2D62080FA390}"/>
               </a:ext>
             </a:extLst>
           </p:cNvPr>
@@ -7158,14 +7293,14 @@
           <a:lstStyle xmlns:a="http://schemas.openxmlformats.org/drawingml/2006/main"/>
           <a:p xmlns:a="http://schemas.openxmlformats.org/drawingml/2006/main">
             <a:pPr algn="l">
-              <a:defRPr sz="1125" b="0" i="0">
-                <a:solidFill>
-                  <a:srgbClr val="061A45"/>
-                </a:solidFill>
-              </a:defRPr>
-            </a:pPr>
-            <a:r>
-              <a:rPr sz="1125" b="0" i="0">
+              <a:defRPr sz="1200" b="0" i="0">
+                <a:solidFill>
+                  <a:srgbClr val="061A45"/>
+                </a:solidFill>
+              </a:defRPr>
+            </a:pPr>
+            <a:r>
+              <a:rPr sz="1200" b="0" i="0">
                 <a:solidFill>
                   <a:srgbClr val="061A45"/>
                 </a:solidFill>
@@ -7180,7 +7315,7 @@
           <p:cNvPr id="41" name="">
             <a:extLst xmlns:a="http://schemas.openxmlformats.org/drawingml/2006/main">
               <a:ext uri="{FF2B5EF4-FFF2-40B4-BE49-F238E27FC236}">
-                <a16:creationId xmlns:a16="http://schemas.microsoft.com/office/drawing/2014/main" id="{8EC4EDD1-42BB-43F9-BC6C-435DE78C51D1}"/>
+                <a16:creationId xmlns:a16="http://schemas.microsoft.com/office/drawing/2014/main" id="{1894D434-5C37-43CD-AAE9-EE5AE1DAD453}"/>
               </a:ext>
             </a:extLst>
           </p:cNvPr>
@@ -7215,7 +7350,7 @@
           <p:cNvPr id="42" name="">
             <a:extLst xmlns:a="http://schemas.openxmlformats.org/drawingml/2006/main">
               <a:ext uri="{FF2B5EF4-FFF2-40B4-BE49-F238E27FC236}">
-                <a16:creationId xmlns:a16="http://schemas.microsoft.com/office/drawing/2014/main" id="{0DC99657-8BFD-4331-8904-E8C3FBC60832}"/>
+                <a16:creationId xmlns:a16="http://schemas.microsoft.com/office/drawing/2014/main" id="{2F7D82FC-487F-43C6-B397-A8790FAF3D00}"/>
               </a:ext>
             </a:extLst>
           </p:cNvPr>
@@ -7250,7 +7385,7 @@
           <p:cNvPr id="43" name="">
             <a:extLst xmlns:a="http://schemas.openxmlformats.org/drawingml/2006/main">
               <a:ext uri="{FF2B5EF4-FFF2-40B4-BE49-F238E27FC236}">
-                <a16:creationId xmlns:a16="http://schemas.microsoft.com/office/drawing/2014/main" id="{B602CC8B-1BD4-4697-91A9-FBC0EFE39CC8}"/>
+                <a16:creationId xmlns:a16="http://schemas.microsoft.com/office/drawing/2014/main" id="{950B2497-D574-4C62-B1F3-980A5F8FB957}"/>
               </a:ext>
             </a:extLst>
           </p:cNvPr>
@@ -7300,7 +7435,7 @@
           <p:cNvPr id="44" name="">
             <a:extLst xmlns:a="http://schemas.openxmlformats.org/drawingml/2006/main">
               <a:ext uri="{FF2B5EF4-FFF2-40B4-BE49-F238E27FC236}">
-                <a16:creationId xmlns:a16="http://schemas.microsoft.com/office/drawing/2014/main" id="{279FFA9F-C24D-4FC7-9BE1-DA90259F20C8}"/>
+                <a16:creationId xmlns:a16="http://schemas.microsoft.com/office/drawing/2014/main" id="{62186A6B-6DFA-4A5A-9FF5-0F8609B8EE8C}"/>
               </a:ext>
             </a:extLst>
           </p:cNvPr>
@@ -7350,7 +7485,7 @@
           <p:cNvPr id="45" name="">
             <a:extLst xmlns:a="http://schemas.openxmlformats.org/drawingml/2006/main">
               <a:ext uri="{FF2B5EF4-FFF2-40B4-BE49-F238E27FC236}">
-                <a16:creationId xmlns:a16="http://schemas.microsoft.com/office/drawing/2014/main" id="{4E5DF472-1FAD-4DD0-BCA2-47C33EEF0891}"/>
+                <a16:creationId xmlns:a16="http://schemas.microsoft.com/office/drawing/2014/main" id="{2F2994AC-F068-432D-A75E-AB61BE46A18B}"/>
               </a:ext>
             </a:extLst>
           </p:cNvPr>
@@ -7378,14 +7513,14 @@
           <a:lstStyle xmlns:a="http://schemas.openxmlformats.org/drawingml/2006/main"/>
           <a:p xmlns:a="http://schemas.openxmlformats.org/drawingml/2006/main">
             <a:pPr algn="l">
-              <a:defRPr sz="1125" b="0" i="0">
-                <a:solidFill>
-                  <a:srgbClr val="061A45"/>
-                </a:solidFill>
-              </a:defRPr>
-            </a:pPr>
-            <a:r>
-              <a:rPr sz="1125" b="0" i="0">
+              <a:defRPr sz="1200" b="0" i="0">
+                <a:solidFill>
+                  <a:srgbClr val="061A45"/>
+                </a:solidFill>
+              </a:defRPr>
+            </a:pPr>
+            <a:r>
+              <a:rPr sz="1200" b="0" i="0">
                 <a:solidFill>
                   <a:srgbClr val="061A45"/>
                 </a:solidFill>
@@ -7400,7 +7535,7 @@
           <p:cNvPr id="46" name="">
             <a:extLst xmlns:a="http://schemas.openxmlformats.org/drawingml/2006/main">
               <a:ext uri="{FF2B5EF4-FFF2-40B4-BE49-F238E27FC236}">
-                <a16:creationId xmlns:a16="http://schemas.microsoft.com/office/drawing/2014/main" id="{F4B09278-64F0-4875-A1D8-7D41DF5030CE}"/>
+                <a16:creationId xmlns:a16="http://schemas.microsoft.com/office/drawing/2014/main" id="{F86775D2-FD27-4D9C-8B99-1CAC2A8D28AC}"/>
               </a:ext>
             </a:extLst>
           </p:cNvPr>
@@ -7430,7 +7565,7 @@
           <p:cNvPr id="47" name="">
             <a:extLst xmlns:a="http://schemas.openxmlformats.org/drawingml/2006/main">
               <a:ext uri="{FF2B5EF4-FFF2-40B4-BE49-F238E27FC236}">
-                <a16:creationId xmlns:a16="http://schemas.microsoft.com/office/drawing/2014/main" id="{245167F8-8589-41FA-8080-CD1C4E5E4B00}"/>
+                <a16:creationId xmlns:a16="http://schemas.microsoft.com/office/drawing/2014/main" id="{7A25F67E-5E45-4711-833B-082A60774641}"/>
               </a:ext>
             </a:extLst>
           </p:cNvPr>
@@ -7460,7 +7595,7 @@
           <p:cNvPr id="48" name="">
             <a:extLst xmlns:a="http://schemas.openxmlformats.org/drawingml/2006/main">
               <a:ext uri="{FF2B5EF4-FFF2-40B4-BE49-F238E27FC236}">
-                <a16:creationId xmlns:a16="http://schemas.microsoft.com/office/drawing/2014/main" id="{BAD1630B-173D-4FD8-80D7-DB5390F19509}"/>
+                <a16:creationId xmlns:a16="http://schemas.microsoft.com/office/drawing/2014/main" id="{385CAB14-E012-498D-A995-158F83CC32F6}"/>
               </a:ext>
             </a:extLst>
           </p:cNvPr>
@@ -7490,7 +7625,7 @@
           <p:cNvPr id="49" name="">
             <a:extLst xmlns:a="http://schemas.openxmlformats.org/drawingml/2006/main">
               <a:ext uri="{FF2B5EF4-FFF2-40B4-BE49-F238E27FC236}">
-                <a16:creationId xmlns:a16="http://schemas.microsoft.com/office/drawing/2014/main" id="{2FFC445A-0EBC-4088-A47B-F1813EDE1706}"/>
+                <a16:creationId xmlns:a16="http://schemas.microsoft.com/office/drawing/2014/main" id="{1A19E4F1-A9AF-421E-8D03-080812A4F286}"/>
               </a:ext>
             </a:extLst>
           </p:cNvPr>
@@ -7520,7 +7655,7 @@
           <p:cNvPr id="50" name="">
             <a:extLst xmlns:a="http://schemas.openxmlformats.org/drawingml/2006/main">
               <a:ext uri="{FF2B5EF4-FFF2-40B4-BE49-F238E27FC236}">
-                <a16:creationId xmlns:a16="http://schemas.microsoft.com/office/drawing/2014/main" id="{B74614C0-5A3E-49A6-BEE8-E7056A314151}"/>
+                <a16:creationId xmlns:a16="http://schemas.microsoft.com/office/drawing/2014/main" id="{D73B0A2B-E9C5-4893-9891-30EA4C265588}"/>
               </a:ext>
             </a:extLst>
           </p:cNvPr>
@@ -7548,7 +7683,7 @@
     </p:spTree>
     <p:extLst>
       <p:ext uri="{BB962C8B-B14F-4D97-AF65-F5344CB8AC3E}">
-        <p14:creationId xmlns:p14="http://schemas.microsoft.com/office/powerpoint/2010/main" val="1388832577"/>
+        <p14:creationId xmlns:p14="http://schemas.microsoft.com/office/powerpoint/2010/main" val="1169272498"/>
       </p:ext>
     </p:extLst>
   </p:cSld>
@@ -7579,7 +7714,7 @@
           <p:cNvPr id="1" name="">
             <a:extLst xmlns:a="http://schemas.openxmlformats.org/drawingml/2006/main">
               <a:ext uri="{FF2B5EF4-FFF2-40B4-BE49-F238E27FC236}">
-                <a16:creationId xmlns:a16="http://schemas.microsoft.com/office/drawing/2014/main" id="{3ECA6076-3714-4BD4-BFAD-7EEB1AD6C282}"/>
+                <a16:creationId xmlns:a16="http://schemas.microsoft.com/office/drawing/2014/main" id="{DD6271C4-A1BB-47A4-917F-664524DB5796}"/>
               </a:ext>
             </a:extLst>
           </p:cNvPr>
@@ -7629,7 +7764,7 @@
           <p:cNvPr id="2" name="">
             <a:extLst xmlns:a="http://schemas.openxmlformats.org/drawingml/2006/main">
               <a:ext uri="{FF2B5EF4-FFF2-40B4-BE49-F238E27FC236}">
-                <a16:creationId xmlns:a16="http://schemas.microsoft.com/office/drawing/2014/main" id="{8316E57D-DFCD-4DD4-B831-036401210694}"/>
+                <a16:creationId xmlns:a16="http://schemas.microsoft.com/office/drawing/2014/main" id="{C117049F-5CA1-4062-A4EF-4A594467368F}"/>
               </a:ext>
             </a:extLst>
           </p:cNvPr>
@@ -7679,7 +7814,7 @@
           <p:cNvPr id="3" name="">
             <a:extLst xmlns:a="http://schemas.openxmlformats.org/drawingml/2006/main">
               <a:ext uri="{FF2B5EF4-FFF2-40B4-BE49-F238E27FC236}">
-                <a16:creationId xmlns:a16="http://schemas.microsoft.com/office/drawing/2014/main" id="{F8ADD084-C11C-4C5F-96CF-F93B72F8ED28}"/>
+                <a16:creationId xmlns:a16="http://schemas.microsoft.com/office/drawing/2014/main" id="{BC10847B-B7B1-495F-9B59-D3DE74E696CC}"/>
               </a:ext>
             </a:extLst>
           </p:cNvPr>
@@ -7709,7 +7844,7 @@
           <p:cNvPr id="4" name="">
             <a:extLst xmlns:a="http://schemas.openxmlformats.org/drawingml/2006/main">
               <a:ext uri="{FF2B5EF4-FFF2-40B4-BE49-F238E27FC236}">
-                <a16:creationId xmlns:a16="http://schemas.microsoft.com/office/drawing/2014/main" id="{63F01A75-4A07-4B5A-B508-D3C9CB3D2D6A}"/>
+                <a16:creationId xmlns:a16="http://schemas.microsoft.com/office/drawing/2014/main" id="{10F9BE01-DAC7-4E0F-960E-E3C05039C1D7}"/>
               </a:ext>
             </a:extLst>
           </p:cNvPr>
@@ -7744,7 +7879,7 @@
           <p:cNvPr id="5" name="">
             <a:extLst xmlns:a="http://schemas.openxmlformats.org/drawingml/2006/main">
               <a:ext uri="{FF2B5EF4-FFF2-40B4-BE49-F238E27FC236}">
-                <a16:creationId xmlns:a16="http://schemas.microsoft.com/office/drawing/2014/main" id="{D1B6342A-334E-4F20-88ED-06F3DAFE136B}"/>
+                <a16:creationId xmlns:a16="http://schemas.microsoft.com/office/drawing/2014/main" id="{1DB1567C-E2C4-42B5-9C87-B18506DD0672}"/>
               </a:ext>
             </a:extLst>
           </p:cNvPr>
@@ -7779,7 +7914,7 @@
           <p:cNvPr id="6" name="">
             <a:extLst xmlns:a="http://schemas.openxmlformats.org/drawingml/2006/main">
               <a:ext uri="{FF2B5EF4-FFF2-40B4-BE49-F238E27FC236}">
-                <a16:creationId xmlns:a16="http://schemas.microsoft.com/office/drawing/2014/main" id="{09388B9F-395C-4EF2-9885-14A9DD07F06B}"/>
+                <a16:creationId xmlns:a16="http://schemas.microsoft.com/office/drawing/2014/main" id="{C7A98240-B3AE-4CF3-A688-5E8A1C5BD49F}"/>
               </a:ext>
             </a:extLst>
           </p:cNvPr>
@@ -7829,7 +7964,7 @@
           <p:cNvPr id="7" name="">
             <a:extLst xmlns:a="http://schemas.openxmlformats.org/drawingml/2006/main">
               <a:ext uri="{FF2B5EF4-FFF2-40B4-BE49-F238E27FC236}">
-                <a16:creationId xmlns:a16="http://schemas.microsoft.com/office/drawing/2014/main" id="{767A1581-28DB-4301-A5E5-B19B367E4DAA}"/>
+                <a16:creationId xmlns:a16="http://schemas.microsoft.com/office/drawing/2014/main" id="{1394AAAD-89FC-4C5F-8612-41B376B61494}"/>
               </a:ext>
             </a:extLst>
           </p:cNvPr>
@@ -7879,7 +8014,7 @@
           <p:cNvPr id="8" name="">
             <a:extLst xmlns:a="http://schemas.openxmlformats.org/drawingml/2006/main">
               <a:ext uri="{FF2B5EF4-FFF2-40B4-BE49-F238E27FC236}">
-                <a16:creationId xmlns:a16="http://schemas.microsoft.com/office/drawing/2014/main" id="{9682330C-C6C7-414C-99E2-CA59C43E7593}"/>
+                <a16:creationId xmlns:a16="http://schemas.microsoft.com/office/drawing/2014/main" id="{B526569F-0308-45CA-9F4B-BB6C8F925D5A}"/>
               </a:ext>
             </a:extLst>
           </p:cNvPr>
@@ -7907,14 +8042,14 @@
           <a:lstStyle xmlns:a="http://schemas.openxmlformats.org/drawingml/2006/main"/>
           <a:p xmlns:a="http://schemas.openxmlformats.org/drawingml/2006/main">
             <a:pPr algn="l">
-              <a:defRPr sz="1125" b="0" i="0">
-                <a:solidFill>
-                  <a:srgbClr val="061A45"/>
-                </a:solidFill>
-              </a:defRPr>
-            </a:pPr>
-            <a:r>
-              <a:rPr sz="1125" b="0" i="0">
+              <a:defRPr sz="1200" b="0" i="0">
+                <a:solidFill>
+                  <a:srgbClr val="061A45"/>
+                </a:solidFill>
+              </a:defRPr>
+            </a:pPr>
+            <a:r>
+              <a:rPr sz="1200" b="0" i="0">
                 <a:solidFill>
                   <a:srgbClr val="061A45"/>
                 </a:solidFill>
@@ -7929,7 +8064,7 @@
           <p:cNvPr id="9" name="">
             <a:extLst xmlns:a="http://schemas.openxmlformats.org/drawingml/2006/main">
               <a:ext uri="{FF2B5EF4-FFF2-40B4-BE49-F238E27FC236}">
-                <a16:creationId xmlns:a16="http://schemas.microsoft.com/office/drawing/2014/main" id="{B0943756-BFD3-40EA-9BB5-161D48A501EC}"/>
+                <a16:creationId xmlns:a16="http://schemas.microsoft.com/office/drawing/2014/main" id="{CDA5FB21-EC38-4866-A6AD-C31DEC77270E}"/>
               </a:ext>
             </a:extLst>
           </p:cNvPr>
@@ -7964,7 +8099,7 @@
           <p:cNvPr id="10" name="">
             <a:extLst xmlns:a="http://schemas.openxmlformats.org/drawingml/2006/main">
               <a:ext uri="{FF2B5EF4-FFF2-40B4-BE49-F238E27FC236}">
-                <a16:creationId xmlns:a16="http://schemas.microsoft.com/office/drawing/2014/main" id="{A98BF60C-3256-4D23-8695-885DF804FC95}"/>
+                <a16:creationId xmlns:a16="http://schemas.microsoft.com/office/drawing/2014/main" id="{4988E5F5-D88B-46AE-AA82-8BEE308580D3}"/>
               </a:ext>
             </a:extLst>
           </p:cNvPr>
@@ -7999,7 +8134,7 @@
           <p:cNvPr id="11" name="">
             <a:extLst xmlns:a="http://schemas.openxmlformats.org/drawingml/2006/main">
               <a:ext uri="{FF2B5EF4-FFF2-40B4-BE49-F238E27FC236}">
-                <a16:creationId xmlns:a16="http://schemas.microsoft.com/office/drawing/2014/main" id="{BBDC517E-B304-46FC-A627-82C5DCE54DEE}"/>
+                <a16:creationId xmlns:a16="http://schemas.microsoft.com/office/drawing/2014/main" id="{6CC84DEC-5A9C-4B7B-BDCA-4398E96AA523}"/>
               </a:ext>
             </a:extLst>
           </p:cNvPr>
@@ -8049,7 +8184,7 @@
           <p:cNvPr id="12" name="">
             <a:extLst xmlns:a="http://schemas.openxmlformats.org/drawingml/2006/main">
               <a:ext uri="{FF2B5EF4-FFF2-40B4-BE49-F238E27FC236}">
-                <a16:creationId xmlns:a16="http://schemas.microsoft.com/office/drawing/2014/main" id="{F07D69D2-786D-4CEF-96BF-74459011C77A}"/>
+                <a16:creationId xmlns:a16="http://schemas.microsoft.com/office/drawing/2014/main" id="{4EF559E0-DBE2-4105-9386-43947D366108}"/>
               </a:ext>
             </a:extLst>
           </p:cNvPr>
@@ -8099,7 +8234,7 @@
           <p:cNvPr id="13" name="">
             <a:extLst xmlns:a="http://schemas.openxmlformats.org/drawingml/2006/main">
               <a:ext uri="{FF2B5EF4-FFF2-40B4-BE49-F238E27FC236}">
-                <a16:creationId xmlns:a16="http://schemas.microsoft.com/office/drawing/2014/main" id="{E6D726A6-AB22-47EB-A0C3-06EFFE3A2C01}"/>
+                <a16:creationId xmlns:a16="http://schemas.microsoft.com/office/drawing/2014/main" id="{D60F8C4A-C0FA-4128-8CBF-53C8B2A5F930}"/>
               </a:ext>
             </a:extLst>
           </p:cNvPr>
@@ -8127,14 +8262,14 @@
           <a:lstStyle xmlns:a="http://schemas.openxmlformats.org/drawingml/2006/main"/>
           <a:p xmlns:a="http://schemas.openxmlformats.org/drawingml/2006/main">
             <a:pPr algn="l">
-              <a:defRPr sz="1125" b="0" i="0">
-                <a:solidFill>
-                  <a:srgbClr val="061A45"/>
-                </a:solidFill>
-              </a:defRPr>
-            </a:pPr>
-            <a:r>
-              <a:rPr sz="1125" b="0" i="0">
+              <a:defRPr sz="1200" b="0" i="0">
+                <a:solidFill>
+                  <a:srgbClr val="061A45"/>
+                </a:solidFill>
+              </a:defRPr>
+            </a:pPr>
+            <a:r>
+              <a:rPr sz="1200" b="0" i="0">
                 <a:solidFill>
                   <a:srgbClr val="061A45"/>
                 </a:solidFill>
@@ -8149,7 +8284,7 @@
           <p:cNvPr id="14" name="">
             <a:extLst xmlns:a="http://schemas.openxmlformats.org/drawingml/2006/main">
               <a:ext uri="{FF2B5EF4-FFF2-40B4-BE49-F238E27FC236}">
-                <a16:creationId xmlns:a16="http://schemas.microsoft.com/office/drawing/2014/main" id="{94D5F367-2120-417D-9B9A-870AEFDCC6D1}"/>
+                <a16:creationId xmlns:a16="http://schemas.microsoft.com/office/drawing/2014/main" id="{13646299-B547-4966-83AB-644621E84481}"/>
               </a:ext>
             </a:extLst>
           </p:cNvPr>
@@ -8184,7 +8319,7 @@
           <p:cNvPr id="15" name="">
             <a:extLst xmlns:a="http://schemas.openxmlformats.org/drawingml/2006/main">
               <a:ext uri="{FF2B5EF4-FFF2-40B4-BE49-F238E27FC236}">
-                <a16:creationId xmlns:a16="http://schemas.microsoft.com/office/drawing/2014/main" id="{1B95C2E5-09AD-4332-A7A3-1758772C322B}"/>
+                <a16:creationId xmlns:a16="http://schemas.microsoft.com/office/drawing/2014/main" id="{BD5660F8-81D7-4704-8F6E-4522E7B96930}"/>
               </a:ext>
             </a:extLst>
           </p:cNvPr>
@@ -8219,7 +8354,7 @@
           <p:cNvPr id="16" name="">
             <a:extLst xmlns:a="http://schemas.openxmlformats.org/drawingml/2006/main">
               <a:ext uri="{FF2B5EF4-FFF2-40B4-BE49-F238E27FC236}">
-                <a16:creationId xmlns:a16="http://schemas.microsoft.com/office/drawing/2014/main" id="{A9CEADAB-359C-4376-A5A7-DF71034F23B5}"/>
+                <a16:creationId xmlns:a16="http://schemas.microsoft.com/office/drawing/2014/main" id="{940072CF-9117-4B7E-A712-AB5C662CABFE}"/>
               </a:ext>
             </a:extLst>
           </p:cNvPr>
@@ -8269,7 +8404,7 @@
           <p:cNvPr id="17" name="">
             <a:extLst xmlns:a="http://schemas.openxmlformats.org/drawingml/2006/main">
               <a:ext uri="{FF2B5EF4-FFF2-40B4-BE49-F238E27FC236}">
-                <a16:creationId xmlns:a16="http://schemas.microsoft.com/office/drawing/2014/main" id="{7F5CC41C-7290-4FD0-B23E-045D2097D9B5}"/>
+                <a16:creationId xmlns:a16="http://schemas.microsoft.com/office/drawing/2014/main" id="{BE769F32-96D1-4A88-A25B-FC966F77800D}"/>
               </a:ext>
             </a:extLst>
           </p:cNvPr>
@@ -8319,7 +8454,7 @@
           <p:cNvPr id="18" name="">
             <a:extLst xmlns:a="http://schemas.openxmlformats.org/drawingml/2006/main">
               <a:ext uri="{FF2B5EF4-FFF2-40B4-BE49-F238E27FC236}">
-                <a16:creationId xmlns:a16="http://schemas.microsoft.com/office/drawing/2014/main" id="{ABEF7684-70DE-4A58-AFE4-EEC0E9CC8628}"/>
+                <a16:creationId xmlns:a16="http://schemas.microsoft.com/office/drawing/2014/main" id="{0722BCEC-BCC7-47DF-AB2B-025B7779B2AB}"/>
               </a:ext>
             </a:extLst>
           </p:cNvPr>
@@ -8347,14 +8482,14 @@
           <a:lstStyle xmlns:a="http://schemas.openxmlformats.org/drawingml/2006/main"/>
           <a:p xmlns:a="http://schemas.openxmlformats.org/drawingml/2006/main">
             <a:pPr algn="l">
-              <a:defRPr sz="1125" b="0" i="0">
-                <a:solidFill>
-                  <a:srgbClr val="061A45"/>
-                </a:solidFill>
-              </a:defRPr>
-            </a:pPr>
-            <a:r>
-              <a:rPr sz="1125" b="0" i="0">
+              <a:defRPr sz="1200" b="0" i="0">
+                <a:solidFill>
+                  <a:srgbClr val="061A45"/>
+                </a:solidFill>
+              </a:defRPr>
+            </a:pPr>
+            <a:r>
+              <a:rPr sz="1200" b="0" i="0">
                 <a:solidFill>
                   <a:srgbClr val="061A45"/>
                 </a:solidFill>
@@ -8369,7 +8504,7 @@
           <p:cNvPr id="19" name="">
             <a:extLst xmlns:a="http://schemas.openxmlformats.org/drawingml/2006/main">
               <a:ext uri="{FF2B5EF4-FFF2-40B4-BE49-F238E27FC236}">
-                <a16:creationId xmlns:a16="http://schemas.microsoft.com/office/drawing/2014/main" id="{B2D35DA3-040F-4770-A5B7-1BE4F97EC793}"/>
+                <a16:creationId xmlns:a16="http://schemas.microsoft.com/office/drawing/2014/main" id="{339E007D-3CE4-4A88-9F4B-F26451F73638}"/>
               </a:ext>
             </a:extLst>
           </p:cNvPr>
@@ -8404,7 +8539,7 @@
           <p:cNvPr id="20" name="">
             <a:extLst xmlns:a="http://schemas.openxmlformats.org/drawingml/2006/main">
               <a:ext uri="{FF2B5EF4-FFF2-40B4-BE49-F238E27FC236}">
-                <a16:creationId xmlns:a16="http://schemas.microsoft.com/office/drawing/2014/main" id="{73E7FCD9-2EB3-43B6-8411-0CDEB4FE2723}"/>
+                <a16:creationId xmlns:a16="http://schemas.microsoft.com/office/drawing/2014/main" id="{6C546750-4660-4BA8-A905-58E2672CD08D}"/>
               </a:ext>
             </a:extLst>
           </p:cNvPr>
@@ -8439,7 +8574,7 @@
           <p:cNvPr id="21" name="">
             <a:extLst xmlns:a="http://schemas.openxmlformats.org/drawingml/2006/main">
               <a:ext uri="{FF2B5EF4-FFF2-40B4-BE49-F238E27FC236}">
-                <a16:creationId xmlns:a16="http://schemas.microsoft.com/office/drawing/2014/main" id="{D37559C1-CBA0-4000-8244-8740238D4045}"/>
+                <a16:creationId xmlns:a16="http://schemas.microsoft.com/office/drawing/2014/main" id="{37397DDC-0B97-431F-B53E-E4783E600B12}"/>
               </a:ext>
             </a:extLst>
           </p:cNvPr>
@@ -8489,7 +8624,7 @@
           <p:cNvPr id="22" name="">
             <a:extLst xmlns:a="http://schemas.openxmlformats.org/drawingml/2006/main">
               <a:ext uri="{FF2B5EF4-FFF2-40B4-BE49-F238E27FC236}">
-                <a16:creationId xmlns:a16="http://schemas.microsoft.com/office/drawing/2014/main" id="{FAC19BAA-E4C1-4853-8AAD-7EE6019C2E5D}"/>
+                <a16:creationId xmlns:a16="http://schemas.microsoft.com/office/drawing/2014/main" id="{CC28F6A5-DABC-4EDD-9A2C-F2578E4AE9A7}"/>
               </a:ext>
             </a:extLst>
           </p:cNvPr>
@@ -8539,7 +8674,7 @@
           <p:cNvPr id="23" name="">
             <a:extLst xmlns:a="http://schemas.openxmlformats.org/drawingml/2006/main">
               <a:ext uri="{FF2B5EF4-FFF2-40B4-BE49-F238E27FC236}">
-                <a16:creationId xmlns:a16="http://schemas.microsoft.com/office/drawing/2014/main" id="{940D752A-5DC4-4F4B-B472-EB81F7F78271}"/>
+                <a16:creationId xmlns:a16="http://schemas.microsoft.com/office/drawing/2014/main" id="{AB173336-3C0E-425E-A073-56696A4D6D65}"/>
               </a:ext>
             </a:extLst>
           </p:cNvPr>
@@ -8567,14 +8702,14 @@
           <a:lstStyle xmlns:a="http://schemas.openxmlformats.org/drawingml/2006/main"/>
           <a:p xmlns:a="http://schemas.openxmlformats.org/drawingml/2006/main">
             <a:pPr algn="l">
-              <a:defRPr sz="1125" b="0" i="0">
-                <a:solidFill>
-                  <a:srgbClr val="061A45"/>
-                </a:solidFill>
-              </a:defRPr>
-            </a:pPr>
-            <a:r>
-              <a:rPr sz="1125" b="0" i="0">
+              <a:defRPr sz="1200" b="0" i="0">
+                <a:solidFill>
+                  <a:srgbClr val="061A45"/>
+                </a:solidFill>
+              </a:defRPr>
+            </a:pPr>
+            <a:r>
+              <a:rPr sz="1200" b="0" i="0">
                 <a:solidFill>
                   <a:srgbClr val="061A45"/>
                 </a:solidFill>
@@ -8589,7 +8724,7 @@
           <p:cNvPr id="24" name="">
             <a:extLst xmlns:a="http://schemas.openxmlformats.org/drawingml/2006/main">
               <a:ext uri="{FF2B5EF4-FFF2-40B4-BE49-F238E27FC236}">
-                <a16:creationId xmlns:a16="http://schemas.microsoft.com/office/drawing/2014/main" id="{C53B4ACC-C7B4-4F3E-A54C-4AA18D45C75B}"/>
+                <a16:creationId xmlns:a16="http://schemas.microsoft.com/office/drawing/2014/main" id="{607DD09A-0DB4-49C1-91E6-06F7828A47FE}"/>
               </a:ext>
             </a:extLst>
           </p:cNvPr>
@@ -8624,7 +8759,7 @@
           <p:cNvPr id="25" name="">
             <a:extLst xmlns:a="http://schemas.openxmlformats.org/drawingml/2006/main">
               <a:ext uri="{FF2B5EF4-FFF2-40B4-BE49-F238E27FC236}">
-                <a16:creationId xmlns:a16="http://schemas.microsoft.com/office/drawing/2014/main" id="{4971028C-243C-4701-A612-7C33BE2E5190}"/>
+                <a16:creationId xmlns:a16="http://schemas.microsoft.com/office/drawing/2014/main" id="{D717AE2C-8FC6-4A94-BB72-E708123692EA}"/>
               </a:ext>
             </a:extLst>
           </p:cNvPr>
@@ -8659,7 +8794,7 @@
           <p:cNvPr id="26" name="">
             <a:extLst xmlns:a="http://schemas.openxmlformats.org/drawingml/2006/main">
               <a:ext uri="{FF2B5EF4-FFF2-40B4-BE49-F238E27FC236}">
-                <a16:creationId xmlns:a16="http://schemas.microsoft.com/office/drawing/2014/main" id="{4CDD8666-0B50-4170-874D-5CC908204AC0}"/>
+                <a16:creationId xmlns:a16="http://schemas.microsoft.com/office/drawing/2014/main" id="{17B4529C-1F9B-4C67-AAD2-70D3DFA88736}"/>
               </a:ext>
             </a:extLst>
           </p:cNvPr>
@@ -8709,7 +8844,7 @@
           <p:cNvPr id="27" name="">
             <a:extLst xmlns:a="http://schemas.openxmlformats.org/drawingml/2006/main">
               <a:ext uri="{FF2B5EF4-FFF2-40B4-BE49-F238E27FC236}">
-                <a16:creationId xmlns:a16="http://schemas.microsoft.com/office/drawing/2014/main" id="{8CD2BC0E-CD09-4847-BC06-FBA28DBD356F}"/>
+                <a16:creationId xmlns:a16="http://schemas.microsoft.com/office/drawing/2014/main" id="{BB5B479D-E1B2-47D4-B524-F402BCD425F1}"/>
               </a:ext>
             </a:extLst>
           </p:cNvPr>
@@ -8759,7 +8894,7 @@
           <p:cNvPr id="28" name="">
             <a:extLst xmlns:a="http://schemas.openxmlformats.org/drawingml/2006/main">
               <a:ext uri="{FF2B5EF4-FFF2-40B4-BE49-F238E27FC236}">
-                <a16:creationId xmlns:a16="http://schemas.microsoft.com/office/drawing/2014/main" id="{5E1293E4-DADF-4744-BE7E-C760CE0A3E84}"/>
+                <a16:creationId xmlns:a16="http://schemas.microsoft.com/office/drawing/2014/main" id="{33371063-CF4B-4659-A1E5-6225D8A0B9F8}"/>
               </a:ext>
             </a:extLst>
           </p:cNvPr>
@@ -8787,14 +8922,14 @@
           <a:lstStyle xmlns:a="http://schemas.openxmlformats.org/drawingml/2006/main"/>
           <a:p xmlns:a="http://schemas.openxmlformats.org/drawingml/2006/main">
             <a:pPr algn="l">
-              <a:defRPr sz="1125" b="0" i="0">
-                <a:solidFill>
-                  <a:srgbClr val="061A45"/>
-                </a:solidFill>
-              </a:defRPr>
-            </a:pPr>
-            <a:r>
-              <a:rPr sz="1125" b="0" i="0">
+              <a:defRPr sz="1200" b="0" i="0">
+                <a:solidFill>
+                  <a:srgbClr val="061A45"/>
+                </a:solidFill>
+              </a:defRPr>
+            </a:pPr>
+            <a:r>
+              <a:rPr sz="1200" b="0" i="0">
                 <a:solidFill>
                   <a:srgbClr val="061A45"/>
                 </a:solidFill>
@@ -8809,7 +8944,7 @@
           <p:cNvPr id="29" name="">
             <a:extLst xmlns:a="http://schemas.openxmlformats.org/drawingml/2006/main">
               <a:ext uri="{FF2B5EF4-FFF2-40B4-BE49-F238E27FC236}">
-                <a16:creationId xmlns:a16="http://schemas.microsoft.com/office/drawing/2014/main" id="{4C1CAB72-6C66-4AEA-823A-610824BDB1C2}"/>
+                <a16:creationId xmlns:a16="http://schemas.microsoft.com/office/drawing/2014/main" id="{DE2DC3AC-1A97-45BB-BF9C-B36662ED4BE0}"/>
               </a:ext>
             </a:extLst>
           </p:cNvPr>
@@ -8844,7 +8979,7 @@
           <p:cNvPr id="30" name="">
             <a:extLst xmlns:a="http://schemas.openxmlformats.org/drawingml/2006/main">
               <a:ext uri="{FF2B5EF4-FFF2-40B4-BE49-F238E27FC236}">
-                <a16:creationId xmlns:a16="http://schemas.microsoft.com/office/drawing/2014/main" id="{D9DCA8DC-6302-4482-9179-FD59E5381584}"/>
+                <a16:creationId xmlns:a16="http://schemas.microsoft.com/office/drawing/2014/main" id="{DA525553-88ED-49BC-AD17-596EE7EDB9DC}"/>
               </a:ext>
             </a:extLst>
           </p:cNvPr>
@@ -8879,7 +9014,7 @@
           <p:cNvPr id="31" name="">
             <a:extLst xmlns:a="http://schemas.openxmlformats.org/drawingml/2006/main">
               <a:ext uri="{FF2B5EF4-FFF2-40B4-BE49-F238E27FC236}">
-                <a16:creationId xmlns:a16="http://schemas.microsoft.com/office/drawing/2014/main" id="{2729DDD1-5CD0-4704-A8E9-67BB36946C5D}"/>
+                <a16:creationId xmlns:a16="http://schemas.microsoft.com/office/drawing/2014/main" id="{96C78C98-B54B-407C-91D2-896390B51552}"/>
               </a:ext>
             </a:extLst>
           </p:cNvPr>
@@ -8929,7 +9064,7 @@
           <p:cNvPr id="32" name="">
             <a:extLst xmlns:a="http://schemas.openxmlformats.org/drawingml/2006/main">
               <a:ext uri="{FF2B5EF4-FFF2-40B4-BE49-F238E27FC236}">
-                <a16:creationId xmlns:a16="http://schemas.microsoft.com/office/drawing/2014/main" id="{BC0934B1-F733-4437-B164-A6C982EF8C7B}"/>
+                <a16:creationId xmlns:a16="http://schemas.microsoft.com/office/drawing/2014/main" id="{86A8106E-D253-4812-B116-82E311F766EA}"/>
               </a:ext>
             </a:extLst>
           </p:cNvPr>
@@ -8979,7 +9114,7 @@
           <p:cNvPr id="33" name="">
             <a:extLst xmlns:a="http://schemas.openxmlformats.org/drawingml/2006/main">
               <a:ext uri="{FF2B5EF4-FFF2-40B4-BE49-F238E27FC236}">
-                <a16:creationId xmlns:a16="http://schemas.microsoft.com/office/drawing/2014/main" id="{4EA81D7B-64EF-4EC1-9B11-74CAA1BFE34E}"/>
+                <a16:creationId xmlns:a16="http://schemas.microsoft.com/office/drawing/2014/main" id="{88356F03-5AF6-4F3A-A7E0-31EFD46BB389}"/>
               </a:ext>
             </a:extLst>
           </p:cNvPr>
@@ -9007,14 +9142,14 @@
           <a:lstStyle xmlns:a="http://schemas.openxmlformats.org/drawingml/2006/main"/>
           <a:p xmlns:a="http://schemas.openxmlformats.org/drawingml/2006/main">
             <a:pPr algn="l">
-              <a:defRPr sz="1125" b="0" i="0">
-                <a:solidFill>
-                  <a:srgbClr val="061A45"/>
-                </a:solidFill>
-              </a:defRPr>
-            </a:pPr>
-            <a:r>
-              <a:rPr sz="1125" b="0" i="0">
+              <a:defRPr sz="1200" b="0" i="0">
+                <a:solidFill>
+                  <a:srgbClr val="061A45"/>
+                </a:solidFill>
+              </a:defRPr>
+            </a:pPr>
+            <a:r>
+              <a:rPr sz="1200" b="0" i="0">
                 <a:solidFill>
                   <a:srgbClr val="061A45"/>
                 </a:solidFill>
@@ -9029,7 +9164,7 @@
           <p:cNvPr id="34" name="">
             <a:extLst xmlns:a="http://schemas.openxmlformats.org/drawingml/2006/main">
               <a:ext uri="{FF2B5EF4-FFF2-40B4-BE49-F238E27FC236}">
-                <a16:creationId xmlns:a16="http://schemas.microsoft.com/office/drawing/2014/main" id="{5A0B80B6-5803-4A23-823F-E9172196B2C2}"/>
+                <a16:creationId xmlns:a16="http://schemas.microsoft.com/office/drawing/2014/main" id="{89187B8B-9033-4838-85AD-1478CA458B5A}"/>
               </a:ext>
             </a:extLst>
           </p:cNvPr>
@@ -9064,7 +9199,7 @@
           <p:cNvPr id="35" name="">
             <a:extLst xmlns:a="http://schemas.openxmlformats.org/drawingml/2006/main">
               <a:ext uri="{FF2B5EF4-FFF2-40B4-BE49-F238E27FC236}">
-                <a16:creationId xmlns:a16="http://schemas.microsoft.com/office/drawing/2014/main" id="{76273EAF-9A67-4C7B-A5D4-E85EBF383540}"/>
+                <a16:creationId xmlns:a16="http://schemas.microsoft.com/office/drawing/2014/main" id="{DB2B2CA5-2F90-41A3-B397-21855F2021EC}"/>
               </a:ext>
             </a:extLst>
           </p:cNvPr>
@@ -9099,7 +9234,7 @@
           <p:cNvPr id="36" name="">
             <a:extLst xmlns:a="http://schemas.openxmlformats.org/drawingml/2006/main">
               <a:ext uri="{FF2B5EF4-FFF2-40B4-BE49-F238E27FC236}">
-                <a16:creationId xmlns:a16="http://schemas.microsoft.com/office/drawing/2014/main" id="{74E38D4F-F077-4D00-A173-3C1FF293B939}"/>
+                <a16:creationId xmlns:a16="http://schemas.microsoft.com/office/drawing/2014/main" id="{3C3978C6-5D07-4092-B0FF-F1A4D73C65AA}"/>
               </a:ext>
             </a:extLst>
           </p:cNvPr>
@@ -9149,7 +9284,7 @@
           <p:cNvPr id="37" name="">
             <a:extLst xmlns:a="http://schemas.openxmlformats.org/drawingml/2006/main">
               <a:ext uri="{FF2B5EF4-FFF2-40B4-BE49-F238E27FC236}">
-                <a16:creationId xmlns:a16="http://schemas.microsoft.com/office/drawing/2014/main" id="{21999D23-BFC7-4FD2-BD8F-E10538E7B43B}"/>
+                <a16:creationId xmlns:a16="http://schemas.microsoft.com/office/drawing/2014/main" id="{1B19641D-6ACF-4485-91E5-C9D5F0D672A8}"/>
               </a:ext>
             </a:extLst>
           </p:cNvPr>
@@ -9199,7 +9334,7 @@
           <p:cNvPr id="38" name="">
             <a:extLst xmlns:a="http://schemas.openxmlformats.org/drawingml/2006/main">
               <a:ext uri="{FF2B5EF4-FFF2-40B4-BE49-F238E27FC236}">
-                <a16:creationId xmlns:a16="http://schemas.microsoft.com/office/drawing/2014/main" id="{19C0F001-2A6C-46C2-B7EA-7A5E9CFFCC65}"/>
+                <a16:creationId xmlns:a16="http://schemas.microsoft.com/office/drawing/2014/main" id="{EADA2BB9-863C-4151-8766-6E3C01FB0731}"/>
               </a:ext>
             </a:extLst>
           </p:cNvPr>
@@ -9227,14 +9362,14 @@
           <a:lstStyle xmlns:a="http://schemas.openxmlformats.org/drawingml/2006/main"/>
           <a:p xmlns:a="http://schemas.openxmlformats.org/drawingml/2006/main">
             <a:pPr algn="l">
-              <a:defRPr sz="1125" b="0" i="0">
-                <a:solidFill>
-                  <a:srgbClr val="061A45"/>
-                </a:solidFill>
-              </a:defRPr>
-            </a:pPr>
-            <a:r>
-              <a:rPr sz="1125" b="0" i="0">
+              <a:defRPr sz="1200" b="0" i="0">
+                <a:solidFill>
+                  <a:srgbClr val="061A45"/>
+                </a:solidFill>
+              </a:defRPr>
+            </a:pPr>
+            <a:r>
+              <a:rPr sz="1200" b="0" i="0">
                 <a:solidFill>
                   <a:srgbClr val="061A45"/>
                 </a:solidFill>
@@ -9249,7 +9384,7 @@
           <p:cNvPr id="39" name="">
             <a:extLst xmlns:a="http://schemas.openxmlformats.org/drawingml/2006/main">
               <a:ext uri="{FF2B5EF4-FFF2-40B4-BE49-F238E27FC236}">
-                <a16:creationId xmlns:a16="http://schemas.microsoft.com/office/drawing/2014/main" id="{B8F2340A-EF41-499B-B7DD-E41E35634D6C}"/>
+                <a16:creationId xmlns:a16="http://schemas.microsoft.com/office/drawing/2014/main" id="{C7AA7D8F-D137-4F75-A523-B62D1C200D88}"/>
               </a:ext>
             </a:extLst>
           </p:cNvPr>
@@ -9284,7 +9419,7 @@
           <p:cNvPr id="40" name="">
             <a:extLst xmlns:a="http://schemas.openxmlformats.org/drawingml/2006/main">
               <a:ext uri="{FF2B5EF4-FFF2-40B4-BE49-F238E27FC236}">
-                <a16:creationId xmlns:a16="http://schemas.microsoft.com/office/drawing/2014/main" id="{3B280AEF-63D6-4867-AAB7-B32B7C9EDF27}"/>
+                <a16:creationId xmlns:a16="http://schemas.microsoft.com/office/drawing/2014/main" id="{D927B83F-285E-4616-AD94-8D629F32E299}"/>
               </a:ext>
             </a:extLst>
           </p:cNvPr>
@@ -9319,7 +9454,7 @@
           <p:cNvPr id="41" name="">
             <a:extLst xmlns:a="http://schemas.openxmlformats.org/drawingml/2006/main">
               <a:ext uri="{FF2B5EF4-FFF2-40B4-BE49-F238E27FC236}">
-                <a16:creationId xmlns:a16="http://schemas.microsoft.com/office/drawing/2014/main" id="{A4536920-0347-4B66-9C4F-AFBA75755FA4}"/>
+                <a16:creationId xmlns:a16="http://schemas.microsoft.com/office/drawing/2014/main" id="{C98EDD00-EB41-4AEB-AA67-7684D91B75FB}"/>
               </a:ext>
             </a:extLst>
           </p:cNvPr>
@@ -9369,7 +9504,7 @@
           <p:cNvPr id="42" name="">
             <a:extLst xmlns:a="http://schemas.openxmlformats.org/drawingml/2006/main">
               <a:ext uri="{FF2B5EF4-FFF2-40B4-BE49-F238E27FC236}">
-                <a16:creationId xmlns:a16="http://schemas.microsoft.com/office/drawing/2014/main" id="{66634194-74B9-4A1A-9AA4-F88A06AC099D}"/>
+                <a16:creationId xmlns:a16="http://schemas.microsoft.com/office/drawing/2014/main" id="{640828B6-026A-4004-B31E-B4205F6BE24A}"/>
               </a:ext>
             </a:extLst>
           </p:cNvPr>
@@ -9419,7 +9554,7 @@
           <p:cNvPr id="43" name="">
             <a:extLst xmlns:a="http://schemas.openxmlformats.org/drawingml/2006/main">
               <a:ext uri="{FF2B5EF4-FFF2-40B4-BE49-F238E27FC236}">
-                <a16:creationId xmlns:a16="http://schemas.microsoft.com/office/drawing/2014/main" id="{748123AE-A6AD-49BA-8290-A070AAD2D064}"/>
+                <a16:creationId xmlns:a16="http://schemas.microsoft.com/office/drawing/2014/main" id="{FD71D00C-B0AF-40A9-9FCC-6A932F597DDA}"/>
               </a:ext>
             </a:extLst>
           </p:cNvPr>
@@ -9447,14 +9582,14 @@
           <a:lstStyle xmlns:a="http://schemas.openxmlformats.org/drawingml/2006/main"/>
           <a:p xmlns:a="http://schemas.openxmlformats.org/drawingml/2006/main">
             <a:pPr algn="l">
-              <a:defRPr sz="1125" b="0" i="0">
-                <a:solidFill>
-                  <a:srgbClr val="061A45"/>
-                </a:solidFill>
-              </a:defRPr>
-            </a:pPr>
-            <a:r>
-              <a:rPr sz="1125" b="0" i="0">
+              <a:defRPr sz="1200" b="0" i="0">
+                <a:solidFill>
+                  <a:srgbClr val="061A45"/>
+                </a:solidFill>
+              </a:defRPr>
+            </a:pPr>
+            <a:r>
+              <a:rPr sz="1200" b="0" i="0">
                 <a:solidFill>
                   <a:srgbClr val="061A45"/>
                 </a:solidFill>
@@ -9469,7 +9604,7 @@
           <p:cNvPr id="44" name="">
             <a:extLst xmlns:a="http://schemas.openxmlformats.org/drawingml/2006/main">
               <a:ext uri="{FF2B5EF4-FFF2-40B4-BE49-F238E27FC236}">
-                <a16:creationId xmlns:a16="http://schemas.microsoft.com/office/drawing/2014/main" id="{8E132529-7D26-474B-A5EC-19B557E63636}"/>
+                <a16:creationId xmlns:a16="http://schemas.microsoft.com/office/drawing/2014/main" id="{047242D5-562A-4D92-850B-FB3F462C4A3A}"/>
               </a:ext>
             </a:extLst>
           </p:cNvPr>
@@ -9504,7 +9639,7 @@
           <p:cNvPr id="45" name="">
             <a:extLst xmlns:a="http://schemas.openxmlformats.org/drawingml/2006/main">
               <a:ext uri="{FF2B5EF4-FFF2-40B4-BE49-F238E27FC236}">
-                <a16:creationId xmlns:a16="http://schemas.microsoft.com/office/drawing/2014/main" id="{29A6DEF7-0A3D-473C-B812-FD6B666EC4AB}"/>
+                <a16:creationId xmlns:a16="http://schemas.microsoft.com/office/drawing/2014/main" id="{E7705C52-99B2-494F-B3F3-C10C121EED8C}"/>
               </a:ext>
             </a:extLst>
           </p:cNvPr>
@@ -9554,7 +9689,7 @@
           <p:cNvPr id="46" name="">
             <a:extLst xmlns:a="http://schemas.openxmlformats.org/drawingml/2006/main">
               <a:ext uri="{FF2B5EF4-FFF2-40B4-BE49-F238E27FC236}">
-                <a16:creationId xmlns:a16="http://schemas.microsoft.com/office/drawing/2014/main" id="{BE34B69B-5540-4FBD-B5C3-10844399F550}"/>
+                <a16:creationId xmlns:a16="http://schemas.microsoft.com/office/drawing/2014/main" id="{1A32DEC2-17A4-43F7-B331-B70858B08941}"/>
               </a:ext>
             </a:extLst>
           </p:cNvPr>
@@ -9594,7 +9729,7 @@
                   <a:srgbClr val="061A45"/>
                 </a:solidFill>
               </a:rPr>
-              <a:t>Can you explain who decided what entered the paper and what was allowed to execute?</a:t>
+              <a:t>Can you trace who chose the context and who authorized execution?</a:t>
             </a:r>
           </a:p>
         </p:txBody>
@@ -9602,7 +9737,7 @@
     </p:spTree>
     <p:extLst>
       <p:ext uri="{BB962C8B-B14F-4D97-AF65-F5344CB8AC3E}">
-        <p14:creationId xmlns:p14="http://schemas.microsoft.com/office/powerpoint/2010/main" val="93409285"/>
+        <p14:creationId xmlns:p14="http://schemas.microsoft.com/office/powerpoint/2010/main" val="852188779"/>
       </p:ext>
     </p:extLst>
   </p:cSld>
@@ -9633,7 +9768,7 @@
           <p:cNvPr id="1" name="">
             <a:extLst xmlns:a="http://schemas.openxmlformats.org/drawingml/2006/main">
               <a:ext uri="{FF2B5EF4-FFF2-40B4-BE49-F238E27FC236}">
-                <a16:creationId xmlns:a16="http://schemas.microsoft.com/office/drawing/2014/main" id="{616C31B9-3877-42DE-B9C1-0C37CEF18BC4}"/>
+                <a16:creationId xmlns:a16="http://schemas.microsoft.com/office/drawing/2014/main" id="{5FEDF24F-AF78-4FB4-BD0F-430150808863}"/>
               </a:ext>
             </a:extLst>
           </p:cNvPr>
@@ -9683,7 +9818,7 @@
           <p:cNvPr id="2" name="">
             <a:extLst xmlns:a="http://schemas.openxmlformats.org/drawingml/2006/main">
               <a:ext uri="{FF2B5EF4-FFF2-40B4-BE49-F238E27FC236}">
-                <a16:creationId xmlns:a16="http://schemas.microsoft.com/office/drawing/2014/main" id="{7C0B0B86-CDBE-421D-855E-EF25883B8EC4}"/>
+                <a16:creationId xmlns:a16="http://schemas.microsoft.com/office/drawing/2014/main" id="{317F0F14-552D-4DAA-861C-DDC4DBDB41BC}"/>
               </a:ext>
             </a:extLst>
           </p:cNvPr>
@@ -9733,7 +9868,7 @@
           <p:cNvPr id="3" name="">
             <a:extLst xmlns:a="http://schemas.openxmlformats.org/drawingml/2006/main">
               <a:ext uri="{FF2B5EF4-FFF2-40B4-BE49-F238E27FC236}">
-                <a16:creationId xmlns:a16="http://schemas.microsoft.com/office/drawing/2014/main" id="{DEB7E58A-288F-4FDB-859C-E56EE011D451}"/>
+                <a16:creationId xmlns:a16="http://schemas.microsoft.com/office/drawing/2014/main" id="{BF51F783-0766-4B4C-9028-EEB5CB2A1B27}"/>
               </a:ext>
             </a:extLst>
           </p:cNvPr>
@@ -9763,7 +9898,7 @@
           <p:cNvPr id="4" name="">
             <a:extLst xmlns:a="http://schemas.openxmlformats.org/drawingml/2006/main">
               <a:ext uri="{FF2B5EF4-FFF2-40B4-BE49-F238E27FC236}">
-                <a16:creationId xmlns:a16="http://schemas.microsoft.com/office/drawing/2014/main" id="{2E331C3D-D9DA-426F-A179-376C9A066E5C}"/>
+                <a16:creationId xmlns:a16="http://schemas.microsoft.com/office/drawing/2014/main" id="{DE75BC06-FC2C-4262-92E6-F4E6E7546F51}"/>
               </a:ext>
             </a:extLst>
           </p:cNvPr>
@@ -9798,7 +9933,7 @@
           <p:cNvPr id="5" name="">
             <a:extLst xmlns:a="http://schemas.openxmlformats.org/drawingml/2006/main">
               <a:ext uri="{FF2B5EF4-FFF2-40B4-BE49-F238E27FC236}">
-                <a16:creationId xmlns:a16="http://schemas.microsoft.com/office/drawing/2014/main" id="{38F4ADA0-3796-46A6-BA1F-E3F9C66B83D6}"/>
+                <a16:creationId xmlns:a16="http://schemas.microsoft.com/office/drawing/2014/main" id="{938D0F99-F8BE-4CEC-B255-767A264239C5}"/>
               </a:ext>
             </a:extLst>
           </p:cNvPr>
@@ -9848,7 +9983,7 @@
           <p:cNvPr id="6" name="">
             <a:extLst xmlns:a="http://schemas.openxmlformats.org/drawingml/2006/main">
               <a:ext uri="{FF2B5EF4-FFF2-40B4-BE49-F238E27FC236}">
-                <a16:creationId xmlns:a16="http://schemas.microsoft.com/office/drawing/2014/main" id="{C85E5F4B-D8CF-416A-8F1F-E5DD4D47C95C}"/>
+                <a16:creationId xmlns:a16="http://schemas.microsoft.com/office/drawing/2014/main" id="{2D2FCE9C-46B3-495C-AD07-3EF6FE38B305}"/>
               </a:ext>
             </a:extLst>
           </p:cNvPr>
@@ -9883,7 +10018,7 @@
           <p:cNvPr id="7" name="">
             <a:extLst xmlns:a="http://schemas.openxmlformats.org/drawingml/2006/main">
               <a:ext uri="{FF2B5EF4-FFF2-40B4-BE49-F238E27FC236}">
-                <a16:creationId xmlns:a16="http://schemas.microsoft.com/office/drawing/2014/main" id="{D443534D-308F-4916-BE90-11CFE7B8A30F}"/>
+                <a16:creationId xmlns:a16="http://schemas.microsoft.com/office/drawing/2014/main" id="{7A2688F0-5D26-464C-AA67-E9B021C91698}"/>
               </a:ext>
             </a:extLst>
           </p:cNvPr>
@@ -9933,7 +10068,7 @@
           <p:cNvPr id="8" name="">
             <a:extLst xmlns:a="http://schemas.openxmlformats.org/drawingml/2006/main">
               <a:ext uri="{FF2B5EF4-FFF2-40B4-BE49-F238E27FC236}">
-                <a16:creationId xmlns:a16="http://schemas.microsoft.com/office/drawing/2014/main" id="{26053E0F-461C-40A4-B8C7-E82599EB05D8}"/>
+                <a16:creationId xmlns:a16="http://schemas.microsoft.com/office/drawing/2014/main" id="{2AD43175-2B57-4D07-8050-3A604AD101C4}"/>
               </a:ext>
             </a:extLst>
           </p:cNvPr>
@@ -9968,7 +10103,7 @@
           <p:cNvPr id="9" name="">
             <a:extLst xmlns:a="http://schemas.openxmlformats.org/drawingml/2006/main">
               <a:ext uri="{FF2B5EF4-FFF2-40B4-BE49-F238E27FC236}">
-                <a16:creationId xmlns:a16="http://schemas.microsoft.com/office/drawing/2014/main" id="{00D0EC9B-0F66-4EA0-A27C-0D7C25223ECD}"/>
+                <a16:creationId xmlns:a16="http://schemas.microsoft.com/office/drawing/2014/main" id="{08BA6C86-647C-4407-83C7-1191B7CC339E}"/>
               </a:ext>
             </a:extLst>
           </p:cNvPr>
@@ -10018,7 +10153,7 @@
           <p:cNvPr id="10" name="">
             <a:extLst xmlns:a="http://schemas.openxmlformats.org/drawingml/2006/main">
               <a:ext uri="{FF2B5EF4-FFF2-40B4-BE49-F238E27FC236}">
-                <a16:creationId xmlns:a16="http://schemas.microsoft.com/office/drawing/2014/main" id="{50CE1827-0D9A-46B8-93FD-254FA8118B0F}"/>
+                <a16:creationId xmlns:a16="http://schemas.microsoft.com/office/drawing/2014/main" id="{E506224C-E608-4E38-AF0D-0CFE84C867C4}"/>
               </a:ext>
             </a:extLst>
           </p:cNvPr>
@@ -10053,7 +10188,7 @@
           <p:cNvPr id="11" name="">
             <a:extLst xmlns:a="http://schemas.openxmlformats.org/drawingml/2006/main">
               <a:ext uri="{FF2B5EF4-FFF2-40B4-BE49-F238E27FC236}">
-                <a16:creationId xmlns:a16="http://schemas.microsoft.com/office/drawing/2014/main" id="{CB722BEC-A618-492E-93D9-0403FB4B304E}"/>
+                <a16:creationId xmlns:a16="http://schemas.microsoft.com/office/drawing/2014/main" id="{7DEDA5C5-3968-47BB-823C-AB3D09CC2D41}"/>
               </a:ext>
             </a:extLst>
           </p:cNvPr>
@@ -10103,7 +10238,7 @@
           <p:cNvPr id="12" name="">
             <a:extLst xmlns:a="http://schemas.openxmlformats.org/drawingml/2006/main">
               <a:ext uri="{FF2B5EF4-FFF2-40B4-BE49-F238E27FC236}">
-                <a16:creationId xmlns:a16="http://schemas.microsoft.com/office/drawing/2014/main" id="{723D5972-77CB-4265-AF3F-1868F6790711}"/>
+                <a16:creationId xmlns:a16="http://schemas.microsoft.com/office/drawing/2014/main" id="{5CFC3E4C-CEA9-48FE-9EE9-D5C905D6E80D}"/>
               </a:ext>
             </a:extLst>
           </p:cNvPr>
@@ -10138,7 +10273,7 @@
           <p:cNvPr id="13" name="">
             <a:extLst xmlns:a="http://schemas.openxmlformats.org/drawingml/2006/main">
               <a:ext uri="{FF2B5EF4-FFF2-40B4-BE49-F238E27FC236}">
-                <a16:creationId xmlns:a16="http://schemas.microsoft.com/office/drawing/2014/main" id="{E594EBFE-0AB5-496B-B587-92D551A9DEC7}"/>
+                <a16:creationId xmlns:a16="http://schemas.microsoft.com/office/drawing/2014/main" id="{52AD1069-710D-4592-A95B-AFB85C3FE85F}"/>
               </a:ext>
             </a:extLst>
           </p:cNvPr>
@@ -10188,7 +10323,7 @@
           <p:cNvPr id="14" name="">
             <a:extLst xmlns:a="http://schemas.openxmlformats.org/drawingml/2006/main">
               <a:ext uri="{FF2B5EF4-FFF2-40B4-BE49-F238E27FC236}">
-                <a16:creationId xmlns:a16="http://schemas.microsoft.com/office/drawing/2014/main" id="{ABD26297-4E4A-4482-81F1-E44D1FB3D91D}"/>
+                <a16:creationId xmlns:a16="http://schemas.microsoft.com/office/drawing/2014/main" id="{35010156-BA90-4EC8-B104-57ADA15CC778}"/>
               </a:ext>
             </a:extLst>
           </p:cNvPr>
@@ -10223,7 +10358,7 @@
           <p:cNvPr id="15" name="">
             <a:extLst xmlns:a="http://schemas.openxmlformats.org/drawingml/2006/main">
               <a:ext uri="{FF2B5EF4-FFF2-40B4-BE49-F238E27FC236}">
-                <a16:creationId xmlns:a16="http://schemas.microsoft.com/office/drawing/2014/main" id="{EBA6B7F4-306B-4494-ADC1-992E20966E22}"/>
+                <a16:creationId xmlns:a16="http://schemas.microsoft.com/office/drawing/2014/main" id="{FE688ACA-6109-4AD0-8405-56B68ECC6607}"/>
               </a:ext>
             </a:extLst>
           </p:cNvPr>
@@ -10273,7 +10408,7 @@
           <p:cNvPr id="16" name="">
             <a:extLst xmlns:a="http://schemas.openxmlformats.org/drawingml/2006/main">
               <a:ext uri="{FF2B5EF4-FFF2-40B4-BE49-F238E27FC236}">
-                <a16:creationId xmlns:a16="http://schemas.microsoft.com/office/drawing/2014/main" id="{FF37D08D-D6D0-497C-A0D0-032EE2E094E8}"/>
+                <a16:creationId xmlns:a16="http://schemas.microsoft.com/office/drawing/2014/main" id="{3F73F870-AFC8-4B04-9367-586C220DB15E}"/>
               </a:ext>
             </a:extLst>
           </p:cNvPr>
@@ -10308,7 +10443,7 @@
           <p:cNvPr id="17" name="">
             <a:extLst xmlns:a="http://schemas.openxmlformats.org/drawingml/2006/main">
               <a:ext uri="{FF2B5EF4-FFF2-40B4-BE49-F238E27FC236}">
-                <a16:creationId xmlns:a16="http://schemas.microsoft.com/office/drawing/2014/main" id="{E61F52ED-6525-4A26-A01F-0B2C1815D45C}"/>
+                <a16:creationId xmlns:a16="http://schemas.microsoft.com/office/drawing/2014/main" id="{EA417043-A9A8-48CD-A139-FB496A20BB87}"/>
               </a:ext>
             </a:extLst>
           </p:cNvPr>
@@ -10358,7 +10493,7 @@
           <p:cNvPr id="18" name="">
             <a:extLst xmlns:a="http://schemas.openxmlformats.org/drawingml/2006/main">
               <a:ext uri="{FF2B5EF4-FFF2-40B4-BE49-F238E27FC236}">
-                <a16:creationId xmlns:a16="http://schemas.microsoft.com/office/drawing/2014/main" id="{4F940847-CFB8-4DF9-A2D9-655F1D7C5D6D}"/>
+                <a16:creationId xmlns:a16="http://schemas.microsoft.com/office/drawing/2014/main" id="{88AF46C3-592A-4EF8-8433-77228D7A95EF}"/>
               </a:ext>
             </a:extLst>
           </p:cNvPr>
@@ -10393,7 +10528,7 @@
           <p:cNvPr id="19" name="">
             <a:extLst xmlns:a="http://schemas.openxmlformats.org/drawingml/2006/main">
               <a:ext uri="{FF2B5EF4-FFF2-40B4-BE49-F238E27FC236}">
-                <a16:creationId xmlns:a16="http://schemas.microsoft.com/office/drawing/2014/main" id="{B63A419D-E283-42F4-A56B-8888458BCF4A}"/>
+                <a16:creationId xmlns:a16="http://schemas.microsoft.com/office/drawing/2014/main" id="{0AD6B021-11FD-4E91-BFCA-387D5B5EB582}"/>
               </a:ext>
             </a:extLst>
           </p:cNvPr>
@@ -10443,7 +10578,7 @@
           <p:cNvPr id="20" name="">
             <a:extLst xmlns:a="http://schemas.openxmlformats.org/drawingml/2006/main">
               <a:ext uri="{FF2B5EF4-FFF2-40B4-BE49-F238E27FC236}">
-                <a16:creationId xmlns:a16="http://schemas.microsoft.com/office/drawing/2014/main" id="{2664EA6D-9861-46EE-8E53-553B9EC8525D}"/>
+                <a16:creationId xmlns:a16="http://schemas.microsoft.com/office/drawing/2014/main" id="{A93150B2-6E21-414B-B632-799201181F66}"/>
               </a:ext>
             </a:extLst>
           </p:cNvPr>
@@ -10478,7 +10613,7 @@
           <p:cNvPr id="21" name="">
             <a:extLst xmlns:a="http://schemas.openxmlformats.org/drawingml/2006/main">
               <a:ext uri="{FF2B5EF4-FFF2-40B4-BE49-F238E27FC236}">
-                <a16:creationId xmlns:a16="http://schemas.microsoft.com/office/drawing/2014/main" id="{4E0871F8-DCFE-4FC6-84F4-4FB2F6837888}"/>
+                <a16:creationId xmlns:a16="http://schemas.microsoft.com/office/drawing/2014/main" id="{86913EAC-7462-4BE7-80C9-168EE7295093}"/>
               </a:ext>
             </a:extLst>
           </p:cNvPr>
@@ -10528,7 +10663,7 @@
           <p:cNvPr id="22" name="">
             <a:extLst xmlns:a="http://schemas.openxmlformats.org/drawingml/2006/main">
               <a:ext uri="{FF2B5EF4-FFF2-40B4-BE49-F238E27FC236}">
-                <a16:creationId xmlns:a16="http://schemas.microsoft.com/office/drawing/2014/main" id="{FA8B97A3-C276-4D74-889B-0737E2C67CF1}"/>
+                <a16:creationId xmlns:a16="http://schemas.microsoft.com/office/drawing/2014/main" id="{0019404B-6C14-444D-8BEE-B4ED358D0ECE}"/>
               </a:ext>
             </a:extLst>
           </p:cNvPr>
@@ -10563,7 +10698,7 @@
           <p:cNvPr id="23" name="">
             <a:extLst xmlns:a="http://schemas.openxmlformats.org/drawingml/2006/main">
               <a:ext uri="{FF2B5EF4-FFF2-40B4-BE49-F238E27FC236}">
-                <a16:creationId xmlns:a16="http://schemas.microsoft.com/office/drawing/2014/main" id="{120A3499-3DE9-4939-8B31-3749D32E4B17}"/>
+                <a16:creationId xmlns:a16="http://schemas.microsoft.com/office/drawing/2014/main" id="{11B28BF9-00B7-4EB0-8093-BE09B99507CE}"/>
               </a:ext>
             </a:extLst>
           </p:cNvPr>
@@ -10613,7 +10748,7 @@
           <p:cNvPr id="24" name="">
             <a:extLst xmlns:a="http://schemas.openxmlformats.org/drawingml/2006/main">
               <a:ext uri="{FF2B5EF4-FFF2-40B4-BE49-F238E27FC236}">
-                <a16:creationId xmlns:a16="http://schemas.microsoft.com/office/drawing/2014/main" id="{E7B8C885-9211-4122-92CE-2EE03F51918E}"/>
+                <a16:creationId xmlns:a16="http://schemas.microsoft.com/office/drawing/2014/main" id="{A42D1A1D-B00F-4D08-846E-8B5BD30B0EA1}"/>
               </a:ext>
             </a:extLst>
           </p:cNvPr>
@@ -10648,7 +10783,7 @@
           <p:cNvPr id="25" name="">
             <a:extLst xmlns:a="http://schemas.openxmlformats.org/drawingml/2006/main">
               <a:ext uri="{FF2B5EF4-FFF2-40B4-BE49-F238E27FC236}">
-                <a16:creationId xmlns:a16="http://schemas.microsoft.com/office/drawing/2014/main" id="{DC193D58-B21C-4FB1-AC0A-1D6CCA7E00B6}"/>
+                <a16:creationId xmlns:a16="http://schemas.microsoft.com/office/drawing/2014/main" id="{83E9FE5F-E5C3-4786-8482-57289A4B7C76}"/>
               </a:ext>
             </a:extLst>
           </p:cNvPr>
@@ -10698,7 +10833,7 @@
           <p:cNvPr id="26" name="">
             <a:extLst xmlns:a="http://schemas.openxmlformats.org/drawingml/2006/main">
               <a:ext uri="{FF2B5EF4-FFF2-40B4-BE49-F238E27FC236}">
-                <a16:creationId xmlns:a16="http://schemas.microsoft.com/office/drawing/2014/main" id="{D78DB675-3E14-4B89-9F7B-FA70CD09BC54}"/>
+                <a16:creationId xmlns:a16="http://schemas.microsoft.com/office/drawing/2014/main" id="{C3DE5E7F-FF16-40B8-8F87-2B3ADDB0B0EF}"/>
               </a:ext>
             </a:extLst>
           </p:cNvPr>
@@ -10738,7 +10873,7 @@
                   <a:srgbClr val="061A45"/>
                 </a:solidFill>
               </a:rPr>
-              <a:t>If it changes by task, put it in the task. If it is sensitive, do not store it as an instruction.</a:t>
+              <a:t>Task-specific details stay in the task. Sensitive data stays out.</a:t>
             </a:r>
           </a:p>
         </p:txBody>
@@ -10746,7 +10881,7 @@
     </p:spTree>
     <p:extLst>
       <p:ext uri="{BB962C8B-B14F-4D97-AF65-F5344CB8AC3E}">
-        <p14:creationId xmlns:p14="http://schemas.microsoft.com/office/powerpoint/2010/main" val="439445914"/>
+        <p14:creationId xmlns:p14="http://schemas.microsoft.com/office/powerpoint/2010/main" val="2093402134"/>
       </p:ext>
     </p:extLst>
   </p:cSld>
@@ -10777,7 +10912,7 @@
           <p:cNvPr id="1" name="">
             <a:extLst xmlns:a="http://schemas.openxmlformats.org/drawingml/2006/main">
               <a:ext uri="{FF2B5EF4-FFF2-40B4-BE49-F238E27FC236}">
-                <a16:creationId xmlns:a16="http://schemas.microsoft.com/office/drawing/2014/main" id="{737811F3-C602-4689-983F-413BFC4B8DF9}"/>
+                <a16:creationId xmlns:a16="http://schemas.microsoft.com/office/drawing/2014/main" id="{F67268EC-0B96-4D1A-BFD1-67C0D89D1CB5}"/>
               </a:ext>
             </a:extLst>
           </p:cNvPr>
@@ -10817,7 +10952,7 @@
                   <a:srgbClr val="061A45"/>
                 </a:solidFill>
               </a:rPr>
-              <a:t>A Custom Agent Is a Reusable Work Environment</a:t>
+              <a:t>A Custom Agent Packages a Custom Prompt</a:t>
             </a:r>
           </a:p>
         </p:txBody>
@@ -10827,7 +10962,7 @@
           <p:cNvPr id="2" name="">
             <a:extLst xmlns:a="http://schemas.openxmlformats.org/drawingml/2006/main">
               <a:ext uri="{FF2B5EF4-FFF2-40B4-BE49-F238E27FC236}">
-                <a16:creationId xmlns:a16="http://schemas.microsoft.com/office/drawing/2014/main" id="{8B00EEAB-4D6A-4DA0-BD43-F175047A0978}"/>
+                <a16:creationId xmlns:a16="http://schemas.microsoft.com/office/drawing/2014/main" id="{D7BB2C32-4BFA-4AA4-B8C4-193175A67167}"/>
               </a:ext>
             </a:extLst>
           </p:cNvPr>
@@ -10867,7 +11002,7 @@
                   <a:srgbClr val="004AAD"/>
                 </a:solidFill>
               </a:rPr>
-              <a:t>It packages rules, tools, limits, and quality standards for a task type.</a:t>
+              <a:t>It turns repeated instructions into a reusable runtime profile.</a:t>
             </a:r>
           </a:p>
         </p:txBody>
@@ -10877,7 +11012,7 @@
           <p:cNvPr id="3" name="">
             <a:extLst xmlns:a="http://schemas.openxmlformats.org/drawingml/2006/main">
               <a:ext uri="{FF2B5EF4-FFF2-40B4-BE49-F238E27FC236}">
-                <a16:creationId xmlns:a16="http://schemas.microsoft.com/office/drawing/2014/main" id="{E09E09B6-7D48-4781-B0B4-84FEAF34BE7E}"/>
+                <a16:creationId xmlns:a16="http://schemas.microsoft.com/office/drawing/2014/main" id="{C4B5A5F0-5F0F-40E6-8258-5B9E9A191F58}"/>
               </a:ext>
             </a:extLst>
           </p:cNvPr>
@@ -10907,23 +11042,23 @@
           <p:cNvPr id="4" name="">
             <a:extLst xmlns:a="http://schemas.openxmlformats.org/drawingml/2006/main">
               <a:ext uri="{FF2B5EF4-FFF2-40B4-BE49-F238E27FC236}">
-                <a16:creationId xmlns:a16="http://schemas.microsoft.com/office/drawing/2014/main" id="{96E30C66-3ECC-425D-B7E2-E0DF20E68B2F}"/>
-              </a:ext>
-            </a:extLst>
-          </p:cNvPr>
-          <p:cNvSpPr>
-            <a:spLocks xmlns:a="http://schemas.openxmlformats.org/drawingml/2006/main" noGrp="1"/>
-          </p:cNvSpPr>
-          <p:nvPr/>
-        </p:nvSpPr>
-        <p:spPr>
-          <a:xfrm xmlns:a="http://schemas.openxmlformats.org/drawingml/2006/main">
-            <a:off x="990600" y="1676400"/>
-            <a:ext cx="3429000" cy="3714750"/>
+                <a16:creationId xmlns:a16="http://schemas.microsoft.com/office/drawing/2014/main" id="{681B5E25-C197-4C19-BFA6-DED286417191}"/>
+              </a:ext>
+            </a:extLst>
+          </p:cNvPr>
+          <p:cNvSpPr>
+            <a:spLocks xmlns:a="http://schemas.openxmlformats.org/drawingml/2006/main" noGrp="1"/>
+          </p:cNvSpPr>
+          <p:nvPr/>
+        </p:nvSpPr>
+        <p:spPr>
+          <a:xfrm xmlns:a="http://schemas.openxmlformats.org/drawingml/2006/main">
+            <a:off x="857250" y="2038350"/>
+            <a:ext cx="2857500" cy="1809750"/>
           </a:xfrm>
           <a:prstGeom xmlns:a="http://schemas.openxmlformats.org/drawingml/2006/main" prst="roundRect">
             <a:avLst>
-              <a:gd name="adj" fmla="val 2222"/>
+              <a:gd name="adj" fmla="val 4211"/>
             </a:avLst>
           </a:prstGeom>
           <a:solidFill xmlns:a="http://schemas.openxmlformats.org/drawingml/2006/main">
@@ -10942,19 +11077,19 @@
           <p:cNvPr id="5" name="">
             <a:extLst xmlns:a="http://schemas.openxmlformats.org/drawingml/2006/main">
               <a:ext uri="{FF2B5EF4-FFF2-40B4-BE49-F238E27FC236}">
-                <a16:creationId xmlns:a16="http://schemas.microsoft.com/office/drawing/2014/main" id="{411DF1DE-55BB-48B0-9E74-4CCDCCDA90FD}"/>
-              </a:ext>
-            </a:extLst>
-          </p:cNvPr>
-          <p:cNvSpPr>
-            <a:spLocks xmlns:a="http://schemas.openxmlformats.org/drawingml/2006/main" noGrp="1"/>
-          </p:cNvSpPr>
-          <p:nvPr/>
-        </p:nvSpPr>
-        <p:spPr>
-          <a:xfrm xmlns:a="http://schemas.openxmlformats.org/drawingml/2006/main">
-            <a:off x="1676400" y="2038350"/>
-            <a:ext cx="2057400" cy="323850"/>
+                <a16:creationId xmlns:a16="http://schemas.microsoft.com/office/drawing/2014/main" id="{6B97AAE9-0F3C-4948-B5EF-61C995530409}"/>
+              </a:ext>
+            </a:extLst>
+          </p:cNvPr>
+          <p:cNvSpPr>
+            <a:spLocks xmlns:a="http://schemas.openxmlformats.org/drawingml/2006/main" noGrp="1"/>
+          </p:cNvSpPr>
+          <p:nvPr/>
+        </p:nvSpPr>
+        <p:spPr>
+          <a:xfrm xmlns:a="http://schemas.openxmlformats.org/drawingml/2006/main">
+            <a:off x="1123950" y="2305050"/>
+            <a:ext cx="2324100" cy="285750"/>
           </a:xfrm>
           <a:prstGeom xmlns:a="http://schemas.openxmlformats.org/drawingml/2006/main" prst="rect">
             <a:avLst/>
@@ -10970,19 +11105,19 @@
           <a:lstStyle xmlns:a="http://schemas.openxmlformats.org/drawingml/2006/main"/>
           <a:p xmlns:a="http://schemas.openxmlformats.org/drawingml/2006/main">
             <a:pPr algn="ctr">
-              <a:defRPr sz="2400" b="1" i="0">
+              <a:defRPr sz="1950" b="1" i="0">
                 <a:solidFill>
                   <a:srgbClr val="004AAD"/>
                 </a:solidFill>
               </a:defRPr>
             </a:pPr>
             <a:r>
-              <a:rPr sz="2400" b="1" i="0">
+              <a:rPr sz="1950" b="1" i="0">
                 <a:solidFill>
                   <a:srgbClr val="004AAD"/>
                 </a:solidFill>
               </a:rPr>
-              <a:t>Prompt</a:t>
+              <a:t>One-off prompt</a:t>
             </a:r>
           </a:p>
         </p:txBody>
@@ -10992,19 +11127,19 @@
           <p:cNvPr id="6" name="">
             <a:extLst xmlns:a="http://schemas.openxmlformats.org/drawingml/2006/main">
               <a:ext uri="{FF2B5EF4-FFF2-40B4-BE49-F238E27FC236}">
-                <a16:creationId xmlns:a16="http://schemas.microsoft.com/office/drawing/2014/main" id="{AD565197-D604-4C9B-907E-BB197F7D38A6}"/>
-              </a:ext>
-            </a:extLst>
-          </p:cNvPr>
-          <p:cNvSpPr>
-            <a:spLocks xmlns:a="http://schemas.openxmlformats.org/drawingml/2006/main" noGrp="1"/>
-          </p:cNvSpPr>
-          <p:nvPr/>
-        </p:nvSpPr>
-        <p:spPr>
-          <a:xfrm xmlns:a="http://schemas.openxmlformats.org/drawingml/2006/main">
-            <a:off x="1428750" y="2724150"/>
-            <a:ext cx="2552700" cy="552450"/>
+                <a16:creationId xmlns:a16="http://schemas.microsoft.com/office/drawing/2014/main" id="{2F08FF29-2E8B-40D8-8F18-593E1544F421}"/>
+              </a:ext>
+            </a:extLst>
+          </p:cNvPr>
+          <p:cNvSpPr>
+            <a:spLocks xmlns:a="http://schemas.openxmlformats.org/drawingml/2006/main" noGrp="1"/>
+          </p:cNvSpPr>
+          <p:nvPr/>
+        </p:nvSpPr>
+        <p:spPr>
+          <a:xfrm xmlns:a="http://schemas.openxmlformats.org/drawingml/2006/main">
+            <a:off x="1200150" y="2819400"/>
+            <a:ext cx="2171700" cy="590550"/>
           </a:xfrm>
           <a:prstGeom xmlns:a="http://schemas.openxmlformats.org/drawingml/2006/main" prst="rect">
             <a:avLst/>
@@ -11020,19 +11155,19 @@
           <a:lstStyle xmlns:a="http://schemas.openxmlformats.org/drawingml/2006/main"/>
           <a:p xmlns:a="http://schemas.openxmlformats.org/drawingml/2006/main">
             <a:pPr algn="ctr">
-              <a:defRPr sz="1650" b="0" i="0">
-                <a:solidFill>
-                  <a:srgbClr val="061A45"/>
-                </a:solidFill>
-              </a:defRPr>
-            </a:pPr>
-            <a:r>
-              <a:rPr sz="1650" b="0" i="0">
-                <a:solidFill>
-                  <a:srgbClr val="061A45"/>
-                </a:solidFill>
-              </a:rPr>
-              <a:t>A temporary request written on the current paper.</a:t>
+              <a:defRPr sz="1425" b="0" i="0">
+                <a:solidFill>
+                  <a:srgbClr val="061A45"/>
+                </a:solidFill>
+              </a:defRPr>
+            </a:pPr>
+            <a:r>
+              <a:rPr sz="1425" b="0" i="0">
+                <a:solidFill>
+                  <a:srgbClr val="061A45"/>
+                </a:solidFill>
+              </a:rPr>
+              <a:t>temporary task request</a:t>
             </a:r>
           </a:p>
         </p:txBody>
@@ -11042,69 +11177,19 @@
           <p:cNvPr id="7" name="">
             <a:extLst xmlns:a="http://schemas.openxmlformats.org/drawingml/2006/main">
               <a:ext uri="{FF2B5EF4-FFF2-40B4-BE49-F238E27FC236}">
-                <a16:creationId xmlns:a16="http://schemas.microsoft.com/office/drawing/2014/main" id="{86531714-3363-455C-9637-BFE127B3297B}"/>
-              </a:ext>
-            </a:extLst>
-          </p:cNvPr>
-          <p:cNvSpPr>
-            <a:spLocks xmlns:a="http://schemas.openxmlformats.org/drawingml/2006/main" noGrp="1"/>
-          </p:cNvSpPr>
-          <p:nvPr/>
-        </p:nvSpPr>
-        <p:spPr>
-          <a:xfrm xmlns:a="http://schemas.openxmlformats.org/drawingml/2006/main">
-            <a:off x="1543050" y="4095750"/>
-            <a:ext cx="2324100" cy="228600"/>
-          </a:xfrm>
-          <a:prstGeom xmlns:a="http://schemas.openxmlformats.org/drawingml/2006/main" prst="rect">
-            <a:avLst/>
-          </a:prstGeom>
-          <a:noFill xmlns:a="http://schemas.openxmlformats.org/drawingml/2006/main"/>
-          <a:ln xmlns:a="http://schemas.openxmlformats.org/drawingml/2006/main" w="0">
-            <a:noFill/>
-            <a:prstDash val="solid"/>
-          </a:ln>
-        </p:spPr>
-        <p:txBody>
-          <a:bodyPr xmlns:a="http://schemas.openxmlformats.org/drawingml/2006/main"/>
-          <a:lstStyle xmlns:a="http://schemas.openxmlformats.org/drawingml/2006/main"/>
-          <a:p xmlns:a="http://schemas.openxmlformats.org/drawingml/2006/main">
-            <a:pPr algn="ctr">
-              <a:defRPr sz="1500" b="1" i="0">
-                <a:solidFill>
-                  <a:srgbClr val="004AAD"/>
-                </a:solidFill>
-              </a:defRPr>
-            </a:pPr>
-            <a:r>
-              <a:rPr sz="1500" b="1" i="0">
-                <a:solidFill>
-                  <a:srgbClr val="004AAD"/>
-                </a:solidFill>
-              </a:rPr>
-              <a:t>Good for one task.</a:t>
-            </a:r>
-          </a:p>
-        </p:txBody>
-      </p:sp>
-      <p:sp>
-        <p:nvSpPr>
-          <p:cNvPr id="8" name="">
-            <a:extLst xmlns:a="http://schemas.openxmlformats.org/drawingml/2006/main">
-              <a:ext uri="{FF2B5EF4-FFF2-40B4-BE49-F238E27FC236}">
-                <a16:creationId xmlns:a16="http://schemas.microsoft.com/office/drawing/2014/main" id="{7BBC153C-FCB1-4FE2-9434-48CF549343C0}"/>
-              </a:ext>
-            </a:extLst>
-          </p:cNvPr>
-          <p:cNvSpPr>
-            <a:spLocks xmlns:a="http://schemas.openxmlformats.org/drawingml/2006/main" noGrp="1"/>
-          </p:cNvSpPr>
-          <p:nvPr/>
-        </p:nvSpPr>
-        <p:spPr>
-          <a:xfrm xmlns:a="http://schemas.openxmlformats.org/drawingml/2006/main">
-            <a:off x="4648200" y="3524250"/>
-            <a:ext cx="971550" cy="0"/>
+                <a16:creationId xmlns:a16="http://schemas.microsoft.com/office/drawing/2014/main" id="{E655CA92-866D-4E95-BE3D-79523425A8B5}"/>
+              </a:ext>
+            </a:extLst>
+          </p:cNvPr>
+          <p:cNvSpPr>
+            <a:spLocks xmlns:a="http://schemas.openxmlformats.org/drawingml/2006/main" noGrp="1"/>
+          </p:cNvSpPr>
+          <p:nvPr/>
+        </p:nvSpPr>
+        <p:spPr>
+          <a:xfrm xmlns:a="http://schemas.openxmlformats.org/drawingml/2006/main">
+            <a:off x="3886200" y="3048000"/>
+            <a:ext cx="552450" cy="0"/>
           </a:xfrm>
           <a:prstGeom xmlns:a="http://schemas.openxmlformats.org/drawingml/2006/main" prst="line">
             <a:avLst/>
@@ -11119,26 +11204,191 @@
       </p:sp>
       <p:sp>
         <p:nvSpPr>
-          <p:cNvPr id="9" name="">
-            <a:extLst xmlns:a="http://schemas.openxmlformats.org/drawingml/2006/main">
-              <a:ext uri="{FF2B5EF4-FFF2-40B4-BE49-F238E27FC236}">
-                <a16:creationId xmlns:a16="http://schemas.microsoft.com/office/drawing/2014/main" id="{B82B829C-0A99-4086-B17A-478B922DE1B4}"/>
-              </a:ext>
-            </a:extLst>
-          </p:cNvPr>
-          <p:cNvSpPr>
-            <a:spLocks xmlns:a="http://schemas.openxmlformats.org/drawingml/2006/main" noGrp="1"/>
-          </p:cNvSpPr>
-          <p:nvPr/>
-        </p:nvSpPr>
-        <p:spPr>
-          <a:xfrm xmlns:a="http://schemas.openxmlformats.org/drawingml/2006/main">
-            <a:off x="5867400" y="1428750"/>
-            <a:ext cx="5334000" cy="4229100"/>
+          <p:cNvPr id="8" name="">
+            <a:extLst xmlns:a="http://schemas.openxmlformats.org/drawingml/2006/main">
+              <a:ext uri="{FF2B5EF4-FFF2-40B4-BE49-F238E27FC236}">
+                <a16:creationId xmlns:a16="http://schemas.microsoft.com/office/drawing/2014/main" id="{45B65E5C-799D-4B8E-BEE5-F13377D37767}"/>
+              </a:ext>
+            </a:extLst>
+          </p:cNvPr>
+          <p:cNvSpPr>
+            <a:spLocks xmlns:a="http://schemas.openxmlformats.org/drawingml/2006/main" noGrp="1"/>
+          </p:cNvSpPr>
+          <p:nvPr/>
+        </p:nvSpPr>
+        <p:spPr>
+          <a:xfrm xmlns:a="http://schemas.openxmlformats.org/drawingml/2006/main">
+            <a:off x="4591050" y="2038350"/>
+            <a:ext cx="2857500" cy="1809750"/>
           </a:xfrm>
           <a:prstGeom xmlns:a="http://schemas.openxmlformats.org/drawingml/2006/main" prst="roundRect">
             <a:avLst>
-              <a:gd name="adj" fmla="val 1802"/>
+              <a:gd name="adj" fmla="val 4211"/>
+            </a:avLst>
+          </a:prstGeom>
+          <a:solidFill xmlns:a="http://schemas.openxmlformats.org/drawingml/2006/main">
+            <a:srgbClr val="FFF7DF"/>
+          </a:solidFill>
+          <a:ln xmlns:a="http://schemas.openxmlformats.org/drawingml/2006/main" w="10478">
+            <a:solidFill>
+              <a:srgbClr val="D88A00"/>
+            </a:solidFill>
+            <a:prstDash val="solid"/>
+          </a:ln>
+        </p:spPr>
+      </p:sp>
+      <p:sp>
+        <p:nvSpPr>
+          <p:cNvPr id="9" name="">
+            <a:extLst xmlns:a="http://schemas.openxmlformats.org/drawingml/2006/main">
+              <a:ext uri="{FF2B5EF4-FFF2-40B4-BE49-F238E27FC236}">
+                <a16:creationId xmlns:a16="http://schemas.microsoft.com/office/drawing/2014/main" id="{5FF9D6BE-E1E0-426B-B7E9-A6EB17357E53}"/>
+              </a:ext>
+            </a:extLst>
+          </p:cNvPr>
+          <p:cNvSpPr>
+            <a:spLocks xmlns:a="http://schemas.openxmlformats.org/drawingml/2006/main" noGrp="1"/>
+          </p:cNvSpPr>
+          <p:nvPr/>
+        </p:nvSpPr>
+        <p:spPr>
+          <a:xfrm xmlns:a="http://schemas.openxmlformats.org/drawingml/2006/main">
+            <a:off x="4857750" y="2305050"/>
+            <a:ext cx="2324100" cy="285750"/>
+          </a:xfrm>
+          <a:prstGeom xmlns:a="http://schemas.openxmlformats.org/drawingml/2006/main" prst="rect">
+            <a:avLst/>
+          </a:prstGeom>
+          <a:noFill xmlns:a="http://schemas.openxmlformats.org/drawingml/2006/main"/>
+          <a:ln xmlns:a="http://schemas.openxmlformats.org/drawingml/2006/main" w="0">
+            <a:noFill/>
+            <a:prstDash val="solid"/>
+          </a:ln>
+        </p:spPr>
+        <p:txBody>
+          <a:bodyPr xmlns:a="http://schemas.openxmlformats.org/drawingml/2006/main"/>
+          <a:lstStyle xmlns:a="http://schemas.openxmlformats.org/drawingml/2006/main"/>
+          <a:p xmlns:a="http://schemas.openxmlformats.org/drawingml/2006/main">
+            <a:pPr algn="ctr">
+              <a:defRPr sz="1950" b="1" i="0">
+                <a:solidFill>
+                  <a:srgbClr val="D88A00"/>
+                </a:solidFill>
+              </a:defRPr>
+            </a:pPr>
+            <a:r>
+              <a:rPr sz="1950" b="1" i="0">
+                <a:solidFill>
+                  <a:srgbClr val="D88A00"/>
+                </a:solidFill>
+              </a:rPr>
+              <a:t>Prompt template</a:t>
+            </a:r>
+          </a:p>
+        </p:txBody>
+      </p:sp>
+      <p:sp>
+        <p:nvSpPr>
+          <p:cNvPr id="10" name="">
+            <a:extLst xmlns:a="http://schemas.openxmlformats.org/drawingml/2006/main">
+              <a:ext uri="{FF2B5EF4-FFF2-40B4-BE49-F238E27FC236}">
+                <a16:creationId xmlns:a16="http://schemas.microsoft.com/office/drawing/2014/main" id="{9101B43D-19DF-48CB-9B04-9FD2B788CB6B}"/>
+              </a:ext>
+            </a:extLst>
+          </p:cNvPr>
+          <p:cNvSpPr>
+            <a:spLocks xmlns:a="http://schemas.openxmlformats.org/drawingml/2006/main" noGrp="1"/>
+          </p:cNvSpPr>
+          <p:nvPr/>
+        </p:nvSpPr>
+        <p:spPr>
+          <a:xfrm xmlns:a="http://schemas.openxmlformats.org/drawingml/2006/main">
+            <a:off x="4933950" y="2819400"/>
+            <a:ext cx="2171700" cy="590550"/>
+          </a:xfrm>
+          <a:prstGeom xmlns:a="http://schemas.openxmlformats.org/drawingml/2006/main" prst="rect">
+            <a:avLst/>
+          </a:prstGeom>
+          <a:noFill xmlns:a="http://schemas.openxmlformats.org/drawingml/2006/main"/>
+          <a:ln xmlns:a="http://schemas.openxmlformats.org/drawingml/2006/main" w="0">
+            <a:noFill/>
+            <a:prstDash val="solid"/>
+          </a:ln>
+        </p:spPr>
+        <p:txBody>
+          <a:bodyPr xmlns:a="http://schemas.openxmlformats.org/drawingml/2006/main"/>
+          <a:lstStyle xmlns:a="http://schemas.openxmlformats.org/drawingml/2006/main"/>
+          <a:p xmlns:a="http://schemas.openxmlformats.org/drawingml/2006/main">
+            <a:pPr algn="ctr">
+              <a:defRPr sz="1425" b="0" i="0">
+                <a:solidFill>
+                  <a:srgbClr val="061A45"/>
+                </a:solidFill>
+              </a:defRPr>
+            </a:pPr>
+            <a:r>
+              <a:rPr sz="1425" b="0" i="0">
+                <a:solidFill>
+                  <a:srgbClr val="061A45"/>
+                </a:solidFill>
+              </a:rPr>
+              <a:t>repeatable wording</a:t>
+            </a:r>
+          </a:p>
+        </p:txBody>
+      </p:sp>
+      <p:sp>
+        <p:nvSpPr>
+          <p:cNvPr id="11" name="">
+            <a:extLst xmlns:a="http://schemas.openxmlformats.org/drawingml/2006/main">
+              <a:ext uri="{FF2B5EF4-FFF2-40B4-BE49-F238E27FC236}">
+                <a16:creationId xmlns:a16="http://schemas.microsoft.com/office/drawing/2014/main" id="{D403BE91-B08A-4F18-BD8D-6B3161845A8F}"/>
+              </a:ext>
+            </a:extLst>
+          </p:cNvPr>
+          <p:cNvSpPr>
+            <a:spLocks xmlns:a="http://schemas.openxmlformats.org/drawingml/2006/main" noGrp="1"/>
+          </p:cNvSpPr>
+          <p:nvPr/>
+        </p:nvSpPr>
+        <p:spPr>
+          <a:xfrm xmlns:a="http://schemas.openxmlformats.org/drawingml/2006/main">
+            <a:off x="7620000" y="3048000"/>
+            <a:ext cx="552450" cy="0"/>
+          </a:xfrm>
+          <a:prstGeom xmlns:a="http://schemas.openxmlformats.org/drawingml/2006/main" prst="line">
+            <a:avLst/>
+          </a:prstGeom>
+          <a:ln xmlns:a="http://schemas.openxmlformats.org/drawingml/2006/main" w="38100">
+            <a:solidFill>
+              <a:srgbClr val="004AAD"/>
+            </a:solidFill>
+            <a:prstDash val="solid"/>
+          </a:ln>
+        </p:spPr>
+      </p:sp>
+      <p:sp>
+        <p:nvSpPr>
+          <p:cNvPr id="12" name="">
+            <a:extLst xmlns:a="http://schemas.openxmlformats.org/drawingml/2006/main">
+              <a:ext uri="{FF2B5EF4-FFF2-40B4-BE49-F238E27FC236}">
+                <a16:creationId xmlns:a16="http://schemas.microsoft.com/office/drawing/2014/main" id="{B0CD4ACB-AE85-44C2-8736-6BF8B6C6BE62}"/>
+              </a:ext>
+            </a:extLst>
+          </p:cNvPr>
+          <p:cNvSpPr>
+            <a:spLocks xmlns:a="http://schemas.openxmlformats.org/drawingml/2006/main" noGrp="1"/>
+          </p:cNvSpPr>
+          <p:nvPr/>
+        </p:nvSpPr>
+        <p:spPr>
+          <a:xfrm xmlns:a="http://schemas.openxmlformats.org/drawingml/2006/main">
+            <a:off x="8324850" y="1657350"/>
+            <a:ext cx="2857500" cy="3143250"/>
+          </a:xfrm>
+          <a:prstGeom xmlns:a="http://schemas.openxmlformats.org/drawingml/2006/main" prst="roundRect">
+            <a:avLst>
+              <a:gd name="adj" fmla="val 2667"/>
             </a:avLst>
           </a:prstGeom>
           <a:solidFill xmlns:a="http://schemas.openxmlformats.org/drawingml/2006/main">
@@ -11154,22 +11404,22 @@
       </p:sp>
       <p:sp>
         <p:nvSpPr>
-          <p:cNvPr id="10" name="">
-            <a:extLst xmlns:a="http://schemas.openxmlformats.org/drawingml/2006/main">
-              <a:ext uri="{FF2B5EF4-FFF2-40B4-BE49-F238E27FC236}">
-                <a16:creationId xmlns:a16="http://schemas.microsoft.com/office/drawing/2014/main" id="{BEAD9BB7-BBDA-4C19-BE31-54FC615B3307}"/>
-              </a:ext>
-            </a:extLst>
-          </p:cNvPr>
-          <p:cNvSpPr>
-            <a:spLocks xmlns:a="http://schemas.openxmlformats.org/drawingml/2006/main" noGrp="1"/>
-          </p:cNvSpPr>
-          <p:nvPr/>
-        </p:nvSpPr>
-        <p:spPr>
-          <a:xfrm xmlns:a="http://schemas.openxmlformats.org/drawingml/2006/main">
-            <a:off x="6858000" y="1752600"/>
-            <a:ext cx="3352800" cy="342900"/>
+          <p:cNvPr id="13" name="">
+            <a:extLst xmlns:a="http://schemas.openxmlformats.org/drawingml/2006/main">
+              <a:ext uri="{FF2B5EF4-FFF2-40B4-BE49-F238E27FC236}">
+                <a16:creationId xmlns:a16="http://schemas.microsoft.com/office/drawing/2014/main" id="{89F2F2FE-E4F7-4829-BEAD-79464AE38150}"/>
+              </a:ext>
+            </a:extLst>
+          </p:cNvPr>
+          <p:cNvSpPr>
+            <a:spLocks xmlns:a="http://schemas.openxmlformats.org/drawingml/2006/main" noGrp="1"/>
+          </p:cNvSpPr>
+          <p:nvPr/>
+        </p:nvSpPr>
+        <p:spPr>
+          <a:xfrm xmlns:a="http://schemas.openxmlformats.org/drawingml/2006/main">
+            <a:off x="8591550" y="1924050"/>
+            <a:ext cx="2324100" cy="285750"/>
           </a:xfrm>
           <a:prstGeom xmlns:a="http://schemas.openxmlformats.org/drawingml/2006/main" prst="rect">
             <a:avLst/>
@@ -11185,45 +11435,112 @@
           <a:lstStyle xmlns:a="http://schemas.openxmlformats.org/drawingml/2006/main"/>
           <a:p xmlns:a="http://schemas.openxmlformats.org/drawingml/2006/main">
             <a:pPr algn="ctr">
-              <a:defRPr sz="2550" b="1" i="0">
+              <a:defRPr sz="1950" b="1" i="0">
                 <a:solidFill>
                   <a:srgbClr val="138A43"/>
                 </a:solidFill>
               </a:defRPr>
             </a:pPr>
             <a:r>
-              <a:rPr sz="2550" b="1" i="0">
+              <a:rPr sz="1950" b="1" i="0">
                 <a:solidFill>
                   <a:srgbClr val="138A43"/>
                 </a:solidFill>
               </a:rPr>
-              <a:t>Custom Agent</a:t>
-            </a:r>
-          </a:p>
-        </p:txBody>
-      </p:sp>
-      <p:sp>
-        <p:nvSpPr>
-          <p:cNvPr id="11" name="">
-            <a:extLst xmlns:a="http://schemas.openxmlformats.org/drawingml/2006/main">
-              <a:ext uri="{FF2B5EF4-FFF2-40B4-BE49-F238E27FC236}">
-                <a16:creationId xmlns:a16="http://schemas.microsoft.com/office/drawing/2014/main" id="{83BB0CFC-C78D-4533-B5B8-645096D5BDDD}"/>
-              </a:ext>
-            </a:extLst>
-          </p:cNvPr>
-          <p:cNvSpPr>
-            <a:spLocks xmlns:a="http://schemas.openxmlformats.org/drawingml/2006/main" noGrp="1"/>
-          </p:cNvSpPr>
-          <p:nvPr/>
-        </p:nvSpPr>
-        <p:spPr>
-          <a:xfrm xmlns:a="http://schemas.openxmlformats.org/drawingml/2006/main">
-            <a:off x="6305550" y="2400300"/>
-            <a:ext cx="2076450" cy="514350"/>
+              <a:t>Custom agent</a:t>
+            </a:r>
+          </a:p>
+        </p:txBody>
+      </p:sp>
+      <p:sp>
+        <p:nvSpPr>
+          <p:cNvPr id="14" name="">
+            <a:extLst xmlns:a="http://schemas.openxmlformats.org/drawingml/2006/main">
+              <a:ext uri="{FF2B5EF4-FFF2-40B4-BE49-F238E27FC236}">
+                <a16:creationId xmlns:a16="http://schemas.microsoft.com/office/drawing/2014/main" id="{8697417B-5812-4EB6-BB3A-F6AB1A56F3C3}"/>
+              </a:ext>
+            </a:extLst>
+          </p:cNvPr>
+          <p:cNvSpPr>
+            <a:spLocks xmlns:a="http://schemas.openxmlformats.org/drawingml/2006/main" noGrp="1"/>
+          </p:cNvSpPr>
+          <p:nvPr/>
+        </p:nvSpPr>
+        <p:spPr>
+          <a:xfrm xmlns:a="http://schemas.openxmlformats.org/drawingml/2006/main">
+            <a:off x="8667750" y="2438400"/>
+            <a:ext cx="2171700" cy="590550"/>
+          </a:xfrm>
+          <a:prstGeom xmlns:a="http://schemas.openxmlformats.org/drawingml/2006/main" prst="rect">
+            <a:avLst/>
+          </a:prstGeom>
+          <a:noFill xmlns:a="http://schemas.openxmlformats.org/drawingml/2006/main"/>
+          <a:ln xmlns:a="http://schemas.openxmlformats.org/drawingml/2006/main" w="0">
+            <a:noFill/>
+            <a:prstDash val="solid"/>
+          </a:ln>
+        </p:spPr>
+        <p:txBody>
+          <a:bodyPr xmlns:a="http://schemas.openxmlformats.org/drawingml/2006/main"/>
+          <a:lstStyle xmlns:a="http://schemas.openxmlformats.org/drawingml/2006/main"/>
+          <a:p xmlns:a="http://schemas.openxmlformats.org/drawingml/2006/main">
+            <a:pPr algn="ctr">
+              <a:defRPr sz="1425" b="0" i="0">
+                <a:solidFill>
+                  <a:srgbClr val="061A45"/>
+                </a:solidFill>
+              </a:defRPr>
+            </a:pPr>
+            <a:r>
+              <a:rPr sz="1425" b="0" i="0">
+                <a:solidFill>
+                  <a:srgbClr val="061A45"/>
+                </a:solidFill>
+              </a:rPr>
+              <a:t>packaged role, rules,</a:t>
+            </a:r>
+          </a:p>
+          <a:p xmlns:a="http://schemas.openxmlformats.org/drawingml/2006/main">
+            <a:pPr algn="ctr">
+              <a:defRPr sz="1425" b="0" i="0">
+                <a:solidFill>
+                  <a:srgbClr val="061A45"/>
+                </a:solidFill>
+              </a:defRPr>
+            </a:pPr>
+            <a:r>
+              <a:rPr sz="1425" b="0" i="0">
+                <a:solidFill>
+                  <a:srgbClr val="061A45"/>
+                </a:solidFill>
+              </a:rPr>
+              <a:t>tools, permissions</a:t>
+            </a:r>
+          </a:p>
+        </p:txBody>
+      </p:sp>
+      <p:sp>
+        <p:nvSpPr>
+          <p:cNvPr id="15" name="">
+            <a:extLst xmlns:a="http://schemas.openxmlformats.org/drawingml/2006/main">
+              <a:ext uri="{FF2B5EF4-FFF2-40B4-BE49-F238E27FC236}">
+                <a16:creationId xmlns:a16="http://schemas.microsoft.com/office/drawing/2014/main" id="{F4271F82-27DB-496C-835E-2734DBDF528D}"/>
+              </a:ext>
+            </a:extLst>
+          </p:cNvPr>
+          <p:cNvSpPr>
+            <a:spLocks xmlns:a="http://schemas.openxmlformats.org/drawingml/2006/main" noGrp="1"/>
+          </p:cNvSpPr>
+          <p:nvPr/>
+        </p:nvSpPr>
+        <p:spPr>
+          <a:xfrm xmlns:a="http://schemas.openxmlformats.org/drawingml/2006/main">
+            <a:off x="8496300" y="3371850"/>
+            <a:ext cx="1066800" cy="361950"/>
           </a:xfrm>
           <a:prstGeom xmlns:a="http://schemas.openxmlformats.org/drawingml/2006/main" prst="roundRect">
             <a:avLst>
-              <a:gd name="adj" fmla="val 11111"/>
+              <a:gd name="adj" fmla="val 15789"/>
             </a:avLst>
           </a:prstGeom>
           <a:solidFill xmlns:a="http://schemas.openxmlformats.org/drawingml/2006/main">
@@ -11239,22 +11556,22 @@
       </p:sp>
       <p:sp>
         <p:nvSpPr>
-          <p:cNvPr id="12" name="">
-            <a:extLst xmlns:a="http://schemas.openxmlformats.org/drawingml/2006/main">
-              <a:ext uri="{FF2B5EF4-FFF2-40B4-BE49-F238E27FC236}">
-                <a16:creationId xmlns:a16="http://schemas.microsoft.com/office/drawing/2014/main" id="{35BDD75E-F7E0-4D45-AAE2-AF9F05C806EB}"/>
-              </a:ext>
-            </a:extLst>
-          </p:cNvPr>
-          <p:cNvSpPr>
-            <a:spLocks xmlns:a="http://schemas.openxmlformats.org/drawingml/2006/main" noGrp="1"/>
-          </p:cNvSpPr>
-          <p:nvPr/>
-        </p:nvSpPr>
-        <p:spPr>
-          <a:xfrm xmlns:a="http://schemas.openxmlformats.org/drawingml/2006/main">
-            <a:off x="6477000" y="2476500"/>
-            <a:ext cx="1733550" cy="171450"/>
+          <p:cNvPr id="16" name="">
+            <a:extLst xmlns:a="http://schemas.openxmlformats.org/drawingml/2006/main">
+              <a:ext uri="{FF2B5EF4-FFF2-40B4-BE49-F238E27FC236}">
+                <a16:creationId xmlns:a16="http://schemas.microsoft.com/office/drawing/2014/main" id="{626C4627-71DD-4A95-A1B2-7F886DBCAD71}"/>
+              </a:ext>
+            </a:extLst>
+          </p:cNvPr>
+          <p:cNvSpPr>
+            <a:spLocks xmlns:a="http://schemas.openxmlformats.org/drawingml/2006/main" noGrp="1"/>
+          </p:cNvSpPr>
+          <p:nvPr/>
+        </p:nvSpPr>
+        <p:spPr>
+          <a:xfrm xmlns:a="http://schemas.openxmlformats.org/drawingml/2006/main">
+            <a:off x="8553450" y="3467100"/>
+            <a:ext cx="952500" cy="171450"/>
           </a:xfrm>
           <a:prstGeom xmlns:a="http://schemas.openxmlformats.org/drawingml/2006/main" prst="rect">
             <a:avLst/>
@@ -11289,76 +11606,26 @@
       </p:sp>
       <p:sp>
         <p:nvSpPr>
-          <p:cNvPr id="13" name="">
-            <a:extLst xmlns:a="http://schemas.openxmlformats.org/drawingml/2006/main">
-              <a:ext uri="{FF2B5EF4-FFF2-40B4-BE49-F238E27FC236}">
-                <a16:creationId xmlns:a16="http://schemas.microsoft.com/office/drawing/2014/main" id="{80D5A2D2-1D48-486E-96F2-9992576BD0D4}"/>
-              </a:ext>
-            </a:extLst>
-          </p:cNvPr>
-          <p:cNvSpPr>
-            <a:spLocks xmlns:a="http://schemas.openxmlformats.org/drawingml/2006/main" noGrp="1"/>
-          </p:cNvSpPr>
-          <p:nvPr/>
-        </p:nvSpPr>
-        <p:spPr>
-          <a:xfrm xmlns:a="http://schemas.openxmlformats.org/drawingml/2006/main">
-            <a:off x="6477000" y="2676525"/>
-            <a:ext cx="1733550" cy="152400"/>
-          </a:xfrm>
-          <a:prstGeom xmlns:a="http://schemas.openxmlformats.org/drawingml/2006/main" prst="rect">
-            <a:avLst/>
-          </a:prstGeom>
-          <a:noFill xmlns:a="http://schemas.openxmlformats.org/drawingml/2006/main"/>
-          <a:ln xmlns:a="http://schemas.openxmlformats.org/drawingml/2006/main" w="0">
-            <a:noFill/>
-            <a:prstDash val="solid"/>
-          </a:ln>
-        </p:spPr>
-        <p:txBody>
-          <a:bodyPr xmlns:a="http://schemas.openxmlformats.org/drawingml/2006/main"/>
-          <a:lstStyle xmlns:a="http://schemas.openxmlformats.org/drawingml/2006/main"/>
-          <a:p xmlns:a="http://schemas.openxmlformats.org/drawingml/2006/main">
-            <a:pPr algn="ctr">
-              <a:defRPr sz="975" b="0" i="0">
-                <a:solidFill>
-                  <a:srgbClr val="061A45"/>
-                </a:solidFill>
-              </a:defRPr>
-            </a:pPr>
-            <a:r>
-              <a:rPr sz="975" b="0" i="0">
-                <a:solidFill>
-                  <a:srgbClr val="061A45"/>
-                </a:solidFill>
-              </a:rPr>
-              <a:t>what this agent is for</a:t>
-            </a:r>
-          </a:p>
-        </p:txBody>
-      </p:sp>
-      <p:sp>
-        <p:nvSpPr>
-          <p:cNvPr id="14" name="">
-            <a:extLst xmlns:a="http://schemas.openxmlformats.org/drawingml/2006/main">
-              <a:ext uri="{FF2B5EF4-FFF2-40B4-BE49-F238E27FC236}">
-                <a16:creationId xmlns:a16="http://schemas.microsoft.com/office/drawing/2014/main" id="{DC4BE908-FA8A-4250-9720-2FA135037789}"/>
-              </a:ext>
-            </a:extLst>
-          </p:cNvPr>
-          <p:cNvSpPr>
-            <a:spLocks xmlns:a="http://schemas.openxmlformats.org/drawingml/2006/main" noGrp="1"/>
-          </p:cNvSpPr>
-          <p:nvPr/>
-        </p:nvSpPr>
-        <p:spPr>
-          <a:xfrm xmlns:a="http://schemas.openxmlformats.org/drawingml/2006/main">
-            <a:off x="8648700" y="2400300"/>
-            <a:ext cx="2076450" cy="514350"/>
+          <p:cNvPr id="17" name="">
+            <a:extLst xmlns:a="http://schemas.openxmlformats.org/drawingml/2006/main">
+              <a:ext uri="{FF2B5EF4-FFF2-40B4-BE49-F238E27FC236}">
+                <a16:creationId xmlns:a16="http://schemas.microsoft.com/office/drawing/2014/main" id="{14509817-9AD9-4795-A2DE-BA9FA2934A64}"/>
+              </a:ext>
+            </a:extLst>
+          </p:cNvPr>
+          <p:cNvSpPr>
+            <a:spLocks xmlns:a="http://schemas.openxmlformats.org/drawingml/2006/main" noGrp="1"/>
+          </p:cNvSpPr>
+          <p:nvPr/>
+        </p:nvSpPr>
+        <p:spPr>
+          <a:xfrm xmlns:a="http://schemas.openxmlformats.org/drawingml/2006/main">
+            <a:off x="9696450" y="3371850"/>
+            <a:ext cx="1066800" cy="361950"/>
           </a:xfrm>
           <a:prstGeom xmlns:a="http://schemas.openxmlformats.org/drawingml/2006/main" prst="roundRect">
             <a:avLst>
-              <a:gd name="adj" fmla="val 11111"/>
+              <a:gd name="adj" fmla="val 15789"/>
             </a:avLst>
           </a:prstGeom>
           <a:solidFill xmlns:a="http://schemas.openxmlformats.org/drawingml/2006/main">
@@ -11374,22 +11641,22 @@
       </p:sp>
       <p:sp>
         <p:nvSpPr>
-          <p:cNvPr id="15" name="">
-            <a:extLst xmlns:a="http://schemas.openxmlformats.org/drawingml/2006/main">
-              <a:ext uri="{FF2B5EF4-FFF2-40B4-BE49-F238E27FC236}">
-                <a16:creationId xmlns:a16="http://schemas.microsoft.com/office/drawing/2014/main" id="{793265EE-3108-4BCD-B675-92E90C11CB90}"/>
-              </a:ext>
-            </a:extLst>
-          </p:cNvPr>
-          <p:cNvSpPr>
-            <a:spLocks xmlns:a="http://schemas.openxmlformats.org/drawingml/2006/main" noGrp="1"/>
-          </p:cNvSpPr>
-          <p:nvPr/>
-        </p:nvSpPr>
-        <p:spPr>
-          <a:xfrm xmlns:a="http://schemas.openxmlformats.org/drawingml/2006/main">
-            <a:off x="8820150" y="2476500"/>
-            <a:ext cx="1733550" cy="171450"/>
+          <p:cNvPr id="18" name="">
+            <a:extLst xmlns:a="http://schemas.openxmlformats.org/drawingml/2006/main">
+              <a:ext uri="{FF2B5EF4-FFF2-40B4-BE49-F238E27FC236}">
+                <a16:creationId xmlns:a16="http://schemas.microsoft.com/office/drawing/2014/main" id="{6E49ABF0-45A9-4743-B3F9-40EEA003EFA0}"/>
+              </a:ext>
+            </a:extLst>
+          </p:cNvPr>
+          <p:cNvSpPr>
+            <a:spLocks xmlns:a="http://schemas.openxmlformats.org/drawingml/2006/main" noGrp="1"/>
+          </p:cNvSpPr>
+          <p:nvPr/>
+        </p:nvSpPr>
+        <p:spPr>
+          <a:xfrm xmlns:a="http://schemas.openxmlformats.org/drawingml/2006/main">
+            <a:off x="9753600" y="3467100"/>
+            <a:ext cx="952500" cy="171450"/>
           </a:xfrm>
           <a:prstGeom xmlns:a="http://schemas.openxmlformats.org/drawingml/2006/main" prst="rect">
             <a:avLst/>
@@ -11417,83 +11684,33 @@
                   <a:srgbClr val="138A43"/>
                 </a:solidFill>
               </a:rPr>
-              <a:t>Instructions</a:t>
-            </a:r>
-          </a:p>
-        </p:txBody>
-      </p:sp>
-      <p:sp>
-        <p:nvSpPr>
-          <p:cNvPr id="16" name="">
-            <a:extLst xmlns:a="http://schemas.openxmlformats.org/drawingml/2006/main">
-              <a:ext uri="{FF2B5EF4-FFF2-40B4-BE49-F238E27FC236}">
-                <a16:creationId xmlns:a16="http://schemas.microsoft.com/office/drawing/2014/main" id="{B326199E-E9B2-49C7-8C8E-8FDBD87D2049}"/>
-              </a:ext>
-            </a:extLst>
-          </p:cNvPr>
-          <p:cNvSpPr>
-            <a:spLocks xmlns:a="http://schemas.openxmlformats.org/drawingml/2006/main" noGrp="1"/>
-          </p:cNvSpPr>
-          <p:nvPr/>
-        </p:nvSpPr>
-        <p:spPr>
-          <a:xfrm xmlns:a="http://schemas.openxmlformats.org/drawingml/2006/main">
-            <a:off x="8820150" y="2676525"/>
-            <a:ext cx="1733550" cy="152400"/>
-          </a:xfrm>
-          <a:prstGeom xmlns:a="http://schemas.openxmlformats.org/drawingml/2006/main" prst="rect">
-            <a:avLst/>
-          </a:prstGeom>
-          <a:noFill xmlns:a="http://schemas.openxmlformats.org/drawingml/2006/main"/>
-          <a:ln xmlns:a="http://schemas.openxmlformats.org/drawingml/2006/main" w="0">
-            <a:noFill/>
-            <a:prstDash val="solid"/>
-          </a:ln>
-        </p:spPr>
-        <p:txBody>
-          <a:bodyPr xmlns:a="http://schemas.openxmlformats.org/drawingml/2006/main"/>
-          <a:lstStyle xmlns:a="http://schemas.openxmlformats.org/drawingml/2006/main"/>
-          <a:p xmlns:a="http://schemas.openxmlformats.org/drawingml/2006/main">
-            <a:pPr algn="ctr">
-              <a:defRPr sz="975" b="0" i="0">
-                <a:solidFill>
-                  <a:srgbClr val="061A45"/>
-                </a:solidFill>
-              </a:defRPr>
-            </a:pPr>
-            <a:r>
-              <a:rPr sz="975" b="0" i="0">
-                <a:solidFill>
-                  <a:srgbClr val="061A45"/>
-                </a:solidFill>
-              </a:rPr>
-              <a:t>standing rules and style</a:t>
-            </a:r>
-          </a:p>
-        </p:txBody>
-      </p:sp>
-      <p:sp>
-        <p:nvSpPr>
-          <p:cNvPr id="17" name="">
-            <a:extLst xmlns:a="http://schemas.openxmlformats.org/drawingml/2006/main">
-              <a:ext uri="{FF2B5EF4-FFF2-40B4-BE49-F238E27FC236}">
-                <a16:creationId xmlns:a16="http://schemas.microsoft.com/office/drawing/2014/main" id="{FAAFC4D8-BCBA-41DE-9E0C-4A12D85DA8A3}"/>
-              </a:ext>
-            </a:extLst>
-          </p:cNvPr>
-          <p:cNvSpPr>
-            <a:spLocks xmlns:a="http://schemas.openxmlformats.org/drawingml/2006/main" noGrp="1"/>
-          </p:cNvSpPr>
-          <p:nvPr/>
-        </p:nvSpPr>
-        <p:spPr>
-          <a:xfrm xmlns:a="http://schemas.openxmlformats.org/drawingml/2006/main">
-            <a:off x="6305550" y="3124200"/>
-            <a:ext cx="2076450" cy="514350"/>
+              <a:t>Rules</a:t>
+            </a:r>
+          </a:p>
+        </p:txBody>
+      </p:sp>
+      <p:sp>
+        <p:nvSpPr>
+          <p:cNvPr id="19" name="">
+            <a:extLst xmlns:a="http://schemas.openxmlformats.org/drawingml/2006/main">
+              <a:ext uri="{FF2B5EF4-FFF2-40B4-BE49-F238E27FC236}">
+                <a16:creationId xmlns:a16="http://schemas.microsoft.com/office/drawing/2014/main" id="{13D244D7-3832-4F73-9D70-0A1858208F4C}"/>
+              </a:ext>
+            </a:extLst>
+          </p:cNvPr>
+          <p:cNvSpPr>
+            <a:spLocks xmlns:a="http://schemas.openxmlformats.org/drawingml/2006/main" noGrp="1"/>
+          </p:cNvSpPr>
+          <p:nvPr/>
+        </p:nvSpPr>
+        <p:spPr>
+          <a:xfrm xmlns:a="http://schemas.openxmlformats.org/drawingml/2006/main">
+            <a:off x="8496300" y="3848100"/>
+            <a:ext cx="1066800" cy="361950"/>
           </a:xfrm>
           <a:prstGeom xmlns:a="http://schemas.openxmlformats.org/drawingml/2006/main" prst="roundRect">
             <a:avLst>
-              <a:gd name="adj" fmla="val 11111"/>
+              <a:gd name="adj" fmla="val 15789"/>
             </a:avLst>
           </a:prstGeom>
           <a:solidFill xmlns:a="http://schemas.openxmlformats.org/drawingml/2006/main">
@@ -11509,22 +11726,22 @@
       </p:sp>
       <p:sp>
         <p:nvSpPr>
-          <p:cNvPr id="18" name="">
-            <a:extLst xmlns:a="http://schemas.openxmlformats.org/drawingml/2006/main">
-              <a:ext uri="{FF2B5EF4-FFF2-40B4-BE49-F238E27FC236}">
-                <a16:creationId xmlns:a16="http://schemas.microsoft.com/office/drawing/2014/main" id="{5DBD3C46-387A-484A-8ED2-D41EA6540591}"/>
-              </a:ext>
-            </a:extLst>
-          </p:cNvPr>
-          <p:cNvSpPr>
-            <a:spLocks xmlns:a="http://schemas.openxmlformats.org/drawingml/2006/main" noGrp="1"/>
-          </p:cNvSpPr>
-          <p:nvPr/>
-        </p:nvSpPr>
-        <p:spPr>
-          <a:xfrm xmlns:a="http://schemas.openxmlformats.org/drawingml/2006/main">
-            <a:off x="6477000" y="3200400"/>
-            <a:ext cx="1733550" cy="171450"/>
+          <p:cNvPr id="20" name="">
+            <a:extLst xmlns:a="http://schemas.openxmlformats.org/drawingml/2006/main">
+              <a:ext uri="{FF2B5EF4-FFF2-40B4-BE49-F238E27FC236}">
+                <a16:creationId xmlns:a16="http://schemas.microsoft.com/office/drawing/2014/main" id="{56662610-25C9-40B1-A790-AEC7406FF4CD}"/>
+              </a:ext>
+            </a:extLst>
+          </p:cNvPr>
+          <p:cNvSpPr>
+            <a:spLocks xmlns:a="http://schemas.openxmlformats.org/drawingml/2006/main" noGrp="1"/>
+          </p:cNvSpPr>
+          <p:nvPr/>
+        </p:nvSpPr>
+        <p:spPr>
+          <a:xfrm xmlns:a="http://schemas.openxmlformats.org/drawingml/2006/main">
+            <a:off x="8553450" y="3943350"/>
+            <a:ext cx="952500" cy="171450"/>
           </a:xfrm>
           <a:prstGeom xmlns:a="http://schemas.openxmlformats.org/drawingml/2006/main" prst="rect">
             <a:avLst/>
@@ -11559,76 +11776,26 @@
       </p:sp>
       <p:sp>
         <p:nvSpPr>
-          <p:cNvPr id="19" name="">
-            <a:extLst xmlns:a="http://schemas.openxmlformats.org/drawingml/2006/main">
-              <a:ext uri="{FF2B5EF4-FFF2-40B4-BE49-F238E27FC236}">
-                <a16:creationId xmlns:a16="http://schemas.microsoft.com/office/drawing/2014/main" id="{139C8CB0-16FC-459F-89F9-9E9C4AF5E2B7}"/>
-              </a:ext>
-            </a:extLst>
-          </p:cNvPr>
-          <p:cNvSpPr>
-            <a:spLocks xmlns:a="http://schemas.openxmlformats.org/drawingml/2006/main" noGrp="1"/>
-          </p:cNvSpPr>
-          <p:nvPr/>
-        </p:nvSpPr>
-        <p:spPr>
-          <a:xfrm xmlns:a="http://schemas.openxmlformats.org/drawingml/2006/main">
-            <a:off x="6477000" y="3400425"/>
-            <a:ext cx="1733550" cy="152400"/>
-          </a:xfrm>
-          <a:prstGeom xmlns:a="http://schemas.openxmlformats.org/drawingml/2006/main" prst="rect">
-            <a:avLst/>
-          </a:prstGeom>
-          <a:noFill xmlns:a="http://schemas.openxmlformats.org/drawingml/2006/main"/>
-          <a:ln xmlns:a="http://schemas.openxmlformats.org/drawingml/2006/main" w="0">
-            <a:noFill/>
-            <a:prstDash val="solid"/>
-          </a:ln>
-        </p:spPr>
-        <p:txBody>
-          <a:bodyPr xmlns:a="http://schemas.openxmlformats.org/drawingml/2006/main"/>
-          <a:lstStyle xmlns:a="http://schemas.openxmlformats.org/drawingml/2006/main"/>
-          <a:p xmlns:a="http://schemas.openxmlformats.org/drawingml/2006/main">
-            <a:pPr algn="ctr">
-              <a:defRPr sz="975" b="0" i="0">
-                <a:solidFill>
-                  <a:srgbClr val="061A45"/>
-                </a:solidFill>
-              </a:defRPr>
-            </a:pPr>
-            <a:r>
-              <a:rPr sz="975" b="0" i="0">
-                <a:solidFill>
-                  <a:srgbClr val="061A45"/>
-                </a:solidFill>
-              </a:rPr>
-              <a:t>what can be called</a:t>
-            </a:r>
-          </a:p>
-        </p:txBody>
-      </p:sp>
-      <p:sp>
-        <p:nvSpPr>
-          <p:cNvPr id="20" name="">
-            <a:extLst xmlns:a="http://schemas.openxmlformats.org/drawingml/2006/main">
-              <a:ext uri="{FF2B5EF4-FFF2-40B4-BE49-F238E27FC236}">
-                <a16:creationId xmlns:a16="http://schemas.microsoft.com/office/drawing/2014/main" id="{8800DB1B-74CB-451E-82F8-A4FD0224E836}"/>
-              </a:ext>
-            </a:extLst>
-          </p:cNvPr>
-          <p:cNvSpPr>
-            <a:spLocks xmlns:a="http://schemas.openxmlformats.org/drawingml/2006/main" noGrp="1"/>
-          </p:cNvSpPr>
-          <p:nvPr/>
-        </p:nvSpPr>
-        <p:spPr>
-          <a:xfrm xmlns:a="http://schemas.openxmlformats.org/drawingml/2006/main">
-            <a:off x="8648700" y="3124200"/>
-            <a:ext cx="2076450" cy="514350"/>
+          <p:cNvPr id="21" name="">
+            <a:extLst xmlns:a="http://schemas.openxmlformats.org/drawingml/2006/main">
+              <a:ext uri="{FF2B5EF4-FFF2-40B4-BE49-F238E27FC236}">
+                <a16:creationId xmlns:a16="http://schemas.microsoft.com/office/drawing/2014/main" id="{AFD8A1F0-683F-4C2F-AD69-8C676CD9FC03}"/>
+              </a:ext>
+            </a:extLst>
+          </p:cNvPr>
+          <p:cNvSpPr>
+            <a:spLocks xmlns:a="http://schemas.openxmlformats.org/drawingml/2006/main" noGrp="1"/>
+          </p:cNvSpPr>
+          <p:nvPr/>
+        </p:nvSpPr>
+        <p:spPr>
+          <a:xfrm xmlns:a="http://schemas.openxmlformats.org/drawingml/2006/main">
+            <a:off x="9696450" y="3848100"/>
+            <a:ext cx="1066800" cy="361950"/>
           </a:xfrm>
           <a:prstGeom xmlns:a="http://schemas.openxmlformats.org/drawingml/2006/main" prst="roundRect">
             <a:avLst>
-              <a:gd name="adj" fmla="val 11111"/>
+              <a:gd name="adj" fmla="val 15789"/>
             </a:avLst>
           </a:prstGeom>
           <a:solidFill xmlns:a="http://schemas.openxmlformats.org/drawingml/2006/main">
@@ -11644,22 +11811,22 @@
       </p:sp>
       <p:sp>
         <p:nvSpPr>
-          <p:cNvPr id="21" name="">
-            <a:extLst xmlns:a="http://schemas.openxmlformats.org/drawingml/2006/main">
-              <a:ext uri="{FF2B5EF4-FFF2-40B4-BE49-F238E27FC236}">
-                <a16:creationId xmlns:a16="http://schemas.microsoft.com/office/drawing/2014/main" id="{AB30452D-104F-4768-AEC1-C2C10F717F4F}"/>
-              </a:ext>
-            </a:extLst>
-          </p:cNvPr>
-          <p:cNvSpPr>
-            <a:spLocks xmlns:a="http://schemas.openxmlformats.org/drawingml/2006/main" noGrp="1"/>
-          </p:cNvSpPr>
-          <p:nvPr/>
-        </p:nvSpPr>
-        <p:spPr>
-          <a:xfrm xmlns:a="http://schemas.openxmlformats.org/drawingml/2006/main">
-            <a:off x="8820150" y="3200400"/>
-            <a:ext cx="1733550" cy="171450"/>
+          <p:cNvPr id="22" name="">
+            <a:extLst xmlns:a="http://schemas.openxmlformats.org/drawingml/2006/main">
+              <a:ext uri="{FF2B5EF4-FFF2-40B4-BE49-F238E27FC236}">
+                <a16:creationId xmlns:a16="http://schemas.microsoft.com/office/drawing/2014/main" id="{90DF3A15-5ABF-401B-A7E0-029A2F42E1B4}"/>
+              </a:ext>
+            </a:extLst>
+          </p:cNvPr>
+          <p:cNvSpPr>
+            <a:spLocks xmlns:a="http://schemas.openxmlformats.org/drawingml/2006/main" noGrp="1"/>
+          </p:cNvSpPr>
+          <p:nvPr/>
+        </p:nvSpPr>
+        <p:spPr>
+          <a:xfrm xmlns:a="http://schemas.openxmlformats.org/drawingml/2006/main">
+            <a:off x="9753600" y="3943350"/>
+            <a:ext cx="952500" cy="171450"/>
           </a:xfrm>
           <a:prstGeom xmlns:a="http://schemas.openxmlformats.org/drawingml/2006/main" prst="rect">
             <a:avLst/>
@@ -11687,57 +11854,7 @@
                   <a:srgbClr val="138A43"/>
                 </a:solidFill>
               </a:rPr>
-              <a:t>Permissions</a:t>
-            </a:r>
-          </a:p>
-        </p:txBody>
-      </p:sp>
-      <p:sp>
-        <p:nvSpPr>
-          <p:cNvPr id="22" name="">
-            <a:extLst xmlns:a="http://schemas.openxmlformats.org/drawingml/2006/main">
-              <a:ext uri="{FF2B5EF4-FFF2-40B4-BE49-F238E27FC236}">
-                <a16:creationId xmlns:a16="http://schemas.microsoft.com/office/drawing/2014/main" id="{8B30CBF8-5BE5-4548-99BB-565602C0F956}"/>
-              </a:ext>
-            </a:extLst>
-          </p:cNvPr>
-          <p:cNvSpPr>
-            <a:spLocks xmlns:a="http://schemas.openxmlformats.org/drawingml/2006/main" noGrp="1"/>
-          </p:cNvSpPr>
-          <p:nvPr/>
-        </p:nvSpPr>
-        <p:spPr>
-          <a:xfrm xmlns:a="http://schemas.openxmlformats.org/drawingml/2006/main">
-            <a:off x="8820150" y="3400425"/>
-            <a:ext cx="1733550" cy="152400"/>
-          </a:xfrm>
-          <a:prstGeom xmlns:a="http://schemas.openxmlformats.org/drawingml/2006/main" prst="rect">
-            <a:avLst/>
-          </a:prstGeom>
-          <a:noFill xmlns:a="http://schemas.openxmlformats.org/drawingml/2006/main"/>
-          <a:ln xmlns:a="http://schemas.openxmlformats.org/drawingml/2006/main" w="0">
-            <a:noFill/>
-            <a:prstDash val="solid"/>
-          </a:ln>
-        </p:spPr>
-        <p:txBody>
-          <a:bodyPr xmlns:a="http://schemas.openxmlformats.org/drawingml/2006/main"/>
-          <a:lstStyle xmlns:a="http://schemas.openxmlformats.org/drawingml/2006/main"/>
-          <a:p xmlns:a="http://schemas.openxmlformats.org/drawingml/2006/main">
-            <a:pPr algn="ctr">
-              <a:defRPr sz="975" b="0" i="0">
-                <a:solidFill>
-                  <a:srgbClr val="061A45"/>
-                </a:solidFill>
-              </a:defRPr>
-            </a:pPr>
-            <a:r>
-              <a:rPr sz="975" b="0" i="0">
-                <a:solidFill>
-                  <a:srgbClr val="061A45"/>
-                </a:solidFill>
-              </a:rPr>
-              <a:t>what needs approval</a:t>
+              <a:t>Access</a:t>
             </a:r>
           </a:p>
         </p:txBody>
@@ -11747,23 +11864,23 @@
           <p:cNvPr id="23" name="">
             <a:extLst xmlns:a="http://schemas.openxmlformats.org/drawingml/2006/main">
               <a:ext uri="{FF2B5EF4-FFF2-40B4-BE49-F238E27FC236}">
-                <a16:creationId xmlns:a16="http://schemas.microsoft.com/office/drawing/2014/main" id="{6C6C1BBE-0AC8-4CE0-8D2C-56B6B047CC37}"/>
-              </a:ext>
-            </a:extLst>
-          </p:cNvPr>
-          <p:cNvSpPr>
-            <a:spLocks xmlns:a="http://schemas.openxmlformats.org/drawingml/2006/main" noGrp="1"/>
-          </p:cNvSpPr>
-          <p:nvPr/>
-        </p:nvSpPr>
-        <p:spPr>
-          <a:xfrm xmlns:a="http://schemas.openxmlformats.org/drawingml/2006/main">
-            <a:off x="6305550" y="3848100"/>
-            <a:ext cx="2076450" cy="514350"/>
+                <a16:creationId xmlns:a16="http://schemas.microsoft.com/office/drawing/2014/main" id="{BE521814-6FD3-48E3-B8FE-F9E17B76BF6F}"/>
+              </a:ext>
+            </a:extLst>
+          </p:cNvPr>
+          <p:cNvSpPr>
+            <a:spLocks xmlns:a="http://schemas.openxmlformats.org/drawingml/2006/main" noGrp="1"/>
+          </p:cNvSpPr>
+          <p:nvPr/>
+        </p:nvSpPr>
+        <p:spPr>
+          <a:xfrm xmlns:a="http://schemas.openxmlformats.org/drawingml/2006/main">
+            <a:off x="8496300" y="4324350"/>
+            <a:ext cx="1066800" cy="361950"/>
           </a:xfrm>
           <a:prstGeom xmlns:a="http://schemas.openxmlformats.org/drawingml/2006/main" prst="roundRect">
             <a:avLst>
-              <a:gd name="adj" fmla="val 11111"/>
+              <a:gd name="adj" fmla="val 15789"/>
             </a:avLst>
           </a:prstGeom>
           <a:solidFill xmlns:a="http://schemas.openxmlformats.org/drawingml/2006/main">
@@ -11782,19 +11899,19 @@
           <p:cNvPr id="24" name="">
             <a:extLst xmlns:a="http://schemas.openxmlformats.org/drawingml/2006/main">
               <a:ext uri="{FF2B5EF4-FFF2-40B4-BE49-F238E27FC236}">
-                <a16:creationId xmlns:a16="http://schemas.microsoft.com/office/drawing/2014/main" id="{17D1326F-6ECC-4C9F-9D06-20C0C4FCC28A}"/>
-              </a:ext>
-            </a:extLst>
-          </p:cNvPr>
-          <p:cNvSpPr>
-            <a:spLocks xmlns:a="http://schemas.openxmlformats.org/drawingml/2006/main" noGrp="1"/>
-          </p:cNvSpPr>
-          <p:nvPr/>
-        </p:nvSpPr>
-        <p:spPr>
-          <a:xfrm xmlns:a="http://schemas.openxmlformats.org/drawingml/2006/main">
-            <a:off x="6477000" y="3924300"/>
-            <a:ext cx="1733550" cy="171450"/>
+                <a16:creationId xmlns:a16="http://schemas.microsoft.com/office/drawing/2014/main" id="{90EDBF49-F2DE-4B6C-A147-B287FA249F68}"/>
+              </a:ext>
+            </a:extLst>
+          </p:cNvPr>
+          <p:cNvSpPr>
+            <a:spLocks xmlns:a="http://schemas.openxmlformats.org/drawingml/2006/main" noGrp="1"/>
+          </p:cNvSpPr>
+          <p:nvPr/>
+        </p:nvSpPr>
+        <p:spPr>
+          <a:xfrm xmlns:a="http://schemas.openxmlformats.org/drawingml/2006/main">
+            <a:off x="8553450" y="4419600"/>
+            <a:ext cx="952500" cy="171450"/>
           </a:xfrm>
           <a:prstGeom xmlns:a="http://schemas.openxmlformats.org/drawingml/2006/main" prst="rect">
             <a:avLst/>
@@ -11822,7 +11939,7 @@
                   <a:srgbClr val="138A43"/>
                 </a:solidFill>
               </a:rPr>
-              <a:t>Task boundary</a:t>
+              <a:t>Boundary</a:t>
             </a:r>
           </a:p>
         </p:txBody>
@@ -11832,73 +11949,23 @@
           <p:cNvPr id="25" name="">
             <a:extLst xmlns:a="http://schemas.openxmlformats.org/drawingml/2006/main">
               <a:ext uri="{FF2B5EF4-FFF2-40B4-BE49-F238E27FC236}">
-                <a16:creationId xmlns:a16="http://schemas.microsoft.com/office/drawing/2014/main" id="{2591D975-3729-4041-9708-A6E2CEB1B05B}"/>
-              </a:ext>
-            </a:extLst>
-          </p:cNvPr>
-          <p:cNvSpPr>
-            <a:spLocks xmlns:a="http://schemas.openxmlformats.org/drawingml/2006/main" noGrp="1"/>
-          </p:cNvSpPr>
-          <p:nvPr/>
-        </p:nvSpPr>
-        <p:spPr>
-          <a:xfrm xmlns:a="http://schemas.openxmlformats.org/drawingml/2006/main">
-            <a:off x="6477000" y="4124325"/>
-            <a:ext cx="1733550" cy="152400"/>
-          </a:xfrm>
-          <a:prstGeom xmlns:a="http://schemas.openxmlformats.org/drawingml/2006/main" prst="rect">
-            <a:avLst/>
-          </a:prstGeom>
-          <a:noFill xmlns:a="http://schemas.openxmlformats.org/drawingml/2006/main"/>
-          <a:ln xmlns:a="http://schemas.openxmlformats.org/drawingml/2006/main" w="0">
-            <a:noFill/>
-            <a:prstDash val="solid"/>
-          </a:ln>
-        </p:spPr>
-        <p:txBody>
-          <a:bodyPr xmlns:a="http://schemas.openxmlformats.org/drawingml/2006/main"/>
-          <a:lstStyle xmlns:a="http://schemas.openxmlformats.org/drawingml/2006/main"/>
-          <a:p xmlns:a="http://schemas.openxmlformats.org/drawingml/2006/main">
-            <a:pPr algn="ctr">
-              <a:defRPr sz="975" b="0" i="0">
-                <a:solidFill>
-                  <a:srgbClr val="061A45"/>
-                </a:solidFill>
-              </a:defRPr>
-            </a:pPr>
-            <a:r>
-              <a:rPr sz="975" b="0" i="0">
-                <a:solidFill>
-                  <a:srgbClr val="061A45"/>
-                </a:solidFill>
-              </a:rPr>
-              <a:t>what it should refuse or stop</a:t>
-            </a:r>
-          </a:p>
-        </p:txBody>
-      </p:sp>
-      <p:sp>
-        <p:nvSpPr>
-          <p:cNvPr id="26" name="">
-            <a:extLst xmlns:a="http://schemas.openxmlformats.org/drawingml/2006/main">
-              <a:ext uri="{FF2B5EF4-FFF2-40B4-BE49-F238E27FC236}">
-                <a16:creationId xmlns:a16="http://schemas.microsoft.com/office/drawing/2014/main" id="{1A59A60D-52E2-4429-BE80-34CD7B573F26}"/>
-              </a:ext>
-            </a:extLst>
-          </p:cNvPr>
-          <p:cNvSpPr>
-            <a:spLocks xmlns:a="http://schemas.openxmlformats.org/drawingml/2006/main" noGrp="1"/>
-          </p:cNvSpPr>
-          <p:nvPr/>
-        </p:nvSpPr>
-        <p:spPr>
-          <a:xfrm xmlns:a="http://schemas.openxmlformats.org/drawingml/2006/main">
-            <a:off x="8648700" y="3848100"/>
-            <a:ext cx="2076450" cy="514350"/>
+                <a16:creationId xmlns:a16="http://schemas.microsoft.com/office/drawing/2014/main" id="{8E729AB1-8D82-40A0-A622-91CFD11AC75B}"/>
+              </a:ext>
+            </a:extLst>
+          </p:cNvPr>
+          <p:cNvSpPr>
+            <a:spLocks xmlns:a="http://schemas.openxmlformats.org/drawingml/2006/main" noGrp="1"/>
+          </p:cNvSpPr>
+          <p:nvPr/>
+        </p:nvSpPr>
+        <p:spPr>
+          <a:xfrm xmlns:a="http://schemas.openxmlformats.org/drawingml/2006/main">
+            <a:off x="9696450" y="4324350"/>
+            <a:ext cx="1066800" cy="361950"/>
           </a:xfrm>
           <a:prstGeom xmlns:a="http://schemas.openxmlformats.org/drawingml/2006/main" prst="roundRect">
             <a:avLst>
-              <a:gd name="adj" fmla="val 11111"/>
+              <a:gd name="adj" fmla="val 15789"/>
             </a:avLst>
           </a:prstGeom>
           <a:solidFill xmlns:a="http://schemas.openxmlformats.org/drawingml/2006/main">
@@ -11914,22 +11981,22 @@
       </p:sp>
       <p:sp>
         <p:nvSpPr>
-          <p:cNvPr id="27" name="">
-            <a:extLst xmlns:a="http://schemas.openxmlformats.org/drawingml/2006/main">
-              <a:ext uri="{FF2B5EF4-FFF2-40B4-BE49-F238E27FC236}">
-                <a16:creationId xmlns:a16="http://schemas.microsoft.com/office/drawing/2014/main" id="{56B739DD-383D-490C-AE70-4712BAF0803E}"/>
-              </a:ext>
-            </a:extLst>
-          </p:cNvPr>
-          <p:cNvSpPr>
-            <a:spLocks xmlns:a="http://schemas.openxmlformats.org/drawingml/2006/main" noGrp="1"/>
-          </p:cNvSpPr>
-          <p:nvPr/>
-        </p:nvSpPr>
-        <p:spPr>
-          <a:xfrm xmlns:a="http://schemas.openxmlformats.org/drawingml/2006/main">
-            <a:off x="8820150" y="3924300"/>
-            <a:ext cx="1733550" cy="171450"/>
+          <p:cNvPr id="26" name="">
+            <a:extLst xmlns:a="http://schemas.openxmlformats.org/drawingml/2006/main">
+              <a:ext uri="{FF2B5EF4-FFF2-40B4-BE49-F238E27FC236}">
+                <a16:creationId xmlns:a16="http://schemas.microsoft.com/office/drawing/2014/main" id="{028D5237-E2FE-4C31-B93E-AD65A3FEF304}"/>
+              </a:ext>
+            </a:extLst>
+          </p:cNvPr>
+          <p:cNvSpPr>
+            <a:spLocks xmlns:a="http://schemas.openxmlformats.org/drawingml/2006/main" noGrp="1"/>
+          </p:cNvSpPr>
+          <p:nvPr/>
+        </p:nvSpPr>
+        <p:spPr>
+          <a:xfrm xmlns:a="http://schemas.openxmlformats.org/drawingml/2006/main">
+            <a:off x="9753600" y="4419600"/>
+            <a:ext cx="952500" cy="171450"/>
           </a:xfrm>
           <a:prstGeom xmlns:a="http://schemas.openxmlformats.org/drawingml/2006/main" prst="rect">
             <a:avLst/>
@@ -11957,83 +12024,33 @@
                   <a:srgbClr val="138A43"/>
                 </a:solidFill>
               </a:rPr>
-              <a:t>Quality standard</a:t>
-            </a:r>
-          </a:p>
-        </p:txBody>
-      </p:sp>
-      <p:sp>
-        <p:nvSpPr>
-          <p:cNvPr id="28" name="">
-            <a:extLst xmlns:a="http://schemas.openxmlformats.org/drawingml/2006/main">
-              <a:ext uri="{FF2B5EF4-FFF2-40B4-BE49-F238E27FC236}">
-                <a16:creationId xmlns:a16="http://schemas.microsoft.com/office/drawing/2014/main" id="{3CC58A56-BF93-4FEC-B652-6D18D90D8FCB}"/>
-              </a:ext>
-            </a:extLst>
-          </p:cNvPr>
-          <p:cNvSpPr>
-            <a:spLocks xmlns:a="http://schemas.openxmlformats.org/drawingml/2006/main" noGrp="1"/>
-          </p:cNvSpPr>
-          <p:nvPr/>
-        </p:nvSpPr>
-        <p:spPr>
-          <a:xfrm xmlns:a="http://schemas.openxmlformats.org/drawingml/2006/main">
-            <a:off x="8820150" y="4124325"/>
-            <a:ext cx="1733550" cy="152400"/>
-          </a:xfrm>
-          <a:prstGeom xmlns:a="http://schemas.openxmlformats.org/drawingml/2006/main" prst="rect">
-            <a:avLst/>
-          </a:prstGeom>
-          <a:noFill xmlns:a="http://schemas.openxmlformats.org/drawingml/2006/main"/>
-          <a:ln xmlns:a="http://schemas.openxmlformats.org/drawingml/2006/main" w="0">
-            <a:noFill/>
-            <a:prstDash val="solid"/>
-          </a:ln>
-        </p:spPr>
-        <p:txBody>
-          <a:bodyPr xmlns:a="http://schemas.openxmlformats.org/drawingml/2006/main"/>
-          <a:lstStyle xmlns:a="http://schemas.openxmlformats.org/drawingml/2006/main"/>
-          <a:p xmlns:a="http://schemas.openxmlformats.org/drawingml/2006/main">
-            <a:pPr algn="ctr">
-              <a:defRPr sz="975" b="0" i="0">
-                <a:solidFill>
-                  <a:srgbClr val="061A45"/>
-                </a:solidFill>
-              </a:defRPr>
-            </a:pPr>
-            <a:r>
-              <a:rPr sz="975" b="0" i="0">
-                <a:solidFill>
-                  <a:srgbClr val="061A45"/>
-                </a:solidFill>
-              </a:rPr>
-              <a:t>how done is judged</a:t>
-            </a:r>
-          </a:p>
-        </p:txBody>
-      </p:sp>
-      <p:sp>
-        <p:nvSpPr>
-          <p:cNvPr id="29" name="">
-            <a:extLst xmlns:a="http://schemas.openxmlformats.org/drawingml/2006/main">
-              <a:ext uri="{FF2B5EF4-FFF2-40B4-BE49-F238E27FC236}">
-                <a16:creationId xmlns:a16="http://schemas.microsoft.com/office/drawing/2014/main" id="{679D34E2-8A6F-4937-BCB0-158BC1D072CE}"/>
-              </a:ext>
-            </a:extLst>
-          </p:cNvPr>
-          <p:cNvSpPr>
-            <a:spLocks xmlns:a="http://schemas.openxmlformats.org/drawingml/2006/main" noGrp="1"/>
-          </p:cNvSpPr>
-          <p:nvPr/>
-        </p:nvSpPr>
-        <p:spPr>
-          <a:xfrm xmlns:a="http://schemas.openxmlformats.org/drawingml/2006/main">
-            <a:off x="1676400" y="5924550"/>
-            <a:ext cx="8839200" cy="400050"/>
+              <a:t>Stop</a:t>
+            </a:r>
+          </a:p>
+        </p:txBody>
+      </p:sp>
+      <p:sp>
+        <p:nvSpPr>
+          <p:cNvPr id="27" name="">
+            <a:extLst xmlns:a="http://schemas.openxmlformats.org/drawingml/2006/main">
+              <a:ext uri="{FF2B5EF4-FFF2-40B4-BE49-F238E27FC236}">
+                <a16:creationId xmlns:a16="http://schemas.microsoft.com/office/drawing/2014/main" id="{5031162C-967B-4E2E-B123-50FEF76B1FD7}"/>
+              </a:ext>
+            </a:extLst>
+          </p:cNvPr>
+          <p:cNvSpPr>
+            <a:spLocks xmlns:a="http://schemas.openxmlformats.org/drawingml/2006/main" noGrp="1"/>
+          </p:cNvSpPr>
+          <p:nvPr/>
+        </p:nvSpPr>
+        <p:spPr>
+          <a:xfrm xmlns:a="http://schemas.openxmlformats.org/drawingml/2006/main">
+            <a:off x="1352550" y="5772150"/>
+            <a:ext cx="9486900" cy="495300"/>
           </a:xfrm>
           <a:prstGeom xmlns:a="http://schemas.openxmlformats.org/drawingml/2006/main" prst="roundRect">
             <a:avLst>
-              <a:gd name="adj" fmla="val 19048"/>
+              <a:gd name="adj" fmla="val 15385"/>
             </a:avLst>
           </a:prstGeom>
           <a:solidFill xmlns:a="http://schemas.openxmlformats.org/drawingml/2006/main">
@@ -12049,50 +12066,100 @@
       </p:sp>
       <p:sp>
         <p:nvSpPr>
-          <p:cNvPr id="30" name="">
-            <a:extLst xmlns:a="http://schemas.openxmlformats.org/drawingml/2006/main">
-              <a:ext uri="{FF2B5EF4-FFF2-40B4-BE49-F238E27FC236}">
-                <a16:creationId xmlns:a16="http://schemas.microsoft.com/office/drawing/2014/main" id="{AA284E11-0B50-4F50-9020-662BB9EF169B}"/>
-              </a:ext>
-            </a:extLst>
-          </p:cNvPr>
-          <p:cNvSpPr>
-            <a:spLocks xmlns:a="http://schemas.openxmlformats.org/drawingml/2006/main" noGrp="1"/>
-          </p:cNvSpPr>
-          <p:nvPr/>
-        </p:nvSpPr>
-        <p:spPr>
-          <a:xfrm xmlns:a="http://schemas.openxmlformats.org/drawingml/2006/main">
-            <a:off x="2095500" y="6029325"/>
-            <a:ext cx="8001000" cy="171450"/>
-          </a:xfrm>
-          <a:prstGeom xmlns:a="http://schemas.openxmlformats.org/drawingml/2006/main" prst="rect">
-            <a:avLst/>
-          </a:prstGeom>
-          <a:noFill xmlns:a="http://schemas.openxmlformats.org/drawingml/2006/main"/>
-          <a:ln xmlns:a="http://schemas.openxmlformats.org/drawingml/2006/main" w="0">
-            <a:noFill/>
-            <a:prstDash val="solid"/>
-          </a:ln>
-        </p:spPr>
-        <p:txBody>
-          <a:bodyPr xmlns:a="http://schemas.openxmlformats.org/drawingml/2006/main"/>
-          <a:lstStyle xmlns:a="http://schemas.openxmlformats.org/drawingml/2006/main"/>
-          <a:p xmlns:a="http://schemas.openxmlformats.org/drawingml/2006/main">
-            <a:pPr algn="ctr">
-              <a:defRPr sz="1275" b="1" i="0">
-                <a:solidFill>
-                  <a:srgbClr val="061A45"/>
-                </a:solidFill>
-              </a:defRPr>
-            </a:pPr>
-            <a:r>
-              <a:rPr sz="1275" b="1" i="0">
-                <a:solidFill>
-                  <a:srgbClr val="061A45"/>
-                </a:solidFill>
-              </a:rPr>
-              <a:t>Lesson boundary: this is one runtime profile, not a Lesson 3 subagent workflow.</a:t>
+          <p:cNvPr id="28" name="">
+            <a:extLst xmlns:a="http://schemas.openxmlformats.org/drawingml/2006/main">
+              <a:ext uri="{FF2B5EF4-FFF2-40B4-BE49-F238E27FC236}">
+                <a16:creationId xmlns:a16="http://schemas.microsoft.com/office/drawing/2014/main" id="{1550D0DD-3B99-463F-ACBC-60A24E0E18A4}"/>
+              </a:ext>
+            </a:extLst>
+          </p:cNvPr>
+          <p:cNvSpPr>
+            <a:spLocks xmlns:a="http://schemas.openxmlformats.org/drawingml/2006/main" noGrp="1"/>
+          </p:cNvSpPr>
+          <p:nvPr/>
+        </p:nvSpPr>
+        <p:spPr>
+          <a:xfrm xmlns:a="http://schemas.openxmlformats.org/drawingml/2006/main">
+            <a:off x="1695450" y="5924550"/>
+            <a:ext cx="1200150" cy="209550"/>
+          </a:xfrm>
+          <a:prstGeom xmlns:a="http://schemas.openxmlformats.org/drawingml/2006/main" prst="rect">
+            <a:avLst/>
+          </a:prstGeom>
+          <a:noFill xmlns:a="http://schemas.openxmlformats.org/drawingml/2006/main"/>
+          <a:ln xmlns:a="http://schemas.openxmlformats.org/drawingml/2006/main" w="0">
+            <a:noFill/>
+            <a:prstDash val="solid"/>
+          </a:ln>
+        </p:spPr>
+        <p:txBody>
+          <a:bodyPr xmlns:a="http://schemas.openxmlformats.org/drawingml/2006/main"/>
+          <a:lstStyle xmlns:a="http://schemas.openxmlformats.org/drawingml/2006/main"/>
+          <a:p xmlns:a="http://schemas.openxmlformats.org/drawingml/2006/main">
+            <a:pPr algn="l">
+              <a:defRPr sz="1500" b="1" i="0">
+                <a:solidFill>
+                  <a:srgbClr val="D88A00"/>
+                </a:solidFill>
+              </a:defRPr>
+            </a:pPr>
+            <a:r>
+              <a:rPr sz="1500" b="1" i="0">
+                <a:solidFill>
+                  <a:srgbClr val="D88A00"/>
+                </a:solidFill>
+              </a:rPr>
+              <a:t>Boundary</a:t>
+            </a:r>
+          </a:p>
+        </p:txBody>
+      </p:sp>
+      <p:sp>
+        <p:nvSpPr>
+          <p:cNvPr id="29" name="">
+            <a:extLst xmlns:a="http://schemas.openxmlformats.org/drawingml/2006/main">
+              <a:ext uri="{FF2B5EF4-FFF2-40B4-BE49-F238E27FC236}">
+                <a16:creationId xmlns:a16="http://schemas.microsoft.com/office/drawing/2014/main" id="{3C7D1057-111F-4839-99AB-6386E255E33D}"/>
+              </a:ext>
+            </a:extLst>
+          </p:cNvPr>
+          <p:cNvSpPr>
+            <a:spLocks xmlns:a="http://schemas.openxmlformats.org/drawingml/2006/main" noGrp="1"/>
+          </p:cNvSpPr>
+          <p:nvPr/>
+        </p:nvSpPr>
+        <p:spPr>
+          <a:xfrm xmlns:a="http://schemas.openxmlformats.org/drawingml/2006/main">
+            <a:off x="3086100" y="5924550"/>
+            <a:ext cx="7239000" cy="209550"/>
+          </a:xfrm>
+          <a:prstGeom xmlns:a="http://schemas.openxmlformats.org/drawingml/2006/main" prst="rect">
+            <a:avLst/>
+          </a:prstGeom>
+          <a:noFill xmlns:a="http://schemas.openxmlformats.org/drawingml/2006/main"/>
+          <a:ln xmlns:a="http://schemas.openxmlformats.org/drawingml/2006/main" w="0">
+            <a:noFill/>
+            <a:prstDash val="solid"/>
+          </a:ln>
+        </p:spPr>
+        <p:txBody>
+          <a:bodyPr xmlns:a="http://schemas.openxmlformats.org/drawingml/2006/main"/>
+          <a:lstStyle xmlns:a="http://schemas.openxmlformats.org/drawingml/2006/main"/>
+          <a:p xmlns:a="http://schemas.openxmlformats.org/drawingml/2006/main">
+            <a:pPr algn="l">
+              <a:defRPr sz="1350" b="0" i="0">
+                <a:solidFill>
+                  <a:srgbClr val="061A45"/>
+                </a:solidFill>
+              </a:defRPr>
+            </a:pPr>
+            <a:r>
+              <a:rPr sz="1350" b="0" i="0">
+                <a:solidFill>
+                  <a:srgbClr val="061A45"/>
+                </a:solidFill>
+              </a:rPr>
+              <a:t>A profile becomes a subagent only when the runtime starts a separate run.</a:t>
             </a:r>
           </a:p>
         </p:txBody>
@@ -12100,7 +12167,7 @@
     </p:spTree>
     <p:extLst>
       <p:ext uri="{BB962C8B-B14F-4D97-AF65-F5344CB8AC3E}">
-        <p14:creationId xmlns:p14="http://schemas.microsoft.com/office/powerpoint/2010/main" val="1136854200"/>
+        <p14:creationId xmlns:p14="http://schemas.microsoft.com/office/powerpoint/2010/main" val="112711569"/>
       </p:ext>
     </p:extLst>
   </p:cSld>
@@ -12131,7 +12198,7 @@
           <p:cNvPr id="1" name="">
             <a:extLst xmlns:a="http://schemas.openxmlformats.org/drawingml/2006/main">
               <a:ext uri="{FF2B5EF4-FFF2-40B4-BE49-F238E27FC236}">
-                <a16:creationId xmlns:a16="http://schemas.microsoft.com/office/drawing/2014/main" id="{AD8E0283-5D85-41B1-92AD-5560FC182C36}"/>
+                <a16:creationId xmlns:a16="http://schemas.microsoft.com/office/drawing/2014/main" id="{D486CC29-0D45-432B-8204-AC31AA66F3D1}"/>
               </a:ext>
             </a:extLst>
           </p:cNvPr>
@@ -12171,7 +12238,7 @@
                   <a:srgbClr val="061A45"/>
                 </a:solidFill>
               </a:rPr>
-              <a:t>A Skill Is a Reusable Manual Loaded When Relevant</a:t>
+              <a:t>A Skill Is a Dynamic Custom Prompt Pack</a:t>
             </a:r>
           </a:p>
         </p:txBody>
@@ -12181,7 +12248,7 @@
           <p:cNvPr id="2" name="">
             <a:extLst xmlns:a="http://schemas.openxmlformats.org/drawingml/2006/main">
               <a:ext uri="{FF2B5EF4-FFF2-40B4-BE49-F238E27FC236}">
-                <a16:creationId xmlns:a16="http://schemas.microsoft.com/office/drawing/2014/main" id="{6D5B8670-6EA1-4AF7-9F1F-5265BB54C9B1}"/>
+                <a16:creationId xmlns:a16="http://schemas.microsoft.com/office/drawing/2014/main" id="{FD9CE829-CF4F-4150-AA7E-E00148E1D139}"/>
               </a:ext>
             </a:extLst>
           </p:cNvPr>
@@ -12221,7 +12288,7 @@
                   <a:srgbClr val="004AAD"/>
                 </a:solidFill>
               </a:rPr>
-              <a:t>It teaches the runtime how to do a repeated task pattern.</a:t>
+              <a:t>Load the relevant manual only when the task needs it.</a:t>
             </a:r>
           </a:p>
         </p:txBody>
@@ -12231,7 +12298,7 @@
           <p:cNvPr id="3" name="">
             <a:extLst xmlns:a="http://schemas.openxmlformats.org/drawingml/2006/main">
               <a:ext uri="{FF2B5EF4-FFF2-40B4-BE49-F238E27FC236}">
-                <a16:creationId xmlns:a16="http://schemas.microsoft.com/office/drawing/2014/main" id="{9FAF71B1-43A1-49E0-99FC-2F80D7820A68}"/>
+                <a16:creationId xmlns:a16="http://schemas.microsoft.com/office/drawing/2014/main" id="{103A522F-90EC-49ED-9261-BB35743F2FCC}"/>
               </a:ext>
             </a:extLst>
           </p:cNvPr>
@@ -12261,23 +12328,1163 @@
           <p:cNvPr id="4" name="">
             <a:extLst xmlns:a="http://schemas.openxmlformats.org/drawingml/2006/main">
               <a:ext uri="{FF2B5EF4-FFF2-40B4-BE49-F238E27FC236}">
-                <a16:creationId xmlns:a16="http://schemas.microsoft.com/office/drawing/2014/main" id="{0FDE1EB0-0555-471D-BBB5-79D996A7B67F}"/>
-              </a:ext>
-            </a:extLst>
-          </p:cNvPr>
-          <p:cNvSpPr>
-            <a:spLocks xmlns:a="http://schemas.openxmlformats.org/drawingml/2006/main" noGrp="1"/>
-          </p:cNvSpPr>
-          <p:nvPr/>
-        </p:nvSpPr>
-        <p:spPr>
-          <a:xfrm xmlns:a="http://schemas.openxmlformats.org/drawingml/2006/main">
-            <a:off x="704850" y="1619250"/>
-            <a:ext cx="3371850" cy="3524250"/>
+                <a16:creationId xmlns:a16="http://schemas.microsoft.com/office/drawing/2014/main" id="{FC22EA78-277A-40FE-BCA7-2A2C0524CDE2}"/>
+              </a:ext>
+            </a:extLst>
+          </p:cNvPr>
+          <p:cNvSpPr>
+            <a:spLocks xmlns:a="http://schemas.openxmlformats.org/drawingml/2006/main" noGrp="1"/>
+          </p:cNvSpPr>
+          <p:nvPr/>
+        </p:nvSpPr>
+        <p:spPr>
+          <a:xfrm xmlns:a="http://schemas.openxmlformats.org/drawingml/2006/main">
+            <a:off x="647700" y="1638300"/>
+            <a:ext cx="3143250" cy="3333750"/>
           </a:xfrm>
           <a:prstGeom xmlns:a="http://schemas.openxmlformats.org/drawingml/2006/main" prst="roundRect">
             <a:avLst>
-              <a:gd name="adj" fmla="val 2260"/>
+              <a:gd name="adj" fmla="val 2424"/>
+            </a:avLst>
+          </a:prstGeom>
+          <a:solidFill xmlns:a="http://schemas.openxmlformats.org/drawingml/2006/main">
+            <a:srgbClr val="FFF5F5"/>
+          </a:solidFill>
+          <a:ln xmlns:a="http://schemas.openxmlformats.org/drawingml/2006/main" w="10478">
+            <a:solidFill>
+              <a:srgbClr val="F0B5B5"/>
+            </a:solidFill>
+            <a:prstDash val="solid"/>
+          </a:ln>
+        </p:spPr>
+      </p:sp>
+      <p:sp>
+        <p:nvSpPr>
+          <p:cNvPr id="5" name="">
+            <a:extLst xmlns:a="http://schemas.openxmlformats.org/drawingml/2006/main">
+              <a:ext uri="{FF2B5EF4-FFF2-40B4-BE49-F238E27FC236}">
+                <a16:creationId xmlns:a16="http://schemas.microsoft.com/office/drawing/2014/main" id="{B7AE6376-799D-4E19-8F96-62AB0F5570E7}"/>
+              </a:ext>
+            </a:extLst>
+          </p:cNvPr>
+          <p:cNvSpPr>
+            <a:spLocks xmlns:a="http://schemas.openxmlformats.org/drawingml/2006/main" noGrp="1"/>
+          </p:cNvSpPr>
+          <p:nvPr/>
+        </p:nvSpPr>
+        <p:spPr>
+          <a:xfrm xmlns:a="http://schemas.openxmlformats.org/drawingml/2006/main">
+            <a:off x="1066800" y="1962150"/>
+            <a:ext cx="2305050" cy="285750"/>
+          </a:xfrm>
+          <a:prstGeom xmlns:a="http://schemas.openxmlformats.org/drawingml/2006/main" prst="rect">
+            <a:avLst/>
+          </a:prstGeom>
+          <a:noFill xmlns:a="http://schemas.openxmlformats.org/drawingml/2006/main"/>
+          <a:ln xmlns:a="http://schemas.openxmlformats.org/drawingml/2006/main" w="0">
+            <a:noFill/>
+            <a:prstDash val="solid"/>
+          </a:ln>
+        </p:spPr>
+        <p:txBody>
+          <a:bodyPr xmlns:a="http://schemas.openxmlformats.org/drawingml/2006/main"/>
+          <a:lstStyle xmlns:a="http://schemas.openxmlformats.org/drawingml/2006/main"/>
+          <a:p xmlns:a="http://schemas.openxmlformats.org/drawingml/2006/main">
+            <a:pPr algn="ctr">
+              <a:defRPr sz="2100" b="1" i="0">
+                <a:solidFill>
+                  <a:srgbClr val="CC2B2B"/>
+                </a:solidFill>
+              </a:defRPr>
+            </a:pPr>
+            <a:r>
+              <a:rPr sz="2100" b="1" i="0">
+                <a:solidFill>
+                  <a:srgbClr val="CC2B2B"/>
+                </a:solidFill>
+              </a:rPr>
+              <a:t>Bad loading</a:t>
+            </a:r>
+          </a:p>
+        </p:txBody>
+      </p:sp>
+      <p:sp>
+        <p:nvSpPr>
+          <p:cNvPr id="6" name="">
+            <a:extLst xmlns:a="http://schemas.openxmlformats.org/drawingml/2006/main">
+              <a:ext uri="{FF2B5EF4-FFF2-40B4-BE49-F238E27FC236}">
+                <a16:creationId xmlns:a16="http://schemas.microsoft.com/office/drawing/2014/main" id="{342B9E18-9AD4-4906-950E-70192EE66D85}"/>
+              </a:ext>
+            </a:extLst>
+          </p:cNvPr>
+          <p:cNvSpPr>
+            <a:spLocks xmlns:a="http://schemas.openxmlformats.org/drawingml/2006/main" noGrp="1"/>
+          </p:cNvSpPr>
+          <p:nvPr/>
+        </p:nvSpPr>
+        <p:spPr>
+          <a:xfrm xmlns:a="http://schemas.openxmlformats.org/drawingml/2006/main">
+            <a:off x="1066800" y="2495550"/>
+            <a:ext cx="2305050" cy="285750"/>
+          </a:xfrm>
+          <a:prstGeom xmlns:a="http://schemas.openxmlformats.org/drawingml/2006/main" prst="roundRect">
+            <a:avLst>
+              <a:gd name="adj" fmla="val 20000"/>
+            </a:avLst>
+          </a:prstGeom>
+          <a:solidFill xmlns:a="http://schemas.openxmlformats.org/drawingml/2006/main">
+            <a:srgbClr val="FFFFFF"/>
+          </a:solidFill>
+          <a:ln xmlns:a="http://schemas.openxmlformats.org/drawingml/2006/main" w="10478">
+            <a:solidFill>
+              <a:srgbClr val="F0B5B5"/>
+            </a:solidFill>
+            <a:prstDash val="solid"/>
+          </a:ln>
+        </p:spPr>
+      </p:sp>
+      <p:sp>
+        <p:nvSpPr>
+          <p:cNvPr id="7" name="">
+            <a:extLst xmlns:a="http://schemas.openxmlformats.org/drawingml/2006/main">
+              <a:ext uri="{FF2B5EF4-FFF2-40B4-BE49-F238E27FC236}">
+                <a16:creationId xmlns:a16="http://schemas.microsoft.com/office/drawing/2014/main" id="{44DCB293-0562-47AA-9AE9-5E16D3963F93}"/>
+              </a:ext>
+            </a:extLst>
+          </p:cNvPr>
+          <p:cNvSpPr>
+            <a:spLocks xmlns:a="http://schemas.openxmlformats.org/drawingml/2006/main" noGrp="1"/>
+          </p:cNvSpPr>
+          <p:nvPr/>
+        </p:nvSpPr>
+        <p:spPr>
+          <a:xfrm xmlns:a="http://schemas.openxmlformats.org/drawingml/2006/main">
+            <a:off x="1257300" y="2562225"/>
+            <a:ext cx="1924050" cy="152400"/>
+          </a:xfrm>
+          <a:prstGeom xmlns:a="http://schemas.openxmlformats.org/drawingml/2006/main" prst="rect">
+            <a:avLst/>
+          </a:prstGeom>
+          <a:noFill xmlns:a="http://schemas.openxmlformats.org/drawingml/2006/main"/>
+          <a:ln xmlns:a="http://schemas.openxmlformats.org/drawingml/2006/main" w="0">
+            <a:noFill/>
+            <a:prstDash val="solid"/>
+          </a:ln>
+        </p:spPr>
+        <p:txBody>
+          <a:bodyPr xmlns:a="http://schemas.openxmlformats.org/drawingml/2006/main"/>
+          <a:lstStyle xmlns:a="http://schemas.openxmlformats.org/drawingml/2006/main"/>
+          <a:p xmlns:a="http://schemas.openxmlformats.org/drawingml/2006/main">
+            <a:pPr algn="ctr">
+              <a:defRPr sz="1200" b="0" i="0">
+                <a:solidFill>
+                  <a:srgbClr val="061A45"/>
+                </a:solidFill>
+              </a:defRPr>
+            </a:pPr>
+            <a:r>
+              <a:rPr sz="1200" b="0" i="0">
+                <a:solidFill>
+                  <a:srgbClr val="061A45"/>
+                </a:solidFill>
+              </a:rPr>
+              <a:t>Debug checklist</a:t>
+            </a:r>
+          </a:p>
+        </p:txBody>
+      </p:sp>
+      <p:sp>
+        <p:nvSpPr>
+          <p:cNvPr id="8" name="">
+            <a:extLst xmlns:a="http://schemas.openxmlformats.org/drawingml/2006/main">
+              <a:ext uri="{FF2B5EF4-FFF2-40B4-BE49-F238E27FC236}">
+                <a16:creationId xmlns:a16="http://schemas.microsoft.com/office/drawing/2014/main" id="{AAE8EDB1-6611-4CF5-83E2-4D055E1EF490}"/>
+              </a:ext>
+            </a:extLst>
+          </p:cNvPr>
+          <p:cNvSpPr>
+            <a:spLocks xmlns:a="http://schemas.openxmlformats.org/drawingml/2006/main" noGrp="1"/>
+          </p:cNvSpPr>
+          <p:nvPr/>
+        </p:nvSpPr>
+        <p:spPr>
+          <a:xfrm xmlns:a="http://schemas.openxmlformats.org/drawingml/2006/main">
+            <a:off x="1066800" y="2933700"/>
+            <a:ext cx="2305050" cy="285750"/>
+          </a:xfrm>
+          <a:prstGeom xmlns:a="http://schemas.openxmlformats.org/drawingml/2006/main" prst="roundRect">
+            <a:avLst>
+              <a:gd name="adj" fmla="val 20000"/>
+            </a:avLst>
+          </a:prstGeom>
+          <a:solidFill xmlns:a="http://schemas.openxmlformats.org/drawingml/2006/main">
+            <a:srgbClr val="FFFFFF"/>
+          </a:solidFill>
+          <a:ln xmlns:a="http://schemas.openxmlformats.org/drawingml/2006/main" w="10478">
+            <a:solidFill>
+              <a:srgbClr val="F0B5B5"/>
+            </a:solidFill>
+            <a:prstDash val="solid"/>
+          </a:ln>
+        </p:spPr>
+      </p:sp>
+      <p:sp>
+        <p:nvSpPr>
+          <p:cNvPr id="9" name="">
+            <a:extLst xmlns:a="http://schemas.openxmlformats.org/drawingml/2006/main">
+              <a:ext uri="{FF2B5EF4-FFF2-40B4-BE49-F238E27FC236}">
+                <a16:creationId xmlns:a16="http://schemas.microsoft.com/office/drawing/2014/main" id="{65AE67B7-1ACE-4361-AFD7-ACE0CDB36635}"/>
+              </a:ext>
+            </a:extLst>
+          </p:cNvPr>
+          <p:cNvSpPr>
+            <a:spLocks xmlns:a="http://schemas.openxmlformats.org/drawingml/2006/main" noGrp="1"/>
+          </p:cNvSpPr>
+          <p:nvPr/>
+        </p:nvSpPr>
+        <p:spPr>
+          <a:xfrm xmlns:a="http://schemas.openxmlformats.org/drawingml/2006/main">
+            <a:off x="1257300" y="3000375"/>
+            <a:ext cx="1924050" cy="152400"/>
+          </a:xfrm>
+          <a:prstGeom xmlns:a="http://schemas.openxmlformats.org/drawingml/2006/main" prst="rect">
+            <a:avLst/>
+          </a:prstGeom>
+          <a:noFill xmlns:a="http://schemas.openxmlformats.org/drawingml/2006/main"/>
+          <a:ln xmlns:a="http://schemas.openxmlformats.org/drawingml/2006/main" w="0">
+            <a:noFill/>
+            <a:prstDash val="solid"/>
+          </a:ln>
+        </p:spPr>
+        <p:txBody>
+          <a:bodyPr xmlns:a="http://schemas.openxmlformats.org/drawingml/2006/main"/>
+          <a:lstStyle xmlns:a="http://schemas.openxmlformats.org/drawingml/2006/main"/>
+          <a:p xmlns:a="http://schemas.openxmlformats.org/drawingml/2006/main">
+            <a:pPr algn="ctr">
+              <a:defRPr sz="1200" b="0" i="0">
+                <a:solidFill>
+                  <a:srgbClr val="061A45"/>
+                </a:solidFill>
+              </a:defRPr>
+            </a:pPr>
+            <a:r>
+              <a:rPr sz="1200" b="0" i="0">
+                <a:solidFill>
+                  <a:srgbClr val="061A45"/>
+                </a:solidFill>
+              </a:rPr>
+              <a:t>Review checklist</a:t>
+            </a:r>
+          </a:p>
+        </p:txBody>
+      </p:sp>
+      <p:sp>
+        <p:nvSpPr>
+          <p:cNvPr id="10" name="">
+            <a:extLst xmlns:a="http://schemas.openxmlformats.org/drawingml/2006/main">
+              <a:ext uri="{FF2B5EF4-FFF2-40B4-BE49-F238E27FC236}">
+                <a16:creationId xmlns:a16="http://schemas.microsoft.com/office/drawing/2014/main" id="{C064AE87-79C6-4FAE-ADFF-CC8A61E0FBBB}"/>
+              </a:ext>
+            </a:extLst>
+          </p:cNvPr>
+          <p:cNvSpPr>
+            <a:spLocks xmlns:a="http://schemas.openxmlformats.org/drawingml/2006/main" noGrp="1"/>
+          </p:cNvSpPr>
+          <p:nvPr/>
+        </p:nvSpPr>
+        <p:spPr>
+          <a:xfrm xmlns:a="http://schemas.openxmlformats.org/drawingml/2006/main">
+            <a:off x="1066800" y="3371850"/>
+            <a:ext cx="2305050" cy="285750"/>
+          </a:xfrm>
+          <a:prstGeom xmlns:a="http://schemas.openxmlformats.org/drawingml/2006/main" prst="roundRect">
+            <a:avLst>
+              <a:gd name="adj" fmla="val 20000"/>
+            </a:avLst>
+          </a:prstGeom>
+          <a:solidFill xmlns:a="http://schemas.openxmlformats.org/drawingml/2006/main">
+            <a:srgbClr val="FFFFFF"/>
+          </a:solidFill>
+          <a:ln xmlns:a="http://schemas.openxmlformats.org/drawingml/2006/main" w="10478">
+            <a:solidFill>
+              <a:srgbClr val="F0B5B5"/>
+            </a:solidFill>
+            <a:prstDash val="solid"/>
+          </a:ln>
+        </p:spPr>
+      </p:sp>
+      <p:sp>
+        <p:nvSpPr>
+          <p:cNvPr id="11" name="">
+            <a:extLst xmlns:a="http://schemas.openxmlformats.org/drawingml/2006/main">
+              <a:ext uri="{FF2B5EF4-FFF2-40B4-BE49-F238E27FC236}">
+                <a16:creationId xmlns:a16="http://schemas.microsoft.com/office/drawing/2014/main" id="{7276645B-E4FF-4C5C-8133-DD86DE4CAF21}"/>
+              </a:ext>
+            </a:extLst>
+          </p:cNvPr>
+          <p:cNvSpPr>
+            <a:spLocks xmlns:a="http://schemas.openxmlformats.org/drawingml/2006/main" noGrp="1"/>
+          </p:cNvSpPr>
+          <p:nvPr/>
+        </p:nvSpPr>
+        <p:spPr>
+          <a:xfrm xmlns:a="http://schemas.openxmlformats.org/drawingml/2006/main">
+            <a:off x="1257300" y="3438525"/>
+            <a:ext cx="1924050" cy="152400"/>
+          </a:xfrm>
+          <a:prstGeom xmlns:a="http://schemas.openxmlformats.org/drawingml/2006/main" prst="rect">
+            <a:avLst/>
+          </a:prstGeom>
+          <a:noFill xmlns:a="http://schemas.openxmlformats.org/drawingml/2006/main"/>
+          <a:ln xmlns:a="http://schemas.openxmlformats.org/drawingml/2006/main" w="0">
+            <a:noFill/>
+            <a:prstDash val="solid"/>
+          </a:ln>
+        </p:spPr>
+        <p:txBody>
+          <a:bodyPr xmlns:a="http://schemas.openxmlformats.org/drawingml/2006/main"/>
+          <a:lstStyle xmlns:a="http://schemas.openxmlformats.org/drawingml/2006/main"/>
+          <a:p xmlns:a="http://schemas.openxmlformats.org/drawingml/2006/main">
+            <a:pPr algn="ctr">
+              <a:defRPr sz="1200" b="0" i="0">
+                <a:solidFill>
+                  <a:srgbClr val="061A45"/>
+                </a:solidFill>
+              </a:defRPr>
+            </a:pPr>
+            <a:r>
+              <a:rPr sz="1200" b="0" i="0">
+                <a:solidFill>
+                  <a:srgbClr val="061A45"/>
+                </a:solidFill>
+              </a:rPr>
+              <a:t>Docs template</a:t>
+            </a:r>
+          </a:p>
+        </p:txBody>
+      </p:sp>
+      <p:sp>
+        <p:nvSpPr>
+          <p:cNvPr id="12" name="">
+            <a:extLst xmlns:a="http://schemas.openxmlformats.org/drawingml/2006/main">
+              <a:ext uri="{FF2B5EF4-FFF2-40B4-BE49-F238E27FC236}">
+                <a16:creationId xmlns:a16="http://schemas.microsoft.com/office/drawing/2014/main" id="{B9DE2BCA-4DAD-4124-BE55-265656EF8BFD}"/>
+              </a:ext>
+            </a:extLst>
+          </p:cNvPr>
+          <p:cNvSpPr>
+            <a:spLocks xmlns:a="http://schemas.openxmlformats.org/drawingml/2006/main" noGrp="1"/>
+          </p:cNvSpPr>
+          <p:nvPr/>
+        </p:nvSpPr>
+        <p:spPr>
+          <a:xfrm xmlns:a="http://schemas.openxmlformats.org/drawingml/2006/main">
+            <a:off x="1066800" y="3810000"/>
+            <a:ext cx="2305050" cy="285750"/>
+          </a:xfrm>
+          <a:prstGeom xmlns:a="http://schemas.openxmlformats.org/drawingml/2006/main" prst="roundRect">
+            <a:avLst>
+              <a:gd name="adj" fmla="val 20000"/>
+            </a:avLst>
+          </a:prstGeom>
+          <a:solidFill xmlns:a="http://schemas.openxmlformats.org/drawingml/2006/main">
+            <a:srgbClr val="FFFFFF"/>
+          </a:solidFill>
+          <a:ln xmlns:a="http://schemas.openxmlformats.org/drawingml/2006/main" w="10478">
+            <a:solidFill>
+              <a:srgbClr val="F0B5B5"/>
+            </a:solidFill>
+            <a:prstDash val="solid"/>
+          </a:ln>
+        </p:spPr>
+      </p:sp>
+      <p:sp>
+        <p:nvSpPr>
+          <p:cNvPr id="13" name="">
+            <a:extLst xmlns:a="http://schemas.openxmlformats.org/drawingml/2006/main">
+              <a:ext uri="{FF2B5EF4-FFF2-40B4-BE49-F238E27FC236}">
+                <a16:creationId xmlns:a16="http://schemas.microsoft.com/office/drawing/2014/main" id="{25CF1FB9-35F6-445A-8C81-A481F477B588}"/>
+              </a:ext>
+            </a:extLst>
+          </p:cNvPr>
+          <p:cNvSpPr>
+            <a:spLocks xmlns:a="http://schemas.openxmlformats.org/drawingml/2006/main" noGrp="1"/>
+          </p:cNvSpPr>
+          <p:nvPr/>
+        </p:nvSpPr>
+        <p:spPr>
+          <a:xfrm xmlns:a="http://schemas.openxmlformats.org/drawingml/2006/main">
+            <a:off x="1257300" y="3876675"/>
+            <a:ext cx="1924050" cy="152400"/>
+          </a:xfrm>
+          <a:prstGeom xmlns:a="http://schemas.openxmlformats.org/drawingml/2006/main" prst="rect">
+            <a:avLst/>
+          </a:prstGeom>
+          <a:noFill xmlns:a="http://schemas.openxmlformats.org/drawingml/2006/main"/>
+          <a:ln xmlns:a="http://schemas.openxmlformats.org/drawingml/2006/main" w="0">
+            <a:noFill/>
+            <a:prstDash val="solid"/>
+          </a:ln>
+        </p:spPr>
+        <p:txBody>
+          <a:bodyPr xmlns:a="http://schemas.openxmlformats.org/drawingml/2006/main"/>
+          <a:lstStyle xmlns:a="http://schemas.openxmlformats.org/drawingml/2006/main"/>
+          <a:p xmlns:a="http://schemas.openxmlformats.org/drawingml/2006/main">
+            <a:pPr algn="ctr">
+              <a:defRPr sz="1200" b="0" i="0">
+                <a:solidFill>
+                  <a:srgbClr val="061A45"/>
+                </a:solidFill>
+              </a:defRPr>
+            </a:pPr>
+            <a:r>
+              <a:rPr sz="1200" b="0" i="0">
+                <a:solidFill>
+                  <a:srgbClr val="061A45"/>
+                </a:solidFill>
+              </a:rPr>
+              <a:t>Deploy rules</a:t>
+            </a:r>
+          </a:p>
+        </p:txBody>
+      </p:sp>
+      <p:sp>
+        <p:nvSpPr>
+          <p:cNvPr id="14" name="">
+            <a:extLst xmlns:a="http://schemas.openxmlformats.org/drawingml/2006/main">
+              <a:ext uri="{FF2B5EF4-FFF2-40B4-BE49-F238E27FC236}">
+                <a16:creationId xmlns:a16="http://schemas.microsoft.com/office/drawing/2014/main" id="{70CC45A2-9F0E-47FF-B2B9-175A86A0C420}"/>
+              </a:ext>
+            </a:extLst>
+          </p:cNvPr>
+          <p:cNvSpPr>
+            <a:spLocks xmlns:a="http://schemas.openxmlformats.org/drawingml/2006/main" noGrp="1"/>
+          </p:cNvSpPr>
+          <p:nvPr/>
+        </p:nvSpPr>
+        <p:spPr>
+          <a:xfrm xmlns:a="http://schemas.openxmlformats.org/drawingml/2006/main">
+            <a:off x="1066800" y="4248150"/>
+            <a:ext cx="2305050" cy="285750"/>
+          </a:xfrm>
+          <a:prstGeom xmlns:a="http://schemas.openxmlformats.org/drawingml/2006/main" prst="roundRect">
+            <a:avLst>
+              <a:gd name="adj" fmla="val 20000"/>
+            </a:avLst>
+          </a:prstGeom>
+          <a:solidFill xmlns:a="http://schemas.openxmlformats.org/drawingml/2006/main">
+            <a:srgbClr val="FFFFFF"/>
+          </a:solidFill>
+          <a:ln xmlns:a="http://schemas.openxmlformats.org/drawingml/2006/main" w="10478">
+            <a:solidFill>
+              <a:srgbClr val="F0B5B5"/>
+            </a:solidFill>
+            <a:prstDash val="solid"/>
+          </a:ln>
+        </p:spPr>
+      </p:sp>
+      <p:sp>
+        <p:nvSpPr>
+          <p:cNvPr id="15" name="">
+            <a:extLst xmlns:a="http://schemas.openxmlformats.org/drawingml/2006/main">
+              <a:ext uri="{FF2B5EF4-FFF2-40B4-BE49-F238E27FC236}">
+                <a16:creationId xmlns:a16="http://schemas.microsoft.com/office/drawing/2014/main" id="{CFBD39BF-6D51-4138-BB2D-D583214050F5}"/>
+              </a:ext>
+            </a:extLst>
+          </p:cNvPr>
+          <p:cNvSpPr>
+            <a:spLocks xmlns:a="http://schemas.openxmlformats.org/drawingml/2006/main" noGrp="1"/>
+          </p:cNvSpPr>
+          <p:nvPr/>
+        </p:nvSpPr>
+        <p:spPr>
+          <a:xfrm xmlns:a="http://schemas.openxmlformats.org/drawingml/2006/main">
+            <a:off x="1257300" y="4314825"/>
+            <a:ext cx="1924050" cy="152400"/>
+          </a:xfrm>
+          <a:prstGeom xmlns:a="http://schemas.openxmlformats.org/drawingml/2006/main" prst="rect">
+            <a:avLst/>
+          </a:prstGeom>
+          <a:noFill xmlns:a="http://schemas.openxmlformats.org/drawingml/2006/main"/>
+          <a:ln xmlns:a="http://schemas.openxmlformats.org/drawingml/2006/main" w="0">
+            <a:noFill/>
+            <a:prstDash val="solid"/>
+          </a:ln>
+        </p:spPr>
+        <p:txBody>
+          <a:bodyPr xmlns:a="http://schemas.openxmlformats.org/drawingml/2006/main"/>
+          <a:lstStyle xmlns:a="http://schemas.openxmlformats.org/drawingml/2006/main"/>
+          <a:p xmlns:a="http://schemas.openxmlformats.org/drawingml/2006/main">
+            <a:pPr algn="ctr">
+              <a:defRPr sz="1200" b="0" i="0">
+                <a:solidFill>
+                  <a:srgbClr val="061A45"/>
+                </a:solidFill>
+              </a:defRPr>
+            </a:pPr>
+            <a:r>
+              <a:rPr sz="1200" b="0" i="0">
+                <a:solidFill>
+                  <a:srgbClr val="061A45"/>
+                </a:solidFill>
+              </a:rPr>
+              <a:t>API conventions</a:t>
+            </a:r>
+          </a:p>
+        </p:txBody>
+      </p:sp>
+      <p:sp>
+        <p:nvSpPr>
+          <p:cNvPr id="16" name="">
+            <a:extLst xmlns:a="http://schemas.openxmlformats.org/drawingml/2006/main">
+              <a:ext uri="{FF2B5EF4-FFF2-40B4-BE49-F238E27FC236}">
+                <a16:creationId xmlns:a16="http://schemas.microsoft.com/office/drawing/2014/main" id="{FB92A203-2863-4667-922C-EE5843483454}"/>
+              </a:ext>
+            </a:extLst>
+          </p:cNvPr>
+          <p:cNvSpPr>
+            <a:spLocks xmlns:a="http://schemas.openxmlformats.org/drawingml/2006/main" noGrp="1"/>
+          </p:cNvSpPr>
+          <p:nvPr/>
+        </p:nvSpPr>
+        <p:spPr>
+          <a:xfrm xmlns:a="http://schemas.openxmlformats.org/drawingml/2006/main">
+            <a:off x="1028700" y="4514850"/>
+            <a:ext cx="2381250" cy="228600"/>
+          </a:xfrm>
+          <a:prstGeom xmlns:a="http://schemas.openxmlformats.org/drawingml/2006/main" prst="rect">
+            <a:avLst/>
+          </a:prstGeom>
+          <a:noFill xmlns:a="http://schemas.openxmlformats.org/drawingml/2006/main"/>
+          <a:ln xmlns:a="http://schemas.openxmlformats.org/drawingml/2006/main" w="0">
+            <a:noFill/>
+            <a:prstDash val="solid"/>
+          </a:ln>
+        </p:spPr>
+        <p:txBody>
+          <a:bodyPr xmlns:a="http://schemas.openxmlformats.org/drawingml/2006/main"/>
+          <a:lstStyle xmlns:a="http://schemas.openxmlformats.org/drawingml/2006/main"/>
+          <a:p xmlns:a="http://schemas.openxmlformats.org/drawingml/2006/main">
+            <a:pPr algn="ctr">
+              <a:defRPr sz="1275" b="1" i="0">
+                <a:solidFill>
+                  <a:srgbClr val="CC2B2B"/>
+                </a:solidFill>
+              </a:defRPr>
+            </a:pPr>
+            <a:r>
+              <a:rPr sz="1275" b="1" i="0">
+                <a:solidFill>
+                  <a:srgbClr val="CC2B2B"/>
+                </a:solidFill>
+              </a:rPr>
+              <a:t>Everything is pasted into every turn.</a:t>
+            </a:r>
+          </a:p>
+        </p:txBody>
+      </p:sp>
+      <p:sp>
+        <p:nvSpPr>
+          <p:cNvPr id="17" name="">
+            <a:extLst xmlns:a="http://schemas.openxmlformats.org/drawingml/2006/main">
+              <a:ext uri="{FF2B5EF4-FFF2-40B4-BE49-F238E27FC236}">
+                <a16:creationId xmlns:a16="http://schemas.microsoft.com/office/drawing/2014/main" id="{34289714-A7DD-4187-9346-179FABC869D9}"/>
+              </a:ext>
+            </a:extLst>
+          </p:cNvPr>
+          <p:cNvSpPr>
+            <a:spLocks xmlns:a="http://schemas.openxmlformats.org/drawingml/2006/main" noGrp="1"/>
+          </p:cNvSpPr>
+          <p:nvPr/>
+        </p:nvSpPr>
+        <p:spPr>
+          <a:xfrm xmlns:a="http://schemas.openxmlformats.org/drawingml/2006/main">
+            <a:off x="4057650" y="3314700"/>
+            <a:ext cx="800100" cy="0"/>
+          </a:xfrm>
+          <a:prstGeom xmlns:a="http://schemas.openxmlformats.org/drawingml/2006/main" prst="line">
+            <a:avLst/>
+          </a:prstGeom>
+          <a:ln xmlns:a="http://schemas.openxmlformats.org/drawingml/2006/main" w="38100">
+            <a:solidFill>
+              <a:srgbClr val="004AAD"/>
+            </a:solidFill>
+            <a:prstDash val="solid"/>
+          </a:ln>
+        </p:spPr>
+      </p:sp>
+      <p:sp>
+        <p:nvSpPr>
+          <p:cNvPr id="18" name="">
+            <a:extLst xmlns:a="http://schemas.openxmlformats.org/drawingml/2006/main">
+              <a:ext uri="{FF2B5EF4-FFF2-40B4-BE49-F238E27FC236}">
+                <a16:creationId xmlns:a16="http://schemas.microsoft.com/office/drawing/2014/main" id="{71106388-2EAE-411F-8544-28B053A9DFCE}"/>
+              </a:ext>
+            </a:extLst>
+          </p:cNvPr>
+          <p:cNvSpPr>
+            <a:spLocks xmlns:a="http://schemas.openxmlformats.org/drawingml/2006/main" noGrp="1"/>
+          </p:cNvSpPr>
+          <p:nvPr/>
+        </p:nvSpPr>
+        <p:spPr>
+          <a:xfrm xmlns:a="http://schemas.openxmlformats.org/drawingml/2006/main">
+            <a:off x="5143500" y="1466850"/>
+            <a:ext cx="2724150" cy="3676650"/>
+          </a:xfrm>
+          <a:prstGeom xmlns:a="http://schemas.openxmlformats.org/drawingml/2006/main" prst="roundRect">
+            <a:avLst>
+              <a:gd name="adj" fmla="val 2797"/>
+            </a:avLst>
+          </a:prstGeom>
+          <a:solidFill xmlns:a="http://schemas.openxmlformats.org/drawingml/2006/main">
+            <a:srgbClr val="FFF7DF"/>
+          </a:solidFill>
+          <a:ln xmlns:a="http://schemas.openxmlformats.org/drawingml/2006/main" w="10478">
+            <a:solidFill>
+              <a:srgbClr val="F0D891"/>
+            </a:solidFill>
+            <a:prstDash val="solid"/>
+          </a:ln>
+        </p:spPr>
+      </p:sp>
+      <p:sp>
+        <p:nvSpPr>
+          <p:cNvPr id="19" name="">
+            <a:extLst xmlns:a="http://schemas.openxmlformats.org/drawingml/2006/main">
+              <a:ext uri="{FF2B5EF4-FFF2-40B4-BE49-F238E27FC236}">
+                <a16:creationId xmlns:a16="http://schemas.microsoft.com/office/drawing/2014/main" id="{035595D4-3E64-4E34-9820-6489922CABE4}"/>
+              </a:ext>
+            </a:extLst>
+          </p:cNvPr>
+          <p:cNvSpPr>
+            <a:spLocks xmlns:a="http://schemas.openxmlformats.org/drawingml/2006/main" noGrp="1"/>
+          </p:cNvSpPr>
+          <p:nvPr/>
+        </p:nvSpPr>
+        <p:spPr>
+          <a:xfrm xmlns:a="http://schemas.openxmlformats.org/drawingml/2006/main">
+            <a:off x="5581650" y="1790700"/>
+            <a:ext cx="1847850" cy="285750"/>
+          </a:xfrm>
+          <a:prstGeom xmlns:a="http://schemas.openxmlformats.org/drawingml/2006/main" prst="rect">
+            <a:avLst/>
+          </a:prstGeom>
+          <a:noFill xmlns:a="http://schemas.openxmlformats.org/drawingml/2006/main"/>
+          <a:ln xmlns:a="http://schemas.openxmlformats.org/drawingml/2006/main" w="0">
+            <a:noFill/>
+            <a:prstDash val="solid"/>
+          </a:ln>
+        </p:spPr>
+        <p:txBody>
+          <a:bodyPr xmlns:a="http://schemas.openxmlformats.org/drawingml/2006/main"/>
+          <a:lstStyle xmlns:a="http://schemas.openxmlformats.org/drawingml/2006/main"/>
+          <a:p xmlns:a="http://schemas.openxmlformats.org/drawingml/2006/main">
+            <a:pPr algn="ctr">
+              <a:defRPr sz="2100" b="1" i="0">
+                <a:solidFill>
+                  <a:srgbClr val="D88A00"/>
+                </a:solidFill>
+              </a:defRPr>
+            </a:pPr>
+            <a:r>
+              <a:rPr sz="2100" b="1" i="0">
+                <a:solidFill>
+                  <a:srgbClr val="D88A00"/>
+                </a:solidFill>
+              </a:rPr>
+              <a:t>Skill registry</a:t>
+            </a:r>
+          </a:p>
+        </p:txBody>
+      </p:sp>
+      <p:sp>
+        <p:nvSpPr>
+          <p:cNvPr id="20" name="">
+            <a:extLst xmlns:a="http://schemas.openxmlformats.org/drawingml/2006/main">
+              <a:ext uri="{FF2B5EF4-FFF2-40B4-BE49-F238E27FC236}">
+                <a16:creationId xmlns:a16="http://schemas.microsoft.com/office/drawing/2014/main" id="{07DAFEF3-F758-4F1B-BD73-B89B499F33D0}"/>
+              </a:ext>
+            </a:extLst>
+          </p:cNvPr>
+          <p:cNvSpPr>
+            <a:spLocks xmlns:a="http://schemas.openxmlformats.org/drawingml/2006/main" noGrp="1"/>
+          </p:cNvSpPr>
+          <p:nvPr/>
+        </p:nvSpPr>
+        <p:spPr>
+          <a:xfrm xmlns:a="http://schemas.openxmlformats.org/drawingml/2006/main">
+            <a:off x="5753100" y="2457450"/>
+            <a:ext cx="1695450" cy="190500"/>
+          </a:xfrm>
+          <a:prstGeom xmlns:a="http://schemas.openxmlformats.org/drawingml/2006/main" prst="rect">
+            <a:avLst/>
+          </a:prstGeom>
+          <a:noFill xmlns:a="http://schemas.openxmlformats.org/drawingml/2006/main"/>
+          <a:ln xmlns:a="http://schemas.openxmlformats.org/drawingml/2006/main" w="0">
+            <a:noFill/>
+            <a:prstDash val="solid"/>
+          </a:ln>
+        </p:spPr>
+        <p:txBody>
+          <a:bodyPr xmlns:a="http://schemas.openxmlformats.org/drawingml/2006/main"/>
+          <a:lstStyle xmlns:a="http://schemas.openxmlformats.org/drawingml/2006/main"/>
+          <a:p xmlns:a="http://schemas.openxmlformats.org/drawingml/2006/main">
+            <a:pPr algn="l">
+              <a:defRPr sz="1275" b="0" i="0">
+                <a:solidFill>
+                  <a:srgbClr val="061A45"/>
+                </a:solidFill>
+              </a:defRPr>
+            </a:pPr>
+            <a:r>
+              <a:rPr sz="1275" b="0" i="0">
+                <a:solidFill>
+                  <a:srgbClr val="061A45"/>
+                </a:solidFill>
+              </a:rPr>
+              <a:t>1. detect task</a:t>
+            </a:r>
+          </a:p>
+        </p:txBody>
+      </p:sp>
+      <p:sp>
+        <p:nvSpPr>
+          <p:cNvPr id="21" name="">
+            <a:extLst xmlns:a="http://schemas.openxmlformats.org/drawingml/2006/main">
+              <a:ext uri="{FF2B5EF4-FFF2-40B4-BE49-F238E27FC236}">
+                <a16:creationId xmlns:a16="http://schemas.microsoft.com/office/drawing/2014/main" id="{7DAC8365-04FC-4CC5-84EE-628E057C2338}"/>
+              </a:ext>
+            </a:extLst>
+          </p:cNvPr>
+          <p:cNvSpPr>
+            <a:spLocks xmlns:a="http://schemas.openxmlformats.org/drawingml/2006/main" noGrp="1"/>
+          </p:cNvSpPr>
+          <p:nvPr/>
+        </p:nvSpPr>
+        <p:spPr>
+          <a:xfrm xmlns:a="http://schemas.openxmlformats.org/drawingml/2006/main">
+            <a:off x="5753100" y="2857500"/>
+            <a:ext cx="1695450" cy="190500"/>
+          </a:xfrm>
+          <a:prstGeom xmlns:a="http://schemas.openxmlformats.org/drawingml/2006/main" prst="rect">
+            <a:avLst/>
+          </a:prstGeom>
+          <a:noFill xmlns:a="http://schemas.openxmlformats.org/drawingml/2006/main"/>
+          <a:ln xmlns:a="http://schemas.openxmlformats.org/drawingml/2006/main" w="0">
+            <a:noFill/>
+            <a:prstDash val="solid"/>
+          </a:ln>
+        </p:spPr>
+        <p:txBody>
+          <a:bodyPr xmlns:a="http://schemas.openxmlformats.org/drawingml/2006/main"/>
+          <a:lstStyle xmlns:a="http://schemas.openxmlformats.org/drawingml/2006/main"/>
+          <a:p xmlns:a="http://schemas.openxmlformats.org/drawingml/2006/main">
+            <a:pPr algn="l">
+              <a:defRPr sz="1275" b="0" i="0">
+                <a:solidFill>
+                  <a:srgbClr val="061A45"/>
+                </a:solidFill>
+              </a:defRPr>
+            </a:pPr>
+            <a:r>
+              <a:rPr sz="1275" b="0" i="0">
+                <a:solidFill>
+                  <a:srgbClr val="061A45"/>
+                </a:solidFill>
+              </a:rPr>
+              <a:t>2. select skill</a:t>
+            </a:r>
+          </a:p>
+        </p:txBody>
+      </p:sp>
+      <p:sp>
+        <p:nvSpPr>
+          <p:cNvPr id="22" name="">
+            <a:extLst xmlns:a="http://schemas.openxmlformats.org/drawingml/2006/main">
+              <a:ext uri="{FF2B5EF4-FFF2-40B4-BE49-F238E27FC236}">
+                <a16:creationId xmlns:a16="http://schemas.microsoft.com/office/drawing/2014/main" id="{5A94435C-7ADA-4974-93BC-CBCEB0AE8BC9}"/>
+              </a:ext>
+            </a:extLst>
+          </p:cNvPr>
+          <p:cNvSpPr>
+            <a:spLocks xmlns:a="http://schemas.openxmlformats.org/drawingml/2006/main" noGrp="1"/>
+          </p:cNvSpPr>
+          <p:nvPr/>
+        </p:nvSpPr>
+        <p:spPr>
+          <a:xfrm xmlns:a="http://schemas.openxmlformats.org/drawingml/2006/main">
+            <a:off x="5753100" y="3257550"/>
+            <a:ext cx="1695450" cy="190500"/>
+          </a:xfrm>
+          <a:prstGeom xmlns:a="http://schemas.openxmlformats.org/drawingml/2006/main" prst="rect">
+            <a:avLst/>
+          </a:prstGeom>
+          <a:noFill xmlns:a="http://schemas.openxmlformats.org/drawingml/2006/main"/>
+          <a:ln xmlns:a="http://schemas.openxmlformats.org/drawingml/2006/main" w="0">
+            <a:noFill/>
+            <a:prstDash val="solid"/>
+          </a:ln>
+        </p:spPr>
+        <p:txBody>
+          <a:bodyPr xmlns:a="http://schemas.openxmlformats.org/drawingml/2006/main"/>
+          <a:lstStyle xmlns:a="http://schemas.openxmlformats.org/drawingml/2006/main"/>
+          <a:p xmlns:a="http://schemas.openxmlformats.org/drawingml/2006/main">
+            <a:pPr algn="l">
+              <a:defRPr sz="1275" b="0" i="0">
+                <a:solidFill>
+                  <a:srgbClr val="061A45"/>
+                </a:solidFill>
+              </a:defRPr>
+            </a:pPr>
+            <a:r>
+              <a:rPr sz="1275" b="0" i="0">
+                <a:solidFill>
+                  <a:srgbClr val="061A45"/>
+                </a:solidFill>
+              </a:rPr>
+              <a:t>3. render instructions</a:t>
+            </a:r>
+          </a:p>
+        </p:txBody>
+      </p:sp>
+      <p:sp>
+        <p:nvSpPr>
+          <p:cNvPr id="23" name="">
+            <a:extLst xmlns:a="http://schemas.openxmlformats.org/drawingml/2006/main">
+              <a:ext uri="{FF2B5EF4-FFF2-40B4-BE49-F238E27FC236}">
+                <a16:creationId xmlns:a16="http://schemas.microsoft.com/office/drawing/2014/main" id="{EA2CE20D-8B4B-4894-B590-0B332386C000}"/>
+              </a:ext>
+            </a:extLst>
+          </p:cNvPr>
+          <p:cNvSpPr>
+            <a:spLocks xmlns:a="http://schemas.openxmlformats.org/drawingml/2006/main" noGrp="1"/>
+          </p:cNvSpPr>
+          <p:nvPr/>
+        </p:nvSpPr>
+        <p:spPr>
+          <a:xfrm xmlns:a="http://schemas.openxmlformats.org/drawingml/2006/main">
+            <a:off x="5753100" y="3657600"/>
+            <a:ext cx="1695450" cy="190500"/>
+          </a:xfrm>
+          <a:prstGeom xmlns:a="http://schemas.openxmlformats.org/drawingml/2006/main" prst="rect">
+            <a:avLst/>
+          </a:prstGeom>
+          <a:noFill xmlns:a="http://schemas.openxmlformats.org/drawingml/2006/main"/>
+          <a:ln xmlns:a="http://schemas.openxmlformats.org/drawingml/2006/main" w="0">
+            <a:noFill/>
+            <a:prstDash val="solid"/>
+          </a:ln>
+        </p:spPr>
+        <p:txBody>
+          <a:bodyPr xmlns:a="http://schemas.openxmlformats.org/drawingml/2006/main"/>
+          <a:lstStyle xmlns:a="http://schemas.openxmlformats.org/drawingml/2006/main"/>
+          <a:p xmlns:a="http://schemas.openxmlformats.org/drawingml/2006/main">
+            <a:pPr algn="l">
+              <a:defRPr sz="1275" b="0" i="0">
+                <a:solidFill>
+                  <a:srgbClr val="061A45"/>
+                </a:solidFill>
+              </a:defRPr>
+            </a:pPr>
+            <a:r>
+              <a:rPr sz="1275" b="0" i="0">
+                <a:solidFill>
+                  <a:srgbClr val="061A45"/>
+                </a:solidFill>
+              </a:rPr>
+              <a:t>4. include examples</a:t>
+            </a:r>
+          </a:p>
+        </p:txBody>
+      </p:sp>
+      <p:sp>
+        <p:nvSpPr>
+          <p:cNvPr id="24" name="">
+            <a:extLst xmlns:a="http://schemas.openxmlformats.org/drawingml/2006/main">
+              <a:ext uri="{FF2B5EF4-FFF2-40B4-BE49-F238E27FC236}">
+                <a16:creationId xmlns:a16="http://schemas.microsoft.com/office/drawing/2014/main" id="{2A2BB776-80EB-4FD9-8057-6025E595D9F9}"/>
+              </a:ext>
+            </a:extLst>
+          </p:cNvPr>
+          <p:cNvSpPr>
+            <a:spLocks xmlns:a="http://schemas.openxmlformats.org/drawingml/2006/main" noGrp="1"/>
+          </p:cNvSpPr>
+          <p:nvPr/>
+        </p:nvSpPr>
+        <p:spPr>
+          <a:xfrm xmlns:a="http://schemas.openxmlformats.org/drawingml/2006/main">
+            <a:off x="5753100" y="4057650"/>
+            <a:ext cx="1695450" cy="190500"/>
+          </a:xfrm>
+          <a:prstGeom xmlns:a="http://schemas.openxmlformats.org/drawingml/2006/main" prst="rect">
+            <a:avLst/>
+          </a:prstGeom>
+          <a:noFill xmlns:a="http://schemas.openxmlformats.org/drawingml/2006/main"/>
+          <a:ln xmlns:a="http://schemas.openxmlformats.org/drawingml/2006/main" w="0">
+            <a:noFill/>
+            <a:prstDash val="solid"/>
+          </a:ln>
+        </p:spPr>
+        <p:txBody>
+          <a:bodyPr xmlns:a="http://schemas.openxmlformats.org/drawingml/2006/main"/>
+          <a:lstStyle xmlns:a="http://schemas.openxmlformats.org/drawingml/2006/main"/>
+          <a:p xmlns:a="http://schemas.openxmlformats.org/drawingml/2006/main">
+            <a:pPr algn="l">
+              <a:defRPr sz="1275" b="0" i="0">
+                <a:solidFill>
+                  <a:srgbClr val="061A45"/>
+                </a:solidFill>
+              </a:defRPr>
+            </a:pPr>
+            <a:r>
+              <a:rPr sz="1275" b="0" i="0">
+                <a:solidFill>
+                  <a:srgbClr val="061A45"/>
+                </a:solidFill>
+              </a:rPr>
+              <a:t>5. keep unused skills out</a:t>
+            </a:r>
+          </a:p>
+        </p:txBody>
+      </p:sp>
+      <p:sp>
+        <p:nvSpPr>
+          <p:cNvPr id="25" name="">
+            <a:extLst xmlns:a="http://schemas.openxmlformats.org/drawingml/2006/main">
+              <a:ext uri="{FF2B5EF4-FFF2-40B4-BE49-F238E27FC236}">
+                <a16:creationId xmlns:a16="http://schemas.microsoft.com/office/drawing/2014/main" id="{AFDF3E09-A595-49DA-A1BD-856A2560A02F}"/>
+              </a:ext>
+            </a:extLst>
+          </p:cNvPr>
+          <p:cNvSpPr>
+            <a:spLocks xmlns:a="http://schemas.openxmlformats.org/drawingml/2006/main" noGrp="1"/>
+          </p:cNvSpPr>
+          <p:nvPr/>
+        </p:nvSpPr>
+        <p:spPr>
+          <a:xfrm xmlns:a="http://schemas.openxmlformats.org/drawingml/2006/main">
+            <a:off x="8153400" y="3314700"/>
+            <a:ext cx="800100" cy="0"/>
+          </a:xfrm>
+          <a:prstGeom xmlns:a="http://schemas.openxmlformats.org/drawingml/2006/main" prst="line">
+            <a:avLst/>
+          </a:prstGeom>
+          <a:ln xmlns:a="http://schemas.openxmlformats.org/drawingml/2006/main" w="38100">
+            <a:solidFill>
+              <a:srgbClr val="004AAD"/>
+            </a:solidFill>
+            <a:prstDash val="solid"/>
+          </a:ln>
+        </p:spPr>
+      </p:sp>
+      <p:sp>
+        <p:nvSpPr>
+          <p:cNvPr id="26" name="">
+            <a:extLst xmlns:a="http://schemas.openxmlformats.org/drawingml/2006/main">
+              <a:ext uri="{FF2B5EF4-FFF2-40B4-BE49-F238E27FC236}">
+                <a16:creationId xmlns:a16="http://schemas.microsoft.com/office/drawing/2014/main" id="{D056721F-02E4-41EE-B31F-4F917B9C6CE3}"/>
+              </a:ext>
+            </a:extLst>
+          </p:cNvPr>
+          <p:cNvSpPr>
+            <a:spLocks xmlns:a="http://schemas.openxmlformats.org/drawingml/2006/main" noGrp="1"/>
+          </p:cNvSpPr>
+          <p:nvPr/>
+        </p:nvSpPr>
+        <p:spPr>
+          <a:xfrm xmlns:a="http://schemas.openxmlformats.org/drawingml/2006/main">
+            <a:off x="9239250" y="1638300"/>
+            <a:ext cx="2305050" cy="3333750"/>
+          </a:xfrm>
+          <a:prstGeom xmlns:a="http://schemas.openxmlformats.org/drawingml/2006/main" prst="roundRect">
+            <a:avLst>
+              <a:gd name="adj" fmla="val 3306"/>
+            </a:avLst>
+          </a:prstGeom>
+          <a:solidFill xmlns:a="http://schemas.openxmlformats.org/drawingml/2006/main">
+            <a:srgbClr val="EEF6FF"/>
+          </a:solidFill>
+          <a:ln xmlns:a="http://schemas.openxmlformats.org/drawingml/2006/main" w="10478">
+            <a:solidFill>
+              <a:srgbClr val="138A43"/>
+            </a:solidFill>
+            <a:prstDash val="solid"/>
+          </a:ln>
+        </p:spPr>
+      </p:sp>
+      <p:sp>
+        <p:nvSpPr>
+          <p:cNvPr id="27" name="">
+            <a:extLst xmlns:a="http://schemas.openxmlformats.org/drawingml/2006/main">
+              <a:ext uri="{FF2B5EF4-FFF2-40B4-BE49-F238E27FC236}">
+                <a16:creationId xmlns:a16="http://schemas.microsoft.com/office/drawing/2014/main" id="{454452AD-6256-4451-8190-DBA5EDA13758}"/>
+              </a:ext>
+            </a:extLst>
+          </p:cNvPr>
+          <p:cNvSpPr>
+            <a:spLocks xmlns:a="http://schemas.openxmlformats.org/drawingml/2006/main" noGrp="1"/>
+          </p:cNvSpPr>
+          <p:nvPr/>
+        </p:nvSpPr>
+        <p:spPr>
+          <a:xfrm xmlns:a="http://schemas.openxmlformats.org/drawingml/2006/main">
+            <a:off x="9563100" y="1962150"/>
+            <a:ext cx="1657350" cy="285750"/>
+          </a:xfrm>
+          <a:prstGeom xmlns:a="http://schemas.openxmlformats.org/drawingml/2006/main" prst="rect">
+            <a:avLst/>
+          </a:prstGeom>
+          <a:noFill xmlns:a="http://schemas.openxmlformats.org/drawingml/2006/main"/>
+          <a:ln xmlns:a="http://schemas.openxmlformats.org/drawingml/2006/main" w="0">
+            <a:noFill/>
+            <a:prstDash val="solid"/>
+          </a:ln>
+        </p:spPr>
+        <p:txBody>
+          <a:bodyPr xmlns:a="http://schemas.openxmlformats.org/drawingml/2006/main"/>
+          <a:lstStyle xmlns:a="http://schemas.openxmlformats.org/drawingml/2006/main"/>
+          <a:p xmlns:a="http://schemas.openxmlformats.org/drawingml/2006/main">
+            <a:pPr algn="ctr">
+              <a:defRPr sz="1950" b="1" i="0">
+                <a:solidFill>
+                  <a:srgbClr val="138A43"/>
+                </a:solidFill>
+              </a:defRPr>
+            </a:pPr>
+            <a:r>
+              <a:rPr sz="1950" b="1" i="0">
+                <a:solidFill>
+                  <a:srgbClr val="138A43"/>
+                </a:solidFill>
+              </a:rPr>
+              <a:t>Current paper</a:t>
+            </a:r>
+          </a:p>
+        </p:txBody>
+      </p:sp>
+      <p:sp>
+        <p:nvSpPr>
+          <p:cNvPr id="28" name="">
+            <a:extLst xmlns:a="http://schemas.openxmlformats.org/drawingml/2006/main">
+              <a:ext uri="{FF2B5EF4-FFF2-40B4-BE49-F238E27FC236}">
+                <a16:creationId xmlns:a16="http://schemas.microsoft.com/office/drawing/2014/main" id="{93C2EB8F-C58B-4FBF-B86C-6EB5AA6DDDFE}"/>
+              </a:ext>
+            </a:extLst>
+          </p:cNvPr>
+          <p:cNvSpPr>
+            <a:spLocks xmlns:a="http://schemas.openxmlformats.org/drawingml/2006/main" noGrp="1"/>
+          </p:cNvSpPr>
+          <p:nvPr/>
+        </p:nvSpPr>
+        <p:spPr>
+          <a:xfrm xmlns:a="http://schemas.openxmlformats.org/drawingml/2006/main">
+            <a:off x="9563100" y="2743200"/>
+            <a:ext cx="1657350" cy="876300"/>
+          </a:xfrm>
+          <a:prstGeom xmlns:a="http://schemas.openxmlformats.org/drawingml/2006/main" prst="rect">
+            <a:avLst/>
+          </a:prstGeom>
+          <a:noFill xmlns:a="http://schemas.openxmlformats.org/drawingml/2006/main"/>
+          <a:ln xmlns:a="http://schemas.openxmlformats.org/drawingml/2006/main" w="0">
+            <a:noFill/>
+            <a:prstDash val="solid"/>
+          </a:ln>
+        </p:spPr>
+        <p:txBody>
+          <a:bodyPr xmlns:a="http://schemas.openxmlformats.org/drawingml/2006/main"/>
+          <a:lstStyle xmlns:a="http://schemas.openxmlformats.org/drawingml/2006/main"/>
+          <a:p xmlns:a="http://schemas.openxmlformats.org/drawingml/2006/main">
+            <a:pPr algn="ctr">
+              <a:defRPr sz="1500" b="0" i="0">
+                <a:solidFill>
+                  <a:srgbClr val="061A45"/>
+                </a:solidFill>
+              </a:defRPr>
+            </a:pPr>
+            <a:r>
+              <a:rPr sz="1500" b="0" i="0">
+                <a:solidFill>
+                  <a:srgbClr val="061A45"/>
+                </a:solidFill>
+              </a:rPr>
+              <a:t>Only the skill needed for this task enters the context window.</a:t>
+            </a:r>
+          </a:p>
+        </p:txBody>
+      </p:sp>
+      <p:sp>
+        <p:nvSpPr>
+          <p:cNvPr id="29" name="">
+            <a:extLst xmlns:a="http://schemas.openxmlformats.org/drawingml/2006/main">
+              <a:ext uri="{FF2B5EF4-FFF2-40B4-BE49-F238E27FC236}">
+                <a16:creationId xmlns:a16="http://schemas.microsoft.com/office/drawing/2014/main" id="{B348C404-B755-44FF-AD68-A1E7D438B092}"/>
+              </a:ext>
+            </a:extLst>
+          </p:cNvPr>
+          <p:cNvSpPr>
+            <a:spLocks xmlns:a="http://schemas.openxmlformats.org/drawingml/2006/main" noGrp="1"/>
+          </p:cNvSpPr>
+          <p:nvPr/>
+        </p:nvSpPr>
+        <p:spPr>
+          <a:xfrm xmlns:a="http://schemas.openxmlformats.org/drawingml/2006/main">
+            <a:off x="9525000" y="4095750"/>
+            <a:ext cx="1733550" cy="419100"/>
+          </a:xfrm>
+          <a:prstGeom xmlns:a="http://schemas.openxmlformats.org/drawingml/2006/main" prst="rect">
+            <a:avLst/>
+          </a:prstGeom>
+          <a:noFill xmlns:a="http://schemas.openxmlformats.org/drawingml/2006/main"/>
+          <a:ln xmlns:a="http://schemas.openxmlformats.org/drawingml/2006/main" w="0">
+            <a:noFill/>
+            <a:prstDash val="solid"/>
+          </a:ln>
+        </p:spPr>
+        <p:txBody>
+          <a:bodyPr xmlns:a="http://schemas.openxmlformats.org/drawingml/2006/main"/>
+          <a:lstStyle xmlns:a="http://schemas.openxmlformats.org/drawingml/2006/main"/>
+          <a:p xmlns:a="http://schemas.openxmlformats.org/drawingml/2006/main">
+            <a:pPr algn="ctr">
+              <a:defRPr sz="1350" b="1" i="0">
+                <a:solidFill>
+                  <a:srgbClr val="138A43"/>
+                </a:solidFill>
+              </a:defRPr>
+            </a:pPr>
+            <a:r>
+              <a:rPr sz="1350" b="1" i="0">
+                <a:solidFill>
+                  <a:srgbClr val="138A43"/>
+                </a:solidFill>
+              </a:rPr>
+              <a:t>Unused prompts stay outside.</a:t>
+            </a:r>
+          </a:p>
+        </p:txBody>
+      </p:sp>
+      <p:sp>
+        <p:nvSpPr>
+          <p:cNvPr id="30" name="">
+            <a:extLst xmlns:a="http://schemas.openxmlformats.org/drawingml/2006/main">
+              <a:ext uri="{FF2B5EF4-FFF2-40B4-BE49-F238E27FC236}">
+                <a16:creationId xmlns:a16="http://schemas.microsoft.com/office/drawing/2014/main" id="{BB1E291E-FA79-4572-A6C6-D56AC0115B86}"/>
+              </a:ext>
+            </a:extLst>
+          </p:cNvPr>
+          <p:cNvSpPr>
+            <a:spLocks xmlns:a="http://schemas.openxmlformats.org/drawingml/2006/main" noGrp="1"/>
+          </p:cNvSpPr>
+          <p:nvPr/>
+        </p:nvSpPr>
+        <p:spPr>
+          <a:xfrm xmlns:a="http://schemas.openxmlformats.org/drawingml/2006/main">
+            <a:off x="1352550" y="5753100"/>
+            <a:ext cx="9486900" cy="476250"/>
+          </a:xfrm>
+          <a:prstGeom xmlns:a="http://schemas.openxmlformats.org/drawingml/2006/main" prst="roundRect">
+            <a:avLst>
+              <a:gd name="adj" fmla="val 16000"/>
             </a:avLst>
           </a:prstGeom>
           <a:solidFill xmlns:a="http://schemas.openxmlformats.org/drawingml/2006/main">
@@ -12293,527 +13500,72 @@
       </p:sp>
       <p:sp>
         <p:nvSpPr>
-          <p:cNvPr id="5" name="">
-            <a:extLst xmlns:a="http://schemas.openxmlformats.org/drawingml/2006/main">
-              <a:ext uri="{FF2B5EF4-FFF2-40B4-BE49-F238E27FC236}">
-                <a16:creationId xmlns:a16="http://schemas.microsoft.com/office/drawing/2014/main" id="{FF18FC7D-9035-42CF-807F-F3DFB65DD2B0}"/>
-              </a:ext>
-            </a:extLst>
-          </p:cNvPr>
-          <p:cNvSpPr>
-            <a:spLocks xmlns:a="http://schemas.openxmlformats.org/drawingml/2006/main" noGrp="1"/>
-          </p:cNvSpPr>
-          <p:nvPr/>
-        </p:nvSpPr>
-        <p:spPr>
-          <a:xfrm xmlns:a="http://schemas.openxmlformats.org/drawingml/2006/main">
-            <a:off x="1181100" y="1962150"/>
-            <a:ext cx="2419350" cy="285750"/>
-          </a:xfrm>
-          <a:prstGeom xmlns:a="http://schemas.openxmlformats.org/drawingml/2006/main" prst="rect">
-            <a:avLst/>
-          </a:prstGeom>
-          <a:noFill xmlns:a="http://schemas.openxmlformats.org/drawingml/2006/main"/>
-          <a:ln xmlns:a="http://schemas.openxmlformats.org/drawingml/2006/main" w="0">
-            <a:noFill/>
-            <a:prstDash val="solid"/>
-          </a:ln>
-        </p:spPr>
-        <p:txBody>
-          <a:bodyPr xmlns:a="http://schemas.openxmlformats.org/drawingml/2006/main"/>
-          <a:lstStyle xmlns:a="http://schemas.openxmlformats.org/drawingml/2006/main"/>
-          <a:p xmlns:a="http://schemas.openxmlformats.org/drawingml/2006/main">
-            <a:pPr algn="ctr">
-              <a:defRPr sz="2100" b="1" i="0">
+          <p:cNvPr id="31" name="">
+            <a:extLst xmlns:a="http://schemas.openxmlformats.org/drawingml/2006/main">
+              <a:ext uri="{FF2B5EF4-FFF2-40B4-BE49-F238E27FC236}">
+                <a16:creationId xmlns:a16="http://schemas.microsoft.com/office/drawing/2014/main" id="{35CF0FEA-C25B-4A97-BF1B-76B6DFB21E13}"/>
+              </a:ext>
+            </a:extLst>
+          </p:cNvPr>
+          <p:cNvSpPr>
+            <a:spLocks xmlns:a="http://schemas.openxmlformats.org/drawingml/2006/main" noGrp="1"/>
+          </p:cNvSpPr>
+          <p:nvPr/>
+        </p:nvSpPr>
+        <p:spPr>
+          <a:xfrm xmlns:a="http://schemas.openxmlformats.org/drawingml/2006/main">
+            <a:off x="1695450" y="5886450"/>
+            <a:ext cx="1714500" cy="209550"/>
+          </a:xfrm>
+          <a:prstGeom xmlns:a="http://schemas.openxmlformats.org/drawingml/2006/main" prst="rect">
+            <a:avLst/>
+          </a:prstGeom>
+          <a:noFill xmlns:a="http://schemas.openxmlformats.org/drawingml/2006/main"/>
+          <a:ln xmlns:a="http://schemas.openxmlformats.org/drawingml/2006/main" w="0">
+            <a:noFill/>
+            <a:prstDash val="solid"/>
+          </a:ln>
+        </p:spPr>
+        <p:txBody>
+          <a:bodyPr xmlns:a="http://schemas.openxmlformats.org/drawingml/2006/main"/>
+          <a:lstStyle xmlns:a="http://schemas.openxmlformats.org/drawingml/2006/main"/>
+          <a:p xmlns:a="http://schemas.openxmlformats.org/drawingml/2006/main">
+            <a:pPr algn="l">
+              <a:defRPr sz="1425" b="1" i="0">
                 <a:solidFill>
                   <a:srgbClr val="004AAD"/>
                 </a:solidFill>
               </a:defRPr>
             </a:pPr>
             <a:r>
-              <a:rPr sz="2100" b="1" i="0">
+              <a:rPr sz="1425" b="1" i="0">
                 <a:solidFill>
                   <a:srgbClr val="004AAD"/>
                 </a:solidFill>
               </a:rPr>
-              <a:t>Repeated task</a:t>
-            </a:r>
-          </a:p>
-        </p:txBody>
-      </p:sp>
-      <p:sp>
-        <p:nvSpPr>
-          <p:cNvPr id="6" name="">
-            <a:extLst xmlns:a="http://schemas.openxmlformats.org/drawingml/2006/main">
-              <a:ext uri="{FF2B5EF4-FFF2-40B4-BE49-F238E27FC236}">
-                <a16:creationId xmlns:a16="http://schemas.microsoft.com/office/drawing/2014/main" id="{FB67447F-C42A-436B-8A9A-53B4FB8A9732}"/>
-              </a:ext>
-            </a:extLst>
-          </p:cNvPr>
-          <p:cNvSpPr>
-            <a:spLocks xmlns:a="http://schemas.openxmlformats.org/drawingml/2006/main" noGrp="1"/>
-          </p:cNvSpPr>
-          <p:nvPr/>
-        </p:nvSpPr>
-        <p:spPr>
-          <a:xfrm xmlns:a="http://schemas.openxmlformats.org/drawingml/2006/main">
-            <a:off x="1200150" y="2571750"/>
-            <a:ext cx="2381250" cy="323850"/>
-          </a:xfrm>
-          <a:prstGeom xmlns:a="http://schemas.openxmlformats.org/drawingml/2006/main" prst="roundRect">
-            <a:avLst>
-              <a:gd name="adj" fmla="val 17647"/>
-            </a:avLst>
-          </a:prstGeom>
-          <a:solidFill xmlns:a="http://schemas.openxmlformats.org/drawingml/2006/main">
-            <a:srgbClr val="FFFFFF"/>
-          </a:solidFill>
-          <a:ln xmlns:a="http://schemas.openxmlformats.org/drawingml/2006/main" w="10478">
-            <a:solidFill>
-              <a:srgbClr val="B9D4F6"/>
-            </a:solidFill>
-            <a:prstDash val="solid"/>
-          </a:ln>
-        </p:spPr>
-      </p:sp>
-      <p:sp>
-        <p:nvSpPr>
-          <p:cNvPr id="7" name="">
-            <a:extLst xmlns:a="http://schemas.openxmlformats.org/drawingml/2006/main">
-              <a:ext uri="{FF2B5EF4-FFF2-40B4-BE49-F238E27FC236}">
-                <a16:creationId xmlns:a16="http://schemas.microsoft.com/office/drawing/2014/main" id="{4A202E61-B54F-44AD-8907-E7BE61BC436B}"/>
-              </a:ext>
-            </a:extLst>
-          </p:cNvPr>
-          <p:cNvSpPr>
-            <a:spLocks xmlns:a="http://schemas.openxmlformats.org/drawingml/2006/main" noGrp="1"/>
-          </p:cNvSpPr>
-          <p:nvPr/>
-        </p:nvSpPr>
-        <p:spPr>
-          <a:xfrm xmlns:a="http://schemas.openxmlformats.org/drawingml/2006/main">
-            <a:off x="1428750" y="2647950"/>
-            <a:ext cx="1924050" cy="171450"/>
-          </a:xfrm>
-          <a:prstGeom xmlns:a="http://schemas.openxmlformats.org/drawingml/2006/main" prst="rect">
-            <a:avLst/>
-          </a:prstGeom>
-          <a:noFill xmlns:a="http://schemas.openxmlformats.org/drawingml/2006/main"/>
-          <a:ln xmlns:a="http://schemas.openxmlformats.org/drawingml/2006/main" w="0">
-            <a:noFill/>
-            <a:prstDash val="solid"/>
-          </a:ln>
-        </p:spPr>
-        <p:txBody>
-          <a:bodyPr xmlns:a="http://schemas.openxmlformats.org/drawingml/2006/main"/>
-          <a:lstStyle xmlns:a="http://schemas.openxmlformats.org/drawingml/2006/main"/>
-          <a:p xmlns:a="http://schemas.openxmlformats.org/drawingml/2006/main">
-            <a:pPr algn="ctr">
-              <a:defRPr sz="1200" b="0" i="0">
-                <a:solidFill>
-                  <a:srgbClr val="061A45"/>
-                </a:solidFill>
-              </a:defRPr>
-            </a:pPr>
-            <a:r>
-              <a:rPr sz="1200" b="0" i="0">
-                <a:solidFill>
-                  <a:srgbClr val="061A45"/>
-                </a:solidFill>
-              </a:rPr>
-              <a:t>Debug an error</a:t>
-            </a:r>
-          </a:p>
-        </p:txBody>
-      </p:sp>
-      <p:sp>
-        <p:nvSpPr>
-          <p:cNvPr id="8" name="">
-            <a:extLst xmlns:a="http://schemas.openxmlformats.org/drawingml/2006/main">
-              <a:ext uri="{FF2B5EF4-FFF2-40B4-BE49-F238E27FC236}">
-                <a16:creationId xmlns:a16="http://schemas.microsoft.com/office/drawing/2014/main" id="{0B18FB38-C5E4-48FB-A8C3-8519302D6534}"/>
-              </a:ext>
-            </a:extLst>
-          </p:cNvPr>
-          <p:cNvSpPr>
-            <a:spLocks xmlns:a="http://schemas.openxmlformats.org/drawingml/2006/main" noGrp="1"/>
-          </p:cNvSpPr>
-          <p:nvPr/>
-        </p:nvSpPr>
-        <p:spPr>
-          <a:xfrm xmlns:a="http://schemas.openxmlformats.org/drawingml/2006/main">
-            <a:off x="1200150" y="3028950"/>
-            <a:ext cx="2381250" cy="323850"/>
-          </a:xfrm>
-          <a:prstGeom xmlns:a="http://schemas.openxmlformats.org/drawingml/2006/main" prst="roundRect">
-            <a:avLst>
-              <a:gd name="adj" fmla="val 17647"/>
-            </a:avLst>
-          </a:prstGeom>
-          <a:solidFill xmlns:a="http://schemas.openxmlformats.org/drawingml/2006/main">
-            <a:srgbClr val="FFFFFF"/>
-          </a:solidFill>
-          <a:ln xmlns:a="http://schemas.openxmlformats.org/drawingml/2006/main" w="10478">
-            <a:solidFill>
-              <a:srgbClr val="B9D4F6"/>
-            </a:solidFill>
-            <a:prstDash val="solid"/>
-          </a:ln>
-        </p:spPr>
-      </p:sp>
-      <p:sp>
-        <p:nvSpPr>
-          <p:cNvPr id="9" name="">
-            <a:extLst xmlns:a="http://schemas.openxmlformats.org/drawingml/2006/main">
-              <a:ext uri="{FF2B5EF4-FFF2-40B4-BE49-F238E27FC236}">
-                <a16:creationId xmlns:a16="http://schemas.microsoft.com/office/drawing/2014/main" id="{C4FA1D9F-8756-400C-BB80-E398675EC688}"/>
-              </a:ext>
-            </a:extLst>
-          </p:cNvPr>
-          <p:cNvSpPr>
-            <a:spLocks xmlns:a="http://schemas.openxmlformats.org/drawingml/2006/main" noGrp="1"/>
-          </p:cNvSpPr>
-          <p:nvPr/>
-        </p:nvSpPr>
-        <p:spPr>
-          <a:xfrm xmlns:a="http://schemas.openxmlformats.org/drawingml/2006/main">
-            <a:off x="1428750" y="3105150"/>
-            <a:ext cx="1924050" cy="171450"/>
-          </a:xfrm>
-          <a:prstGeom xmlns:a="http://schemas.openxmlformats.org/drawingml/2006/main" prst="rect">
-            <a:avLst/>
-          </a:prstGeom>
-          <a:noFill xmlns:a="http://schemas.openxmlformats.org/drawingml/2006/main"/>
-          <a:ln xmlns:a="http://schemas.openxmlformats.org/drawingml/2006/main" w="0">
-            <a:noFill/>
-            <a:prstDash val="solid"/>
-          </a:ln>
-        </p:spPr>
-        <p:txBody>
-          <a:bodyPr xmlns:a="http://schemas.openxmlformats.org/drawingml/2006/main"/>
-          <a:lstStyle xmlns:a="http://schemas.openxmlformats.org/drawingml/2006/main"/>
-          <a:p xmlns:a="http://schemas.openxmlformats.org/drawingml/2006/main">
-            <a:pPr algn="ctr">
-              <a:defRPr sz="1200" b="0" i="0">
-                <a:solidFill>
-                  <a:srgbClr val="061A45"/>
-                </a:solidFill>
-              </a:defRPr>
-            </a:pPr>
-            <a:r>
-              <a:rPr sz="1200" b="0" i="0">
-                <a:solidFill>
-                  <a:srgbClr val="061A45"/>
-                </a:solidFill>
-              </a:rPr>
-              <a:t>Review a PR</a:t>
-            </a:r>
-          </a:p>
-        </p:txBody>
-      </p:sp>
-      <p:sp>
-        <p:nvSpPr>
-          <p:cNvPr id="10" name="">
-            <a:extLst xmlns:a="http://schemas.openxmlformats.org/drawingml/2006/main">
-              <a:ext uri="{FF2B5EF4-FFF2-40B4-BE49-F238E27FC236}">
-                <a16:creationId xmlns:a16="http://schemas.microsoft.com/office/drawing/2014/main" id="{3E3023E9-4968-4F36-97CB-6E2DC70206D2}"/>
-              </a:ext>
-            </a:extLst>
-          </p:cNvPr>
-          <p:cNvSpPr>
-            <a:spLocks xmlns:a="http://schemas.openxmlformats.org/drawingml/2006/main" noGrp="1"/>
-          </p:cNvSpPr>
-          <p:nvPr/>
-        </p:nvSpPr>
-        <p:spPr>
-          <a:xfrm xmlns:a="http://schemas.openxmlformats.org/drawingml/2006/main">
-            <a:off x="1200150" y="3486150"/>
-            <a:ext cx="2381250" cy="323850"/>
-          </a:xfrm>
-          <a:prstGeom xmlns:a="http://schemas.openxmlformats.org/drawingml/2006/main" prst="roundRect">
-            <a:avLst>
-              <a:gd name="adj" fmla="val 17647"/>
-            </a:avLst>
-          </a:prstGeom>
-          <a:solidFill xmlns:a="http://schemas.openxmlformats.org/drawingml/2006/main">
-            <a:srgbClr val="FFFFFF"/>
-          </a:solidFill>
-          <a:ln xmlns:a="http://schemas.openxmlformats.org/drawingml/2006/main" w="10478">
-            <a:solidFill>
-              <a:srgbClr val="B9D4F6"/>
-            </a:solidFill>
-            <a:prstDash val="solid"/>
-          </a:ln>
-        </p:spPr>
-      </p:sp>
-      <p:sp>
-        <p:nvSpPr>
-          <p:cNvPr id="11" name="">
-            <a:extLst xmlns:a="http://schemas.openxmlformats.org/drawingml/2006/main">
-              <a:ext uri="{FF2B5EF4-FFF2-40B4-BE49-F238E27FC236}">
-                <a16:creationId xmlns:a16="http://schemas.microsoft.com/office/drawing/2014/main" id="{0AE5623C-DACF-4FE4-9213-1FA0FFB40DD7}"/>
-              </a:ext>
-            </a:extLst>
-          </p:cNvPr>
-          <p:cNvSpPr>
-            <a:spLocks xmlns:a="http://schemas.openxmlformats.org/drawingml/2006/main" noGrp="1"/>
-          </p:cNvSpPr>
-          <p:nvPr/>
-        </p:nvSpPr>
-        <p:spPr>
-          <a:xfrm xmlns:a="http://schemas.openxmlformats.org/drawingml/2006/main">
-            <a:off x="1428750" y="3562350"/>
-            <a:ext cx="1924050" cy="171450"/>
-          </a:xfrm>
-          <a:prstGeom xmlns:a="http://schemas.openxmlformats.org/drawingml/2006/main" prst="rect">
-            <a:avLst/>
-          </a:prstGeom>
-          <a:noFill xmlns:a="http://schemas.openxmlformats.org/drawingml/2006/main"/>
-          <a:ln xmlns:a="http://schemas.openxmlformats.org/drawingml/2006/main" w="0">
-            <a:noFill/>
-            <a:prstDash val="solid"/>
-          </a:ln>
-        </p:spPr>
-        <p:txBody>
-          <a:bodyPr xmlns:a="http://schemas.openxmlformats.org/drawingml/2006/main"/>
-          <a:lstStyle xmlns:a="http://schemas.openxmlformats.org/drawingml/2006/main"/>
-          <a:p xmlns:a="http://schemas.openxmlformats.org/drawingml/2006/main">
-            <a:pPr algn="ctr">
-              <a:defRPr sz="1200" b="0" i="0">
-                <a:solidFill>
-                  <a:srgbClr val="061A45"/>
-                </a:solidFill>
-              </a:defRPr>
-            </a:pPr>
-            <a:r>
-              <a:rPr sz="1200" b="0" i="0">
-                <a:solidFill>
-                  <a:srgbClr val="061A45"/>
-                </a:solidFill>
-              </a:rPr>
-              <a:t>Write tests</a:t>
-            </a:r>
-          </a:p>
-        </p:txBody>
-      </p:sp>
-      <p:sp>
-        <p:nvSpPr>
-          <p:cNvPr id="12" name="">
-            <a:extLst xmlns:a="http://schemas.openxmlformats.org/drawingml/2006/main">
-              <a:ext uri="{FF2B5EF4-FFF2-40B4-BE49-F238E27FC236}">
-                <a16:creationId xmlns:a16="http://schemas.microsoft.com/office/drawing/2014/main" id="{7E03418F-AD76-49DF-865A-3A80A7E3BB7B}"/>
-              </a:ext>
-            </a:extLst>
-          </p:cNvPr>
-          <p:cNvSpPr>
-            <a:spLocks xmlns:a="http://schemas.openxmlformats.org/drawingml/2006/main" noGrp="1"/>
-          </p:cNvSpPr>
-          <p:nvPr/>
-        </p:nvSpPr>
-        <p:spPr>
-          <a:xfrm xmlns:a="http://schemas.openxmlformats.org/drawingml/2006/main">
-            <a:off x="1200150" y="3943350"/>
-            <a:ext cx="2381250" cy="323850"/>
-          </a:xfrm>
-          <a:prstGeom xmlns:a="http://schemas.openxmlformats.org/drawingml/2006/main" prst="roundRect">
-            <a:avLst>
-              <a:gd name="adj" fmla="val 17647"/>
-            </a:avLst>
-          </a:prstGeom>
-          <a:solidFill xmlns:a="http://schemas.openxmlformats.org/drawingml/2006/main">
-            <a:srgbClr val="FFFFFF"/>
-          </a:solidFill>
-          <a:ln xmlns:a="http://schemas.openxmlformats.org/drawingml/2006/main" w="10478">
-            <a:solidFill>
-              <a:srgbClr val="B9D4F6"/>
-            </a:solidFill>
-            <a:prstDash val="solid"/>
-          </a:ln>
-        </p:spPr>
-      </p:sp>
-      <p:sp>
-        <p:nvSpPr>
-          <p:cNvPr id="13" name="">
-            <a:extLst xmlns:a="http://schemas.openxmlformats.org/drawingml/2006/main">
-              <a:ext uri="{FF2B5EF4-FFF2-40B4-BE49-F238E27FC236}">
-                <a16:creationId xmlns:a16="http://schemas.microsoft.com/office/drawing/2014/main" id="{E74DF1B1-ADC2-428E-A402-6AE736D712D0}"/>
-              </a:ext>
-            </a:extLst>
-          </p:cNvPr>
-          <p:cNvSpPr>
-            <a:spLocks xmlns:a="http://schemas.openxmlformats.org/drawingml/2006/main" noGrp="1"/>
-          </p:cNvSpPr>
-          <p:nvPr/>
-        </p:nvSpPr>
-        <p:spPr>
-          <a:xfrm xmlns:a="http://schemas.openxmlformats.org/drawingml/2006/main">
-            <a:off x="1428750" y="4019550"/>
-            <a:ext cx="1924050" cy="171450"/>
-          </a:xfrm>
-          <a:prstGeom xmlns:a="http://schemas.openxmlformats.org/drawingml/2006/main" prst="rect">
-            <a:avLst/>
-          </a:prstGeom>
-          <a:noFill xmlns:a="http://schemas.openxmlformats.org/drawingml/2006/main"/>
-          <a:ln xmlns:a="http://schemas.openxmlformats.org/drawingml/2006/main" w="0">
-            <a:noFill/>
-            <a:prstDash val="solid"/>
-          </a:ln>
-        </p:spPr>
-        <p:txBody>
-          <a:bodyPr xmlns:a="http://schemas.openxmlformats.org/drawingml/2006/main"/>
-          <a:lstStyle xmlns:a="http://schemas.openxmlformats.org/drawingml/2006/main"/>
-          <a:p xmlns:a="http://schemas.openxmlformats.org/drawingml/2006/main">
-            <a:pPr algn="ctr">
-              <a:defRPr sz="1200" b="0" i="0">
-                <a:solidFill>
-                  <a:srgbClr val="061A45"/>
-                </a:solidFill>
-              </a:defRPr>
-            </a:pPr>
-            <a:r>
-              <a:rPr sz="1200" b="0" i="0">
-                <a:solidFill>
-                  <a:srgbClr val="061A45"/>
-                </a:solidFill>
-              </a:rPr>
-              <a:t>Generate docs</a:t>
-            </a:r>
-          </a:p>
-        </p:txBody>
-      </p:sp>
-      <p:sp>
-        <p:nvSpPr>
-          <p:cNvPr id="14" name="">
-            <a:extLst xmlns:a="http://schemas.openxmlformats.org/drawingml/2006/main">
-              <a:ext uri="{FF2B5EF4-FFF2-40B4-BE49-F238E27FC236}">
-                <a16:creationId xmlns:a16="http://schemas.microsoft.com/office/drawing/2014/main" id="{F08A340C-758D-4841-94F6-B8A07B69D231}"/>
-              </a:ext>
-            </a:extLst>
-          </p:cNvPr>
-          <p:cNvSpPr>
-            <a:spLocks xmlns:a="http://schemas.openxmlformats.org/drawingml/2006/main" noGrp="1"/>
-          </p:cNvSpPr>
-          <p:nvPr/>
-        </p:nvSpPr>
-        <p:spPr>
-          <a:xfrm xmlns:a="http://schemas.openxmlformats.org/drawingml/2006/main">
-            <a:off x="4324350" y="3371850"/>
-            <a:ext cx="876300" cy="0"/>
-          </a:xfrm>
-          <a:prstGeom xmlns:a="http://schemas.openxmlformats.org/drawingml/2006/main" prst="line">
-            <a:avLst/>
-          </a:prstGeom>
-          <a:ln xmlns:a="http://schemas.openxmlformats.org/drawingml/2006/main" w="38100">
-            <a:solidFill>
-              <a:srgbClr val="004AAD"/>
-            </a:solidFill>
-            <a:prstDash val="solid"/>
-          </a:ln>
-        </p:spPr>
-      </p:sp>
-      <p:sp>
-        <p:nvSpPr>
-          <p:cNvPr id="15" name="">
-            <a:extLst xmlns:a="http://schemas.openxmlformats.org/drawingml/2006/main">
-              <a:ext uri="{FF2B5EF4-FFF2-40B4-BE49-F238E27FC236}">
-                <a16:creationId xmlns:a16="http://schemas.microsoft.com/office/drawing/2014/main" id="{676B7865-A910-40D3-BDA0-3BB043E4A655}"/>
-              </a:ext>
-            </a:extLst>
-          </p:cNvPr>
-          <p:cNvSpPr>
-            <a:spLocks xmlns:a="http://schemas.openxmlformats.org/drawingml/2006/main" noGrp="1"/>
-          </p:cNvSpPr>
-          <p:nvPr/>
-        </p:nvSpPr>
-        <p:spPr>
-          <a:xfrm xmlns:a="http://schemas.openxmlformats.org/drawingml/2006/main">
-            <a:off x="5448300" y="1409700"/>
-            <a:ext cx="3143250" cy="3943350"/>
-          </a:xfrm>
-          <a:prstGeom xmlns:a="http://schemas.openxmlformats.org/drawingml/2006/main" prst="roundRect">
-            <a:avLst>
-              <a:gd name="adj" fmla="val 2424"/>
-            </a:avLst>
-          </a:prstGeom>
-          <a:solidFill xmlns:a="http://schemas.openxmlformats.org/drawingml/2006/main">
-            <a:srgbClr val="FFF7DF"/>
-          </a:solidFill>
-          <a:ln xmlns:a="http://schemas.openxmlformats.org/drawingml/2006/main" w="10478">
-            <a:solidFill>
-              <a:srgbClr val="F0D891"/>
-            </a:solidFill>
-            <a:prstDash val="solid"/>
-          </a:ln>
-        </p:spPr>
-      </p:sp>
-      <p:sp>
-        <p:nvSpPr>
-          <p:cNvPr id="16" name="">
-            <a:extLst xmlns:a="http://schemas.openxmlformats.org/drawingml/2006/main">
-              <a:ext uri="{FF2B5EF4-FFF2-40B4-BE49-F238E27FC236}">
-                <a16:creationId xmlns:a16="http://schemas.microsoft.com/office/drawing/2014/main" id="{B649E31C-BD52-43A6-89EE-5B784A3BE51F}"/>
-              </a:ext>
-            </a:extLst>
-          </p:cNvPr>
-          <p:cNvSpPr>
-            <a:spLocks xmlns:a="http://schemas.openxmlformats.org/drawingml/2006/main" noGrp="1"/>
-          </p:cNvSpPr>
-          <p:nvPr/>
-        </p:nvSpPr>
-        <p:spPr>
-          <a:xfrm xmlns:a="http://schemas.openxmlformats.org/drawingml/2006/main">
-            <a:off x="6000750" y="1752600"/>
-            <a:ext cx="2038350" cy="342900"/>
-          </a:xfrm>
-          <a:prstGeom xmlns:a="http://schemas.openxmlformats.org/drawingml/2006/main" prst="rect">
-            <a:avLst/>
-          </a:prstGeom>
-          <a:noFill xmlns:a="http://schemas.openxmlformats.org/drawingml/2006/main"/>
-          <a:ln xmlns:a="http://schemas.openxmlformats.org/drawingml/2006/main" w="0">
-            <a:noFill/>
-            <a:prstDash val="solid"/>
-          </a:ln>
-        </p:spPr>
-        <p:txBody>
-          <a:bodyPr xmlns:a="http://schemas.openxmlformats.org/drawingml/2006/main"/>
-          <a:lstStyle xmlns:a="http://schemas.openxmlformats.org/drawingml/2006/main"/>
-          <a:p xmlns:a="http://schemas.openxmlformats.org/drawingml/2006/main">
-            <a:pPr algn="ctr">
-              <a:defRPr sz="2550" b="1" i="0">
-                <a:solidFill>
-                  <a:srgbClr val="D88A00"/>
-                </a:solidFill>
-              </a:defRPr>
-            </a:pPr>
-            <a:r>
-              <a:rPr sz="2550" b="1" i="0">
-                <a:solidFill>
-                  <a:srgbClr val="D88A00"/>
-                </a:solidFill>
-              </a:rPr>
-              <a:t>Skill</a:t>
-            </a:r>
-          </a:p>
-        </p:txBody>
-      </p:sp>
-      <p:sp>
-        <p:nvSpPr>
-          <p:cNvPr id="17" name="">
-            <a:extLst xmlns:a="http://schemas.openxmlformats.org/drawingml/2006/main">
-              <a:ext uri="{FF2B5EF4-FFF2-40B4-BE49-F238E27FC236}">
-                <a16:creationId xmlns:a16="http://schemas.microsoft.com/office/drawing/2014/main" id="{662E9848-CF25-46B2-B408-1A43946C8591}"/>
-              </a:ext>
-            </a:extLst>
-          </p:cNvPr>
-          <p:cNvSpPr>
-            <a:spLocks xmlns:a="http://schemas.openxmlformats.org/drawingml/2006/main" noGrp="1"/>
-          </p:cNvSpPr>
-          <p:nvPr/>
-        </p:nvSpPr>
-        <p:spPr>
-          <a:xfrm xmlns:a="http://schemas.openxmlformats.org/drawingml/2006/main">
-            <a:off x="6191250" y="2381250"/>
-            <a:ext cx="2000250" cy="190500"/>
+              <a:t>Context budget</a:t>
+            </a:r>
+          </a:p>
+        </p:txBody>
+      </p:sp>
+      <p:sp>
+        <p:nvSpPr>
+          <p:cNvPr id="32" name="">
+            <a:extLst xmlns:a="http://schemas.openxmlformats.org/drawingml/2006/main">
+              <a:ext uri="{FF2B5EF4-FFF2-40B4-BE49-F238E27FC236}">
+                <a16:creationId xmlns:a16="http://schemas.microsoft.com/office/drawing/2014/main" id="{D80AD4D5-B632-40EF-9CEF-920DCA400ED9}"/>
+              </a:ext>
+            </a:extLst>
+          </p:cNvPr>
+          <p:cNvSpPr>
+            <a:spLocks xmlns:a="http://schemas.openxmlformats.org/drawingml/2006/main" noGrp="1"/>
+          </p:cNvSpPr>
+          <p:nvPr/>
+        </p:nvSpPr>
+        <p:spPr>
+          <a:xfrm xmlns:a="http://schemas.openxmlformats.org/drawingml/2006/main">
+            <a:off x="3600450" y="5886450"/>
+            <a:ext cx="6762750" cy="209550"/>
           </a:xfrm>
           <a:prstGeom xmlns:a="http://schemas.openxmlformats.org/drawingml/2006/main" prst="rect">
             <a:avLst/>
@@ -12841,557 +13593,7 @@
                   <a:srgbClr val="061A45"/>
                 </a:solidFill>
               </a:rPr>
-              <a:t>- Steps</a:t>
-            </a:r>
-          </a:p>
-        </p:txBody>
-      </p:sp>
-      <p:sp>
-        <p:nvSpPr>
-          <p:cNvPr id="18" name="">
-            <a:extLst xmlns:a="http://schemas.openxmlformats.org/drawingml/2006/main">
-              <a:ext uri="{FF2B5EF4-FFF2-40B4-BE49-F238E27FC236}">
-                <a16:creationId xmlns:a16="http://schemas.microsoft.com/office/drawing/2014/main" id="{2CF4AFCA-1F68-40E6-96A3-3F73A47217BF}"/>
-              </a:ext>
-            </a:extLst>
-          </p:cNvPr>
-          <p:cNvSpPr>
-            <a:spLocks xmlns:a="http://schemas.openxmlformats.org/drawingml/2006/main" noGrp="1"/>
-          </p:cNvSpPr>
-          <p:nvPr/>
-        </p:nvSpPr>
-        <p:spPr>
-          <a:xfrm xmlns:a="http://schemas.openxmlformats.org/drawingml/2006/main">
-            <a:off x="6191250" y="2781300"/>
-            <a:ext cx="2000250" cy="190500"/>
-          </a:xfrm>
-          <a:prstGeom xmlns:a="http://schemas.openxmlformats.org/drawingml/2006/main" prst="rect">
-            <a:avLst/>
-          </a:prstGeom>
-          <a:noFill xmlns:a="http://schemas.openxmlformats.org/drawingml/2006/main"/>
-          <a:ln xmlns:a="http://schemas.openxmlformats.org/drawingml/2006/main" w="0">
-            <a:noFill/>
-            <a:prstDash val="solid"/>
-          </a:ln>
-        </p:spPr>
-        <p:txBody>
-          <a:bodyPr xmlns:a="http://schemas.openxmlformats.org/drawingml/2006/main"/>
-          <a:lstStyle xmlns:a="http://schemas.openxmlformats.org/drawingml/2006/main"/>
-          <a:p xmlns:a="http://schemas.openxmlformats.org/drawingml/2006/main">
-            <a:pPr algn="l">
-              <a:defRPr sz="1350" b="0" i="0">
-                <a:solidFill>
-                  <a:srgbClr val="061A45"/>
-                </a:solidFill>
-              </a:defRPr>
-            </a:pPr>
-            <a:r>
-              <a:rPr sz="1350" b="0" i="0">
-                <a:solidFill>
-                  <a:srgbClr val="061A45"/>
-                </a:solidFill>
-              </a:rPr>
-              <a:t>- Checklist</a:t>
-            </a:r>
-          </a:p>
-        </p:txBody>
-      </p:sp>
-      <p:sp>
-        <p:nvSpPr>
-          <p:cNvPr id="19" name="">
-            <a:extLst xmlns:a="http://schemas.openxmlformats.org/drawingml/2006/main">
-              <a:ext uri="{FF2B5EF4-FFF2-40B4-BE49-F238E27FC236}">
-                <a16:creationId xmlns:a16="http://schemas.microsoft.com/office/drawing/2014/main" id="{DA5CCBB9-7938-4F3B-925F-390BCCF559A7}"/>
-              </a:ext>
-            </a:extLst>
-          </p:cNvPr>
-          <p:cNvSpPr>
-            <a:spLocks xmlns:a="http://schemas.openxmlformats.org/drawingml/2006/main" noGrp="1"/>
-          </p:cNvSpPr>
-          <p:nvPr/>
-        </p:nvSpPr>
-        <p:spPr>
-          <a:xfrm xmlns:a="http://schemas.openxmlformats.org/drawingml/2006/main">
-            <a:off x="6191250" y="3181350"/>
-            <a:ext cx="2000250" cy="190500"/>
-          </a:xfrm>
-          <a:prstGeom xmlns:a="http://schemas.openxmlformats.org/drawingml/2006/main" prst="rect">
-            <a:avLst/>
-          </a:prstGeom>
-          <a:noFill xmlns:a="http://schemas.openxmlformats.org/drawingml/2006/main"/>
-          <a:ln xmlns:a="http://schemas.openxmlformats.org/drawingml/2006/main" w="0">
-            <a:noFill/>
-            <a:prstDash val="solid"/>
-          </a:ln>
-        </p:spPr>
-        <p:txBody>
-          <a:bodyPr xmlns:a="http://schemas.openxmlformats.org/drawingml/2006/main"/>
-          <a:lstStyle xmlns:a="http://schemas.openxmlformats.org/drawingml/2006/main"/>
-          <a:p xmlns:a="http://schemas.openxmlformats.org/drawingml/2006/main">
-            <a:pPr algn="l">
-              <a:defRPr sz="1350" b="0" i="0">
-                <a:solidFill>
-                  <a:srgbClr val="061A45"/>
-                </a:solidFill>
-              </a:defRPr>
-            </a:pPr>
-            <a:r>
-              <a:rPr sz="1350" b="0" i="0">
-                <a:solidFill>
-                  <a:srgbClr val="061A45"/>
-                </a:solidFill>
-              </a:rPr>
-              <a:t>- Output template</a:t>
-            </a:r>
-          </a:p>
-        </p:txBody>
-      </p:sp>
-      <p:sp>
-        <p:nvSpPr>
-          <p:cNvPr id="20" name="">
-            <a:extLst xmlns:a="http://schemas.openxmlformats.org/drawingml/2006/main">
-              <a:ext uri="{FF2B5EF4-FFF2-40B4-BE49-F238E27FC236}">
-                <a16:creationId xmlns:a16="http://schemas.microsoft.com/office/drawing/2014/main" id="{672CF537-8A8B-4D3C-BD6C-32D4BB577B27}"/>
-              </a:ext>
-            </a:extLst>
-          </p:cNvPr>
-          <p:cNvSpPr>
-            <a:spLocks xmlns:a="http://schemas.openxmlformats.org/drawingml/2006/main" noGrp="1"/>
-          </p:cNvSpPr>
-          <p:nvPr/>
-        </p:nvSpPr>
-        <p:spPr>
-          <a:xfrm xmlns:a="http://schemas.openxmlformats.org/drawingml/2006/main">
-            <a:off x="6191250" y="3581400"/>
-            <a:ext cx="2000250" cy="190500"/>
-          </a:xfrm>
-          <a:prstGeom xmlns:a="http://schemas.openxmlformats.org/drawingml/2006/main" prst="rect">
-            <a:avLst/>
-          </a:prstGeom>
-          <a:noFill xmlns:a="http://schemas.openxmlformats.org/drawingml/2006/main"/>
-          <a:ln xmlns:a="http://schemas.openxmlformats.org/drawingml/2006/main" w="0">
-            <a:noFill/>
-            <a:prstDash val="solid"/>
-          </a:ln>
-        </p:spPr>
-        <p:txBody>
-          <a:bodyPr xmlns:a="http://schemas.openxmlformats.org/drawingml/2006/main"/>
-          <a:lstStyle xmlns:a="http://schemas.openxmlformats.org/drawingml/2006/main"/>
-          <a:p xmlns:a="http://schemas.openxmlformats.org/drawingml/2006/main">
-            <a:pPr algn="l">
-              <a:defRPr sz="1350" b="0" i="0">
-                <a:solidFill>
-                  <a:srgbClr val="061A45"/>
-                </a:solidFill>
-              </a:defRPr>
-            </a:pPr>
-            <a:r>
-              <a:rPr sz="1350" b="0" i="0">
-                <a:solidFill>
-                  <a:srgbClr val="061A45"/>
-                </a:solidFill>
-              </a:rPr>
-              <a:t>- Examples</a:t>
-            </a:r>
-          </a:p>
-        </p:txBody>
-      </p:sp>
-      <p:sp>
-        <p:nvSpPr>
-          <p:cNvPr id="21" name="">
-            <a:extLst xmlns:a="http://schemas.openxmlformats.org/drawingml/2006/main">
-              <a:ext uri="{FF2B5EF4-FFF2-40B4-BE49-F238E27FC236}">
-                <a16:creationId xmlns:a16="http://schemas.microsoft.com/office/drawing/2014/main" id="{86A36F37-DD79-46E4-9E76-465A4BF14E88}"/>
-              </a:ext>
-            </a:extLst>
-          </p:cNvPr>
-          <p:cNvSpPr>
-            <a:spLocks xmlns:a="http://schemas.openxmlformats.org/drawingml/2006/main" noGrp="1"/>
-          </p:cNvSpPr>
-          <p:nvPr/>
-        </p:nvSpPr>
-        <p:spPr>
-          <a:xfrm xmlns:a="http://schemas.openxmlformats.org/drawingml/2006/main">
-            <a:off x="6191250" y="3981450"/>
-            <a:ext cx="2000250" cy="190500"/>
-          </a:xfrm>
-          <a:prstGeom xmlns:a="http://schemas.openxmlformats.org/drawingml/2006/main" prst="rect">
-            <a:avLst/>
-          </a:prstGeom>
-          <a:noFill xmlns:a="http://schemas.openxmlformats.org/drawingml/2006/main"/>
-          <a:ln xmlns:a="http://schemas.openxmlformats.org/drawingml/2006/main" w="0">
-            <a:noFill/>
-            <a:prstDash val="solid"/>
-          </a:ln>
-        </p:spPr>
-        <p:txBody>
-          <a:bodyPr xmlns:a="http://schemas.openxmlformats.org/drawingml/2006/main"/>
-          <a:lstStyle xmlns:a="http://schemas.openxmlformats.org/drawingml/2006/main"/>
-          <a:p xmlns:a="http://schemas.openxmlformats.org/drawingml/2006/main">
-            <a:pPr algn="l">
-              <a:defRPr sz="1350" b="0" i="0">
-                <a:solidFill>
-                  <a:srgbClr val="061A45"/>
-                </a:solidFill>
-              </a:defRPr>
-            </a:pPr>
-            <a:r>
-              <a:rPr sz="1350" b="0" i="0">
-                <a:solidFill>
-                  <a:srgbClr val="061A45"/>
-                </a:solidFill>
-              </a:rPr>
-              <a:t>- Tool guidance</a:t>
-            </a:r>
-          </a:p>
-        </p:txBody>
-      </p:sp>
-      <p:sp>
-        <p:nvSpPr>
-          <p:cNvPr id="22" name="">
-            <a:extLst xmlns:a="http://schemas.openxmlformats.org/drawingml/2006/main">
-              <a:ext uri="{FF2B5EF4-FFF2-40B4-BE49-F238E27FC236}">
-                <a16:creationId xmlns:a16="http://schemas.microsoft.com/office/drawing/2014/main" id="{F8CD8904-9D40-4997-A042-96D85ADE4370}"/>
-              </a:ext>
-            </a:extLst>
-          </p:cNvPr>
-          <p:cNvSpPr>
-            <a:spLocks xmlns:a="http://schemas.openxmlformats.org/drawingml/2006/main" noGrp="1"/>
-          </p:cNvSpPr>
-          <p:nvPr/>
-        </p:nvSpPr>
-        <p:spPr>
-          <a:xfrm xmlns:a="http://schemas.openxmlformats.org/drawingml/2006/main">
-            <a:off x="6191250" y="4381500"/>
-            <a:ext cx="2000250" cy="190500"/>
-          </a:xfrm>
-          <a:prstGeom xmlns:a="http://schemas.openxmlformats.org/drawingml/2006/main" prst="rect">
-            <a:avLst/>
-          </a:prstGeom>
-          <a:noFill xmlns:a="http://schemas.openxmlformats.org/drawingml/2006/main"/>
-          <a:ln xmlns:a="http://schemas.openxmlformats.org/drawingml/2006/main" w="0">
-            <a:noFill/>
-            <a:prstDash val="solid"/>
-          </a:ln>
-        </p:spPr>
-        <p:txBody>
-          <a:bodyPr xmlns:a="http://schemas.openxmlformats.org/drawingml/2006/main"/>
-          <a:lstStyle xmlns:a="http://schemas.openxmlformats.org/drawingml/2006/main"/>
-          <a:p xmlns:a="http://schemas.openxmlformats.org/drawingml/2006/main">
-            <a:pPr algn="l">
-              <a:defRPr sz="1350" b="0" i="0">
-                <a:solidFill>
-                  <a:srgbClr val="061A45"/>
-                </a:solidFill>
-              </a:defRPr>
-            </a:pPr>
-            <a:r>
-              <a:rPr sz="1350" b="0" i="0">
-                <a:solidFill>
-                  <a:srgbClr val="061A45"/>
-                </a:solidFill>
-              </a:rPr>
-              <a:t>- Project conventions</a:t>
-            </a:r>
-          </a:p>
-        </p:txBody>
-      </p:sp>
-      <p:sp>
-        <p:nvSpPr>
-          <p:cNvPr id="23" name="">
-            <a:extLst xmlns:a="http://schemas.openxmlformats.org/drawingml/2006/main">
-              <a:ext uri="{FF2B5EF4-FFF2-40B4-BE49-F238E27FC236}">
-                <a16:creationId xmlns:a16="http://schemas.microsoft.com/office/drawing/2014/main" id="{19A7EDDB-CF73-4ACB-A0B0-D2ABBBB6D9F0}"/>
-              </a:ext>
-            </a:extLst>
-          </p:cNvPr>
-          <p:cNvSpPr>
-            <a:spLocks xmlns:a="http://schemas.openxmlformats.org/drawingml/2006/main" noGrp="1"/>
-          </p:cNvSpPr>
-          <p:nvPr/>
-        </p:nvSpPr>
-        <p:spPr>
-          <a:xfrm xmlns:a="http://schemas.openxmlformats.org/drawingml/2006/main">
-            <a:off x="8839200" y="3371850"/>
-            <a:ext cx="876300" cy="0"/>
-          </a:xfrm>
-          <a:prstGeom xmlns:a="http://schemas.openxmlformats.org/drawingml/2006/main" prst="line">
-            <a:avLst/>
-          </a:prstGeom>
-          <a:ln xmlns:a="http://schemas.openxmlformats.org/drawingml/2006/main" w="38100">
-            <a:solidFill>
-              <a:srgbClr val="004AAD"/>
-            </a:solidFill>
-            <a:prstDash val="solid"/>
-          </a:ln>
-        </p:spPr>
-      </p:sp>
-      <p:sp>
-        <p:nvSpPr>
-          <p:cNvPr id="24" name="">
-            <a:extLst xmlns:a="http://schemas.openxmlformats.org/drawingml/2006/main">
-              <a:ext uri="{FF2B5EF4-FFF2-40B4-BE49-F238E27FC236}">
-                <a16:creationId xmlns:a16="http://schemas.microsoft.com/office/drawing/2014/main" id="{0795C7D7-BFA2-4227-8895-81C14DF94D4D}"/>
-              </a:ext>
-            </a:extLst>
-          </p:cNvPr>
-          <p:cNvSpPr>
-            <a:spLocks xmlns:a="http://schemas.openxmlformats.org/drawingml/2006/main" noGrp="1"/>
-          </p:cNvSpPr>
-          <p:nvPr/>
-        </p:nvSpPr>
-        <p:spPr>
-          <a:xfrm xmlns:a="http://schemas.openxmlformats.org/drawingml/2006/main">
-            <a:off x="9963150" y="1619250"/>
-            <a:ext cx="1524000" cy="3524250"/>
-          </a:xfrm>
-          <a:prstGeom xmlns:a="http://schemas.openxmlformats.org/drawingml/2006/main" prst="roundRect">
-            <a:avLst>
-              <a:gd name="adj" fmla="val 5000"/>
-            </a:avLst>
-          </a:prstGeom>
-          <a:solidFill xmlns:a="http://schemas.openxmlformats.org/drawingml/2006/main">
-            <a:srgbClr val="EEF6FF"/>
-          </a:solidFill>
-          <a:ln xmlns:a="http://schemas.openxmlformats.org/drawingml/2006/main" w="10478">
-            <a:solidFill>
-              <a:srgbClr val="138A43"/>
-            </a:solidFill>
-            <a:prstDash val="solid"/>
-          </a:ln>
-        </p:spPr>
-      </p:sp>
-      <p:sp>
-        <p:nvSpPr>
-          <p:cNvPr id="25" name="">
-            <a:extLst xmlns:a="http://schemas.openxmlformats.org/drawingml/2006/main">
-              <a:ext uri="{FF2B5EF4-FFF2-40B4-BE49-F238E27FC236}">
-                <a16:creationId xmlns:a16="http://schemas.microsoft.com/office/drawing/2014/main" id="{3B1A1542-6341-402F-9A03-8B96D1D11140}"/>
-              </a:ext>
-            </a:extLst>
-          </p:cNvPr>
-          <p:cNvSpPr>
-            <a:spLocks xmlns:a="http://schemas.openxmlformats.org/drawingml/2006/main" noGrp="1"/>
-          </p:cNvSpPr>
-          <p:nvPr/>
-        </p:nvSpPr>
-        <p:spPr>
-          <a:xfrm xmlns:a="http://schemas.openxmlformats.org/drawingml/2006/main">
-            <a:off x="10306050" y="2000250"/>
-            <a:ext cx="857250" cy="285750"/>
-          </a:xfrm>
-          <a:prstGeom xmlns:a="http://schemas.openxmlformats.org/drawingml/2006/main" prst="rect">
-            <a:avLst/>
-          </a:prstGeom>
-          <a:noFill xmlns:a="http://schemas.openxmlformats.org/drawingml/2006/main"/>
-          <a:ln xmlns:a="http://schemas.openxmlformats.org/drawingml/2006/main" w="0">
-            <a:noFill/>
-            <a:prstDash val="solid"/>
-          </a:ln>
-        </p:spPr>
-        <p:txBody>
-          <a:bodyPr xmlns:a="http://schemas.openxmlformats.org/drawingml/2006/main"/>
-          <a:lstStyle xmlns:a="http://schemas.openxmlformats.org/drawingml/2006/main"/>
-          <a:p xmlns:a="http://schemas.openxmlformats.org/drawingml/2006/main">
-            <a:pPr algn="ctr">
-              <a:defRPr sz="2100" b="1" i="0">
-                <a:solidFill>
-                  <a:srgbClr val="138A43"/>
-                </a:solidFill>
-              </a:defRPr>
-            </a:pPr>
-            <a:r>
-              <a:rPr sz="2100" b="1" i="0">
-                <a:solidFill>
-                  <a:srgbClr val="138A43"/>
-                </a:solidFill>
-              </a:rPr>
-              <a:t>Paper</a:t>
-            </a:r>
-          </a:p>
-        </p:txBody>
-      </p:sp>
-      <p:sp>
-        <p:nvSpPr>
-          <p:cNvPr id="26" name="">
-            <a:extLst xmlns:a="http://schemas.openxmlformats.org/drawingml/2006/main">
-              <a:ext uri="{FF2B5EF4-FFF2-40B4-BE49-F238E27FC236}">
-                <a16:creationId xmlns:a16="http://schemas.microsoft.com/office/drawing/2014/main" id="{80B79BD0-0027-4910-868C-26BC80152BBA}"/>
-              </a:ext>
-            </a:extLst>
-          </p:cNvPr>
-          <p:cNvSpPr>
-            <a:spLocks xmlns:a="http://schemas.openxmlformats.org/drawingml/2006/main" noGrp="1"/>
-          </p:cNvSpPr>
-          <p:nvPr/>
-        </p:nvSpPr>
-        <p:spPr>
-          <a:xfrm xmlns:a="http://schemas.openxmlformats.org/drawingml/2006/main">
-            <a:off x="10229850" y="2800350"/>
-            <a:ext cx="990600" cy="1143000"/>
-          </a:xfrm>
-          <a:prstGeom xmlns:a="http://schemas.openxmlformats.org/drawingml/2006/main" prst="rect">
-            <a:avLst/>
-          </a:prstGeom>
-          <a:noFill xmlns:a="http://schemas.openxmlformats.org/drawingml/2006/main"/>
-          <a:ln xmlns:a="http://schemas.openxmlformats.org/drawingml/2006/main" w="0">
-            <a:noFill/>
-            <a:prstDash val="solid"/>
-          </a:ln>
-        </p:spPr>
-        <p:txBody>
-          <a:bodyPr xmlns:a="http://schemas.openxmlformats.org/drawingml/2006/main"/>
-          <a:lstStyle xmlns:a="http://schemas.openxmlformats.org/drawingml/2006/main"/>
-          <a:p xmlns:a="http://schemas.openxmlformats.org/drawingml/2006/main">
-            <a:pPr algn="ctr">
-              <a:defRPr sz="1350" b="0" i="0">
-                <a:solidFill>
-                  <a:srgbClr val="061A45"/>
-                </a:solidFill>
-              </a:defRPr>
-            </a:pPr>
-            <a:r>
-              <a:rPr sz="1350" b="0" i="0">
-                <a:solidFill>
-                  <a:srgbClr val="061A45"/>
-                </a:solidFill>
-              </a:rPr>
-              <a:t>Only the relevant manual should be placed into the current context.</a:t>
-            </a:r>
-          </a:p>
-        </p:txBody>
-      </p:sp>
-      <p:sp>
-        <p:nvSpPr>
-          <p:cNvPr id="27" name="">
-            <a:extLst xmlns:a="http://schemas.openxmlformats.org/drawingml/2006/main">
-              <a:ext uri="{FF2B5EF4-FFF2-40B4-BE49-F238E27FC236}">
-                <a16:creationId xmlns:a16="http://schemas.microsoft.com/office/drawing/2014/main" id="{575AB14A-0880-4785-9458-8B7CEC54E290}"/>
-              </a:ext>
-            </a:extLst>
-          </p:cNvPr>
-          <p:cNvSpPr>
-            <a:spLocks xmlns:a="http://schemas.openxmlformats.org/drawingml/2006/main" noGrp="1"/>
-          </p:cNvSpPr>
-          <p:nvPr/>
-        </p:nvSpPr>
-        <p:spPr>
-          <a:xfrm xmlns:a="http://schemas.openxmlformats.org/drawingml/2006/main">
-            <a:off x="1657350" y="5753100"/>
-            <a:ext cx="8877300" cy="476250"/>
-          </a:xfrm>
-          <a:prstGeom xmlns:a="http://schemas.openxmlformats.org/drawingml/2006/main" prst="roundRect">
-            <a:avLst>
-              <a:gd name="adj" fmla="val 16000"/>
-            </a:avLst>
-          </a:prstGeom>
-          <a:solidFill xmlns:a="http://schemas.openxmlformats.org/drawingml/2006/main">
-            <a:srgbClr val="F8FBFF"/>
-          </a:solidFill>
-          <a:ln xmlns:a="http://schemas.openxmlformats.org/drawingml/2006/main" w="10478">
-            <a:solidFill>
-              <a:srgbClr val="004AAD"/>
-            </a:solidFill>
-            <a:prstDash val="solid"/>
-          </a:ln>
-        </p:spPr>
-      </p:sp>
-      <p:sp>
-        <p:nvSpPr>
-          <p:cNvPr id="28" name="">
-            <a:extLst xmlns:a="http://schemas.openxmlformats.org/drawingml/2006/main">
-              <a:ext uri="{FF2B5EF4-FFF2-40B4-BE49-F238E27FC236}">
-                <a16:creationId xmlns:a16="http://schemas.microsoft.com/office/drawing/2014/main" id="{0201A7E3-99B7-4D6C-A6FF-1F95FE6807EB}"/>
-              </a:ext>
-            </a:extLst>
-          </p:cNvPr>
-          <p:cNvSpPr>
-            <a:spLocks xmlns:a="http://schemas.openxmlformats.org/drawingml/2006/main" noGrp="1"/>
-          </p:cNvSpPr>
-          <p:nvPr/>
-        </p:nvSpPr>
-        <p:spPr>
-          <a:xfrm xmlns:a="http://schemas.openxmlformats.org/drawingml/2006/main">
-            <a:off x="2000250" y="5886450"/>
-            <a:ext cx="1714500" cy="209550"/>
-          </a:xfrm>
-          <a:prstGeom xmlns:a="http://schemas.openxmlformats.org/drawingml/2006/main" prst="rect">
-            <a:avLst/>
-          </a:prstGeom>
-          <a:noFill xmlns:a="http://schemas.openxmlformats.org/drawingml/2006/main"/>
-          <a:ln xmlns:a="http://schemas.openxmlformats.org/drawingml/2006/main" w="0">
-            <a:noFill/>
-            <a:prstDash val="solid"/>
-          </a:ln>
-        </p:spPr>
-        <p:txBody>
-          <a:bodyPr xmlns:a="http://schemas.openxmlformats.org/drawingml/2006/main"/>
-          <a:lstStyle xmlns:a="http://schemas.openxmlformats.org/drawingml/2006/main"/>
-          <a:p xmlns:a="http://schemas.openxmlformats.org/drawingml/2006/main">
-            <a:pPr algn="l">
-              <a:defRPr sz="1425" b="1" i="0">
-                <a:solidFill>
-                  <a:srgbClr val="004AAD"/>
-                </a:solidFill>
-              </a:defRPr>
-            </a:pPr>
-            <a:r>
-              <a:rPr sz="1425" b="1" i="0">
-                <a:solidFill>
-                  <a:srgbClr val="004AAD"/>
-                </a:solidFill>
-              </a:rPr>
-              <a:t>Practical point</a:t>
-            </a:r>
-          </a:p>
-        </p:txBody>
-      </p:sp>
-      <p:sp>
-        <p:nvSpPr>
-          <p:cNvPr id="29" name="">
-            <a:extLst xmlns:a="http://schemas.openxmlformats.org/drawingml/2006/main">
-              <a:ext uri="{FF2B5EF4-FFF2-40B4-BE49-F238E27FC236}">
-                <a16:creationId xmlns:a16="http://schemas.microsoft.com/office/drawing/2014/main" id="{2000C27F-CAE7-44D8-8978-20A8B4A294AC}"/>
-              </a:ext>
-            </a:extLst>
-          </p:cNvPr>
-          <p:cNvSpPr>
-            <a:spLocks xmlns:a="http://schemas.openxmlformats.org/drawingml/2006/main" noGrp="1"/>
-          </p:cNvSpPr>
-          <p:nvPr/>
-        </p:nvSpPr>
-        <p:spPr>
-          <a:xfrm xmlns:a="http://schemas.openxmlformats.org/drawingml/2006/main">
-            <a:off x="3905250" y="5886450"/>
-            <a:ext cx="6191250" cy="209550"/>
-          </a:xfrm>
-          <a:prstGeom xmlns:a="http://schemas.openxmlformats.org/drawingml/2006/main" prst="rect">
-            <a:avLst/>
-          </a:prstGeom>
-          <a:noFill xmlns:a="http://schemas.openxmlformats.org/drawingml/2006/main"/>
-          <a:ln xmlns:a="http://schemas.openxmlformats.org/drawingml/2006/main" w="0">
-            <a:noFill/>
-            <a:prstDash val="solid"/>
-          </a:ln>
-        </p:spPr>
-        <p:txBody>
-          <a:bodyPr xmlns:a="http://schemas.openxmlformats.org/drawingml/2006/main"/>
-          <a:lstStyle xmlns:a="http://schemas.openxmlformats.org/drawingml/2006/main"/>
-          <a:p xmlns:a="http://schemas.openxmlformats.org/drawingml/2006/main">
-            <a:pPr algn="l">
-              <a:defRPr sz="1350" b="0" i="0">
-                <a:solidFill>
-                  <a:srgbClr val="061A45"/>
-                </a:solidFill>
-              </a:defRPr>
-            </a:pPr>
-            <a:r>
-              <a:rPr sz="1350" b="0" i="0">
-                <a:solidFill>
-                  <a:srgbClr val="061A45"/>
-                </a:solidFill>
-              </a:rPr>
-              <a:t>Skills reduce repeated prompt copying, but always-loaded skills still consume context.</a:t>
+              <a:t>A skill saves attention by loading just-in-time. If always loaded, it still spends tokens.</a:t>
             </a:r>
           </a:p>
         </p:txBody>
@@ -13399,7 +13601,7 @@
     </p:spTree>
     <p:extLst>
       <p:ext uri="{BB962C8B-B14F-4D97-AF65-F5344CB8AC3E}">
-        <p14:creationId xmlns:p14="http://schemas.microsoft.com/office/powerpoint/2010/main" val="1336128556"/>
+        <p14:creationId xmlns:p14="http://schemas.microsoft.com/office/powerpoint/2010/main" val="2132693513"/>
       </p:ext>
     </p:extLst>
   </p:cSld>
@@ -13430,7 +13632,7 @@
           <p:cNvPr id="1" name="">
             <a:extLst xmlns:a="http://schemas.openxmlformats.org/drawingml/2006/main">
               <a:ext uri="{FF2B5EF4-FFF2-40B4-BE49-F238E27FC236}">
-                <a16:creationId xmlns:a16="http://schemas.microsoft.com/office/drawing/2014/main" id="{40E1B699-AFF4-4967-9CEE-D60D09B6E2B4}"/>
+                <a16:creationId xmlns:a16="http://schemas.microsoft.com/office/drawing/2014/main" id="{5DCD0C29-E70F-49E8-9372-AB2EA26F2A8E}"/>
               </a:ext>
             </a:extLst>
           </p:cNvPr>
@@ -13470,7 +13672,7 @@
                   <a:srgbClr val="061A45"/>
                 </a:solidFill>
               </a:rPr>
-              <a:t>Tool, Skill, Agent, and Harness Are Different</a:t>
+              <a:t>Prompt Extensions Load Context in Different Ways</a:t>
             </a:r>
           </a:p>
         </p:txBody>
@@ -13480,7 +13682,7 @@
           <p:cNvPr id="2" name="">
             <a:extLst xmlns:a="http://schemas.openxmlformats.org/drawingml/2006/main">
               <a:ext uri="{FF2B5EF4-FFF2-40B4-BE49-F238E27FC236}">
-                <a16:creationId xmlns:a16="http://schemas.microsoft.com/office/drawing/2014/main" id="{648D2329-ED00-4182-8B0D-531AFD9DC227}"/>
+                <a16:creationId xmlns:a16="http://schemas.microsoft.com/office/drawing/2014/main" id="{E12D48E1-12D8-486C-9046-5DCB562E7344}"/>
               </a:ext>
             </a:extLst>
           </p:cNvPr>
@@ -13520,7 +13722,7 @@
                   <a:srgbClr val="004AAD"/>
                 </a:solidFill>
               </a:rPr>
-              <a:t>Use the right word for the right runtime responsibility.</a:t>
+              <a:t>The harness decides what stays global, loads on demand, or gets its own paper.</a:t>
             </a:r>
           </a:p>
         </p:txBody>
@@ -13530,7 +13732,7 @@
           <p:cNvPr id="3" name="">
             <a:extLst xmlns:a="http://schemas.openxmlformats.org/drawingml/2006/main">
               <a:ext uri="{FF2B5EF4-FFF2-40B4-BE49-F238E27FC236}">
-                <a16:creationId xmlns:a16="http://schemas.microsoft.com/office/drawing/2014/main" id="{57BAD13C-3F40-4A89-A14B-565149B1AFB9}"/>
+                <a16:creationId xmlns:a16="http://schemas.microsoft.com/office/drawing/2014/main" id="{77A7457F-3E6C-4489-A773-E3F757A05A55}"/>
               </a:ext>
             </a:extLst>
           </p:cNvPr>
@@ -13560,7 +13762,7 @@
           <p:cNvPr id="4" name="">
             <a:extLst xmlns:a="http://schemas.openxmlformats.org/drawingml/2006/main">
               <a:ext uri="{FF2B5EF4-FFF2-40B4-BE49-F238E27FC236}">
-                <a16:creationId xmlns:a16="http://schemas.microsoft.com/office/drawing/2014/main" id="{2B99210F-855A-4299-B911-20A5BFD92067}"/>
+                <a16:creationId xmlns:a16="http://schemas.microsoft.com/office/drawing/2014/main" id="{CE9466E2-1CF2-46EB-9AB2-2837D792FDA5}"/>
               </a:ext>
             </a:extLst>
           </p:cNvPr>
@@ -13595,19 +13797,19 @@
           <p:cNvPr id="5" name="">
             <a:extLst xmlns:a="http://schemas.openxmlformats.org/drawingml/2006/main">
               <a:ext uri="{FF2B5EF4-FFF2-40B4-BE49-F238E27FC236}">
-                <a16:creationId xmlns:a16="http://schemas.microsoft.com/office/drawing/2014/main" id="{AB81FCAF-1A87-4B3C-918E-F80D8FBD22F4}"/>
-              </a:ext>
-            </a:extLst>
-          </p:cNvPr>
-          <p:cNvSpPr>
-            <a:spLocks xmlns:a="http://schemas.openxmlformats.org/drawingml/2006/main" noGrp="1"/>
-          </p:cNvSpPr>
-          <p:nvPr/>
-        </p:nvSpPr>
-        <p:spPr>
-          <a:xfrm xmlns:a="http://schemas.openxmlformats.org/drawingml/2006/main">
-            <a:off x="742950" y="1666875"/>
-            <a:ext cx="1143000" cy="190500"/>
+                <a16:creationId xmlns:a16="http://schemas.microsoft.com/office/drawing/2014/main" id="{1F9D2BBE-B425-4C7E-828B-757201629796}"/>
+              </a:ext>
+            </a:extLst>
+          </p:cNvPr>
+          <p:cNvSpPr>
+            <a:spLocks xmlns:a="http://schemas.openxmlformats.org/drawingml/2006/main" noGrp="1"/>
+          </p:cNvSpPr>
+          <p:nvPr/>
+        </p:nvSpPr>
+        <p:spPr>
+          <a:xfrm xmlns:a="http://schemas.openxmlformats.org/drawingml/2006/main">
+            <a:off x="704850" y="1666875"/>
+            <a:ext cx="1181100" cy="190500"/>
           </a:xfrm>
           <a:prstGeom xmlns:a="http://schemas.openxmlformats.org/drawingml/2006/main" prst="rect">
             <a:avLst/>
@@ -13635,7 +13837,7 @@
                   <a:srgbClr val="FFFFFF"/>
                 </a:solidFill>
               </a:rPr>
-              <a:t>Concept</a:t>
+              <a:t>Object</a:t>
             </a:r>
           </a:p>
         </p:txBody>
@@ -13645,19 +13847,19 @@
           <p:cNvPr id="6" name="">
             <a:extLst xmlns:a="http://schemas.openxmlformats.org/drawingml/2006/main">
               <a:ext uri="{FF2B5EF4-FFF2-40B4-BE49-F238E27FC236}">
-                <a16:creationId xmlns:a16="http://schemas.microsoft.com/office/drawing/2014/main" id="{E1582229-F7BF-4B7F-8BF7-7F987EF0A7AB}"/>
-              </a:ext>
-            </a:extLst>
-          </p:cNvPr>
-          <p:cNvSpPr>
-            <a:spLocks xmlns:a="http://schemas.openxmlformats.org/drawingml/2006/main" noGrp="1"/>
-          </p:cNvSpPr>
-          <p:nvPr/>
-        </p:nvSpPr>
-        <p:spPr>
-          <a:xfrm xmlns:a="http://schemas.openxmlformats.org/drawingml/2006/main">
-            <a:off x="2266950" y="1666875"/>
-            <a:ext cx="2209800" cy="190500"/>
+                <a16:creationId xmlns:a16="http://schemas.microsoft.com/office/drawing/2014/main" id="{601EE06C-BA9A-4BF8-AE64-A516F4BDF869}"/>
+              </a:ext>
+            </a:extLst>
+          </p:cNvPr>
+          <p:cNvSpPr>
+            <a:spLocks xmlns:a="http://schemas.openxmlformats.org/drawingml/2006/main" noGrp="1"/>
+          </p:cNvSpPr>
+          <p:nvPr/>
+        </p:nvSpPr>
+        <p:spPr>
+          <a:xfrm xmlns:a="http://schemas.openxmlformats.org/drawingml/2006/main">
+            <a:off x="2286000" y="1666875"/>
+            <a:ext cx="2133600" cy="190500"/>
           </a:xfrm>
           <a:prstGeom xmlns:a="http://schemas.openxmlformats.org/drawingml/2006/main" prst="rect">
             <a:avLst/>
@@ -13685,7 +13887,7 @@
                   <a:srgbClr val="FFFFFF"/>
                 </a:solidFill>
               </a:rPr>
-              <a:t>Essence</a:t>
+              <a:t>What it extends</a:t>
             </a:r>
           </a:p>
         </p:txBody>
@@ -13695,19 +13897,19 @@
           <p:cNvPr id="7" name="">
             <a:extLst xmlns:a="http://schemas.openxmlformats.org/drawingml/2006/main">
               <a:ext uri="{FF2B5EF4-FFF2-40B4-BE49-F238E27FC236}">
-                <a16:creationId xmlns:a16="http://schemas.microsoft.com/office/drawing/2014/main" id="{DC2C7C6D-5B2A-45D8-B390-E1B6C22C7BE7}"/>
-              </a:ext>
-            </a:extLst>
-          </p:cNvPr>
-          <p:cNvSpPr>
-            <a:spLocks xmlns:a="http://schemas.openxmlformats.org/drawingml/2006/main" noGrp="1"/>
-          </p:cNvSpPr>
-          <p:nvPr/>
-        </p:nvSpPr>
-        <p:spPr>
-          <a:xfrm xmlns:a="http://schemas.openxmlformats.org/drawingml/2006/main">
-            <a:off x="4933950" y="1666875"/>
-            <a:ext cx="2952750" cy="190500"/>
+                <a16:creationId xmlns:a16="http://schemas.microsoft.com/office/drawing/2014/main" id="{FB276478-DE61-4C4B-AB19-7C510A56D7FD}"/>
+              </a:ext>
+            </a:extLst>
+          </p:cNvPr>
+          <p:cNvSpPr>
+            <a:spLocks xmlns:a="http://schemas.openxmlformats.org/drawingml/2006/main" noGrp="1"/>
+          </p:cNvSpPr>
+          <p:nvPr/>
+        </p:nvSpPr>
+        <p:spPr>
+          <a:xfrm xmlns:a="http://schemas.openxmlformats.org/drawingml/2006/main">
+            <a:off x="4857750" y="1666875"/>
+            <a:ext cx="2705100" cy="190500"/>
           </a:xfrm>
           <a:prstGeom xmlns:a="http://schemas.openxmlformats.org/drawingml/2006/main" prst="rect">
             <a:avLst/>
@@ -13735,7 +13937,7 @@
                   <a:srgbClr val="FFFFFF"/>
                 </a:solidFill>
               </a:rPr>
-              <a:t>Paper Model meaning</a:t>
+              <a:t>Loading strategy</a:t>
             </a:r>
           </a:p>
         </p:txBody>
@@ -13745,19 +13947,19 @@
           <p:cNvPr id="8" name="">
             <a:extLst xmlns:a="http://schemas.openxmlformats.org/drawingml/2006/main">
               <a:ext uri="{FF2B5EF4-FFF2-40B4-BE49-F238E27FC236}">
-                <a16:creationId xmlns:a16="http://schemas.microsoft.com/office/drawing/2014/main" id="{81C79BD6-7DF1-4D7C-851F-60FD3CAE6D75}"/>
-              </a:ext>
-            </a:extLst>
-          </p:cNvPr>
-          <p:cNvSpPr>
-            <a:spLocks xmlns:a="http://schemas.openxmlformats.org/drawingml/2006/main" noGrp="1"/>
-          </p:cNvSpPr>
-          <p:nvPr/>
-        </p:nvSpPr>
-        <p:spPr>
-          <a:xfrm xmlns:a="http://schemas.openxmlformats.org/drawingml/2006/main">
-            <a:off x="8362950" y="1666875"/>
-            <a:ext cx="2895600" cy="190500"/>
+                <a16:creationId xmlns:a16="http://schemas.microsoft.com/office/drawing/2014/main" id="{5267F92A-9870-483D-92C0-76692542129F}"/>
+              </a:ext>
+            </a:extLst>
+          </p:cNvPr>
+          <p:cNvSpPr>
+            <a:spLocks xmlns:a="http://schemas.openxmlformats.org/drawingml/2006/main" noGrp="1"/>
+          </p:cNvSpPr>
+          <p:nvPr/>
+        </p:nvSpPr>
+        <p:spPr>
+          <a:xfrm xmlns:a="http://schemas.openxmlformats.org/drawingml/2006/main">
+            <a:off x="8096250" y="1666875"/>
+            <a:ext cx="3048000" cy="190500"/>
           </a:xfrm>
           <a:prstGeom xmlns:a="http://schemas.openxmlformats.org/drawingml/2006/main" prst="rect">
             <a:avLst/>
@@ -13785,7 +13987,7 @@
                   <a:srgbClr val="FFFFFF"/>
                 </a:solidFill>
               </a:rPr>
-              <a:t>Example</a:t>
+              <a:t>Context effect</a:t>
             </a:r>
           </a:p>
         </p:txBody>
@@ -13795,7 +13997,7 @@
           <p:cNvPr id="9" name="">
             <a:extLst xmlns:a="http://schemas.openxmlformats.org/drawingml/2006/main">
               <a:ext uri="{FF2B5EF4-FFF2-40B4-BE49-F238E27FC236}">
-                <a16:creationId xmlns:a16="http://schemas.microsoft.com/office/drawing/2014/main" id="{EEB3A555-49BF-4BE5-8B05-56425E2EE8CF}"/>
+                <a16:creationId xmlns:a16="http://schemas.microsoft.com/office/drawing/2014/main" id="{0498F640-49B2-4615-B857-D42635431488}"/>
               </a:ext>
             </a:extLst>
           </p:cNvPr>
@@ -13807,11 +14009,11 @@
         <p:spPr>
           <a:xfrm xmlns:a="http://schemas.openxmlformats.org/drawingml/2006/main">
             <a:off x="552450" y="2000250"/>
-            <a:ext cx="11087100" cy="723900"/>
+            <a:ext cx="11087100" cy="590550"/>
           </a:xfrm>
           <a:prstGeom xmlns:a="http://schemas.openxmlformats.org/drawingml/2006/main" prst="roundRect">
             <a:avLst>
-              <a:gd name="adj" fmla="val 7895"/>
+              <a:gd name="adj" fmla="val 9677"/>
             </a:avLst>
           </a:prstGeom>
           <a:solidFill xmlns:a="http://schemas.openxmlformats.org/drawingml/2006/main">
@@ -13830,19 +14032,19 @@
           <p:cNvPr id="10" name="">
             <a:extLst xmlns:a="http://schemas.openxmlformats.org/drawingml/2006/main">
               <a:ext uri="{FF2B5EF4-FFF2-40B4-BE49-F238E27FC236}">
-                <a16:creationId xmlns:a16="http://schemas.microsoft.com/office/drawing/2014/main" id="{55822A6B-C04E-4431-A047-3D0003F8DD69}"/>
-              </a:ext>
-            </a:extLst>
-          </p:cNvPr>
-          <p:cNvSpPr>
-            <a:spLocks xmlns:a="http://schemas.openxmlformats.org/drawingml/2006/main" noGrp="1"/>
-          </p:cNvSpPr>
-          <p:nvPr/>
-        </p:nvSpPr>
-        <p:spPr>
-          <a:xfrm xmlns:a="http://schemas.openxmlformats.org/drawingml/2006/main">
-            <a:off x="742950" y="2181225"/>
-            <a:ext cx="1143000" cy="304800"/>
+                <a16:creationId xmlns:a16="http://schemas.microsoft.com/office/drawing/2014/main" id="{6D488591-C8D7-452E-BE21-7B5C4357F6C3}"/>
+              </a:ext>
+            </a:extLst>
+          </p:cNvPr>
+          <p:cNvSpPr>
+            <a:spLocks xmlns:a="http://schemas.openxmlformats.org/drawingml/2006/main" noGrp="1"/>
+          </p:cNvSpPr>
+          <p:nvPr/>
+        </p:nvSpPr>
+        <p:spPr>
+          <a:xfrm xmlns:a="http://schemas.openxmlformats.org/drawingml/2006/main">
+            <a:off x="704850" y="2152650"/>
+            <a:ext cx="1181100" cy="266700"/>
           </a:xfrm>
           <a:prstGeom xmlns:a="http://schemas.openxmlformats.org/drawingml/2006/main" prst="rect">
             <a:avLst/>
@@ -13870,7 +14072,7 @@
                   <a:srgbClr val="004AAD"/>
                 </a:solidFill>
               </a:rPr>
-              <a:t>Tool</a:t>
+              <a:t>Prompt</a:t>
             </a:r>
           </a:p>
         </p:txBody>
@@ -13880,19 +14082,19 @@
           <p:cNvPr id="11" name="">
             <a:extLst xmlns:a="http://schemas.openxmlformats.org/drawingml/2006/main">
               <a:ext uri="{FF2B5EF4-FFF2-40B4-BE49-F238E27FC236}">
-                <a16:creationId xmlns:a16="http://schemas.microsoft.com/office/drawing/2014/main" id="{9960F495-E7BE-4A77-9F42-689231C6B5BA}"/>
-              </a:ext>
-            </a:extLst>
-          </p:cNvPr>
-          <p:cNvSpPr>
-            <a:spLocks xmlns:a="http://schemas.openxmlformats.org/drawingml/2006/main" noGrp="1"/>
-          </p:cNvSpPr>
-          <p:nvPr/>
-        </p:nvSpPr>
-        <p:spPr>
-          <a:xfrm xmlns:a="http://schemas.openxmlformats.org/drawingml/2006/main">
-            <a:off x="2266950" y="2181225"/>
-            <a:ext cx="2209800" cy="304800"/>
+                <a16:creationId xmlns:a16="http://schemas.microsoft.com/office/drawing/2014/main" id="{4A455DBA-29C8-4BE4-9226-C7A5FF3C5FC0}"/>
+              </a:ext>
+            </a:extLst>
+          </p:cNvPr>
+          <p:cNvSpPr>
+            <a:spLocks xmlns:a="http://schemas.openxmlformats.org/drawingml/2006/main" noGrp="1"/>
+          </p:cNvSpPr>
+          <p:nvPr/>
+        </p:nvSpPr>
+        <p:spPr>
+          <a:xfrm xmlns:a="http://schemas.openxmlformats.org/drawingml/2006/main">
+            <a:off x="2286000" y="2152650"/>
+            <a:ext cx="2133600" cy="266700"/>
           </a:xfrm>
           <a:prstGeom xmlns:a="http://schemas.openxmlformats.org/drawingml/2006/main" prst="rect">
             <a:avLst/>
@@ -13920,7 +14122,7 @@
                   <a:srgbClr val="061A45"/>
                 </a:solidFill>
               </a:rPr>
-              <a:t>External executable capability</a:t>
+              <a:t>one task request</a:t>
             </a:r>
           </a:p>
         </p:txBody>
@@ -13930,19 +14132,19 @@
           <p:cNvPr id="12" name="">
             <a:extLst xmlns:a="http://schemas.openxmlformats.org/drawingml/2006/main">
               <a:ext uri="{FF2B5EF4-FFF2-40B4-BE49-F238E27FC236}">
-                <a16:creationId xmlns:a16="http://schemas.microsoft.com/office/drawing/2014/main" id="{50D035CB-2231-4583-98D3-009ED7153F2C}"/>
-              </a:ext>
-            </a:extLst>
-          </p:cNvPr>
-          <p:cNvSpPr>
-            <a:spLocks xmlns:a="http://schemas.openxmlformats.org/drawingml/2006/main" noGrp="1"/>
-          </p:cNvSpPr>
-          <p:nvPr/>
-        </p:nvSpPr>
-        <p:spPr>
-          <a:xfrm xmlns:a="http://schemas.openxmlformats.org/drawingml/2006/main">
-            <a:off x="4933950" y="2181225"/>
-            <a:ext cx="2952750" cy="304800"/>
+                <a16:creationId xmlns:a16="http://schemas.microsoft.com/office/drawing/2014/main" id="{FDB19EC7-406E-4598-A35B-D94CFBEE8672}"/>
+              </a:ext>
+            </a:extLst>
+          </p:cNvPr>
+          <p:cNvSpPr>
+            <a:spLocks xmlns:a="http://schemas.openxmlformats.org/drawingml/2006/main" noGrp="1"/>
+          </p:cNvSpPr>
+          <p:nvPr/>
+        </p:nvSpPr>
+        <p:spPr>
+          <a:xfrm xmlns:a="http://schemas.openxmlformats.org/drawingml/2006/main">
+            <a:off x="4857750" y="2152650"/>
+            <a:ext cx="2705100" cy="266700"/>
           </a:xfrm>
           <a:prstGeom xmlns:a="http://schemas.openxmlformats.org/drawingml/2006/main" prst="rect">
             <a:avLst/>
@@ -13970,7 +14172,7 @@
                   <a:srgbClr val="061A45"/>
                 </a:solidFill>
               </a:rPr>
-              <a:t>Model proposes; runtime executes</a:t>
+              <a:t>written now</a:t>
             </a:r>
           </a:p>
         </p:txBody>
@@ -13980,19 +14182,19 @@
           <p:cNvPr id="13" name="">
             <a:extLst xmlns:a="http://schemas.openxmlformats.org/drawingml/2006/main">
               <a:ext uri="{FF2B5EF4-FFF2-40B4-BE49-F238E27FC236}">
-                <a16:creationId xmlns:a16="http://schemas.microsoft.com/office/drawing/2014/main" id="{5BED0E48-D932-4EE7-AA88-5531D83F068F}"/>
-              </a:ext>
-            </a:extLst>
-          </p:cNvPr>
-          <p:cNvSpPr>
-            <a:spLocks xmlns:a="http://schemas.openxmlformats.org/drawingml/2006/main" noGrp="1"/>
-          </p:cNvSpPr>
-          <p:nvPr/>
-        </p:nvSpPr>
-        <p:spPr>
-          <a:xfrm xmlns:a="http://schemas.openxmlformats.org/drawingml/2006/main">
-            <a:off x="8362950" y="2181225"/>
-            <a:ext cx="2895600" cy="304800"/>
+                <a16:creationId xmlns:a16="http://schemas.microsoft.com/office/drawing/2014/main" id="{F7E92D68-59F8-4C51-BEAF-C2F9F848FD7B}"/>
+              </a:ext>
+            </a:extLst>
+          </p:cNvPr>
+          <p:cNvSpPr>
+            <a:spLocks xmlns:a="http://schemas.openxmlformats.org/drawingml/2006/main" noGrp="1"/>
+          </p:cNvSpPr>
+          <p:nvPr/>
+        </p:nvSpPr>
+        <p:spPr>
+          <a:xfrm xmlns:a="http://schemas.openxmlformats.org/drawingml/2006/main">
+            <a:off x="8096250" y="2152650"/>
+            <a:ext cx="3048000" cy="266700"/>
           </a:xfrm>
           <a:prstGeom xmlns:a="http://schemas.openxmlformats.org/drawingml/2006/main" prst="rect">
             <a:avLst/>
@@ -14020,7 +14222,7 @@
                   <a:srgbClr val="061A45"/>
                 </a:solidFill>
               </a:rPr>
-              <a:t>read file, weather, run tests</a:t>
+              <a:t>uses current paper</a:t>
             </a:r>
           </a:p>
         </p:txBody>
@@ -14030,23 +14232,23 @@
           <p:cNvPr id="14" name="">
             <a:extLst xmlns:a="http://schemas.openxmlformats.org/drawingml/2006/main">
               <a:ext uri="{FF2B5EF4-FFF2-40B4-BE49-F238E27FC236}">
-                <a16:creationId xmlns:a16="http://schemas.microsoft.com/office/drawing/2014/main" id="{533B7E02-03AF-48F3-B244-49EE9593EC6A}"/>
-              </a:ext>
-            </a:extLst>
-          </p:cNvPr>
-          <p:cNvSpPr>
-            <a:spLocks xmlns:a="http://schemas.openxmlformats.org/drawingml/2006/main" noGrp="1"/>
-          </p:cNvSpPr>
-          <p:nvPr/>
-        </p:nvSpPr>
-        <p:spPr>
-          <a:xfrm xmlns:a="http://schemas.openxmlformats.org/drawingml/2006/main">
-            <a:off x="552450" y="2819400"/>
-            <a:ext cx="11087100" cy="723900"/>
+                <a16:creationId xmlns:a16="http://schemas.microsoft.com/office/drawing/2014/main" id="{FC9625AB-67F6-418C-86D0-22BFCBFF2A62}"/>
+              </a:ext>
+            </a:extLst>
+          </p:cNvPr>
+          <p:cNvSpPr>
+            <a:spLocks xmlns:a="http://schemas.openxmlformats.org/drawingml/2006/main" noGrp="1"/>
+          </p:cNvSpPr>
+          <p:nvPr/>
+        </p:nvSpPr>
+        <p:spPr>
+          <a:xfrm xmlns:a="http://schemas.openxmlformats.org/drawingml/2006/main">
+            <a:off x="552450" y="2667000"/>
+            <a:ext cx="11087100" cy="590550"/>
           </a:xfrm>
           <a:prstGeom xmlns:a="http://schemas.openxmlformats.org/drawingml/2006/main" prst="roundRect">
             <a:avLst>
-              <a:gd name="adj" fmla="val 7895"/>
+              <a:gd name="adj" fmla="val 9677"/>
             </a:avLst>
           </a:prstGeom>
           <a:solidFill xmlns:a="http://schemas.openxmlformats.org/drawingml/2006/main">
@@ -14065,19 +14267,19 @@
           <p:cNvPr id="15" name="">
             <a:extLst xmlns:a="http://schemas.openxmlformats.org/drawingml/2006/main">
               <a:ext uri="{FF2B5EF4-FFF2-40B4-BE49-F238E27FC236}">
-                <a16:creationId xmlns:a16="http://schemas.microsoft.com/office/drawing/2014/main" id="{5C4FEA92-29F4-473D-B2CA-D0FB508D233D}"/>
-              </a:ext>
-            </a:extLst>
-          </p:cNvPr>
-          <p:cNvSpPr>
-            <a:spLocks xmlns:a="http://schemas.openxmlformats.org/drawingml/2006/main" noGrp="1"/>
-          </p:cNvSpPr>
-          <p:nvPr/>
-        </p:nvSpPr>
-        <p:spPr>
-          <a:xfrm xmlns:a="http://schemas.openxmlformats.org/drawingml/2006/main">
-            <a:off x="742950" y="3000375"/>
-            <a:ext cx="1143000" cy="304800"/>
+                <a16:creationId xmlns:a16="http://schemas.microsoft.com/office/drawing/2014/main" id="{65FFEE85-4841-47AB-ABE8-537E3CC04E4D}"/>
+              </a:ext>
+            </a:extLst>
+          </p:cNvPr>
+          <p:cNvSpPr>
+            <a:spLocks xmlns:a="http://schemas.openxmlformats.org/drawingml/2006/main" noGrp="1"/>
+          </p:cNvSpPr>
+          <p:nvPr/>
+        </p:nvSpPr>
+        <p:spPr>
+          <a:xfrm xmlns:a="http://schemas.openxmlformats.org/drawingml/2006/main">
+            <a:off x="704850" y="2819400"/>
+            <a:ext cx="1181100" cy="266700"/>
           </a:xfrm>
           <a:prstGeom xmlns:a="http://schemas.openxmlformats.org/drawingml/2006/main" prst="rect">
             <a:avLst/>
@@ -14105,7 +14307,7 @@
                   <a:srgbClr val="004AAD"/>
                 </a:solidFill>
               </a:rPr>
-              <a:t>Skill</a:t>
+              <a:t>User instruction</a:t>
             </a:r>
           </a:p>
         </p:txBody>
@@ -14115,19 +14317,19 @@
           <p:cNvPr id="16" name="">
             <a:extLst xmlns:a="http://schemas.openxmlformats.org/drawingml/2006/main">
               <a:ext uri="{FF2B5EF4-FFF2-40B4-BE49-F238E27FC236}">
-                <a16:creationId xmlns:a16="http://schemas.microsoft.com/office/drawing/2014/main" id="{A7FEA373-618D-427B-B126-1F29461A61A6}"/>
-              </a:ext>
-            </a:extLst>
-          </p:cNvPr>
-          <p:cNvSpPr>
-            <a:spLocks xmlns:a="http://schemas.openxmlformats.org/drawingml/2006/main" noGrp="1"/>
-          </p:cNvSpPr>
-          <p:nvPr/>
-        </p:nvSpPr>
-        <p:spPr>
-          <a:xfrm xmlns:a="http://schemas.openxmlformats.org/drawingml/2006/main">
-            <a:off x="2266950" y="3000375"/>
-            <a:ext cx="2209800" cy="304800"/>
+                <a16:creationId xmlns:a16="http://schemas.microsoft.com/office/drawing/2014/main" id="{5A9820EE-7E98-4D74-92DA-F8A9FEB2FCE4}"/>
+              </a:ext>
+            </a:extLst>
+          </p:cNvPr>
+          <p:cNvSpPr>
+            <a:spLocks xmlns:a="http://schemas.openxmlformats.org/drawingml/2006/main" noGrp="1"/>
+          </p:cNvSpPr>
+          <p:nvPr/>
+        </p:nvSpPr>
+        <p:spPr>
+          <a:xfrm xmlns:a="http://schemas.openxmlformats.org/drawingml/2006/main">
+            <a:off x="2286000" y="2819400"/>
+            <a:ext cx="2133600" cy="266700"/>
           </a:xfrm>
           <a:prstGeom xmlns:a="http://schemas.openxmlformats.org/drawingml/2006/main" prst="rect">
             <a:avLst/>
@@ -14155,7 +14357,7 @@
                   <a:srgbClr val="061A45"/>
                 </a:solidFill>
               </a:rPr>
-              <a:t>Reusable work instruction</a:t>
+              <a:t>stable preference</a:t>
             </a:r>
           </a:p>
         </p:txBody>
@@ -14165,19 +14367,19 @@
           <p:cNvPr id="17" name="">
             <a:extLst xmlns:a="http://schemas.openxmlformats.org/drawingml/2006/main">
               <a:ext uri="{FF2B5EF4-FFF2-40B4-BE49-F238E27FC236}">
-                <a16:creationId xmlns:a16="http://schemas.microsoft.com/office/drawing/2014/main" id="{982860E5-8C91-4C61-AA72-2BF416710F0A}"/>
-              </a:ext>
-            </a:extLst>
-          </p:cNvPr>
-          <p:cNvSpPr>
-            <a:spLocks xmlns:a="http://schemas.openxmlformats.org/drawingml/2006/main" noGrp="1"/>
-          </p:cNvSpPr>
-          <p:nvPr/>
-        </p:nvSpPr>
-        <p:spPr>
-          <a:xfrm xmlns:a="http://schemas.openxmlformats.org/drawingml/2006/main">
-            <a:off x="4933950" y="3000375"/>
-            <a:ext cx="2952750" cy="304800"/>
+                <a16:creationId xmlns:a16="http://schemas.microsoft.com/office/drawing/2014/main" id="{CE4CD364-E4DD-4524-A1E6-DD13300C0651}"/>
+              </a:ext>
+            </a:extLst>
+          </p:cNvPr>
+          <p:cNvSpPr>
+            <a:spLocks xmlns:a="http://schemas.openxmlformats.org/drawingml/2006/main" noGrp="1"/>
+          </p:cNvSpPr>
+          <p:nvPr/>
+        </p:nvSpPr>
+        <p:spPr>
+          <a:xfrm xmlns:a="http://schemas.openxmlformats.org/drawingml/2006/main">
+            <a:off x="4857750" y="2819400"/>
+            <a:ext cx="2705100" cy="266700"/>
           </a:xfrm>
           <a:prstGeom xmlns:a="http://schemas.openxmlformats.org/drawingml/2006/main" prst="rect">
             <a:avLst/>
@@ -14205,7 +14407,7 @@
                   <a:srgbClr val="061A45"/>
                 </a:solidFill>
               </a:rPr>
-              <a:t>Manual placed on paper when relevant</a:t>
+              <a:t>attached persistently</a:t>
             </a:r>
           </a:p>
         </p:txBody>
@@ -14215,19 +14417,19 @@
           <p:cNvPr id="18" name="">
             <a:extLst xmlns:a="http://schemas.openxmlformats.org/drawingml/2006/main">
               <a:ext uri="{FF2B5EF4-FFF2-40B4-BE49-F238E27FC236}">
-                <a16:creationId xmlns:a16="http://schemas.microsoft.com/office/drawing/2014/main" id="{13DBBA09-37C9-4E07-AF6F-471C1737C39C}"/>
-              </a:ext>
-            </a:extLst>
-          </p:cNvPr>
-          <p:cNvSpPr>
-            <a:spLocks xmlns:a="http://schemas.openxmlformats.org/drawingml/2006/main" noGrp="1"/>
-          </p:cNvSpPr>
-          <p:nvPr/>
-        </p:nvSpPr>
-        <p:spPr>
-          <a:xfrm xmlns:a="http://schemas.openxmlformats.org/drawingml/2006/main">
-            <a:off x="8362950" y="3000375"/>
-            <a:ext cx="2895600" cy="304800"/>
+                <a16:creationId xmlns:a16="http://schemas.microsoft.com/office/drawing/2014/main" id="{E41764E7-2AF9-44B1-B6B3-15DED0989975}"/>
+              </a:ext>
+            </a:extLst>
+          </p:cNvPr>
+          <p:cNvSpPr>
+            <a:spLocks xmlns:a="http://schemas.openxmlformats.org/drawingml/2006/main" noGrp="1"/>
+          </p:cNvSpPr>
+          <p:nvPr/>
+        </p:nvSpPr>
+        <p:spPr>
+          <a:xfrm xmlns:a="http://schemas.openxmlformats.org/drawingml/2006/main">
+            <a:off x="8096250" y="2819400"/>
+            <a:ext cx="3048000" cy="266700"/>
           </a:xfrm>
           <a:prstGeom xmlns:a="http://schemas.openxmlformats.org/drawingml/2006/main" prst="rect">
             <a:avLst/>
@@ -14255,7 +14457,7 @@
                   <a:srgbClr val="061A45"/>
                 </a:solidFill>
               </a:rPr>
-              <a:t>code review checklist</a:t>
+              <a:t>always costs attention when included</a:t>
             </a:r>
           </a:p>
         </p:txBody>
@@ -14265,23 +14467,23 @@
           <p:cNvPr id="19" name="">
             <a:extLst xmlns:a="http://schemas.openxmlformats.org/drawingml/2006/main">
               <a:ext uri="{FF2B5EF4-FFF2-40B4-BE49-F238E27FC236}">
-                <a16:creationId xmlns:a16="http://schemas.microsoft.com/office/drawing/2014/main" id="{BE176CB5-65BE-41AF-98A9-73BC5DC31572}"/>
-              </a:ext>
-            </a:extLst>
-          </p:cNvPr>
-          <p:cNvSpPr>
-            <a:spLocks xmlns:a="http://schemas.openxmlformats.org/drawingml/2006/main" noGrp="1"/>
-          </p:cNvSpPr>
-          <p:nvPr/>
-        </p:nvSpPr>
-        <p:spPr>
-          <a:xfrm xmlns:a="http://schemas.openxmlformats.org/drawingml/2006/main">
-            <a:off x="552450" y="3638550"/>
-            <a:ext cx="11087100" cy="723900"/>
+                <a16:creationId xmlns:a16="http://schemas.microsoft.com/office/drawing/2014/main" id="{3D339AC5-C484-48EE-949F-765D3E4BAC16}"/>
+              </a:ext>
+            </a:extLst>
+          </p:cNvPr>
+          <p:cNvSpPr>
+            <a:spLocks xmlns:a="http://schemas.openxmlformats.org/drawingml/2006/main" noGrp="1"/>
+          </p:cNvSpPr>
+          <p:nvPr/>
+        </p:nvSpPr>
+        <p:spPr>
+          <a:xfrm xmlns:a="http://schemas.openxmlformats.org/drawingml/2006/main">
+            <a:off x="552450" y="3333750"/>
+            <a:ext cx="11087100" cy="590550"/>
           </a:xfrm>
           <a:prstGeom xmlns:a="http://schemas.openxmlformats.org/drawingml/2006/main" prst="roundRect">
             <a:avLst>
-              <a:gd name="adj" fmla="val 7895"/>
+              <a:gd name="adj" fmla="val 9677"/>
             </a:avLst>
           </a:prstGeom>
           <a:solidFill xmlns:a="http://schemas.openxmlformats.org/drawingml/2006/main">
@@ -14300,19 +14502,19 @@
           <p:cNvPr id="20" name="">
             <a:extLst xmlns:a="http://schemas.openxmlformats.org/drawingml/2006/main">
               <a:ext uri="{FF2B5EF4-FFF2-40B4-BE49-F238E27FC236}">
-                <a16:creationId xmlns:a16="http://schemas.microsoft.com/office/drawing/2014/main" id="{7C680908-5547-4C11-9B64-CC46BFB50D96}"/>
-              </a:ext>
-            </a:extLst>
-          </p:cNvPr>
-          <p:cNvSpPr>
-            <a:spLocks xmlns:a="http://schemas.openxmlformats.org/drawingml/2006/main" noGrp="1"/>
-          </p:cNvSpPr>
-          <p:nvPr/>
-        </p:nvSpPr>
-        <p:spPr>
-          <a:xfrm xmlns:a="http://schemas.openxmlformats.org/drawingml/2006/main">
-            <a:off x="742950" y="3819525"/>
-            <a:ext cx="1143000" cy="304800"/>
+                <a16:creationId xmlns:a16="http://schemas.microsoft.com/office/drawing/2014/main" id="{5A322EB8-8E16-4F69-9690-A77A3D44403E}"/>
+              </a:ext>
+            </a:extLst>
+          </p:cNvPr>
+          <p:cNvSpPr>
+            <a:spLocks xmlns:a="http://schemas.openxmlformats.org/drawingml/2006/main" noGrp="1"/>
+          </p:cNvSpPr>
+          <p:nvPr/>
+        </p:nvSpPr>
+        <p:spPr>
+          <a:xfrm xmlns:a="http://schemas.openxmlformats.org/drawingml/2006/main">
+            <a:off x="704850" y="3486150"/>
+            <a:ext cx="1181100" cy="266700"/>
           </a:xfrm>
           <a:prstGeom xmlns:a="http://schemas.openxmlformats.org/drawingml/2006/main" prst="rect">
             <a:avLst/>
@@ -14340,7 +14542,7 @@
                   <a:srgbClr val="004AAD"/>
                 </a:solidFill>
               </a:rPr>
-              <a:t>Agent</a:t>
+              <a:t>Skill</a:t>
             </a:r>
           </a:p>
         </p:txBody>
@@ -14350,19 +14552,19 @@
           <p:cNvPr id="21" name="">
             <a:extLst xmlns:a="http://schemas.openxmlformats.org/drawingml/2006/main">
               <a:ext uri="{FF2B5EF4-FFF2-40B4-BE49-F238E27FC236}">
-                <a16:creationId xmlns:a16="http://schemas.microsoft.com/office/drawing/2014/main" id="{82E7FADE-DCC7-4B25-B9CE-F81392F61A9F}"/>
-              </a:ext>
-            </a:extLst>
-          </p:cNvPr>
-          <p:cNvSpPr>
-            <a:spLocks xmlns:a="http://schemas.openxmlformats.org/drawingml/2006/main" noGrp="1"/>
-          </p:cNvSpPr>
-          <p:nvPr/>
-        </p:nvSpPr>
-        <p:spPr>
-          <a:xfrm xmlns:a="http://schemas.openxmlformats.org/drawingml/2006/main">
-            <a:off x="2266950" y="3819525"/>
-            <a:ext cx="2209800" cy="304800"/>
+                <a16:creationId xmlns:a16="http://schemas.microsoft.com/office/drawing/2014/main" id="{878F5BB7-907E-4B00-8FAE-F692345EBBD0}"/>
+              </a:ext>
+            </a:extLst>
+          </p:cNvPr>
+          <p:cNvSpPr>
+            <a:spLocks xmlns:a="http://schemas.openxmlformats.org/drawingml/2006/main" noGrp="1"/>
+          </p:cNvSpPr>
+          <p:nvPr/>
+        </p:nvSpPr>
+        <p:spPr>
+          <a:xfrm xmlns:a="http://schemas.openxmlformats.org/drawingml/2006/main">
+            <a:off x="2286000" y="3486150"/>
+            <a:ext cx="2133600" cy="266700"/>
           </a:xfrm>
           <a:prstGeom xmlns:a="http://schemas.openxmlformats.org/drawingml/2006/main" prst="rect">
             <a:avLst/>
@@ -14390,7 +14592,7 @@
                   <a:srgbClr val="061A45"/>
                 </a:solidFill>
               </a:rPr>
-              <a:t>Packaged work environment</a:t>
+              <a:t>reusable method</a:t>
             </a:r>
           </a:p>
         </p:txBody>
@@ -14400,19 +14602,19 @@
           <p:cNvPr id="22" name="">
             <a:extLst xmlns:a="http://schemas.openxmlformats.org/drawingml/2006/main">
               <a:ext uri="{FF2B5EF4-FFF2-40B4-BE49-F238E27FC236}">
-                <a16:creationId xmlns:a16="http://schemas.microsoft.com/office/drawing/2014/main" id="{8CF1953D-7A4A-4A36-A08F-2F2FA54EE6B5}"/>
-              </a:ext>
-            </a:extLst>
-          </p:cNvPr>
-          <p:cNvSpPr>
-            <a:spLocks xmlns:a="http://schemas.openxmlformats.org/drawingml/2006/main" noGrp="1"/>
-          </p:cNvSpPr>
-          <p:nvPr/>
-        </p:nvSpPr>
-        <p:spPr>
-          <a:xfrm xmlns:a="http://schemas.openxmlformats.org/drawingml/2006/main">
-            <a:off x="4933950" y="3819525"/>
-            <a:ext cx="2952750" cy="304800"/>
+                <a16:creationId xmlns:a16="http://schemas.microsoft.com/office/drawing/2014/main" id="{558F5F36-49B7-4FEE-8E43-B2197426A239}"/>
+              </a:ext>
+            </a:extLst>
+          </p:cNvPr>
+          <p:cNvSpPr>
+            <a:spLocks xmlns:a="http://schemas.openxmlformats.org/drawingml/2006/main" noGrp="1"/>
+          </p:cNvSpPr>
+          <p:nvPr/>
+        </p:nvSpPr>
+        <p:spPr>
+          <a:xfrm xmlns:a="http://schemas.openxmlformats.org/drawingml/2006/main">
+            <a:off x="4857750" y="3486150"/>
+            <a:ext cx="2705100" cy="266700"/>
           </a:xfrm>
           <a:prstGeom xmlns:a="http://schemas.openxmlformats.org/drawingml/2006/main" prst="rect">
             <a:avLst/>
@@ -14440,7 +14642,7 @@
                   <a:srgbClr val="061A45"/>
                 </a:solidFill>
               </a:rPr>
-              <a:t>Fixed role, tools, limits, standards</a:t>
+              <a:t>loaded when relevant</a:t>
             </a:r>
           </a:p>
         </p:txBody>
@@ -14450,19 +14652,19 @@
           <p:cNvPr id="23" name="">
             <a:extLst xmlns:a="http://schemas.openxmlformats.org/drawingml/2006/main">
               <a:ext uri="{FF2B5EF4-FFF2-40B4-BE49-F238E27FC236}">
-                <a16:creationId xmlns:a16="http://schemas.microsoft.com/office/drawing/2014/main" id="{E4FEB241-BBB6-4264-BB0B-738EF9E33002}"/>
-              </a:ext>
-            </a:extLst>
-          </p:cNvPr>
-          <p:cNvSpPr>
-            <a:spLocks xmlns:a="http://schemas.openxmlformats.org/drawingml/2006/main" noGrp="1"/>
-          </p:cNvSpPr>
-          <p:nvPr/>
-        </p:nvSpPr>
-        <p:spPr>
-          <a:xfrm xmlns:a="http://schemas.openxmlformats.org/drawingml/2006/main">
-            <a:off x="8362950" y="3819525"/>
-            <a:ext cx="2895600" cy="304800"/>
+                <a16:creationId xmlns:a16="http://schemas.microsoft.com/office/drawing/2014/main" id="{5B908D97-23B2-4F82-BF12-3B950BC61BC1}"/>
+              </a:ext>
+            </a:extLst>
+          </p:cNvPr>
+          <p:cNvSpPr>
+            <a:spLocks xmlns:a="http://schemas.openxmlformats.org/drawingml/2006/main" noGrp="1"/>
+          </p:cNvSpPr>
+          <p:nvPr/>
+        </p:nvSpPr>
+        <p:spPr>
+          <a:xfrm xmlns:a="http://schemas.openxmlformats.org/drawingml/2006/main">
+            <a:off x="8096250" y="3486150"/>
+            <a:ext cx="3048000" cy="266700"/>
           </a:xfrm>
           <a:prstGeom xmlns:a="http://schemas.openxmlformats.org/drawingml/2006/main" prst="rect">
             <a:avLst/>
@@ -14490,7 +14692,7 @@
                   <a:srgbClr val="061A45"/>
                 </a:solidFill>
               </a:rPr>
-              <a:t>security reviewer</a:t>
+              <a:t>keeps unused prompts outside</a:t>
             </a:r>
           </a:p>
         </p:txBody>
@@ -14500,23 +14702,23 @@
           <p:cNvPr id="24" name="">
             <a:extLst xmlns:a="http://schemas.openxmlformats.org/drawingml/2006/main">
               <a:ext uri="{FF2B5EF4-FFF2-40B4-BE49-F238E27FC236}">
-                <a16:creationId xmlns:a16="http://schemas.microsoft.com/office/drawing/2014/main" id="{0CD8A993-3DD3-448B-9726-B80009284C6A}"/>
-              </a:ext>
-            </a:extLst>
-          </p:cNvPr>
-          <p:cNvSpPr>
-            <a:spLocks xmlns:a="http://schemas.openxmlformats.org/drawingml/2006/main" noGrp="1"/>
-          </p:cNvSpPr>
-          <p:nvPr/>
-        </p:nvSpPr>
-        <p:spPr>
-          <a:xfrm xmlns:a="http://schemas.openxmlformats.org/drawingml/2006/main">
-            <a:off x="552450" y="4457700"/>
-            <a:ext cx="11087100" cy="723900"/>
+                <a16:creationId xmlns:a16="http://schemas.microsoft.com/office/drawing/2014/main" id="{297C81E4-CA88-4847-8EF3-DF10FB8E0309}"/>
+              </a:ext>
+            </a:extLst>
+          </p:cNvPr>
+          <p:cNvSpPr>
+            <a:spLocks xmlns:a="http://schemas.openxmlformats.org/drawingml/2006/main" noGrp="1"/>
+          </p:cNvSpPr>
+          <p:nvPr/>
+        </p:nvSpPr>
+        <p:spPr>
+          <a:xfrm xmlns:a="http://schemas.openxmlformats.org/drawingml/2006/main">
+            <a:off x="552450" y="4000500"/>
+            <a:ext cx="11087100" cy="590550"/>
           </a:xfrm>
           <a:prstGeom xmlns:a="http://schemas.openxmlformats.org/drawingml/2006/main" prst="roundRect">
             <a:avLst>
-              <a:gd name="adj" fmla="val 7895"/>
+              <a:gd name="adj" fmla="val 9677"/>
             </a:avLst>
           </a:prstGeom>
           <a:solidFill xmlns:a="http://schemas.openxmlformats.org/drawingml/2006/main">
@@ -14535,19 +14737,19 @@
           <p:cNvPr id="25" name="">
             <a:extLst xmlns:a="http://schemas.openxmlformats.org/drawingml/2006/main">
               <a:ext uri="{FF2B5EF4-FFF2-40B4-BE49-F238E27FC236}">
-                <a16:creationId xmlns:a16="http://schemas.microsoft.com/office/drawing/2014/main" id="{918B96E0-FB88-4D8A-9B45-65343B747DF4}"/>
-              </a:ext>
-            </a:extLst>
-          </p:cNvPr>
-          <p:cNvSpPr>
-            <a:spLocks xmlns:a="http://schemas.openxmlformats.org/drawingml/2006/main" noGrp="1"/>
-          </p:cNvSpPr>
-          <p:nvPr/>
-        </p:nvSpPr>
-        <p:spPr>
-          <a:xfrm xmlns:a="http://schemas.openxmlformats.org/drawingml/2006/main">
-            <a:off x="742950" y="4638675"/>
-            <a:ext cx="1143000" cy="304800"/>
+                <a16:creationId xmlns:a16="http://schemas.microsoft.com/office/drawing/2014/main" id="{DAF470AB-9C54-44B0-8D66-45D25F02DF0C}"/>
+              </a:ext>
+            </a:extLst>
+          </p:cNvPr>
+          <p:cNvSpPr>
+            <a:spLocks xmlns:a="http://schemas.openxmlformats.org/drawingml/2006/main" noGrp="1"/>
+          </p:cNvSpPr>
+          <p:nvPr/>
+        </p:nvSpPr>
+        <p:spPr>
+          <a:xfrm xmlns:a="http://schemas.openxmlformats.org/drawingml/2006/main">
+            <a:off x="704850" y="4152900"/>
+            <a:ext cx="1181100" cy="266700"/>
           </a:xfrm>
           <a:prstGeom xmlns:a="http://schemas.openxmlformats.org/drawingml/2006/main" prst="rect">
             <a:avLst/>
@@ -14575,7 +14777,7 @@
                   <a:srgbClr val="004AAD"/>
                 </a:solidFill>
               </a:rPr>
-              <a:t>Harness</a:t>
+              <a:t>Custom agent</a:t>
             </a:r>
           </a:p>
         </p:txBody>
@@ -14585,19 +14787,19 @@
           <p:cNvPr id="26" name="">
             <a:extLst xmlns:a="http://schemas.openxmlformats.org/drawingml/2006/main">
               <a:ext uri="{FF2B5EF4-FFF2-40B4-BE49-F238E27FC236}">
-                <a16:creationId xmlns:a16="http://schemas.microsoft.com/office/drawing/2014/main" id="{62686A42-6D0D-4A26-BAB3-F3589E6A9CBF}"/>
-              </a:ext>
-            </a:extLst>
-          </p:cNvPr>
-          <p:cNvSpPr>
-            <a:spLocks xmlns:a="http://schemas.openxmlformats.org/drawingml/2006/main" noGrp="1"/>
-          </p:cNvSpPr>
-          <p:nvPr/>
-        </p:nvSpPr>
-        <p:spPr>
-          <a:xfrm xmlns:a="http://schemas.openxmlformats.org/drawingml/2006/main">
-            <a:off x="2266950" y="4638675"/>
-            <a:ext cx="2209800" cy="304800"/>
+                <a16:creationId xmlns:a16="http://schemas.microsoft.com/office/drawing/2014/main" id="{91E047B1-4E0F-46A2-9434-59E8DF53E19A}"/>
+              </a:ext>
+            </a:extLst>
+          </p:cNvPr>
+          <p:cNvSpPr>
+            <a:spLocks xmlns:a="http://schemas.openxmlformats.org/drawingml/2006/main" noGrp="1"/>
+          </p:cNvSpPr>
+          <p:nvPr/>
+        </p:nvSpPr>
+        <p:spPr>
+          <a:xfrm xmlns:a="http://schemas.openxmlformats.org/drawingml/2006/main">
+            <a:off x="2286000" y="4152900"/>
+            <a:ext cx="2133600" cy="266700"/>
           </a:xfrm>
           <a:prstGeom xmlns:a="http://schemas.openxmlformats.org/drawingml/2006/main" prst="rect">
             <a:avLst/>
@@ -14625,7 +14827,7 @@
                   <a:srgbClr val="061A45"/>
                 </a:solidFill>
               </a:rPr>
-              <a:t>Operating environment</a:t>
+              <a:t>role + rules + tools</a:t>
             </a:r>
           </a:p>
         </p:txBody>
@@ -14635,19 +14837,19 @@
           <p:cNvPr id="27" name="">
             <a:extLst xmlns:a="http://schemas.openxmlformats.org/drawingml/2006/main">
               <a:ext uri="{FF2B5EF4-FFF2-40B4-BE49-F238E27FC236}">
-                <a16:creationId xmlns:a16="http://schemas.microsoft.com/office/drawing/2014/main" id="{1F2BDFF1-EA07-43E8-BC40-BB13069B07D0}"/>
-              </a:ext>
-            </a:extLst>
-          </p:cNvPr>
-          <p:cNvSpPr>
-            <a:spLocks xmlns:a="http://schemas.openxmlformats.org/drawingml/2006/main" noGrp="1"/>
-          </p:cNvSpPr>
-          <p:nvPr/>
-        </p:nvSpPr>
-        <p:spPr>
-          <a:xfrm xmlns:a="http://schemas.openxmlformats.org/drawingml/2006/main">
-            <a:off x="4933950" y="4638675"/>
-            <a:ext cx="2952750" cy="304800"/>
+                <a16:creationId xmlns:a16="http://schemas.microsoft.com/office/drawing/2014/main" id="{2802789C-59B6-4974-AB90-5905356AA699}"/>
+              </a:ext>
+            </a:extLst>
+          </p:cNvPr>
+          <p:cNvSpPr>
+            <a:spLocks xmlns:a="http://schemas.openxmlformats.org/drawingml/2006/main" noGrp="1"/>
+          </p:cNvSpPr>
+          <p:nvPr/>
+        </p:nvSpPr>
+        <p:spPr>
+          <a:xfrm xmlns:a="http://schemas.openxmlformats.org/drawingml/2006/main">
+            <a:off x="4857750" y="4152900"/>
+            <a:ext cx="2705100" cy="266700"/>
           </a:xfrm>
           <a:prstGeom xmlns:a="http://schemas.openxmlformats.org/drawingml/2006/main" prst="rect">
             <a:avLst/>
@@ -14675,7 +14877,7 @@
                   <a:srgbClr val="061A45"/>
                 </a:solidFill>
               </a:rPr>
-              <a:t>Manages paper, execution, results</a:t>
+              <a:t>selected as a profile</a:t>
             </a:r>
           </a:p>
         </p:txBody>
@@ -14685,19 +14887,19 @@
           <p:cNvPr id="28" name="">
             <a:extLst xmlns:a="http://schemas.openxmlformats.org/drawingml/2006/main">
               <a:ext uri="{FF2B5EF4-FFF2-40B4-BE49-F238E27FC236}">
-                <a16:creationId xmlns:a16="http://schemas.microsoft.com/office/drawing/2014/main" id="{C7FD8A70-9B2D-4B4F-B634-698C60BBD22D}"/>
-              </a:ext>
-            </a:extLst>
-          </p:cNvPr>
-          <p:cNvSpPr>
-            <a:spLocks xmlns:a="http://schemas.openxmlformats.org/drawingml/2006/main" noGrp="1"/>
-          </p:cNvSpPr>
-          <p:nvPr/>
-        </p:nvSpPr>
-        <p:spPr>
-          <a:xfrm xmlns:a="http://schemas.openxmlformats.org/drawingml/2006/main">
-            <a:off x="8362950" y="4638675"/>
-            <a:ext cx="2895600" cy="304800"/>
+                <a16:creationId xmlns:a16="http://schemas.microsoft.com/office/drawing/2014/main" id="{BA3D77E2-502F-4011-9024-02EED1BD516A}"/>
+              </a:ext>
+            </a:extLst>
+          </p:cNvPr>
+          <p:cNvSpPr>
+            <a:spLocks xmlns:a="http://schemas.openxmlformats.org/drawingml/2006/main" noGrp="1"/>
+          </p:cNvSpPr>
+          <p:nvPr/>
+        </p:nvSpPr>
+        <p:spPr>
+          <a:xfrm xmlns:a="http://schemas.openxmlformats.org/drawingml/2006/main">
+            <a:off x="8096250" y="4152900"/>
+            <a:ext cx="3048000" cy="266700"/>
           </a:xfrm>
           <a:prstGeom xmlns:a="http://schemas.openxmlformats.org/drawingml/2006/main" prst="rect">
             <a:avLst/>
@@ -14725,7 +14927,7 @@
                   <a:srgbClr val="061A45"/>
                 </a:solidFill>
               </a:rPr>
-              <a:t>IDE agent runtime</a:t>
+              <a:t>packages repeated work setup</a:t>
             </a:r>
           </a:p>
         </p:txBody>
@@ -14735,23 +14937,258 @@
           <p:cNvPr id="29" name="">
             <a:extLst xmlns:a="http://schemas.openxmlformats.org/drawingml/2006/main">
               <a:ext uri="{FF2B5EF4-FFF2-40B4-BE49-F238E27FC236}">
-                <a16:creationId xmlns:a16="http://schemas.microsoft.com/office/drawing/2014/main" id="{EE8D5D08-523F-461F-B42F-5FBD77B632EF}"/>
-              </a:ext>
-            </a:extLst>
-          </p:cNvPr>
-          <p:cNvSpPr>
-            <a:spLocks xmlns:a="http://schemas.openxmlformats.org/drawingml/2006/main" noGrp="1"/>
-          </p:cNvSpPr>
-          <p:nvPr/>
-        </p:nvSpPr>
-        <p:spPr>
-          <a:xfrm xmlns:a="http://schemas.openxmlformats.org/drawingml/2006/main">
-            <a:off x="1524000" y="5638800"/>
-            <a:ext cx="9144000" cy="552450"/>
+                <a16:creationId xmlns:a16="http://schemas.microsoft.com/office/drawing/2014/main" id="{718BC765-E35C-452B-BE10-44E38991B790}"/>
+              </a:ext>
+            </a:extLst>
+          </p:cNvPr>
+          <p:cNvSpPr>
+            <a:spLocks xmlns:a="http://schemas.openxmlformats.org/drawingml/2006/main" noGrp="1"/>
+          </p:cNvSpPr>
+          <p:nvPr/>
+        </p:nvSpPr>
+        <p:spPr>
+          <a:xfrm xmlns:a="http://schemas.openxmlformats.org/drawingml/2006/main">
+            <a:off x="552450" y="4667250"/>
+            <a:ext cx="11087100" cy="590550"/>
           </a:xfrm>
           <a:prstGeom xmlns:a="http://schemas.openxmlformats.org/drawingml/2006/main" prst="roundRect">
             <a:avLst>
-              <a:gd name="adj" fmla="val 13793"/>
+              <a:gd name="adj" fmla="val 9677"/>
+            </a:avLst>
+          </a:prstGeom>
+          <a:solidFill xmlns:a="http://schemas.openxmlformats.org/drawingml/2006/main">
+            <a:srgbClr val="F8FBFF"/>
+          </a:solidFill>
+          <a:ln xmlns:a="http://schemas.openxmlformats.org/drawingml/2006/main" w="10478">
+            <a:solidFill>
+              <a:srgbClr val="B9D4F6"/>
+            </a:solidFill>
+            <a:prstDash val="solid"/>
+          </a:ln>
+        </p:spPr>
+      </p:sp>
+      <p:sp>
+        <p:nvSpPr>
+          <p:cNvPr id="30" name="">
+            <a:extLst xmlns:a="http://schemas.openxmlformats.org/drawingml/2006/main">
+              <a:ext uri="{FF2B5EF4-FFF2-40B4-BE49-F238E27FC236}">
+                <a16:creationId xmlns:a16="http://schemas.microsoft.com/office/drawing/2014/main" id="{250F154C-128B-4FD2-82CF-97A3CCBF69B5}"/>
+              </a:ext>
+            </a:extLst>
+          </p:cNvPr>
+          <p:cNvSpPr>
+            <a:spLocks xmlns:a="http://schemas.openxmlformats.org/drawingml/2006/main" noGrp="1"/>
+          </p:cNvSpPr>
+          <p:nvPr/>
+        </p:nvSpPr>
+        <p:spPr>
+          <a:xfrm xmlns:a="http://schemas.openxmlformats.org/drawingml/2006/main">
+            <a:off x="704850" y="4819650"/>
+            <a:ext cx="1181100" cy="266700"/>
+          </a:xfrm>
+          <a:prstGeom xmlns:a="http://schemas.openxmlformats.org/drawingml/2006/main" prst="rect">
+            <a:avLst/>
+          </a:prstGeom>
+          <a:noFill xmlns:a="http://schemas.openxmlformats.org/drawingml/2006/main"/>
+          <a:ln xmlns:a="http://schemas.openxmlformats.org/drawingml/2006/main" w="0">
+            <a:noFill/>
+            <a:prstDash val="solid"/>
+          </a:ln>
+        </p:spPr>
+        <p:txBody>
+          <a:bodyPr xmlns:a="http://schemas.openxmlformats.org/drawingml/2006/main"/>
+          <a:lstStyle xmlns:a="http://schemas.openxmlformats.org/drawingml/2006/main"/>
+          <a:p xmlns:a="http://schemas.openxmlformats.org/drawingml/2006/main">
+            <a:pPr algn="ctr">
+              <a:defRPr sz="1200" b="1" i="0">
+                <a:solidFill>
+                  <a:srgbClr val="004AAD"/>
+                </a:solidFill>
+              </a:defRPr>
+            </a:pPr>
+            <a:r>
+              <a:rPr sz="1200" b="1" i="0">
+                <a:solidFill>
+                  <a:srgbClr val="004AAD"/>
+                </a:solidFill>
+              </a:rPr>
+              <a:t>Subagent bridge</a:t>
+            </a:r>
+          </a:p>
+        </p:txBody>
+      </p:sp>
+      <p:sp>
+        <p:nvSpPr>
+          <p:cNvPr id="31" name="">
+            <a:extLst xmlns:a="http://schemas.openxmlformats.org/drawingml/2006/main">
+              <a:ext uri="{FF2B5EF4-FFF2-40B4-BE49-F238E27FC236}">
+                <a16:creationId xmlns:a16="http://schemas.microsoft.com/office/drawing/2014/main" id="{1BB983F6-2EA6-4348-BB4A-62CE06EAE9A0}"/>
+              </a:ext>
+            </a:extLst>
+          </p:cNvPr>
+          <p:cNvSpPr>
+            <a:spLocks xmlns:a="http://schemas.openxmlformats.org/drawingml/2006/main" noGrp="1"/>
+          </p:cNvSpPr>
+          <p:nvPr/>
+        </p:nvSpPr>
+        <p:spPr>
+          <a:xfrm xmlns:a="http://schemas.openxmlformats.org/drawingml/2006/main">
+            <a:off x="2286000" y="4819650"/>
+            <a:ext cx="2133600" cy="266700"/>
+          </a:xfrm>
+          <a:prstGeom xmlns:a="http://schemas.openxmlformats.org/drawingml/2006/main" prst="rect">
+            <a:avLst/>
+          </a:prstGeom>
+          <a:noFill xmlns:a="http://schemas.openxmlformats.org/drawingml/2006/main"/>
+          <a:ln xmlns:a="http://schemas.openxmlformats.org/drawingml/2006/main" w="0">
+            <a:noFill/>
+            <a:prstDash val="solid"/>
+          </a:ln>
+        </p:spPr>
+        <p:txBody>
+          <a:bodyPr xmlns:a="http://schemas.openxmlformats.org/drawingml/2006/main"/>
+          <a:lstStyle xmlns:a="http://schemas.openxmlformats.org/drawingml/2006/main"/>
+          <a:p xmlns:a="http://schemas.openxmlformats.org/drawingml/2006/main">
+            <a:pPr algn="l">
+              <a:defRPr sz="1200" b="0" i="0">
+                <a:solidFill>
+                  <a:srgbClr val="061A45"/>
+                </a:solidFill>
+              </a:defRPr>
+            </a:pPr>
+            <a:r>
+              <a:rPr sz="1200" b="0" i="0">
+                <a:solidFill>
+                  <a:srgbClr val="061A45"/>
+                </a:solidFill>
+              </a:rPr>
+              <a:t>local task context</a:t>
+            </a:r>
+          </a:p>
+        </p:txBody>
+      </p:sp>
+      <p:sp>
+        <p:nvSpPr>
+          <p:cNvPr id="32" name="">
+            <a:extLst xmlns:a="http://schemas.openxmlformats.org/drawingml/2006/main">
+              <a:ext uri="{FF2B5EF4-FFF2-40B4-BE49-F238E27FC236}">
+                <a16:creationId xmlns:a16="http://schemas.microsoft.com/office/drawing/2014/main" id="{F16BD45B-9DFE-43FA-BB51-266B02B02ED6}"/>
+              </a:ext>
+            </a:extLst>
+          </p:cNvPr>
+          <p:cNvSpPr>
+            <a:spLocks xmlns:a="http://schemas.openxmlformats.org/drawingml/2006/main" noGrp="1"/>
+          </p:cNvSpPr>
+          <p:nvPr/>
+        </p:nvSpPr>
+        <p:spPr>
+          <a:xfrm xmlns:a="http://schemas.openxmlformats.org/drawingml/2006/main">
+            <a:off x="4857750" y="4819650"/>
+            <a:ext cx="2705100" cy="266700"/>
+          </a:xfrm>
+          <a:prstGeom xmlns:a="http://schemas.openxmlformats.org/drawingml/2006/main" prst="rect">
+            <a:avLst/>
+          </a:prstGeom>
+          <a:noFill xmlns:a="http://schemas.openxmlformats.org/drawingml/2006/main"/>
+          <a:ln xmlns:a="http://schemas.openxmlformats.org/drawingml/2006/main" w="0">
+            <a:noFill/>
+            <a:prstDash val="solid"/>
+          </a:ln>
+        </p:spPr>
+        <p:txBody>
+          <a:bodyPr xmlns:a="http://schemas.openxmlformats.org/drawingml/2006/main"/>
+          <a:lstStyle xmlns:a="http://schemas.openxmlformats.org/drawingml/2006/main"/>
+          <a:p xmlns:a="http://schemas.openxmlformats.org/drawingml/2006/main">
+            <a:pPr algn="l">
+              <a:defRPr sz="1200" b="0" i="0">
+                <a:solidFill>
+                  <a:srgbClr val="061A45"/>
+                </a:solidFill>
+              </a:defRPr>
+            </a:pPr>
+            <a:r>
+              <a:rPr sz="1200" b="0" i="0">
+                <a:solidFill>
+                  <a:srgbClr val="061A45"/>
+                </a:solidFill>
+              </a:rPr>
+              <a:t>fork or fresh run</a:t>
+            </a:r>
+          </a:p>
+        </p:txBody>
+      </p:sp>
+      <p:sp>
+        <p:nvSpPr>
+          <p:cNvPr id="33" name="">
+            <a:extLst xmlns:a="http://schemas.openxmlformats.org/drawingml/2006/main">
+              <a:ext uri="{FF2B5EF4-FFF2-40B4-BE49-F238E27FC236}">
+                <a16:creationId xmlns:a16="http://schemas.microsoft.com/office/drawing/2014/main" id="{7E41F279-DB83-4A48-9E41-CFA9A37897A2}"/>
+              </a:ext>
+            </a:extLst>
+          </p:cNvPr>
+          <p:cNvSpPr>
+            <a:spLocks xmlns:a="http://schemas.openxmlformats.org/drawingml/2006/main" noGrp="1"/>
+          </p:cNvSpPr>
+          <p:nvPr/>
+        </p:nvSpPr>
+        <p:spPr>
+          <a:xfrm xmlns:a="http://schemas.openxmlformats.org/drawingml/2006/main">
+            <a:off x="8096250" y="4819650"/>
+            <a:ext cx="3048000" cy="266700"/>
+          </a:xfrm>
+          <a:prstGeom xmlns:a="http://schemas.openxmlformats.org/drawingml/2006/main" prst="rect">
+            <a:avLst/>
+          </a:prstGeom>
+          <a:noFill xmlns:a="http://schemas.openxmlformats.org/drawingml/2006/main"/>
+          <a:ln xmlns:a="http://schemas.openxmlformats.org/drawingml/2006/main" w="0">
+            <a:noFill/>
+            <a:prstDash val="solid"/>
+          </a:ln>
+        </p:spPr>
+        <p:txBody>
+          <a:bodyPr xmlns:a="http://schemas.openxmlformats.org/drawingml/2006/main"/>
+          <a:lstStyle xmlns:a="http://schemas.openxmlformats.org/drawingml/2006/main"/>
+          <a:p xmlns:a="http://schemas.openxmlformats.org/drawingml/2006/main">
+            <a:pPr algn="l">
+              <a:defRPr sz="1200" b="0" i="0">
+                <a:solidFill>
+                  <a:srgbClr val="061A45"/>
+                </a:solidFill>
+              </a:defRPr>
+            </a:pPr>
+            <a:r>
+              <a:rPr sz="1200" b="0" i="0">
+                <a:solidFill>
+                  <a:srgbClr val="061A45"/>
+                </a:solidFill>
+              </a:rPr>
+              <a:t>copies shared start, then diverges</a:t>
+            </a:r>
+          </a:p>
+        </p:txBody>
+      </p:sp>
+      <p:sp>
+        <p:nvSpPr>
+          <p:cNvPr id="34" name="">
+            <a:extLst xmlns:a="http://schemas.openxmlformats.org/drawingml/2006/main">
+              <a:ext uri="{FF2B5EF4-FFF2-40B4-BE49-F238E27FC236}">
+                <a16:creationId xmlns:a16="http://schemas.microsoft.com/office/drawing/2014/main" id="{975ACFAA-ED84-49FB-96E6-18C5C18F2995}"/>
+              </a:ext>
+            </a:extLst>
+          </p:cNvPr>
+          <p:cNvSpPr>
+            <a:spLocks xmlns:a="http://schemas.openxmlformats.org/drawingml/2006/main" noGrp="1"/>
+          </p:cNvSpPr>
+          <p:nvPr/>
+        </p:nvSpPr>
+        <p:spPr>
+          <a:xfrm xmlns:a="http://schemas.openxmlformats.org/drawingml/2006/main">
+            <a:off x="1352550" y="5448300"/>
+            <a:ext cx="9486900" cy="876300"/>
+          </a:xfrm>
+          <a:prstGeom xmlns:a="http://schemas.openxmlformats.org/drawingml/2006/main" prst="roundRect">
+            <a:avLst>
+              <a:gd name="adj" fmla="val 8696"/>
             </a:avLst>
           </a:prstGeom>
           <a:solidFill xmlns:a="http://schemas.openxmlformats.org/drawingml/2006/main">
@@ -14767,22 +15204,22 @@
       </p:sp>
       <p:sp>
         <p:nvSpPr>
-          <p:cNvPr id="30" name="">
-            <a:extLst xmlns:a="http://schemas.openxmlformats.org/drawingml/2006/main">
-              <a:ext uri="{FF2B5EF4-FFF2-40B4-BE49-F238E27FC236}">
-                <a16:creationId xmlns:a16="http://schemas.microsoft.com/office/drawing/2014/main" id="{EC4DD11E-934D-4F8E-88F5-826B8B7913D0}"/>
-              </a:ext>
-            </a:extLst>
-          </p:cNvPr>
-          <p:cNvSpPr>
-            <a:spLocks xmlns:a="http://schemas.openxmlformats.org/drawingml/2006/main" noGrp="1"/>
-          </p:cNvSpPr>
-          <p:nvPr/>
-        </p:nvSpPr>
-        <p:spPr>
-          <a:xfrm xmlns:a="http://schemas.openxmlformats.org/drawingml/2006/main">
-            <a:off x="1885950" y="5810250"/>
-            <a:ext cx="1809750" cy="209550"/>
+          <p:cNvPr id="35" name="">
+            <a:extLst xmlns:a="http://schemas.openxmlformats.org/drawingml/2006/main">
+              <a:ext uri="{FF2B5EF4-FFF2-40B4-BE49-F238E27FC236}">
+                <a16:creationId xmlns:a16="http://schemas.microsoft.com/office/drawing/2014/main" id="{919E50BE-BD30-4C1C-8470-7340446BE1CB}"/>
+              </a:ext>
+            </a:extLst>
+          </p:cNvPr>
+          <p:cNvSpPr>
+            <a:spLocks xmlns:a="http://schemas.openxmlformats.org/drawingml/2006/main" noGrp="1"/>
+          </p:cNvSpPr>
+          <p:nvPr/>
+        </p:nvSpPr>
+        <p:spPr>
+          <a:xfrm xmlns:a="http://schemas.openxmlformats.org/drawingml/2006/main">
+            <a:off x="1695450" y="5600700"/>
+            <a:ext cx="2000250" cy="209550"/>
           </a:xfrm>
           <a:prstGeom xmlns:a="http://schemas.openxmlformats.org/drawingml/2006/main" prst="rect">
             <a:avLst/>
@@ -14810,29 +15247,29 @@
                   <a:srgbClr val="D88A00"/>
                 </a:solidFill>
               </a:rPr>
-              <a:t>Common mistake</a:t>
-            </a:r>
-          </a:p>
-        </p:txBody>
-      </p:sp>
-      <p:sp>
-        <p:nvSpPr>
-          <p:cNvPr id="31" name="">
-            <a:extLst xmlns:a="http://schemas.openxmlformats.org/drawingml/2006/main">
-              <a:ext uri="{FF2B5EF4-FFF2-40B4-BE49-F238E27FC236}">
-                <a16:creationId xmlns:a16="http://schemas.microsoft.com/office/drawing/2014/main" id="{2785DA55-A0D4-44E1-A5F1-3943C88CCE71}"/>
-              </a:ext>
-            </a:extLst>
-          </p:cNvPr>
-          <p:cNvSpPr>
-            <a:spLocks xmlns:a="http://schemas.openxmlformats.org/drawingml/2006/main" noGrp="1"/>
-          </p:cNvSpPr>
-          <p:nvPr/>
-        </p:nvSpPr>
-        <p:spPr>
-          <a:xfrm xmlns:a="http://schemas.openxmlformats.org/drawingml/2006/main">
-            <a:off x="3886200" y="5810250"/>
-            <a:ext cx="6381750" cy="209550"/>
+              <a:t>Context architecture</a:t>
+            </a:r>
+          </a:p>
+        </p:txBody>
+      </p:sp>
+      <p:sp>
+        <p:nvSpPr>
+          <p:cNvPr id="36" name="">
+            <a:extLst xmlns:a="http://schemas.openxmlformats.org/drawingml/2006/main">
+              <a:ext uri="{FF2B5EF4-FFF2-40B4-BE49-F238E27FC236}">
+                <a16:creationId xmlns:a16="http://schemas.microsoft.com/office/drawing/2014/main" id="{F8C83A37-88F8-407B-AFE4-737F849A9700}"/>
+              </a:ext>
+            </a:extLst>
+          </p:cNvPr>
+          <p:cNvSpPr>
+            <a:spLocks xmlns:a="http://schemas.openxmlformats.org/drawingml/2006/main" noGrp="1"/>
+          </p:cNvSpPr>
+          <p:nvPr/>
+        </p:nvSpPr>
+        <p:spPr>
+          <a:xfrm xmlns:a="http://schemas.openxmlformats.org/drawingml/2006/main">
+            <a:off x="3886200" y="5562600"/>
+            <a:ext cx="6572250" cy="228600"/>
           </a:xfrm>
           <a:prstGeom xmlns:a="http://schemas.openxmlformats.org/drawingml/2006/main" prst="rect">
             <a:avLst/>
@@ -14860,7 +15297,57 @@
                   <a:srgbClr val="061A45"/>
                 </a:solidFill>
               </a:rPr>
-              <a:t>Calling every AI product feature an agent hides the actual engineering boundary.</a:t>
+              <a:t>Compaction reacts: compress one paper as it nears its limit.</a:t>
+            </a:r>
+          </a:p>
+        </p:txBody>
+      </p:sp>
+      <p:sp>
+        <p:nvSpPr>
+          <p:cNvPr id="37" name="">
+            <a:extLst xmlns:a="http://schemas.openxmlformats.org/drawingml/2006/main">
+              <a:ext uri="{FF2B5EF4-FFF2-40B4-BE49-F238E27FC236}">
+                <a16:creationId xmlns:a16="http://schemas.microsoft.com/office/drawing/2014/main" id="{511E9DA5-6FC6-424E-A8DF-8B84928B0978}"/>
+              </a:ext>
+            </a:extLst>
+          </p:cNvPr>
+          <p:cNvSpPr>
+            <a:spLocks xmlns:a="http://schemas.openxmlformats.org/drawingml/2006/main" noGrp="1"/>
+          </p:cNvSpPr>
+          <p:nvPr/>
+        </p:nvSpPr>
+        <p:spPr>
+          <a:xfrm xmlns:a="http://schemas.openxmlformats.org/drawingml/2006/main">
+            <a:off x="3886200" y="5905500"/>
+            <a:ext cx="6572250" cy="228600"/>
+          </a:xfrm>
+          <a:prstGeom xmlns:a="http://schemas.openxmlformats.org/drawingml/2006/main" prst="rect">
+            <a:avLst/>
+          </a:prstGeom>
+          <a:noFill xmlns:a="http://schemas.openxmlformats.org/drawingml/2006/main"/>
+          <a:ln xmlns:a="http://schemas.openxmlformats.org/drawingml/2006/main" w="0">
+            <a:noFill/>
+            <a:prstDash val="solid"/>
+          </a:ln>
+        </p:spPr>
+        <p:txBody>
+          <a:bodyPr xmlns:a="http://schemas.openxmlformats.org/drawingml/2006/main"/>
+          <a:lstStyle xmlns:a="http://schemas.openxmlformats.org/drawingml/2006/main"/>
+          <a:p xmlns:a="http://schemas.openxmlformats.org/drawingml/2006/main">
+            <a:pPr algn="l">
+              <a:defRPr sz="1275" b="1" i="0">
+                <a:solidFill>
+                  <a:srgbClr val="061A45"/>
+                </a:solidFill>
+              </a:defRPr>
+            </a:pPr>
+            <a:r>
+              <a:rPr sz="1275" b="1" i="0">
+                <a:solidFill>
+                  <a:srgbClr val="061A45"/>
+                </a:solidFill>
+              </a:rPr>
+              <a:t>Proactive fork: copy the shared start, then assign one paper per branch.</a:t>
             </a:r>
           </a:p>
         </p:txBody>
@@ -14868,7 +15355,7 @@
     </p:spTree>
     <p:extLst>
       <p:ext uri="{BB962C8B-B14F-4D97-AF65-F5344CB8AC3E}">
-        <p14:creationId xmlns:p14="http://schemas.microsoft.com/office/powerpoint/2010/main" val="1687595729"/>
+        <p14:creationId xmlns:p14="http://schemas.microsoft.com/office/powerpoint/2010/main" val="1199780219"/>
       </p:ext>
     </p:extLst>
   </p:cSld>
@@ -14899,7 +15386,7 @@
           <p:cNvPr id="1" name="">
             <a:extLst xmlns:a="http://schemas.openxmlformats.org/drawingml/2006/main">
               <a:ext uri="{FF2B5EF4-FFF2-40B4-BE49-F238E27FC236}">
-                <a16:creationId xmlns:a16="http://schemas.microsoft.com/office/drawing/2014/main" id="{F5212E00-8DE3-4144-8375-69AA084E0AAB}"/>
+                <a16:creationId xmlns:a16="http://schemas.microsoft.com/office/drawing/2014/main" id="{F74625E4-1FE7-4E71-9D82-871A15A1825A}"/>
               </a:ext>
             </a:extLst>
           </p:cNvPr>
@@ -14949,7 +15436,7 @@
           <p:cNvPr id="2" name="">
             <a:extLst xmlns:a="http://schemas.openxmlformats.org/drawingml/2006/main">
               <a:ext uri="{FF2B5EF4-FFF2-40B4-BE49-F238E27FC236}">
-                <a16:creationId xmlns:a16="http://schemas.microsoft.com/office/drawing/2014/main" id="{B8CC6E23-6075-48D1-9E53-3E55C5979D57}"/>
+                <a16:creationId xmlns:a16="http://schemas.microsoft.com/office/drawing/2014/main" id="{9922F5A1-A9C9-4196-918B-A4CD6ECC6DE2}"/>
               </a:ext>
             </a:extLst>
           </p:cNvPr>
@@ -14999,7 +15486,7 @@
           <p:cNvPr id="3" name="">
             <a:extLst xmlns:a="http://schemas.openxmlformats.org/drawingml/2006/main">
               <a:ext uri="{FF2B5EF4-FFF2-40B4-BE49-F238E27FC236}">
-                <a16:creationId xmlns:a16="http://schemas.microsoft.com/office/drawing/2014/main" id="{C13AB4C2-EC4A-4E96-B830-CDA16B10768B}"/>
+                <a16:creationId xmlns:a16="http://schemas.microsoft.com/office/drawing/2014/main" id="{076E8F95-8267-4F9F-84E0-6ACBD119AA1F}"/>
               </a:ext>
             </a:extLst>
           </p:cNvPr>
@@ -15029,7 +15516,7 @@
           <p:cNvPr id="4" name="">
             <a:extLst xmlns:a="http://schemas.openxmlformats.org/drawingml/2006/main">
               <a:ext uri="{FF2B5EF4-FFF2-40B4-BE49-F238E27FC236}">
-                <a16:creationId xmlns:a16="http://schemas.microsoft.com/office/drawing/2014/main" id="{3FEDF7C2-4C9E-47AA-A20E-8229A40048F1}"/>
+                <a16:creationId xmlns:a16="http://schemas.microsoft.com/office/drawing/2014/main" id="{59DC9D45-B76A-4DB0-82AC-D17B23A79BBB}"/>
               </a:ext>
             </a:extLst>
           </p:cNvPr>
@@ -15041,11 +15528,11 @@
         <p:spPr>
           <a:xfrm xmlns:a="http://schemas.openxmlformats.org/drawingml/2006/main">
             <a:off x="552450" y="1809750"/>
-            <a:ext cx="1524000" cy="1428750"/>
+            <a:ext cx="1524000" cy="1638300"/>
           </a:xfrm>
           <a:prstGeom xmlns:a="http://schemas.openxmlformats.org/drawingml/2006/main" prst="roundRect">
             <a:avLst>
-              <a:gd name="adj" fmla="val 5333"/>
+              <a:gd name="adj" fmla="val 5000"/>
             </a:avLst>
           </a:prstGeom>
           <a:solidFill xmlns:a="http://schemas.openxmlformats.org/drawingml/2006/main">
@@ -15064,7 +15551,7 @@
           <p:cNvPr id="5" name="">
             <a:extLst xmlns:a="http://schemas.openxmlformats.org/drawingml/2006/main">
               <a:ext uri="{FF2B5EF4-FFF2-40B4-BE49-F238E27FC236}">
-                <a16:creationId xmlns:a16="http://schemas.microsoft.com/office/drawing/2014/main" id="{339BCD58-FCCF-469D-844A-337C3B704027}"/>
+                <a16:creationId xmlns:a16="http://schemas.microsoft.com/office/drawing/2014/main" id="{164774E9-87E6-4F4C-9FE0-587198E44247}"/>
               </a:ext>
             </a:extLst>
           </p:cNvPr>
@@ -15099,7 +15586,7 @@
           <p:cNvPr id="6" name="">
             <a:extLst xmlns:a="http://schemas.openxmlformats.org/drawingml/2006/main">
               <a:ext uri="{FF2B5EF4-FFF2-40B4-BE49-F238E27FC236}">
-                <a16:creationId xmlns:a16="http://schemas.microsoft.com/office/drawing/2014/main" id="{4B936DD8-F671-462F-B25B-CAB1A057951A}"/>
+                <a16:creationId xmlns:a16="http://schemas.microsoft.com/office/drawing/2014/main" id="{5C404898-63D9-4217-9925-4565F2C242B2}"/>
               </a:ext>
             </a:extLst>
           </p:cNvPr>
@@ -15149,7 +15636,7 @@
           <p:cNvPr id="7" name="">
             <a:extLst xmlns:a="http://schemas.openxmlformats.org/drawingml/2006/main">
               <a:ext uri="{FF2B5EF4-FFF2-40B4-BE49-F238E27FC236}">
-                <a16:creationId xmlns:a16="http://schemas.microsoft.com/office/drawing/2014/main" id="{30267DAA-EC8D-46C4-9EE8-FD0855E44BE5}"/>
+                <a16:creationId xmlns:a16="http://schemas.microsoft.com/office/drawing/2014/main" id="{539D2B6B-80ED-4A0B-AF6D-F6FA5EBA0A46}"/>
               </a:ext>
             </a:extLst>
           </p:cNvPr>
@@ -15199,7 +15686,7 @@
           <p:cNvPr id="8" name="">
             <a:extLst xmlns:a="http://schemas.openxmlformats.org/drawingml/2006/main">
               <a:ext uri="{FF2B5EF4-FFF2-40B4-BE49-F238E27FC236}">
-                <a16:creationId xmlns:a16="http://schemas.microsoft.com/office/drawing/2014/main" id="{2EBA65E8-F07D-4F8E-99C3-F75517609C6D}"/>
+                <a16:creationId xmlns:a16="http://schemas.microsoft.com/office/drawing/2014/main" id="{51514B7B-B4B0-459D-8528-199EC74DBF5E}"/>
               </a:ext>
             </a:extLst>
           </p:cNvPr>
@@ -15211,7 +15698,7 @@
         <p:spPr>
           <a:xfrm xmlns:a="http://schemas.openxmlformats.org/drawingml/2006/main">
             <a:off x="742950" y="2819400"/>
-            <a:ext cx="1143000" cy="342900"/>
+            <a:ext cx="1143000" cy="514350"/>
           </a:xfrm>
           <a:prstGeom xmlns:a="http://schemas.openxmlformats.org/drawingml/2006/main" prst="rect">
             <a:avLst/>
@@ -15227,14 +15714,14 @@
           <a:lstStyle xmlns:a="http://schemas.openxmlformats.org/drawingml/2006/main"/>
           <a:p xmlns:a="http://schemas.openxmlformats.org/drawingml/2006/main">
             <a:pPr algn="ctr">
-              <a:defRPr sz="1050" b="0" i="0">
-                <a:solidFill>
-                  <a:srgbClr val="061A45"/>
-                </a:solidFill>
-              </a:defRPr>
-            </a:pPr>
-            <a:r>
-              <a:rPr sz="1050" b="0" i="0">
+              <a:defRPr sz="1200" b="0" i="0">
+                <a:solidFill>
+                  <a:srgbClr val="061A45"/>
+                </a:solidFill>
+              </a:defRPr>
+            </a:pPr>
+            <a:r>
+              <a:rPr sz="1200" b="0" i="0">
                 <a:solidFill>
                   <a:srgbClr val="061A45"/>
                 </a:solidFill>
@@ -15244,14 +15731,14 @@
           </a:p>
           <a:p xmlns:a="http://schemas.openxmlformats.org/drawingml/2006/main">
             <a:pPr algn="ctr">
-              <a:defRPr sz="1050" b="0" i="0">
-                <a:solidFill>
-                  <a:srgbClr val="061A45"/>
-                </a:solidFill>
-              </a:defRPr>
-            </a:pPr>
-            <a:r>
-              <a:rPr sz="1050" b="0" i="0">
+              <a:defRPr sz="1200" b="0" i="0">
+                <a:solidFill>
+                  <a:srgbClr val="061A45"/>
+                </a:solidFill>
+              </a:defRPr>
+            </a:pPr>
+            <a:r>
+              <a:rPr sz="1200" b="0" i="0">
                 <a:solidFill>
                   <a:srgbClr val="061A45"/>
                 </a:solidFill>
@@ -15266,7 +15753,7 @@
           <p:cNvPr id="9" name="">
             <a:extLst xmlns:a="http://schemas.openxmlformats.org/drawingml/2006/main">
               <a:ext uri="{FF2B5EF4-FFF2-40B4-BE49-F238E27FC236}">
-                <a16:creationId xmlns:a16="http://schemas.microsoft.com/office/drawing/2014/main" id="{742238C7-FFAD-402E-AB3F-0AAE00ADB447}"/>
+                <a16:creationId xmlns:a16="http://schemas.microsoft.com/office/drawing/2014/main" id="{B9FFBE3D-1B22-442C-8414-237A9D056128}"/>
               </a:ext>
             </a:extLst>
           </p:cNvPr>
@@ -15296,7 +15783,7 @@
           <p:cNvPr id="10" name="">
             <a:extLst xmlns:a="http://schemas.openxmlformats.org/drawingml/2006/main">
               <a:ext uri="{FF2B5EF4-FFF2-40B4-BE49-F238E27FC236}">
-                <a16:creationId xmlns:a16="http://schemas.microsoft.com/office/drawing/2014/main" id="{45D1F57B-13DE-4531-88B9-D4303F380B0F}"/>
+                <a16:creationId xmlns:a16="http://schemas.microsoft.com/office/drawing/2014/main" id="{2FAA591C-7C0C-4CF6-BDD4-04A68A031574}"/>
               </a:ext>
             </a:extLst>
           </p:cNvPr>
@@ -15308,11 +15795,11 @@
         <p:spPr>
           <a:xfrm xmlns:a="http://schemas.openxmlformats.org/drawingml/2006/main">
             <a:off x="2476500" y="1809750"/>
-            <a:ext cx="1524000" cy="1428750"/>
+            <a:ext cx="1524000" cy="1638300"/>
           </a:xfrm>
           <a:prstGeom xmlns:a="http://schemas.openxmlformats.org/drawingml/2006/main" prst="roundRect">
             <a:avLst>
-              <a:gd name="adj" fmla="val 5333"/>
+              <a:gd name="adj" fmla="val 5000"/>
             </a:avLst>
           </a:prstGeom>
           <a:solidFill xmlns:a="http://schemas.openxmlformats.org/drawingml/2006/main">
@@ -15331,7 +15818,7 @@
           <p:cNvPr id="11" name="">
             <a:extLst xmlns:a="http://schemas.openxmlformats.org/drawingml/2006/main">
               <a:ext uri="{FF2B5EF4-FFF2-40B4-BE49-F238E27FC236}">
-                <a16:creationId xmlns:a16="http://schemas.microsoft.com/office/drawing/2014/main" id="{AC72BD61-7404-4AB9-9ED5-82EE2721CAF4}"/>
+                <a16:creationId xmlns:a16="http://schemas.microsoft.com/office/drawing/2014/main" id="{C6C40BA7-9995-4347-852D-4909FB06461C}"/>
               </a:ext>
             </a:extLst>
           </p:cNvPr>
@@ -15366,7 +15853,7 @@
           <p:cNvPr id="12" name="">
             <a:extLst xmlns:a="http://schemas.openxmlformats.org/drawingml/2006/main">
               <a:ext uri="{FF2B5EF4-FFF2-40B4-BE49-F238E27FC236}">
-                <a16:creationId xmlns:a16="http://schemas.microsoft.com/office/drawing/2014/main" id="{BEFAAC7D-40B2-45C7-86A7-BD72418C7014}"/>
+                <a16:creationId xmlns:a16="http://schemas.microsoft.com/office/drawing/2014/main" id="{E23ACFCC-BEBA-4FA6-93AA-90C3B951AC30}"/>
               </a:ext>
             </a:extLst>
           </p:cNvPr>
@@ -15416,7 +15903,7 @@
           <p:cNvPr id="13" name="">
             <a:extLst xmlns:a="http://schemas.openxmlformats.org/drawingml/2006/main">
               <a:ext uri="{FF2B5EF4-FFF2-40B4-BE49-F238E27FC236}">
-                <a16:creationId xmlns:a16="http://schemas.microsoft.com/office/drawing/2014/main" id="{39FF1A3D-D235-427B-8D65-EB7028EC3A31}"/>
+                <a16:creationId xmlns:a16="http://schemas.microsoft.com/office/drawing/2014/main" id="{D4C6FC44-8EAD-4DB3-B5AD-D4779B9BEBD6}"/>
               </a:ext>
             </a:extLst>
           </p:cNvPr>
@@ -15466,7 +15953,7 @@
           <p:cNvPr id="14" name="">
             <a:extLst xmlns:a="http://schemas.openxmlformats.org/drawingml/2006/main">
               <a:ext uri="{FF2B5EF4-FFF2-40B4-BE49-F238E27FC236}">
-                <a16:creationId xmlns:a16="http://schemas.microsoft.com/office/drawing/2014/main" id="{7B886CE1-687A-4FEA-AFEE-CC9B864A298A}"/>
+                <a16:creationId xmlns:a16="http://schemas.microsoft.com/office/drawing/2014/main" id="{FF79362C-F540-48FD-A669-895ECAB5FEAA}"/>
               </a:ext>
             </a:extLst>
           </p:cNvPr>
@@ -15478,7 +15965,7 @@
         <p:spPr>
           <a:xfrm xmlns:a="http://schemas.openxmlformats.org/drawingml/2006/main">
             <a:off x="2667000" y="2819400"/>
-            <a:ext cx="1143000" cy="342900"/>
+            <a:ext cx="1143000" cy="514350"/>
           </a:xfrm>
           <a:prstGeom xmlns:a="http://schemas.openxmlformats.org/drawingml/2006/main" prst="rect">
             <a:avLst/>
@@ -15494,14 +15981,14 @@
           <a:lstStyle xmlns:a="http://schemas.openxmlformats.org/drawingml/2006/main"/>
           <a:p xmlns:a="http://schemas.openxmlformats.org/drawingml/2006/main">
             <a:pPr algn="ctr">
-              <a:defRPr sz="1050" b="0" i="0">
-                <a:solidFill>
-                  <a:srgbClr val="061A45"/>
-                </a:solidFill>
-              </a:defRPr>
-            </a:pPr>
-            <a:r>
-              <a:rPr sz="1050" b="0" i="0">
+              <a:defRPr sz="1200" b="0" i="0">
+                <a:solidFill>
+                  <a:srgbClr val="061A45"/>
+                </a:solidFill>
+              </a:defRPr>
+            </a:pPr>
+            <a:r>
+              <a:rPr sz="1200" b="0" i="0">
                 <a:solidFill>
                   <a:srgbClr val="061A45"/>
                 </a:solidFill>
@@ -15511,14 +15998,14 @@
           </a:p>
           <a:p xmlns:a="http://schemas.openxmlformats.org/drawingml/2006/main">
             <a:pPr algn="ctr">
-              <a:defRPr sz="1050" b="0" i="0">
-                <a:solidFill>
-                  <a:srgbClr val="061A45"/>
-                </a:solidFill>
-              </a:defRPr>
-            </a:pPr>
-            <a:r>
-              <a:rPr sz="1050" b="0" i="0">
+              <a:defRPr sz="1200" b="0" i="0">
+                <a:solidFill>
+                  <a:srgbClr val="061A45"/>
+                </a:solidFill>
+              </a:defRPr>
+            </a:pPr>
+            <a:r>
+              <a:rPr sz="1200" b="0" i="0">
                 <a:solidFill>
                   <a:srgbClr val="061A45"/>
                 </a:solidFill>
@@ -15533,7 +16020,7 @@
           <p:cNvPr id="15" name="">
             <a:extLst xmlns:a="http://schemas.openxmlformats.org/drawingml/2006/main">
               <a:ext uri="{FF2B5EF4-FFF2-40B4-BE49-F238E27FC236}">
-                <a16:creationId xmlns:a16="http://schemas.microsoft.com/office/drawing/2014/main" id="{12CFB988-8329-412F-83F4-C82628F6AF2B}"/>
+                <a16:creationId xmlns:a16="http://schemas.microsoft.com/office/drawing/2014/main" id="{24AEF53F-0C6E-42CE-9A21-386D9C9CC650}"/>
               </a:ext>
             </a:extLst>
           </p:cNvPr>
@@ -15563,7 +16050,7 @@
           <p:cNvPr id="16" name="">
             <a:extLst xmlns:a="http://schemas.openxmlformats.org/drawingml/2006/main">
               <a:ext uri="{FF2B5EF4-FFF2-40B4-BE49-F238E27FC236}">
-                <a16:creationId xmlns:a16="http://schemas.microsoft.com/office/drawing/2014/main" id="{718446E0-8996-49F6-AE37-D7B1BFBFB0A8}"/>
+                <a16:creationId xmlns:a16="http://schemas.microsoft.com/office/drawing/2014/main" id="{BBB74BD0-4337-4582-B1C1-9EFA34CEFE9A}"/>
               </a:ext>
             </a:extLst>
           </p:cNvPr>
@@ -15575,11 +16062,11 @@
         <p:spPr>
           <a:xfrm xmlns:a="http://schemas.openxmlformats.org/drawingml/2006/main">
             <a:off x="4400550" y="1809750"/>
-            <a:ext cx="1524000" cy="1428750"/>
+            <a:ext cx="1524000" cy="1638300"/>
           </a:xfrm>
           <a:prstGeom xmlns:a="http://schemas.openxmlformats.org/drawingml/2006/main" prst="roundRect">
             <a:avLst>
-              <a:gd name="adj" fmla="val 5333"/>
+              <a:gd name="adj" fmla="val 5000"/>
             </a:avLst>
           </a:prstGeom>
           <a:solidFill xmlns:a="http://schemas.openxmlformats.org/drawingml/2006/main">
@@ -15598,7 +16085,7 @@
           <p:cNvPr id="17" name="">
             <a:extLst xmlns:a="http://schemas.openxmlformats.org/drawingml/2006/main">
               <a:ext uri="{FF2B5EF4-FFF2-40B4-BE49-F238E27FC236}">
-                <a16:creationId xmlns:a16="http://schemas.microsoft.com/office/drawing/2014/main" id="{584E3D72-16E3-4A8D-A844-ED478537DD74}"/>
+                <a16:creationId xmlns:a16="http://schemas.microsoft.com/office/drawing/2014/main" id="{3C9F700C-8702-477D-B9B4-4AF089B8C1C2}"/>
               </a:ext>
             </a:extLst>
           </p:cNvPr>
@@ -15633,7 +16120,7 @@
           <p:cNvPr id="18" name="">
             <a:extLst xmlns:a="http://schemas.openxmlformats.org/drawingml/2006/main">
               <a:ext uri="{FF2B5EF4-FFF2-40B4-BE49-F238E27FC236}">
-                <a16:creationId xmlns:a16="http://schemas.microsoft.com/office/drawing/2014/main" id="{E3DB7CA1-9CE7-44F5-89F6-E937EEC03387}"/>
+                <a16:creationId xmlns:a16="http://schemas.microsoft.com/office/drawing/2014/main" id="{9FA09CF1-1AB9-46E0-A16C-F350FF83D149}"/>
               </a:ext>
             </a:extLst>
           </p:cNvPr>
@@ -15683,7 +16170,7 @@
           <p:cNvPr id="19" name="">
             <a:extLst xmlns:a="http://schemas.openxmlformats.org/drawingml/2006/main">
               <a:ext uri="{FF2B5EF4-FFF2-40B4-BE49-F238E27FC236}">
-                <a16:creationId xmlns:a16="http://schemas.microsoft.com/office/drawing/2014/main" id="{D19EB763-23AD-4CAD-9A0C-590C1544B36C}"/>
+                <a16:creationId xmlns:a16="http://schemas.microsoft.com/office/drawing/2014/main" id="{7D116F5D-E581-4036-AE77-68932A7B5EFF}"/>
               </a:ext>
             </a:extLst>
           </p:cNvPr>
@@ -15733,7 +16220,7 @@
           <p:cNvPr id="20" name="">
             <a:extLst xmlns:a="http://schemas.openxmlformats.org/drawingml/2006/main">
               <a:ext uri="{FF2B5EF4-FFF2-40B4-BE49-F238E27FC236}">
-                <a16:creationId xmlns:a16="http://schemas.microsoft.com/office/drawing/2014/main" id="{719EE075-3DA2-4E64-8845-C147C1D141AF}"/>
+                <a16:creationId xmlns:a16="http://schemas.microsoft.com/office/drawing/2014/main" id="{2D1747B4-877E-4D9C-8CEE-C64A1F7486F0}"/>
               </a:ext>
             </a:extLst>
           </p:cNvPr>
@@ -15745,7 +16232,7 @@
         <p:spPr>
           <a:xfrm xmlns:a="http://schemas.openxmlformats.org/drawingml/2006/main">
             <a:off x="4591050" y="2819400"/>
-            <a:ext cx="1143000" cy="342900"/>
+            <a:ext cx="1143000" cy="514350"/>
           </a:xfrm>
           <a:prstGeom xmlns:a="http://schemas.openxmlformats.org/drawingml/2006/main" prst="rect">
             <a:avLst/>
@@ -15761,14 +16248,14 @@
           <a:lstStyle xmlns:a="http://schemas.openxmlformats.org/drawingml/2006/main"/>
           <a:p xmlns:a="http://schemas.openxmlformats.org/drawingml/2006/main">
             <a:pPr algn="ctr">
-              <a:defRPr sz="1050" b="0" i="0">
-                <a:solidFill>
-                  <a:srgbClr val="061A45"/>
-                </a:solidFill>
-              </a:defRPr>
-            </a:pPr>
-            <a:r>
-              <a:rPr sz="1050" b="0" i="0">
+              <a:defRPr sz="1200" b="0" i="0">
+                <a:solidFill>
+                  <a:srgbClr val="061A45"/>
+                </a:solidFill>
+              </a:defRPr>
+            </a:pPr>
+            <a:r>
+              <a:rPr sz="1200" b="0" i="0">
                 <a:solidFill>
                   <a:srgbClr val="061A45"/>
                 </a:solidFill>
@@ -15778,14 +16265,14 @@
           </a:p>
           <a:p xmlns:a="http://schemas.openxmlformats.org/drawingml/2006/main">
             <a:pPr algn="ctr">
-              <a:defRPr sz="1050" b="0" i="0">
-                <a:solidFill>
-                  <a:srgbClr val="061A45"/>
-                </a:solidFill>
-              </a:defRPr>
-            </a:pPr>
-            <a:r>
-              <a:rPr sz="1050" b="0" i="0">
+              <a:defRPr sz="1200" b="0" i="0">
+                <a:solidFill>
+                  <a:srgbClr val="061A45"/>
+                </a:solidFill>
+              </a:defRPr>
+            </a:pPr>
+            <a:r>
+              <a:rPr sz="1200" b="0" i="0">
                 <a:solidFill>
                   <a:srgbClr val="061A45"/>
                 </a:solidFill>
@@ -15800,7 +16287,7 @@
           <p:cNvPr id="21" name="">
             <a:extLst xmlns:a="http://schemas.openxmlformats.org/drawingml/2006/main">
               <a:ext uri="{FF2B5EF4-FFF2-40B4-BE49-F238E27FC236}">
-                <a16:creationId xmlns:a16="http://schemas.microsoft.com/office/drawing/2014/main" id="{A92A59BB-330B-420D-82A1-5727A3B190CC}"/>
+                <a16:creationId xmlns:a16="http://schemas.microsoft.com/office/drawing/2014/main" id="{2852778C-A321-48D4-801E-E7F06BD94BEB}"/>
               </a:ext>
             </a:extLst>
           </p:cNvPr>
@@ -15830,7 +16317,7 @@
           <p:cNvPr id="22" name="">
             <a:extLst xmlns:a="http://schemas.openxmlformats.org/drawingml/2006/main">
               <a:ext uri="{FF2B5EF4-FFF2-40B4-BE49-F238E27FC236}">
-                <a16:creationId xmlns:a16="http://schemas.microsoft.com/office/drawing/2014/main" id="{EFB22A03-7563-470D-AA05-3032DD6E6B58}"/>
+                <a16:creationId xmlns:a16="http://schemas.microsoft.com/office/drawing/2014/main" id="{04FC22CA-D5A2-4DA0-A4A7-D8250C90E74D}"/>
               </a:ext>
             </a:extLst>
           </p:cNvPr>
@@ -15842,11 +16329,11 @@
         <p:spPr>
           <a:xfrm xmlns:a="http://schemas.openxmlformats.org/drawingml/2006/main">
             <a:off x="6324600" y="1809750"/>
-            <a:ext cx="1524000" cy="1428750"/>
+            <a:ext cx="1524000" cy="1638300"/>
           </a:xfrm>
           <a:prstGeom xmlns:a="http://schemas.openxmlformats.org/drawingml/2006/main" prst="roundRect">
             <a:avLst>
-              <a:gd name="adj" fmla="val 5333"/>
+              <a:gd name="adj" fmla="val 5000"/>
             </a:avLst>
           </a:prstGeom>
           <a:solidFill xmlns:a="http://schemas.openxmlformats.org/drawingml/2006/main">
@@ -15865,7 +16352,7 @@
           <p:cNvPr id="23" name="">
             <a:extLst xmlns:a="http://schemas.openxmlformats.org/drawingml/2006/main">
               <a:ext uri="{FF2B5EF4-FFF2-40B4-BE49-F238E27FC236}">
-                <a16:creationId xmlns:a16="http://schemas.microsoft.com/office/drawing/2014/main" id="{657DE031-29D2-4C00-AA67-102B927BFC0C}"/>
+                <a16:creationId xmlns:a16="http://schemas.microsoft.com/office/drawing/2014/main" id="{7E9B7D42-8A86-4B7B-9E3F-5CB7E73C50BD}"/>
               </a:ext>
             </a:extLst>
           </p:cNvPr>
@@ -15900,7 +16387,7 @@
           <p:cNvPr id="24" name="">
             <a:extLst xmlns:a="http://schemas.openxmlformats.org/drawingml/2006/main">
               <a:ext uri="{FF2B5EF4-FFF2-40B4-BE49-F238E27FC236}">
-                <a16:creationId xmlns:a16="http://schemas.microsoft.com/office/drawing/2014/main" id="{D1848943-7A70-4C85-A517-632F930CA8A8}"/>
+                <a16:creationId xmlns:a16="http://schemas.microsoft.com/office/drawing/2014/main" id="{E157B333-1AAB-4863-9587-639A4A4E82CB}"/>
               </a:ext>
             </a:extLst>
           </p:cNvPr>
@@ -15950,7 +16437,7 @@
           <p:cNvPr id="25" name="">
             <a:extLst xmlns:a="http://schemas.openxmlformats.org/drawingml/2006/main">
               <a:ext uri="{FF2B5EF4-FFF2-40B4-BE49-F238E27FC236}">
-                <a16:creationId xmlns:a16="http://schemas.microsoft.com/office/drawing/2014/main" id="{F3C1429D-D134-4488-ACBE-364BF958F651}"/>
+                <a16:creationId xmlns:a16="http://schemas.microsoft.com/office/drawing/2014/main" id="{3EE5C787-A22F-426F-ACD5-313D2A7F3CB6}"/>
               </a:ext>
             </a:extLst>
           </p:cNvPr>
@@ -16000,7 +16487,7 @@
           <p:cNvPr id="26" name="">
             <a:extLst xmlns:a="http://schemas.openxmlformats.org/drawingml/2006/main">
               <a:ext uri="{FF2B5EF4-FFF2-40B4-BE49-F238E27FC236}">
-                <a16:creationId xmlns:a16="http://schemas.microsoft.com/office/drawing/2014/main" id="{263F0C46-0A07-472C-92BD-54F57D782630}"/>
+                <a16:creationId xmlns:a16="http://schemas.microsoft.com/office/drawing/2014/main" id="{BDE71258-21C2-4784-B9B8-F171D84A8723}"/>
               </a:ext>
             </a:extLst>
           </p:cNvPr>
@@ -16012,7 +16499,7 @@
         <p:spPr>
           <a:xfrm xmlns:a="http://schemas.openxmlformats.org/drawingml/2006/main">
             <a:off x="6515100" y="2819400"/>
-            <a:ext cx="1143000" cy="342900"/>
+            <a:ext cx="1143000" cy="514350"/>
           </a:xfrm>
           <a:prstGeom xmlns:a="http://schemas.openxmlformats.org/drawingml/2006/main" prst="rect">
             <a:avLst/>
@@ -16028,14 +16515,14 @@
           <a:lstStyle xmlns:a="http://schemas.openxmlformats.org/drawingml/2006/main"/>
           <a:p xmlns:a="http://schemas.openxmlformats.org/drawingml/2006/main">
             <a:pPr algn="ctr">
-              <a:defRPr sz="1050" b="0" i="0">
-                <a:solidFill>
-                  <a:srgbClr val="061A45"/>
-                </a:solidFill>
-              </a:defRPr>
-            </a:pPr>
-            <a:r>
-              <a:rPr sz="1050" b="0" i="0">
+              <a:defRPr sz="1200" b="0" i="0">
+                <a:solidFill>
+                  <a:srgbClr val="061A45"/>
+                </a:solidFill>
+              </a:defRPr>
+            </a:pPr>
+            <a:r>
+              <a:rPr sz="1200" b="0" i="0">
                 <a:solidFill>
                   <a:srgbClr val="061A45"/>
                 </a:solidFill>
@@ -16045,14 +16532,14 @@
           </a:p>
           <a:p xmlns:a="http://schemas.openxmlformats.org/drawingml/2006/main">
             <a:pPr algn="ctr">
-              <a:defRPr sz="1050" b="0" i="0">
-                <a:solidFill>
-                  <a:srgbClr val="061A45"/>
-                </a:solidFill>
-              </a:defRPr>
-            </a:pPr>
-            <a:r>
-              <a:rPr sz="1050" b="0" i="0">
+              <a:defRPr sz="1200" b="0" i="0">
+                <a:solidFill>
+                  <a:srgbClr val="061A45"/>
+                </a:solidFill>
+              </a:defRPr>
+            </a:pPr>
+            <a:r>
+              <a:rPr sz="1200" b="0" i="0">
                 <a:solidFill>
                   <a:srgbClr val="061A45"/>
                 </a:solidFill>
@@ -16067,7 +16554,7 @@
           <p:cNvPr id="27" name="">
             <a:extLst xmlns:a="http://schemas.openxmlformats.org/drawingml/2006/main">
               <a:ext uri="{FF2B5EF4-FFF2-40B4-BE49-F238E27FC236}">
-                <a16:creationId xmlns:a16="http://schemas.microsoft.com/office/drawing/2014/main" id="{B8E6D538-F786-44FA-9007-A3F1E7DEAF18}"/>
+                <a16:creationId xmlns:a16="http://schemas.microsoft.com/office/drawing/2014/main" id="{215E213F-2402-4F2C-81CA-4F660E0E5BB8}"/>
               </a:ext>
             </a:extLst>
           </p:cNvPr>
@@ -16097,7 +16584,7 @@
           <p:cNvPr id="28" name="">
             <a:extLst xmlns:a="http://schemas.openxmlformats.org/drawingml/2006/main">
               <a:ext uri="{FF2B5EF4-FFF2-40B4-BE49-F238E27FC236}">
-                <a16:creationId xmlns:a16="http://schemas.microsoft.com/office/drawing/2014/main" id="{4CDBE103-1E71-4566-85F5-AA2797B573FD}"/>
+                <a16:creationId xmlns:a16="http://schemas.microsoft.com/office/drawing/2014/main" id="{B8C87951-3336-4B3A-8DA9-30D1488BFFD5}"/>
               </a:ext>
             </a:extLst>
           </p:cNvPr>
@@ -16109,11 +16596,11 @@
         <p:spPr>
           <a:xfrm xmlns:a="http://schemas.openxmlformats.org/drawingml/2006/main">
             <a:off x="8248650" y="1809750"/>
-            <a:ext cx="1524000" cy="1428750"/>
+            <a:ext cx="1524000" cy="1638300"/>
           </a:xfrm>
           <a:prstGeom xmlns:a="http://schemas.openxmlformats.org/drawingml/2006/main" prst="roundRect">
             <a:avLst>
-              <a:gd name="adj" fmla="val 5333"/>
+              <a:gd name="adj" fmla="val 5000"/>
             </a:avLst>
           </a:prstGeom>
           <a:solidFill xmlns:a="http://schemas.openxmlformats.org/drawingml/2006/main">
@@ -16132,7 +16619,7 @@
           <p:cNvPr id="29" name="">
             <a:extLst xmlns:a="http://schemas.openxmlformats.org/drawingml/2006/main">
               <a:ext uri="{FF2B5EF4-FFF2-40B4-BE49-F238E27FC236}">
-                <a16:creationId xmlns:a16="http://schemas.microsoft.com/office/drawing/2014/main" id="{997836D0-CCE9-49F8-9BAF-C916BD3AFCA0}"/>
+                <a16:creationId xmlns:a16="http://schemas.microsoft.com/office/drawing/2014/main" id="{45E62462-8F29-42F3-9E11-C927715A2F9E}"/>
               </a:ext>
             </a:extLst>
           </p:cNvPr>
@@ -16167,7 +16654,7 @@
           <p:cNvPr id="30" name="">
             <a:extLst xmlns:a="http://schemas.openxmlformats.org/drawingml/2006/main">
               <a:ext uri="{FF2B5EF4-FFF2-40B4-BE49-F238E27FC236}">
-                <a16:creationId xmlns:a16="http://schemas.microsoft.com/office/drawing/2014/main" id="{8252B858-70F8-437E-8225-E48A9AF8C99D}"/>
+                <a16:creationId xmlns:a16="http://schemas.microsoft.com/office/drawing/2014/main" id="{D0FCCAE1-BF27-4CE5-9132-C85D307AA182}"/>
               </a:ext>
             </a:extLst>
           </p:cNvPr>
@@ -16217,7 +16704,7 @@
           <p:cNvPr id="31" name="">
             <a:extLst xmlns:a="http://schemas.openxmlformats.org/drawingml/2006/main">
               <a:ext uri="{FF2B5EF4-FFF2-40B4-BE49-F238E27FC236}">
-                <a16:creationId xmlns:a16="http://schemas.microsoft.com/office/drawing/2014/main" id="{0FD30ED1-25E1-4BBF-9B52-5FF3272F340C}"/>
+                <a16:creationId xmlns:a16="http://schemas.microsoft.com/office/drawing/2014/main" id="{C77DF57A-3835-4ED4-860A-EB6343F97BB9}"/>
               </a:ext>
             </a:extLst>
           </p:cNvPr>
@@ -16267,7 +16754,7 @@
           <p:cNvPr id="32" name="">
             <a:extLst xmlns:a="http://schemas.openxmlformats.org/drawingml/2006/main">
               <a:ext uri="{FF2B5EF4-FFF2-40B4-BE49-F238E27FC236}">
-                <a16:creationId xmlns:a16="http://schemas.microsoft.com/office/drawing/2014/main" id="{8C44620B-6C8D-46F1-A26D-52B37D41A4EA}"/>
+                <a16:creationId xmlns:a16="http://schemas.microsoft.com/office/drawing/2014/main" id="{64AD35D2-47FA-4211-A9B5-C09AD16F7843}"/>
               </a:ext>
             </a:extLst>
           </p:cNvPr>
@@ -16279,7 +16766,7 @@
         <p:spPr>
           <a:xfrm xmlns:a="http://schemas.openxmlformats.org/drawingml/2006/main">
             <a:off x="8439150" y="2819400"/>
-            <a:ext cx="1143000" cy="342900"/>
+            <a:ext cx="1143000" cy="514350"/>
           </a:xfrm>
           <a:prstGeom xmlns:a="http://schemas.openxmlformats.org/drawingml/2006/main" prst="rect">
             <a:avLst/>
@@ -16295,14 +16782,14 @@
           <a:lstStyle xmlns:a="http://schemas.openxmlformats.org/drawingml/2006/main"/>
           <a:p xmlns:a="http://schemas.openxmlformats.org/drawingml/2006/main">
             <a:pPr algn="ctr">
-              <a:defRPr sz="1050" b="0" i="0">
-                <a:solidFill>
-                  <a:srgbClr val="061A45"/>
-                </a:solidFill>
-              </a:defRPr>
-            </a:pPr>
-            <a:r>
-              <a:rPr sz="1050" b="0" i="0">
+              <a:defRPr sz="1200" b="0" i="0">
+                <a:solidFill>
+                  <a:srgbClr val="061A45"/>
+                </a:solidFill>
+              </a:defRPr>
+            </a:pPr>
+            <a:r>
+              <a:rPr sz="1200" b="0" i="0">
                 <a:solidFill>
                   <a:srgbClr val="061A45"/>
                 </a:solidFill>
@@ -16312,14 +16799,14 @@
           </a:p>
           <a:p xmlns:a="http://schemas.openxmlformats.org/drawingml/2006/main">
             <a:pPr algn="ctr">
-              <a:defRPr sz="1050" b="0" i="0">
-                <a:solidFill>
-                  <a:srgbClr val="061A45"/>
-                </a:solidFill>
-              </a:defRPr>
-            </a:pPr>
-            <a:r>
-              <a:rPr sz="1050" b="0" i="0">
+              <a:defRPr sz="1200" b="0" i="0">
+                <a:solidFill>
+                  <a:srgbClr val="061A45"/>
+                </a:solidFill>
+              </a:defRPr>
+            </a:pPr>
+            <a:r>
+              <a:rPr sz="1200" b="0" i="0">
                 <a:solidFill>
                   <a:srgbClr val="061A45"/>
                 </a:solidFill>
@@ -16334,7 +16821,7 @@
           <p:cNvPr id="33" name="">
             <a:extLst xmlns:a="http://schemas.openxmlformats.org/drawingml/2006/main">
               <a:ext uri="{FF2B5EF4-FFF2-40B4-BE49-F238E27FC236}">
-                <a16:creationId xmlns:a16="http://schemas.microsoft.com/office/drawing/2014/main" id="{E1BAB63D-5BE0-4ED6-882C-3A21D0CFB5C9}"/>
+                <a16:creationId xmlns:a16="http://schemas.microsoft.com/office/drawing/2014/main" id="{A3E28EDE-F4B1-4079-A928-E4E6578B0AC5}"/>
               </a:ext>
             </a:extLst>
           </p:cNvPr>
@@ -16364,7 +16851,7 @@
           <p:cNvPr id="34" name="">
             <a:extLst xmlns:a="http://schemas.openxmlformats.org/drawingml/2006/main">
               <a:ext uri="{FF2B5EF4-FFF2-40B4-BE49-F238E27FC236}">
-                <a16:creationId xmlns:a16="http://schemas.microsoft.com/office/drawing/2014/main" id="{224074AC-CE84-4BCF-BDC9-A1B512321CD6}"/>
+                <a16:creationId xmlns:a16="http://schemas.microsoft.com/office/drawing/2014/main" id="{B41F8BFC-9B17-4AC1-B277-41B3FEC70E0F}"/>
               </a:ext>
             </a:extLst>
           </p:cNvPr>
@@ -16376,11 +16863,11 @@
         <p:spPr>
           <a:xfrm xmlns:a="http://schemas.openxmlformats.org/drawingml/2006/main">
             <a:off x="10172700" y="1809750"/>
-            <a:ext cx="1524000" cy="1428750"/>
+            <a:ext cx="1524000" cy="1638300"/>
           </a:xfrm>
           <a:prstGeom xmlns:a="http://schemas.openxmlformats.org/drawingml/2006/main" prst="roundRect">
             <a:avLst>
-              <a:gd name="adj" fmla="val 5333"/>
+              <a:gd name="adj" fmla="val 5000"/>
             </a:avLst>
           </a:prstGeom>
           <a:solidFill xmlns:a="http://schemas.openxmlformats.org/drawingml/2006/main">
@@ -16399,7 +16886,7 @@
           <p:cNvPr id="35" name="">
             <a:extLst xmlns:a="http://schemas.openxmlformats.org/drawingml/2006/main">
               <a:ext uri="{FF2B5EF4-FFF2-40B4-BE49-F238E27FC236}">
-                <a16:creationId xmlns:a16="http://schemas.microsoft.com/office/drawing/2014/main" id="{57A91FBA-2EC3-40A1-8865-E64C8E7CC5E7}"/>
+                <a16:creationId xmlns:a16="http://schemas.microsoft.com/office/drawing/2014/main" id="{46D100E9-B595-4A47-B8D7-760C7D0349B9}"/>
               </a:ext>
             </a:extLst>
           </p:cNvPr>
@@ -16434,7 +16921,7 @@
           <p:cNvPr id="36" name="">
             <a:extLst xmlns:a="http://schemas.openxmlformats.org/drawingml/2006/main">
               <a:ext uri="{FF2B5EF4-FFF2-40B4-BE49-F238E27FC236}">
-                <a16:creationId xmlns:a16="http://schemas.microsoft.com/office/drawing/2014/main" id="{421B1CD3-BA51-43B7-BBCF-78456723EC0E}"/>
+                <a16:creationId xmlns:a16="http://schemas.microsoft.com/office/drawing/2014/main" id="{817A3746-2904-4CB0-9F85-B80DC930DA7B}"/>
               </a:ext>
             </a:extLst>
           </p:cNvPr>
@@ -16484,7 +16971,7 @@
           <p:cNvPr id="37" name="">
             <a:extLst xmlns:a="http://schemas.openxmlformats.org/drawingml/2006/main">
               <a:ext uri="{FF2B5EF4-FFF2-40B4-BE49-F238E27FC236}">
-                <a16:creationId xmlns:a16="http://schemas.microsoft.com/office/drawing/2014/main" id="{50B50CDC-A056-4250-AA41-D40ACFDE5CE9}"/>
+                <a16:creationId xmlns:a16="http://schemas.microsoft.com/office/drawing/2014/main" id="{E1715A90-3F0B-4576-89CE-D2AAC0FCB001}"/>
               </a:ext>
             </a:extLst>
           </p:cNvPr>
@@ -16534,7 +17021,7 @@
           <p:cNvPr id="38" name="">
             <a:extLst xmlns:a="http://schemas.openxmlformats.org/drawingml/2006/main">
               <a:ext uri="{FF2B5EF4-FFF2-40B4-BE49-F238E27FC236}">
-                <a16:creationId xmlns:a16="http://schemas.microsoft.com/office/drawing/2014/main" id="{4D111EDE-D65E-4EA6-B58B-2961D5FB784F}"/>
+                <a16:creationId xmlns:a16="http://schemas.microsoft.com/office/drawing/2014/main" id="{20545D8A-55CD-44AE-AB2B-3A05FBE9136B}"/>
               </a:ext>
             </a:extLst>
           </p:cNvPr>
@@ -16546,7 +17033,7 @@
         <p:spPr>
           <a:xfrm xmlns:a="http://schemas.openxmlformats.org/drawingml/2006/main">
             <a:off x="10363200" y="2819400"/>
-            <a:ext cx="1143000" cy="342900"/>
+            <a:ext cx="1143000" cy="514350"/>
           </a:xfrm>
           <a:prstGeom xmlns:a="http://schemas.openxmlformats.org/drawingml/2006/main" prst="rect">
             <a:avLst/>
@@ -16562,14 +17049,14 @@
           <a:lstStyle xmlns:a="http://schemas.openxmlformats.org/drawingml/2006/main"/>
           <a:p xmlns:a="http://schemas.openxmlformats.org/drawingml/2006/main">
             <a:pPr algn="ctr">
-              <a:defRPr sz="1050" b="0" i="0">
-                <a:solidFill>
-                  <a:srgbClr val="061A45"/>
-                </a:solidFill>
-              </a:defRPr>
-            </a:pPr>
-            <a:r>
-              <a:rPr sz="1050" b="0" i="0">
+              <a:defRPr sz="1200" b="0" i="0">
+                <a:solidFill>
+                  <a:srgbClr val="061A45"/>
+                </a:solidFill>
+              </a:defRPr>
+            </a:pPr>
+            <a:r>
+              <a:rPr sz="1200" b="0" i="0">
                 <a:solidFill>
                   <a:srgbClr val="061A45"/>
                 </a:solidFill>
@@ -16579,14 +17066,14 @@
           </a:p>
           <a:p xmlns:a="http://schemas.openxmlformats.org/drawingml/2006/main">
             <a:pPr algn="ctr">
-              <a:defRPr sz="1050" b="0" i="0">
-                <a:solidFill>
-                  <a:srgbClr val="061A45"/>
-                </a:solidFill>
-              </a:defRPr>
-            </a:pPr>
-            <a:r>
-              <a:rPr sz="1050" b="0" i="0">
+              <a:defRPr sz="1200" b="0" i="0">
+                <a:solidFill>
+                  <a:srgbClr val="061A45"/>
+                </a:solidFill>
+              </a:defRPr>
+            </a:pPr>
+            <a:r>
+              <a:rPr sz="1200" b="0" i="0">
                 <a:solidFill>
                   <a:srgbClr val="061A45"/>
                 </a:solidFill>
@@ -16601,7 +17088,7 @@
           <p:cNvPr id="39" name="">
             <a:extLst xmlns:a="http://schemas.openxmlformats.org/drawingml/2006/main">
               <a:ext uri="{FF2B5EF4-FFF2-40B4-BE49-F238E27FC236}">
-                <a16:creationId xmlns:a16="http://schemas.microsoft.com/office/drawing/2014/main" id="{5D6A4F62-8A47-4957-904A-08374413267E}"/>
+                <a16:creationId xmlns:a16="http://schemas.microsoft.com/office/drawing/2014/main" id="{7184183F-1684-4FCF-AB82-2E5E915C18CE}"/>
               </a:ext>
             </a:extLst>
           </p:cNvPr>
@@ -16636,7 +17123,7 @@
           <p:cNvPr id="40" name="">
             <a:extLst xmlns:a="http://schemas.openxmlformats.org/drawingml/2006/main">
               <a:ext uri="{FF2B5EF4-FFF2-40B4-BE49-F238E27FC236}">
-                <a16:creationId xmlns:a16="http://schemas.microsoft.com/office/drawing/2014/main" id="{569468D4-B229-4D69-B6D3-E61EE6EC2438}"/>
+                <a16:creationId xmlns:a16="http://schemas.microsoft.com/office/drawing/2014/main" id="{F49DAE06-08F4-49A7-B3AE-A3946598FF78}"/>
               </a:ext>
             </a:extLst>
           </p:cNvPr>
@@ -16686,7 +17173,7 @@
           <p:cNvPr id="41" name="">
             <a:extLst xmlns:a="http://schemas.openxmlformats.org/drawingml/2006/main">
               <a:ext uri="{FF2B5EF4-FFF2-40B4-BE49-F238E27FC236}">
-                <a16:creationId xmlns:a16="http://schemas.microsoft.com/office/drawing/2014/main" id="{4A8342E6-BE48-443B-B7A7-15386D7238C9}"/>
+                <a16:creationId xmlns:a16="http://schemas.microsoft.com/office/drawing/2014/main" id="{B59A44DA-AB92-4E31-A174-094BE548951D}"/>
               </a:ext>
             </a:extLst>
           </p:cNvPr>
@@ -16736,7 +17223,7 @@
           <p:cNvPr id="42" name="">
             <a:extLst xmlns:a="http://schemas.openxmlformats.org/drawingml/2006/main">
               <a:ext uri="{FF2B5EF4-FFF2-40B4-BE49-F238E27FC236}">
-                <a16:creationId xmlns:a16="http://schemas.microsoft.com/office/drawing/2014/main" id="{50DF43B1-C045-4E80-9285-92D22ADBEF21}"/>
+                <a16:creationId xmlns:a16="http://schemas.microsoft.com/office/drawing/2014/main" id="{3E18F960-543C-4441-9C49-C1AC66591B2B}"/>
               </a:ext>
             </a:extLst>
           </p:cNvPr>
@@ -16771,7 +17258,7 @@
           <p:cNvPr id="43" name="">
             <a:extLst xmlns:a="http://schemas.openxmlformats.org/drawingml/2006/main">
               <a:ext uri="{FF2B5EF4-FFF2-40B4-BE49-F238E27FC236}">
-                <a16:creationId xmlns:a16="http://schemas.microsoft.com/office/drawing/2014/main" id="{27397383-2ADF-4370-93D5-F621A429CD0F}"/>
+                <a16:creationId xmlns:a16="http://schemas.microsoft.com/office/drawing/2014/main" id="{7402AD87-D4A3-4ACF-B45B-68E9B79C3EF5}"/>
               </a:ext>
             </a:extLst>
           </p:cNvPr>
@@ -16821,7 +17308,7 @@
           <p:cNvPr id="44" name="">
             <a:extLst xmlns:a="http://schemas.openxmlformats.org/drawingml/2006/main">
               <a:ext uri="{FF2B5EF4-FFF2-40B4-BE49-F238E27FC236}">
-                <a16:creationId xmlns:a16="http://schemas.microsoft.com/office/drawing/2014/main" id="{A6A58AFF-2A1F-427D-8F81-08683769068C}"/>
+                <a16:creationId xmlns:a16="http://schemas.microsoft.com/office/drawing/2014/main" id="{193E8AB7-647A-428C-B284-5128F127B7BD}"/>
               </a:ext>
             </a:extLst>
           </p:cNvPr>
@@ -16871,7 +17358,7 @@
           <p:cNvPr id="45" name="">
             <a:extLst xmlns:a="http://schemas.openxmlformats.org/drawingml/2006/main">
               <a:ext uri="{FF2B5EF4-FFF2-40B4-BE49-F238E27FC236}">
-                <a16:creationId xmlns:a16="http://schemas.microsoft.com/office/drawing/2014/main" id="{6322E72D-8D77-43ED-9AD6-790B6B5ABB2E}"/>
+                <a16:creationId xmlns:a16="http://schemas.microsoft.com/office/drawing/2014/main" id="{59ABEAED-7787-4293-93A1-864E2B530254}"/>
               </a:ext>
             </a:extLst>
           </p:cNvPr>
@@ -16906,7 +17393,7 @@
           <p:cNvPr id="46" name="">
             <a:extLst xmlns:a="http://schemas.openxmlformats.org/drawingml/2006/main">
               <a:ext uri="{FF2B5EF4-FFF2-40B4-BE49-F238E27FC236}">
-                <a16:creationId xmlns:a16="http://schemas.microsoft.com/office/drawing/2014/main" id="{590AC69A-85B7-4D7C-8910-36ECD1376AC7}"/>
+                <a16:creationId xmlns:a16="http://schemas.microsoft.com/office/drawing/2014/main" id="{9BD5DC66-BB45-4416-A771-A4FB2249A9CE}"/>
               </a:ext>
             </a:extLst>
           </p:cNvPr>
@@ -16954,7 +17441,7 @@
     </p:spTree>
     <p:extLst>
       <p:ext uri="{BB962C8B-B14F-4D97-AF65-F5344CB8AC3E}">
-        <p14:creationId xmlns:p14="http://schemas.microsoft.com/office/powerpoint/2010/main" val="604293150"/>
+        <p14:creationId xmlns:p14="http://schemas.microsoft.com/office/powerpoint/2010/main" val="1302465513"/>
       </p:ext>
     </p:extLst>
   </p:cSld>

--- a/decks/lesson-02-harness-engineering.pptx
+++ b/decks/lesson-02-harness-engineering.pptx
@@ -2,22 +2,22 @@
 <file path=ppt/presentation.xml><?xml version="1.0" encoding="utf-8"?>
 <p:presentation xmlns:p="http://schemas.openxmlformats.org/presentationml/2006/main">
   <p:sldMasterIdLst>
-    <p:sldMasterId xmlns:r="http://schemas.openxmlformats.org/officeDocument/2006/relationships" id="2147483648" r:id="Rb5901e657b0f4d6a"/>
+    <p:sldMasterId xmlns:r="http://schemas.openxmlformats.org/officeDocument/2006/relationships" id="2147483648" r:id="R414bb9a681f4464a"/>
   </p:sldMasterIdLst>
   <p:notesMasterIdLst>
-    <p:notesMasterId xmlns:r="http://schemas.openxmlformats.org/officeDocument/2006/relationships" r:id="R1c61152236bd4961"/>
+    <p:notesMasterId xmlns:r="http://schemas.openxmlformats.org/officeDocument/2006/relationships" r:id="R5590a5d6e8184f4d"/>
   </p:notesMasterIdLst>
   <p:sldIdLst>
-    <p:sldId xmlns:r="http://schemas.openxmlformats.org/officeDocument/2006/relationships" id="256" r:id="R326cbb85ecc4466d"/>
-    <p:sldId xmlns:r="http://schemas.openxmlformats.org/officeDocument/2006/relationships" id="257" r:id="Rb1d03798a901406c"/>
-    <p:sldId xmlns:r="http://schemas.openxmlformats.org/officeDocument/2006/relationships" id="258" r:id="R83d7b3bb28704ac3"/>
-    <p:sldId xmlns:r="http://schemas.openxmlformats.org/officeDocument/2006/relationships" id="259" r:id="Rf4b82bf95fbb48e8"/>
-    <p:sldId xmlns:r="http://schemas.openxmlformats.org/officeDocument/2006/relationships" id="260" r:id="R397e1f775be04fd5"/>
-    <p:sldId xmlns:r="http://schemas.openxmlformats.org/officeDocument/2006/relationships" id="261" r:id="Rbfc88dc7d0654874"/>
-    <p:sldId xmlns:r="http://schemas.openxmlformats.org/officeDocument/2006/relationships" id="262" r:id="R62d8b56bf57243d8"/>
-    <p:sldId xmlns:r="http://schemas.openxmlformats.org/officeDocument/2006/relationships" id="263" r:id="R660b8cec0ad54cd8"/>
-    <p:sldId xmlns:r="http://schemas.openxmlformats.org/officeDocument/2006/relationships" id="264" r:id="R55ac65f3712e4505"/>
-    <p:sldId xmlns:r="http://schemas.openxmlformats.org/officeDocument/2006/relationships" id="265" r:id="R9ac87621ad954d5c"/>
+    <p:sldId xmlns:r="http://schemas.openxmlformats.org/officeDocument/2006/relationships" id="256" r:id="R4e2e04c7da124507"/>
+    <p:sldId xmlns:r="http://schemas.openxmlformats.org/officeDocument/2006/relationships" id="257" r:id="R8a9c54c61bf0473a"/>
+    <p:sldId xmlns:r="http://schemas.openxmlformats.org/officeDocument/2006/relationships" id="258" r:id="Rdae1f8e9ffe340a9"/>
+    <p:sldId xmlns:r="http://schemas.openxmlformats.org/officeDocument/2006/relationships" id="259" r:id="R3e01abfc62fc444a"/>
+    <p:sldId xmlns:r="http://schemas.openxmlformats.org/officeDocument/2006/relationships" id="260" r:id="R2094b4ef3742423a"/>
+    <p:sldId xmlns:r="http://schemas.openxmlformats.org/officeDocument/2006/relationships" id="261" r:id="Rea843e17e6084bb7"/>
+    <p:sldId xmlns:r="http://schemas.openxmlformats.org/officeDocument/2006/relationships" id="262" r:id="R9ea96b418ec045ae"/>
+    <p:sldId xmlns:r="http://schemas.openxmlformats.org/officeDocument/2006/relationships" id="263" r:id="R7ba5ecfe008b43c1"/>
+    <p:sldId xmlns:r="http://schemas.openxmlformats.org/officeDocument/2006/relationships" id="264" r:id="Rfdf81ddecba14656"/>
+    <p:sldId xmlns:r="http://schemas.openxmlformats.org/officeDocument/2006/relationships" id="265" r:id="R3a0d9b3cd60f4f8c"/>
   </p:sldIdLst>
   <p:sldSz cx="12192000" cy="6858000"/>
   <p:notesSz cx="6858000" cy="9144000"/>
@@ -1244,7 +1244,7 @@
   </p:cSld>
   <p:clrMap bg1="lt1" tx1="dk1" bg2="lt2" tx2="dk2" accent1="accent1" accent2="accent2" accent3="accent3" accent4="accent4" accent5="accent5" accent6="accent6" hlink="hlink" folHlink="folHlink"/>
   <p:sldLayoutIdLst>
-    <p:sldLayoutId xmlns:r="http://schemas.openxmlformats.org/officeDocument/2006/relationships" id="2147483649" r:id="R40dee4ae066340a9"/>
+    <p:sldLayoutId xmlns:r="http://schemas.openxmlformats.org/officeDocument/2006/relationships" id="2147483649" r:id="R4b1ecde082de4db2"/>
   </p:sldLayoutIdLst>
   <p:txStyles>
     <p:titleStyle>
@@ -1799,7 +1799,7 @@
           <p:nvPr/>
         </p:nvPicPr>
         <p:blipFill>
-          <a:blip xmlns:r="http://schemas.openxmlformats.org/officeDocument/2006/relationships" xmlns:a="http://schemas.openxmlformats.org/drawingml/2006/main" r:embed="R6ae9047348dc4625"/>
+          <a:blip xmlns:r="http://schemas.openxmlformats.org/officeDocument/2006/relationships" xmlns:a="http://schemas.openxmlformats.org/drawingml/2006/main" r:embed="Rda51026ce67044ac"/>
           <a:stretch xmlns:a="http://schemas.openxmlformats.org/drawingml/2006/main"/>
         </p:blipFill>
         <p:spPr>
@@ -1815,7 +1815,7 @@
     </p:spTree>
     <p:extLst>
       <p:ext uri="{BB962C8B-B14F-4D97-AF65-F5344CB8AC3E}">
-        <p14:creationId xmlns:p14="http://schemas.microsoft.com/office/powerpoint/2010/main" val="260265912"/>
+        <p14:creationId xmlns:p14="http://schemas.microsoft.com/office/powerpoint/2010/main" val="1434409942"/>
       </p:ext>
     </p:extLst>
   </p:cSld>
@@ -1850,7 +1850,7 @@
           <p:nvPr/>
         </p:nvPicPr>
         <p:blipFill>
-          <a:blip xmlns:r="http://schemas.openxmlformats.org/officeDocument/2006/relationships" xmlns:a="http://schemas.openxmlformats.org/drawingml/2006/main" r:embed="R66bc18ba2a8748e0"/>
+          <a:blip xmlns:r="http://schemas.openxmlformats.org/officeDocument/2006/relationships" xmlns:a="http://schemas.openxmlformats.org/drawingml/2006/main" r:embed="R8b130f9612454945"/>
           <a:stretch xmlns:a="http://schemas.openxmlformats.org/drawingml/2006/main"/>
         </p:blipFill>
         <p:spPr>
@@ -1866,7 +1866,7 @@
     </p:spTree>
     <p:extLst>
       <p:ext uri="{BB962C8B-B14F-4D97-AF65-F5344CB8AC3E}">
-        <p14:creationId xmlns:p14="http://schemas.microsoft.com/office/powerpoint/2010/main" val="1802960180"/>
+        <p14:creationId xmlns:p14="http://schemas.microsoft.com/office/powerpoint/2010/main" val="1224810254"/>
       </p:ext>
     </p:extLst>
   </p:cSld>
@@ -1901,7 +1901,7 @@
           <p:nvPr/>
         </p:nvPicPr>
         <p:blipFill>
-          <a:blip xmlns:r="http://schemas.openxmlformats.org/officeDocument/2006/relationships" xmlns:a="http://schemas.openxmlformats.org/drawingml/2006/main" r:embed="Rbfef3792b13c4428"/>
+          <a:blip xmlns:r="http://schemas.openxmlformats.org/officeDocument/2006/relationships" xmlns:a="http://schemas.openxmlformats.org/drawingml/2006/main" r:embed="R7fb296632b3c4555"/>
           <a:stretch xmlns:a="http://schemas.openxmlformats.org/drawingml/2006/main"/>
         </p:blipFill>
         <p:spPr>
@@ -1917,7 +1917,7 @@
     </p:spTree>
     <p:extLst>
       <p:ext uri="{BB962C8B-B14F-4D97-AF65-F5344CB8AC3E}">
-        <p14:creationId xmlns:p14="http://schemas.microsoft.com/office/powerpoint/2010/main" val="1669107915"/>
+        <p14:creationId xmlns:p14="http://schemas.microsoft.com/office/powerpoint/2010/main" val="849229220"/>
       </p:ext>
     </p:extLst>
   </p:cSld>
@@ -1952,7 +1952,7 @@
           <p:nvPr/>
         </p:nvPicPr>
         <p:blipFill>
-          <a:blip xmlns:r="http://schemas.openxmlformats.org/officeDocument/2006/relationships" xmlns:a="http://schemas.openxmlformats.org/drawingml/2006/main" r:embed="R9a7887b7414b4163"/>
+          <a:blip xmlns:r="http://schemas.openxmlformats.org/officeDocument/2006/relationships" xmlns:a="http://schemas.openxmlformats.org/drawingml/2006/main" r:embed="R6518b76d61864880"/>
           <a:stretch xmlns:a="http://schemas.openxmlformats.org/drawingml/2006/main"/>
         </p:blipFill>
         <p:spPr>
@@ -1968,7 +1968,7 @@
     </p:spTree>
     <p:extLst>
       <p:ext uri="{BB962C8B-B14F-4D97-AF65-F5344CB8AC3E}">
-        <p14:creationId xmlns:p14="http://schemas.microsoft.com/office/powerpoint/2010/main" val="54596575"/>
+        <p14:creationId xmlns:p14="http://schemas.microsoft.com/office/powerpoint/2010/main" val="1139984199"/>
       </p:ext>
     </p:extLst>
   </p:cSld>
@@ -2003,7 +2003,7 @@
           <p:nvPr/>
         </p:nvPicPr>
         <p:blipFill>
-          <a:blip xmlns:r="http://schemas.openxmlformats.org/officeDocument/2006/relationships" xmlns:a="http://schemas.openxmlformats.org/drawingml/2006/main" r:embed="R09944096b14f448a"/>
+          <a:blip xmlns:r="http://schemas.openxmlformats.org/officeDocument/2006/relationships" xmlns:a="http://schemas.openxmlformats.org/drawingml/2006/main" r:embed="R9613a76ca9c44499"/>
           <a:stretch xmlns:a="http://schemas.openxmlformats.org/drawingml/2006/main"/>
         </p:blipFill>
         <p:spPr>
@@ -2019,7 +2019,7 @@
     </p:spTree>
     <p:extLst>
       <p:ext uri="{BB962C8B-B14F-4D97-AF65-F5344CB8AC3E}">
-        <p14:creationId xmlns:p14="http://schemas.microsoft.com/office/powerpoint/2010/main" val="2103968313"/>
+        <p14:creationId xmlns:p14="http://schemas.microsoft.com/office/powerpoint/2010/main" val="1036447640"/>
       </p:ext>
     </p:extLst>
   </p:cSld>
@@ -2054,7 +2054,7 @@
           <p:nvPr/>
         </p:nvPicPr>
         <p:blipFill>
-          <a:blip xmlns:r="http://schemas.openxmlformats.org/officeDocument/2006/relationships" xmlns:a="http://schemas.openxmlformats.org/drawingml/2006/main" r:embed="Rd3f77d3473ed45df"/>
+          <a:blip xmlns:r="http://schemas.openxmlformats.org/officeDocument/2006/relationships" xmlns:a="http://schemas.openxmlformats.org/drawingml/2006/main" r:embed="R5686607bb47543a3"/>
           <a:stretch xmlns:a="http://schemas.openxmlformats.org/drawingml/2006/main"/>
         </p:blipFill>
         <p:spPr>
@@ -2070,7 +2070,7 @@
     </p:spTree>
     <p:extLst>
       <p:ext uri="{BB962C8B-B14F-4D97-AF65-F5344CB8AC3E}">
-        <p14:creationId xmlns:p14="http://schemas.microsoft.com/office/powerpoint/2010/main" val="339945172"/>
+        <p14:creationId xmlns:p14="http://schemas.microsoft.com/office/powerpoint/2010/main" val="1861133344"/>
       </p:ext>
     </p:extLst>
   </p:cSld>
@@ -2105,7 +2105,7 @@
           <p:nvPr/>
         </p:nvPicPr>
         <p:blipFill>
-          <a:blip xmlns:r="http://schemas.openxmlformats.org/officeDocument/2006/relationships" xmlns:a="http://schemas.openxmlformats.org/drawingml/2006/main" r:embed="Rf25a31f83885474d"/>
+          <a:blip xmlns:r="http://schemas.openxmlformats.org/officeDocument/2006/relationships" xmlns:a="http://schemas.openxmlformats.org/drawingml/2006/main" r:embed="Rfade758a1f934421"/>
           <a:stretch xmlns:a="http://schemas.openxmlformats.org/drawingml/2006/main"/>
         </p:blipFill>
         <p:spPr>
@@ -2121,7 +2121,7 @@
     </p:spTree>
     <p:extLst>
       <p:ext uri="{BB962C8B-B14F-4D97-AF65-F5344CB8AC3E}">
-        <p14:creationId xmlns:p14="http://schemas.microsoft.com/office/powerpoint/2010/main" val="1948530154"/>
+        <p14:creationId xmlns:p14="http://schemas.microsoft.com/office/powerpoint/2010/main" val="597908338"/>
       </p:ext>
     </p:extLst>
   </p:cSld>
@@ -2156,7 +2156,7 @@
           <p:nvPr/>
         </p:nvPicPr>
         <p:blipFill>
-          <a:blip xmlns:r="http://schemas.openxmlformats.org/officeDocument/2006/relationships" xmlns:a="http://schemas.openxmlformats.org/drawingml/2006/main" r:embed="R3be35bc4be66481f"/>
+          <a:blip xmlns:r="http://schemas.openxmlformats.org/officeDocument/2006/relationships" xmlns:a="http://schemas.openxmlformats.org/drawingml/2006/main" r:embed="R9a635c348d674632"/>
           <a:stretch xmlns:a="http://schemas.openxmlformats.org/drawingml/2006/main"/>
         </p:blipFill>
         <p:spPr>
@@ -2172,7 +2172,7 @@
     </p:spTree>
     <p:extLst>
       <p:ext uri="{BB962C8B-B14F-4D97-AF65-F5344CB8AC3E}">
-        <p14:creationId xmlns:p14="http://schemas.microsoft.com/office/powerpoint/2010/main" val="973554938"/>
+        <p14:creationId xmlns:p14="http://schemas.microsoft.com/office/powerpoint/2010/main" val="1009109976"/>
       </p:ext>
     </p:extLst>
   </p:cSld>
@@ -2207,7 +2207,7 @@
           <p:nvPr/>
         </p:nvPicPr>
         <p:blipFill>
-          <a:blip xmlns:r="http://schemas.openxmlformats.org/officeDocument/2006/relationships" xmlns:a="http://schemas.openxmlformats.org/drawingml/2006/main" r:embed="R2b303d7304314256"/>
+          <a:blip xmlns:r="http://schemas.openxmlformats.org/officeDocument/2006/relationships" xmlns:a="http://schemas.openxmlformats.org/drawingml/2006/main" r:embed="R922b644e53764d3e"/>
           <a:stretch xmlns:a="http://schemas.openxmlformats.org/drawingml/2006/main"/>
         </p:blipFill>
         <p:spPr>
@@ -2223,7 +2223,7 @@
     </p:spTree>
     <p:extLst>
       <p:ext uri="{BB962C8B-B14F-4D97-AF65-F5344CB8AC3E}">
-        <p14:creationId xmlns:p14="http://schemas.microsoft.com/office/powerpoint/2010/main" val="1562722853"/>
+        <p14:creationId xmlns:p14="http://schemas.microsoft.com/office/powerpoint/2010/main" val="1755097069"/>
       </p:ext>
     </p:extLst>
   </p:cSld>
@@ -2258,7 +2258,7 @@
           <p:nvPr/>
         </p:nvPicPr>
         <p:blipFill>
-          <a:blip xmlns:r="http://schemas.openxmlformats.org/officeDocument/2006/relationships" xmlns:a="http://schemas.openxmlformats.org/drawingml/2006/main" r:embed="Rf30ada70453f467b"/>
+          <a:blip xmlns:r="http://schemas.openxmlformats.org/officeDocument/2006/relationships" xmlns:a="http://schemas.openxmlformats.org/drawingml/2006/main" r:embed="Rd52a205ad83c489d"/>
           <a:stretch xmlns:a="http://schemas.openxmlformats.org/drawingml/2006/main"/>
         </p:blipFill>
         <p:spPr>
@@ -2274,7 +2274,7 @@
     </p:spTree>
     <p:extLst>
       <p:ext uri="{BB962C8B-B14F-4D97-AF65-F5344CB8AC3E}">
-        <p14:creationId xmlns:p14="http://schemas.microsoft.com/office/powerpoint/2010/main" val="748289431"/>
+        <p14:creationId xmlns:p14="http://schemas.microsoft.com/office/powerpoint/2010/main" val="654273764"/>
       </p:ext>
     </p:extLst>
   </p:cSld>

--- a/decks/lesson-02-harness-engineering.pptx
+++ b/decks/lesson-02-harness-engineering.pptx
@@ -2,22 +2,22 @@
 <file path=ppt/presentation.xml><?xml version="1.0" encoding="utf-8"?>
 <p:presentation xmlns:p="http://schemas.openxmlformats.org/presentationml/2006/main">
   <p:sldMasterIdLst>
-    <p:sldMasterId xmlns:r="http://schemas.openxmlformats.org/officeDocument/2006/relationships" id="2147483648" r:id="R414bb9a681f4464a"/>
+    <p:sldMasterId xmlns:r="http://schemas.openxmlformats.org/officeDocument/2006/relationships" id="2147483648" r:id="R15d2ec145ff7477a"/>
   </p:sldMasterIdLst>
   <p:notesMasterIdLst>
-    <p:notesMasterId xmlns:r="http://schemas.openxmlformats.org/officeDocument/2006/relationships" r:id="R5590a5d6e8184f4d"/>
+    <p:notesMasterId xmlns:r="http://schemas.openxmlformats.org/officeDocument/2006/relationships" r:id="R5345b29caffb41b0"/>
   </p:notesMasterIdLst>
   <p:sldIdLst>
-    <p:sldId xmlns:r="http://schemas.openxmlformats.org/officeDocument/2006/relationships" id="256" r:id="R4e2e04c7da124507"/>
-    <p:sldId xmlns:r="http://schemas.openxmlformats.org/officeDocument/2006/relationships" id="257" r:id="R8a9c54c61bf0473a"/>
-    <p:sldId xmlns:r="http://schemas.openxmlformats.org/officeDocument/2006/relationships" id="258" r:id="Rdae1f8e9ffe340a9"/>
-    <p:sldId xmlns:r="http://schemas.openxmlformats.org/officeDocument/2006/relationships" id="259" r:id="R3e01abfc62fc444a"/>
-    <p:sldId xmlns:r="http://schemas.openxmlformats.org/officeDocument/2006/relationships" id="260" r:id="R2094b4ef3742423a"/>
-    <p:sldId xmlns:r="http://schemas.openxmlformats.org/officeDocument/2006/relationships" id="261" r:id="Rea843e17e6084bb7"/>
-    <p:sldId xmlns:r="http://schemas.openxmlformats.org/officeDocument/2006/relationships" id="262" r:id="R9ea96b418ec045ae"/>
-    <p:sldId xmlns:r="http://schemas.openxmlformats.org/officeDocument/2006/relationships" id="263" r:id="R7ba5ecfe008b43c1"/>
-    <p:sldId xmlns:r="http://schemas.openxmlformats.org/officeDocument/2006/relationships" id="264" r:id="Rfdf81ddecba14656"/>
-    <p:sldId xmlns:r="http://schemas.openxmlformats.org/officeDocument/2006/relationships" id="265" r:id="R3a0d9b3cd60f4f8c"/>
+    <p:sldId xmlns:r="http://schemas.openxmlformats.org/officeDocument/2006/relationships" id="256" r:id="Reb2f957008a84207"/>
+    <p:sldId xmlns:r="http://schemas.openxmlformats.org/officeDocument/2006/relationships" id="257" r:id="R65ce89cf1f694221"/>
+    <p:sldId xmlns:r="http://schemas.openxmlformats.org/officeDocument/2006/relationships" id="258" r:id="Reb03753fc92c4290"/>
+    <p:sldId xmlns:r="http://schemas.openxmlformats.org/officeDocument/2006/relationships" id="259" r:id="Rd97facb4f47b4221"/>
+    <p:sldId xmlns:r="http://schemas.openxmlformats.org/officeDocument/2006/relationships" id="260" r:id="R5b92d3e96022428f"/>
+    <p:sldId xmlns:r="http://schemas.openxmlformats.org/officeDocument/2006/relationships" id="261" r:id="Rca7bfcae863f42a3"/>
+    <p:sldId xmlns:r="http://schemas.openxmlformats.org/officeDocument/2006/relationships" id="262" r:id="R079cd6b0f9ad44c7"/>
+    <p:sldId xmlns:r="http://schemas.openxmlformats.org/officeDocument/2006/relationships" id="263" r:id="R2562bb31df3f4552"/>
+    <p:sldId xmlns:r="http://schemas.openxmlformats.org/officeDocument/2006/relationships" id="264" r:id="R261792efa7c4427a"/>
+    <p:sldId xmlns:r="http://schemas.openxmlformats.org/officeDocument/2006/relationships" id="265" r:id="R455dcd4601704d09"/>
   </p:sldIdLst>
   <p:sldSz cx="12192000" cy="6858000"/>
   <p:notesSz cx="6858000" cy="9144000"/>
@@ -546,7 +546,7 @@
           <a:lstStyle xmlns:a="http://schemas.openxmlformats.org/drawingml/2006/main"/>
           <a:p xmlns:a="http://schemas.openxmlformats.org/drawingml/2006/main">
             <a:r>
-              <a:t>Open by connecting directly to Lesson 1. Lesson 1 taught that the model reads one visible paper. Lesson 2 asks how we scale the prompts that prepare that paper without pasting every rule into every turn.</a:t>
+              <a:t>Lesson 2 starts where Lesson 1 ended: prompts are written onto a limited paper. This lesson is about scaling prompt-like instructions without crowding the same context.</a:t>
             </a:r>
           </a:p>
         </p:txBody>
@@ -616,7 +616,7 @@
           <a:lstStyle xmlns:a="http://schemas.openxmlformats.org/drawingml/2006/main"/>
           <a:p xmlns:a="http://schemas.openxmlformats.org/drawingml/2006/main">
             <a:r>
-              <a:t>Close the loop. Lesson 2 is about scaling custom prompts by packaging, isolating, and loading them just in time. Lesson 2.1 goes deeper into runtime objects; Lesson 3 handles multi-agent workflows.</a:t>
+              <a:t>Close with the operating model: prompt engineering writes instructions; context architecture decides where those instructions travel.</a:t>
             </a:r>
           </a:p>
         </p:txBody>
@@ -686,7 +686,7 @@
           <a:lstStyle xmlns:a="http://schemas.openxmlformats.org/drawingml/2006/main"/>
           <a:p xmlns:a="http://schemas.openxmlformats.org/drawingml/2006/main">
             <a:r>
-              <a:t>Make the pain concrete. Custom prompts work, but repeated copying creates token cost, drift, duplication, and maintenance problems. This sets up the need for packaging, splitting, and dynamic loading.</a:t>
+              <a:t>Show why copy-pasting custom prompts breaks down. The model still only sees one paper, so duplicated rules compete with the actual task.</a:t>
             </a:r>
           </a:p>
         </p:txBody>
@@ -756,7 +756,7 @@
           <a:lstStyle xmlns:a="http://schemas.openxmlformats.org/drawingml/2006/main"/>
           <a:p xmlns:a="http://schemas.openxmlformats.org/drawingml/2006/main">
             <a:r>
-              <a:t>Define a custom agent as the reusable package for stable role instructions. It is a custom prompt plus a runtime profile: role, rules, tools, permissions, boundaries, and quality bar.</a:t>
+              <a:t>A custom agent packages a stable role and working profile. Treat it as a reusable worker identity, not a longer one-off prompt.</a:t>
             </a:r>
           </a:p>
         </p:txBody>
@@ -826,7 +826,7 @@
           <a:lstStyle xmlns:a="http://schemas.openxmlformats.org/drawingml/2006/main"/>
           <a:p xmlns:a="http://schemas.openxmlformats.org/drawingml/2006/main">
             <a:r>
-              <a:t>Introduce subagents as separate working papers. A subagent may start from a shared task brief or forked context, then keeps its own local detail and returns a summary or artifact.</a:t>
+              <a:t>A subagent is a delegated worker with its own paper. The main thread sends a bounded brief and receives a summary or artifact back.</a:t>
             </a:r>
           </a:p>
         </p:txBody>
@@ -896,7 +896,7 @@
           <a:lstStyle xmlns:a="http://schemas.openxmlformats.org/drawingml/2006/main"/>
           <a:p xmlns:a="http://schemas.openxmlformats.org/drawingml/2006/main">
             <a:r>
-              <a:t>Contrast compaction with planned decomposition. Compaction compresses one evolving paper when it gets too full. Subagent decomposition proactively assigns separate papers to weakly coupled branches.</a:t>
+              <a:t>Compaction compresses one crowded paper. Subagent decomposition proactively gives weakly coupled branches their own papers before detail is compressed away.</a:t>
             </a:r>
           </a:p>
         </p:txBody>
@@ -966,7 +966,7 @@
           <a:lstStyle xmlns:a="http://schemas.openxmlformats.org/drawingml/2006/main"/>
           <a:p xmlns:a="http://schemas.openxmlformats.org/drawingml/2006/main">
             <a:r>
-              <a:t>Give the audience the operating rule. Subagents work best when tasks have clear boundaries, can run independently for a while, and can merge through a summary, file, finding list, or checkpoint.</a:t>
+              <a:t>Subagents work best when local papers can make progress and rejoin through a clear merge artifact. Coupling is a synchronization question, not an automatic ban.</a:t>
             </a:r>
           </a:p>
         </p:txBody>
@@ -1036,7 +1036,7 @@
           <a:lstStyle xmlns:a="http://schemas.openxmlformats.org/drawingml/2006/main"/>
           <a:p xmlns:a="http://schemas.openxmlformats.org/drawingml/2006/main">
             <a:r>
-              <a:t>Define a skill as a just-in-time prompt/manual pack. Use it when you cannot know up front whether a specific checklist, template, or method will be needed in this task.</a:t>
+              <a:t>Skills solve the conditional-loading problem. Keep a method outside the paper until the task actually needs that manual or checklist.</a:t>
             </a:r>
           </a:p>
         </p:txBody>
@@ -1106,7 +1106,7 @@
           <a:lstStyle xmlns:a="http://schemas.openxmlformats.org/drawingml/2006/main"/>
           <a:p xmlns:a="http://schemas.openxmlformats.org/drawingml/2006/main">
             <a:r>
-              <a:t>Show that a skill is more than a prompt. It can sit beside scripts, templates, examples, schemas, and references so a repeated capability is organized as a small tool kit.</a:t>
+              <a:t>A skill can be a small capability kit. It can keep workflow instructions, scripts, examples, templates, and references together.</a:t>
             </a:r>
           </a:p>
         </p:txBody>
@@ -1176,7 +1176,7 @@
           <a:lstStyle xmlns:a="http://schemas.openxmlformats.org/drawingml/2006/main"/>
           <a:p xmlns:a="http://schemas.openxmlformats.org/drawingml/2006/main">
             <a:r>
-              <a:t>Summarize the selection logic. Stable role goes into a custom agent. Independent branch goes to a subagent. Conditional method goes into a skill. One-off detail stays in the current prompt.</a:t>
+              <a:t>This slide gives the selection rule: one-off prompt, custom agent, subagent, and skill each solve a different context-loading problem.</a:t>
             </a:r>
           </a:p>
         </p:txBody>
@@ -1244,7 +1244,7 @@
   </p:cSld>
   <p:clrMap bg1="lt1" tx1="dk1" bg2="lt2" tx2="dk2" accent1="accent1" accent2="accent2" accent3="accent3" accent4="accent4" accent5="accent5" accent6="accent6" hlink="hlink" folHlink="folHlink"/>
   <p:sldLayoutIdLst>
-    <p:sldLayoutId xmlns:r="http://schemas.openxmlformats.org/officeDocument/2006/relationships" id="2147483649" r:id="R4b1ecde082de4db2"/>
+    <p:sldLayoutId xmlns:r="http://schemas.openxmlformats.org/officeDocument/2006/relationships" id="2147483649" r:id="Rbf431e864fdc4ea1"/>
   </p:sldLayoutIdLst>
   <p:txStyles>
     <p:titleStyle>
@@ -1799,7 +1799,7 @@
           <p:nvPr/>
         </p:nvPicPr>
         <p:blipFill>
-          <a:blip xmlns:r="http://schemas.openxmlformats.org/officeDocument/2006/relationships" xmlns:a="http://schemas.openxmlformats.org/drawingml/2006/main" r:embed="Rda51026ce67044ac"/>
+          <a:blip xmlns:r="http://schemas.openxmlformats.org/officeDocument/2006/relationships" xmlns:a="http://schemas.openxmlformats.org/drawingml/2006/main" r:embed="R5b2e6013ac1b4b2a"/>
           <a:stretch xmlns:a="http://schemas.openxmlformats.org/drawingml/2006/main"/>
         </p:blipFill>
         <p:spPr>
@@ -1815,7 +1815,7 @@
     </p:spTree>
     <p:extLst>
       <p:ext uri="{BB962C8B-B14F-4D97-AF65-F5344CB8AC3E}">
-        <p14:creationId xmlns:p14="http://schemas.microsoft.com/office/powerpoint/2010/main" val="1434409942"/>
+        <p14:creationId xmlns:p14="http://schemas.microsoft.com/office/powerpoint/2010/main" val="890390819"/>
       </p:ext>
     </p:extLst>
   </p:cSld>
@@ -1850,7 +1850,7 @@
           <p:nvPr/>
         </p:nvPicPr>
         <p:blipFill>
-          <a:blip xmlns:r="http://schemas.openxmlformats.org/officeDocument/2006/relationships" xmlns:a="http://schemas.openxmlformats.org/drawingml/2006/main" r:embed="R8b130f9612454945"/>
+          <a:blip xmlns:r="http://schemas.openxmlformats.org/officeDocument/2006/relationships" xmlns:a="http://schemas.openxmlformats.org/drawingml/2006/main" r:embed="Rf66c1e806393456b"/>
           <a:stretch xmlns:a="http://schemas.openxmlformats.org/drawingml/2006/main"/>
         </p:blipFill>
         <p:spPr>
@@ -1866,7 +1866,7 @@
     </p:spTree>
     <p:extLst>
       <p:ext uri="{BB962C8B-B14F-4D97-AF65-F5344CB8AC3E}">
-        <p14:creationId xmlns:p14="http://schemas.microsoft.com/office/powerpoint/2010/main" val="1224810254"/>
+        <p14:creationId xmlns:p14="http://schemas.microsoft.com/office/powerpoint/2010/main" val="678593199"/>
       </p:ext>
     </p:extLst>
   </p:cSld>
@@ -1901,7 +1901,7 @@
           <p:nvPr/>
         </p:nvPicPr>
         <p:blipFill>
-          <a:blip xmlns:r="http://schemas.openxmlformats.org/officeDocument/2006/relationships" xmlns:a="http://schemas.openxmlformats.org/drawingml/2006/main" r:embed="R7fb296632b3c4555"/>
+          <a:blip xmlns:r="http://schemas.openxmlformats.org/officeDocument/2006/relationships" xmlns:a="http://schemas.openxmlformats.org/drawingml/2006/main" r:embed="R73941316e73c46d0"/>
           <a:stretch xmlns:a="http://schemas.openxmlformats.org/drawingml/2006/main"/>
         </p:blipFill>
         <p:spPr>
@@ -1917,7 +1917,7 @@
     </p:spTree>
     <p:extLst>
       <p:ext uri="{BB962C8B-B14F-4D97-AF65-F5344CB8AC3E}">
-        <p14:creationId xmlns:p14="http://schemas.microsoft.com/office/powerpoint/2010/main" val="849229220"/>
+        <p14:creationId xmlns:p14="http://schemas.microsoft.com/office/powerpoint/2010/main" val="402447717"/>
       </p:ext>
     </p:extLst>
   </p:cSld>
@@ -1952,7 +1952,7 @@
           <p:nvPr/>
         </p:nvPicPr>
         <p:blipFill>
-          <a:blip xmlns:r="http://schemas.openxmlformats.org/officeDocument/2006/relationships" xmlns:a="http://schemas.openxmlformats.org/drawingml/2006/main" r:embed="R6518b76d61864880"/>
+          <a:blip xmlns:r="http://schemas.openxmlformats.org/officeDocument/2006/relationships" xmlns:a="http://schemas.openxmlformats.org/drawingml/2006/main" r:embed="R84cc150a8126455d"/>
           <a:stretch xmlns:a="http://schemas.openxmlformats.org/drawingml/2006/main"/>
         </p:blipFill>
         <p:spPr>
@@ -1968,7 +1968,7 @@
     </p:spTree>
     <p:extLst>
       <p:ext uri="{BB962C8B-B14F-4D97-AF65-F5344CB8AC3E}">
-        <p14:creationId xmlns:p14="http://schemas.microsoft.com/office/powerpoint/2010/main" val="1139984199"/>
+        <p14:creationId xmlns:p14="http://schemas.microsoft.com/office/powerpoint/2010/main" val="1011599420"/>
       </p:ext>
     </p:extLst>
   </p:cSld>
@@ -2003,7 +2003,7 @@
           <p:nvPr/>
         </p:nvPicPr>
         <p:blipFill>
-          <a:blip xmlns:r="http://schemas.openxmlformats.org/officeDocument/2006/relationships" xmlns:a="http://schemas.openxmlformats.org/drawingml/2006/main" r:embed="R9613a76ca9c44499"/>
+          <a:blip xmlns:r="http://schemas.openxmlformats.org/officeDocument/2006/relationships" xmlns:a="http://schemas.openxmlformats.org/drawingml/2006/main" r:embed="R6863c5bfb01c49c3"/>
           <a:stretch xmlns:a="http://schemas.openxmlformats.org/drawingml/2006/main"/>
         </p:blipFill>
         <p:spPr>
@@ -2019,7 +2019,7 @@
     </p:spTree>
     <p:extLst>
       <p:ext uri="{BB962C8B-B14F-4D97-AF65-F5344CB8AC3E}">
-        <p14:creationId xmlns:p14="http://schemas.microsoft.com/office/powerpoint/2010/main" val="1036447640"/>
+        <p14:creationId xmlns:p14="http://schemas.microsoft.com/office/powerpoint/2010/main" val="1959251133"/>
       </p:ext>
     </p:extLst>
   </p:cSld>
@@ -2054,7 +2054,7 @@
           <p:nvPr/>
         </p:nvPicPr>
         <p:blipFill>
-          <a:blip xmlns:r="http://schemas.openxmlformats.org/officeDocument/2006/relationships" xmlns:a="http://schemas.openxmlformats.org/drawingml/2006/main" r:embed="R5686607bb47543a3"/>
+          <a:blip xmlns:r="http://schemas.openxmlformats.org/officeDocument/2006/relationships" xmlns:a="http://schemas.openxmlformats.org/drawingml/2006/main" r:embed="Rbb1b322e29c640fc"/>
           <a:stretch xmlns:a="http://schemas.openxmlformats.org/drawingml/2006/main"/>
         </p:blipFill>
         <p:spPr>
@@ -2070,7 +2070,7 @@
     </p:spTree>
     <p:extLst>
       <p:ext uri="{BB962C8B-B14F-4D97-AF65-F5344CB8AC3E}">
-        <p14:creationId xmlns:p14="http://schemas.microsoft.com/office/powerpoint/2010/main" val="1861133344"/>
+        <p14:creationId xmlns:p14="http://schemas.microsoft.com/office/powerpoint/2010/main" val="1614057040"/>
       </p:ext>
     </p:extLst>
   </p:cSld>
@@ -2105,7 +2105,7 @@
           <p:nvPr/>
         </p:nvPicPr>
         <p:blipFill>
-          <a:blip xmlns:r="http://schemas.openxmlformats.org/officeDocument/2006/relationships" xmlns:a="http://schemas.openxmlformats.org/drawingml/2006/main" r:embed="Rfade758a1f934421"/>
+          <a:blip xmlns:r="http://schemas.openxmlformats.org/officeDocument/2006/relationships" xmlns:a="http://schemas.openxmlformats.org/drawingml/2006/main" r:embed="Rea45403810974161"/>
           <a:stretch xmlns:a="http://schemas.openxmlformats.org/drawingml/2006/main"/>
         </p:blipFill>
         <p:spPr>
@@ -2121,7 +2121,7 @@
     </p:spTree>
     <p:extLst>
       <p:ext uri="{BB962C8B-B14F-4D97-AF65-F5344CB8AC3E}">
-        <p14:creationId xmlns:p14="http://schemas.microsoft.com/office/powerpoint/2010/main" val="597908338"/>
+        <p14:creationId xmlns:p14="http://schemas.microsoft.com/office/powerpoint/2010/main" val="1619251396"/>
       </p:ext>
     </p:extLst>
   </p:cSld>
@@ -2156,7 +2156,7 @@
           <p:nvPr/>
         </p:nvPicPr>
         <p:blipFill>
-          <a:blip xmlns:r="http://schemas.openxmlformats.org/officeDocument/2006/relationships" xmlns:a="http://schemas.openxmlformats.org/drawingml/2006/main" r:embed="R9a635c348d674632"/>
+          <a:blip xmlns:r="http://schemas.openxmlformats.org/officeDocument/2006/relationships" xmlns:a="http://schemas.openxmlformats.org/drawingml/2006/main" r:embed="R7fdc68809daf40cf"/>
           <a:stretch xmlns:a="http://schemas.openxmlformats.org/drawingml/2006/main"/>
         </p:blipFill>
         <p:spPr>
@@ -2172,7 +2172,7 @@
     </p:spTree>
     <p:extLst>
       <p:ext uri="{BB962C8B-B14F-4D97-AF65-F5344CB8AC3E}">
-        <p14:creationId xmlns:p14="http://schemas.microsoft.com/office/powerpoint/2010/main" val="1009109976"/>
+        <p14:creationId xmlns:p14="http://schemas.microsoft.com/office/powerpoint/2010/main" val="1261882187"/>
       </p:ext>
     </p:extLst>
   </p:cSld>
@@ -2207,7 +2207,7 @@
           <p:nvPr/>
         </p:nvPicPr>
         <p:blipFill>
-          <a:blip xmlns:r="http://schemas.openxmlformats.org/officeDocument/2006/relationships" xmlns:a="http://schemas.openxmlformats.org/drawingml/2006/main" r:embed="R922b644e53764d3e"/>
+          <a:blip xmlns:r="http://schemas.openxmlformats.org/officeDocument/2006/relationships" xmlns:a="http://schemas.openxmlformats.org/drawingml/2006/main" r:embed="Re754319db2894b63"/>
           <a:stretch xmlns:a="http://schemas.openxmlformats.org/drawingml/2006/main"/>
         </p:blipFill>
         <p:spPr>
@@ -2223,7 +2223,7 @@
     </p:spTree>
     <p:extLst>
       <p:ext uri="{BB962C8B-B14F-4D97-AF65-F5344CB8AC3E}">
-        <p14:creationId xmlns:p14="http://schemas.microsoft.com/office/powerpoint/2010/main" val="1755097069"/>
+        <p14:creationId xmlns:p14="http://schemas.microsoft.com/office/powerpoint/2010/main" val="1331627721"/>
       </p:ext>
     </p:extLst>
   </p:cSld>
@@ -2258,7 +2258,7 @@
           <p:nvPr/>
         </p:nvPicPr>
         <p:blipFill>
-          <a:blip xmlns:r="http://schemas.openxmlformats.org/officeDocument/2006/relationships" xmlns:a="http://schemas.openxmlformats.org/drawingml/2006/main" r:embed="Rd52a205ad83c489d"/>
+          <a:blip xmlns:r="http://schemas.openxmlformats.org/officeDocument/2006/relationships" xmlns:a="http://schemas.openxmlformats.org/drawingml/2006/main" r:embed="R93e442d6bf714b68"/>
           <a:stretch xmlns:a="http://schemas.openxmlformats.org/drawingml/2006/main"/>
         </p:blipFill>
         <p:spPr>
@@ -2274,7 +2274,7 @@
     </p:spTree>
     <p:extLst>
       <p:ext uri="{BB962C8B-B14F-4D97-AF65-F5344CB8AC3E}">
-        <p14:creationId xmlns:p14="http://schemas.microsoft.com/office/powerpoint/2010/main" val="654273764"/>
+        <p14:creationId xmlns:p14="http://schemas.microsoft.com/office/powerpoint/2010/main" val="813983337"/>
       </p:ext>
     </p:extLst>
   </p:cSld>
